--- a/docs/pitch-deck/output/per-my-last-email-hackathon-pitch.pptx
+++ b/docs/pitch-deck/output/per-my-last-email-hackathon-pitch.pptx
@@ -2,20 +2,20 @@
 <file path=ppt/presentation.xml><?xml version="1.0" encoding="utf-8"?>
 <p:presentation xmlns:p="http://schemas.openxmlformats.org/presentationml/2006/main">
   <p:sldMasterIdLst>
-    <p:sldMasterId xmlns:r="http://schemas.openxmlformats.org/officeDocument/2006/relationships" id="2147483648" r:id="R298e4d3acc58432f"/>
+    <p:sldMasterId xmlns:r="http://schemas.openxmlformats.org/officeDocument/2006/relationships" id="2147483648" r:id="R3162387ab941485a"/>
   </p:sldMasterIdLst>
   <p:notesMasterIdLst>
-    <p:notesMasterId xmlns:r="http://schemas.openxmlformats.org/officeDocument/2006/relationships" r:id="R7589c654e4ab49d8"/>
+    <p:notesMasterId xmlns:r="http://schemas.openxmlformats.org/officeDocument/2006/relationships" r:id="R27258a725f5f4bf4"/>
   </p:notesMasterIdLst>
   <p:sldIdLst>
-    <p:sldId xmlns:r="http://schemas.openxmlformats.org/officeDocument/2006/relationships" id="256" r:id="R06ab27a6bd0f4124"/>
-    <p:sldId xmlns:r="http://schemas.openxmlformats.org/officeDocument/2006/relationships" id="257" r:id="R1290a82a38bd4161"/>
-    <p:sldId xmlns:r="http://schemas.openxmlformats.org/officeDocument/2006/relationships" id="258" r:id="Rd658c7809d41482c"/>
-    <p:sldId xmlns:r="http://schemas.openxmlformats.org/officeDocument/2006/relationships" id="259" r:id="R1306d1ca33ac45f2"/>
-    <p:sldId xmlns:r="http://schemas.openxmlformats.org/officeDocument/2006/relationships" id="260" r:id="R61c0b16a23a84b38"/>
-    <p:sldId xmlns:r="http://schemas.openxmlformats.org/officeDocument/2006/relationships" id="261" r:id="R155b27fb9eb3497e"/>
-    <p:sldId xmlns:r="http://schemas.openxmlformats.org/officeDocument/2006/relationships" id="262" r:id="R4dd4ea76c52c481f"/>
-    <p:sldId xmlns:r="http://schemas.openxmlformats.org/officeDocument/2006/relationships" id="263" r:id="R7b310b788fac4226"/>
+    <p:sldId xmlns:r="http://schemas.openxmlformats.org/officeDocument/2006/relationships" id="256" r:id="Rb367038a77ec446d"/>
+    <p:sldId xmlns:r="http://schemas.openxmlformats.org/officeDocument/2006/relationships" id="257" r:id="R39a99aa04ea745e4"/>
+    <p:sldId xmlns:r="http://schemas.openxmlformats.org/officeDocument/2006/relationships" id="258" r:id="Rdfcec4295a4e4439"/>
+    <p:sldId xmlns:r="http://schemas.openxmlformats.org/officeDocument/2006/relationships" id="259" r:id="R66ef2503d14b428f"/>
+    <p:sldId xmlns:r="http://schemas.openxmlformats.org/officeDocument/2006/relationships" id="260" r:id="Rb9fd664021fe437a"/>
+    <p:sldId xmlns:r="http://schemas.openxmlformats.org/officeDocument/2006/relationships" id="261" r:id="R7778894b99bd4968"/>
+    <p:sldId xmlns:r="http://schemas.openxmlformats.org/officeDocument/2006/relationships" id="262" r:id="R26ae0c5dc02b460c"/>
+    <p:sldId xmlns:r="http://schemas.openxmlformats.org/officeDocument/2006/relationships" id="263" r:id="Rce954219e1184daa"/>
   </p:sldIdLst>
   <p:sldSz cx="12192000" cy="6858000"/>
   <p:notesSz cx="6858000" cy="9144000"/>
@@ -498,7 +498,7 @@
           <a:lstStyle xmlns:a="http://schemas.openxmlformats.org/drawingml/2006/main"/>
           <a:p xmlns:a="http://schemas.openxmlformats.org/drawingml/2006/main">
             <a:r>
-              <a:t>Cold open. Everyone says "reach younger shoppers" for Shopee SG 11.11. A summarizer marks alignment. Growth means acquisition and app installs; Commerce means GMV and voucher redemption; the Campaign Lead means mainstream-safe youth reach. Same phrase, different assumptions. Introduce Mochi as the Slack-native pre-meeting crux finder. Do not claim measured time savings or adoption; those are not in the source docs.</a:t>
+              <a:t>Cold open. Lead with the outcome, not the mechanism: Mochi helps teams meet less and decide faster by clearing the items that do not need a live meeting and starting the room at the real crux. The Shopee SG 11.11 creator-mix demo compresses a nine-item agenda to two live decisions. Do not claim measured time savings or adoption; those are not in the source docs. The 9 to 2 figure is the demo artifact, not a time metric.</a:t>
             </a:r>
           </a:p>
         </p:txBody>
@@ -708,7 +708,7 @@
           <a:lstStyle xmlns:a="http://schemas.openxmlformats.org/drawingml/2006/main"/>
           <a:p xmlns:a="http://schemas.openxmlformats.org/drawingml/2006/main">
             <a:r>
-              <a:t>Demo proof. Show the final Mochi brief shape. The brief compresses nine agenda items to two live agenda items: align the primary objective, then decide the creator role mix. Action items are three resolved and zero need an owner. Do not show a final influencer decision. Do not claim measured time savings; no such metric is in the docs.</a:t>
+              <a:t>This is the core originality slide, placed before the demo proof so judges know what to watch for. The naive baseline looks only at positions, so it marks "support reaching younger shoppers" as agreed. The assumption-aware classifier compares success criteria and surfaces fake agreement: acquisition, GMV, and mainstream-safe youth reach are different objectives. Both paths are implemented and tested in src/pmle/crux_engine.py, so this is a verifiable build artifact, not a claim.</a:t>
             </a:r>
           </a:p>
         </p:txBody>
@@ -778,7 +778,7 @@
           <a:lstStyle xmlns:a="http://schemas.openxmlformats.org/drawingml/2006/main"/>
           <a:p xmlns:a="http://schemas.openxmlformats.org/drawingml/2006/main">
             <a:r>
-              <a:t>This is the core originality slide. The naive baseline looks only at positions, so it marks "support reaching younger shoppers" as agreed. The assumption-aware classifier compares success criteria and surfaces fake agreement: acquisition, GMV, and mainstream-safe youth reach are different objectives.</a:t>
+              <a:t>Demo proof. Show the actual Mochi digest shape from docs/pitch-script.md: the agenda compresses to one fake-agreement objective, one unresolved role-mix crux, and three cleared action items. That leaves two live decisions: align the primary objective, then decide the creator role mix. Do not show a final influencer decision. Do not claim measured time savings; no such metric is in the docs.</a:t>
             </a:r>
           </a:p>
         </p:txBody>
@@ -918,7 +918,7 @@
           <a:lstStyle xmlns:a="http://schemas.openxmlformats.org/drawingml/2006/main"/>
           <a:p xmlns:a="http://schemas.openxmlformats.org/drawingml/2006/main">
             <a:r>
-              <a:t>Demo flow slide. This is for the presenter to keep the six-minute story tight: start with pain, show Mochi in Slack, show the agent fan-out, show the brief, contrast the naive baseline, then close on the vision. Mention raw eval output and metrics are not in the source docs only if asked.</a:t>
+              <a:t>Use of Codex slide. Codex was a build partner, not just autocomplete. Map concrete Codex contributions to concrete artifacts in this repo: it pivoted the scenario to a Slack-native pre-meeting crux finder, built the transient orchestrator and free-form DM routing, kept the docs and code in sync, and wrote the deterministic test suite and demo hardening. Keep claims grounded in AGENTS.md and the pitch script; do not overstate. Keep cached/live boundary details in notes, not on the slide.</a:t>
             </a:r>
           </a:p>
         </p:txBody>
@@ -988,7 +988,7 @@
           <a:lstStyle xmlns:a="http://schemas.openxmlformats.org/drawingml/2006/main"/>
           <a:p xmlns:a="http://schemas.openxmlformats.org/drawingml/2006/main">
             <a:r>
-              <a:t>Close. Bring the judges back to the sentence from the live script: meetings do not fail because people think they agree. Mochi catches the fake agreement before the hour is gone, inside Slack. Stop at the generated pre-meeting brief; do not imply a final influencer decision. Missing for final submission: GitHub/demo URLs, raw test output, live trace artifact, latency/reliability, and measured adoption/time-saved only if measured.</a:t>
+              <a:t>Close. Bring the judges back to the sentence from the live script: meetings do not fail because people think they agree. Mochi catches the fake agreement before the hour is gone, inside Slack. Stop at the generated pre-meeting brief; do not imply a final influencer decision. The repo URL is now on the slide for submission. Still missing for final submission: optional hosted demo link, live trace artifact, and latency/reliability or measured adoption/time-saved only if measured.</a:t>
             </a:r>
           </a:p>
         </p:txBody>
@@ -1056,7 +1056,7 @@
   </p:cSld>
   <p:clrMap bg1="lt1" tx1="dk1" bg2="lt2" tx2="dk2" accent1="accent1" accent2="accent2" accent3="accent3" accent4="accent4" accent5="accent5" accent6="accent6" hlink="hlink" folHlink="folHlink"/>
   <p:sldLayoutIdLst>
-    <p:sldLayoutId xmlns:r="http://schemas.openxmlformats.org/officeDocument/2006/relationships" id="2147483649" r:id="Rdc5eedbad649424e"/>
+    <p:sldLayoutId xmlns:r="http://schemas.openxmlformats.org/officeDocument/2006/relationships" id="2147483649" r:id="Rc43a85dd62424c5d"/>
   </p:sldLayoutIdLst>
   <p:txStyles>
     <p:titleStyle>
@@ -1565,7 +1565,7 @@
           <p:nvPr/>
         </p:nvPicPr>
         <p:blipFill>
-          <a:blip xmlns:r="http://schemas.openxmlformats.org/officeDocument/2006/relationships" xmlns:a="http://schemas.openxmlformats.org/drawingml/2006/main" r:embed="Ra6b85ba0b030438f"/>
+          <a:blip xmlns:r="http://schemas.openxmlformats.org/officeDocument/2006/relationships" xmlns:a="http://schemas.openxmlformats.org/drawingml/2006/main" r:embed="Rff28054db3ee4a04"/>
           <a:srcRect xmlns:a="http://schemas.openxmlformats.org/drawingml/2006/main" l="0" t="0" r="0" b="0"/>
           <a:stretch xmlns:a="http://schemas.openxmlformats.org/drawingml/2006/main">
             <a:fillRect l="0" t="0" r="0" b="0"/>
@@ -1586,18 +1586,18 @@
           <p:cNvPr id="2" name="">
             <a:extLst xmlns:a="http://schemas.openxmlformats.org/drawingml/2006/main">
               <a:ext uri="{FF2B5EF4-FFF2-40B4-BE49-F238E27FC236}">
-                <a16:creationId xmlns:a16="http://schemas.microsoft.com/office/drawing/2014/main" id="{AC511A7B-A9C8-413B-B04A-3C2FC4DF4E7D}"/>
-              </a:ext>
-            </a:extLst>
-          </p:cNvPr>
-          <p:cNvSpPr>
-            <a:spLocks xmlns:a="http://schemas.openxmlformats.org/drawingml/2006/main" noGrp="1"/>
-          </p:cNvSpPr>
-          <p:nvPr/>
-        </p:nvSpPr>
-        <p:spPr>
-          <a:xfrm xmlns:a="http://schemas.openxmlformats.org/drawingml/2006/main">
-            <a:off x="704850" y="609600"/>
+                <a16:creationId xmlns:a16="http://schemas.microsoft.com/office/drawing/2014/main" id="{BD7AE22C-76A0-495B-AAF7-5D6CB94250F3}"/>
+              </a:ext>
+            </a:extLst>
+          </p:cNvPr>
+          <p:cNvSpPr>
+            <a:spLocks xmlns:a="http://schemas.openxmlformats.org/drawingml/2006/main" noGrp="1"/>
+          </p:cNvSpPr>
+          <p:nvPr/>
+        </p:nvSpPr>
+        <p:spPr>
+          <a:xfrm xmlns:a="http://schemas.openxmlformats.org/drawingml/2006/main">
+            <a:off x="704850" y="571500"/>
             <a:ext cx="3048000" cy="228600"/>
           </a:xfrm>
           <a:prstGeom xmlns:a="http://schemas.openxmlformats.org/drawingml/2006/main" prst="rect">
@@ -1633,19 +1633,53 @@
           <p:cNvPr id="3" name="">
             <a:extLst xmlns:a="http://schemas.openxmlformats.org/drawingml/2006/main">
               <a:ext uri="{FF2B5EF4-FFF2-40B4-BE49-F238E27FC236}">
-                <a16:creationId xmlns:a16="http://schemas.microsoft.com/office/drawing/2014/main" id="{05AFD9E8-ECCC-42FE-8D77-F00B006001E9}"/>
-              </a:ext>
-            </a:extLst>
-          </p:cNvPr>
-          <p:cNvSpPr>
-            <a:spLocks xmlns:a="http://schemas.openxmlformats.org/drawingml/2006/main" noGrp="1"/>
-          </p:cNvSpPr>
-          <p:nvPr/>
-        </p:nvSpPr>
-        <p:spPr>
-          <a:xfrm xmlns:a="http://schemas.openxmlformats.org/drawingml/2006/main">
-            <a:off x="666750" y="1219200"/>
-            <a:ext cx="6191250" cy="1352550"/>
+                <a16:creationId xmlns:a16="http://schemas.microsoft.com/office/drawing/2014/main" id="{7AE41958-B9A2-45CC-B0D2-9053AE272AD8}"/>
+              </a:ext>
+            </a:extLst>
+          </p:cNvPr>
+          <p:cNvSpPr>
+            <a:spLocks xmlns:a="http://schemas.openxmlformats.org/drawingml/2006/main" noGrp="1"/>
+          </p:cNvSpPr>
+          <p:nvPr/>
+        </p:nvSpPr>
+        <p:spPr>
+          <a:xfrm xmlns:a="http://schemas.openxmlformats.org/drawingml/2006/main">
+            <a:off x="704850" y="895350"/>
+            <a:ext cx="4572000" cy="323850"/>
+          </a:xfrm>
+          <a:prstGeom xmlns:a="http://schemas.openxmlformats.org/drawingml/2006/main" prst="roundRect">
+            <a:avLst>
+              <a:gd name="adj" fmla="val 50000"/>
+            </a:avLst>
+          </a:prstGeom>
+          <a:solidFill xmlns:a="http://schemas.openxmlformats.org/drawingml/2006/main">
+            <a:srgbClr val="DDEBFF"/>
+          </a:solidFill>
+          <a:ln xmlns:a="http://schemas.openxmlformats.org/drawingml/2006/main" w="9525">
+            <a:solidFill>
+              <a:srgbClr val="2636B8"/>
+            </a:solidFill>
+          </a:ln>
+        </p:spPr>
+      </p:sp>
+      <p:sp>
+        <p:nvSpPr>
+          <p:cNvPr id="4" name="">
+            <a:extLst xmlns:a="http://schemas.openxmlformats.org/drawingml/2006/main">
+              <a:ext uri="{FF2B5EF4-FFF2-40B4-BE49-F238E27FC236}">
+                <a16:creationId xmlns:a16="http://schemas.microsoft.com/office/drawing/2014/main" id="{8438FFBB-8F0B-4D45-BD42-67209086F54C}"/>
+              </a:ext>
+            </a:extLst>
+          </p:cNvPr>
+          <p:cNvSpPr>
+            <a:spLocks xmlns:a="http://schemas.openxmlformats.org/drawingml/2006/main" noGrp="1"/>
+          </p:cNvSpPr>
+          <p:nvPr/>
+        </p:nvSpPr>
+        <p:spPr>
+          <a:xfrm xmlns:a="http://schemas.openxmlformats.org/drawingml/2006/main">
+            <a:off x="819150" y="962025"/>
+            <a:ext cx="4343400" cy="171450"/>
           </a:xfrm>
           <a:prstGeom xmlns:a="http://schemas.openxmlformats.org/drawingml/2006/main" prst="rect">
             <a:avLst/>
@@ -1661,6 +1695,63 @@
           </a:bodyPr>
           <a:lstStyle xmlns:a="http://schemas.openxmlformats.org/drawingml/2006/main"/>
           <a:p xmlns:a="http://schemas.openxmlformats.org/drawingml/2006/main">
+            <a:pPr algn="ctr">
+              <a:defRPr sz="900" b="1">
+                <a:solidFill>
+                  <a:srgbClr val="2636B8"/>
+                </a:solidFill>
+                <a:latin typeface="Inter"/>
+                <a:ea typeface="Inter"/>
+                <a:cs typeface="Inter"/>
+              </a:defRPr>
+            </a:pPr>
+            <a:r>
+              <a:rPr sz="900" b="1">
+                <a:solidFill>
+                  <a:srgbClr val="2636B8"/>
+                </a:solidFill>
+                <a:latin typeface="Inter"/>
+                <a:ea typeface="Inter"/>
+                <a:cs typeface="Inter"/>
+              </a:rPr>
+              <a:t>BUILD DIRECTION  ·  AI-NATIVE PRODUCTS &amp; OPERATIONS</a:t>
+            </a:r>
+          </a:p>
+        </p:txBody>
+      </p:sp>
+      <p:sp>
+        <p:nvSpPr>
+          <p:cNvPr id="5" name="">
+            <a:extLst xmlns:a="http://schemas.openxmlformats.org/drawingml/2006/main">
+              <a:ext uri="{FF2B5EF4-FFF2-40B4-BE49-F238E27FC236}">
+                <a16:creationId xmlns:a16="http://schemas.microsoft.com/office/drawing/2014/main" id="{8E416F68-B340-4637-BAF7-0C7F77E473D6}"/>
+              </a:ext>
+            </a:extLst>
+          </p:cNvPr>
+          <p:cNvSpPr>
+            <a:spLocks xmlns:a="http://schemas.openxmlformats.org/drawingml/2006/main" noGrp="1"/>
+          </p:cNvSpPr>
+          <p:nvPr/>
+        </p:nvSpPr>
+        <p:spPr>
+          <a:xfrm xmlns:a="http://schemas.openxmlformats.org/drawingml/2006/main">
+            <a:off x="666750" y="1352550"/>
+            <a:ext cx="6286500" cy="1352550"/>
+          </a:xfrm>
+          <a:prstGeom xmlns:a="http://schemas.openxmlformats.org/drawingml/2006/main" prst="rect">
+            <a:avLst/>
+          </a:prstGeom>
+          <a:noFill xmlns:a="http://schemas.openxmlformats.org/drawingml/2006/main"/>
+          <a:ln xmlns:a="http://schemas.openxmlformats.org/drawingml/2006/main" w="0">
+            <a:noFill/>
+          </a:ln>
+        </p:spPr>
+        <p:txBody>
+          <a:bodyPr xmlns:a="http://schemas.openxmlformats.org/drawingml/2006/main" wrap="square" lIns="0" tIns="0" rIns="0" bIns="0">
+            <a:noAutofit/>
+          </a:bodyPr>
+          <a:lstStyle xmlns:a="http://schemas.openxmlformats.org/drawingml/2006/main"/>
+          <a:p xmlns:a="http://schemas.openxmlformats.org/drawingml/2006/main">
             <a:r>
               <a:rPr sz="4050">
                 <a:solidFill>
@@ -1670,7 +1761,7 @@
                 <a:ea typeface="Inter"/>
                 <a:cs typeface="Inter"/>
               </a:rPr>
-              <a:t>Same phrase,</a:t>
+              <a:t>Cut the meeting,</a:t>
             </a:r>
           </a:p>
           <a:p xmlns:a="http://schemas.openxmlformats.org/drawingml/2006/main">
@@ -1683,29 +1774,29 @@
                 <a:ea typeface="Inter"/>
                 <a:cs typeface="Inter"/>
               </a:rPr>
-              <a:t>different goals.</a:t>
-            </a:r>
-          </a:p>
-        </p:txBody>
-      </p:sp>
-      <p:sp>
-        <p:nvSpPr>
-          <p:cNvPr id="4" name="">
-            <a:extLst xmlns:a="http://schemas.openxmlformats.org/drawingml/2006/main">
-              <a:ext uri="{FF2B5EF4-FFF2-40B4-BE49-F238E27FC236}">
-                <a16:creationId xmlns:a16="http://schemas.microsoft.com/office/drawing/2014/main" id="{39C6A9C8-2151-4F57-8A4E-8A8777216DD8}"/>
-              </a:ext>
-            </a:extLst>
-          </p:cNvPr>
-          <p:cNvSpPr>
-            <a:spLocks xmlns:a="http://schemas.openxmlformats.org/drawingml/2006/main" noGrp="1"/>
-          </p:cNvSpPr>
-          <p:nvPr/>
-        </p:nvSpPr>
-        <p:spPr>
-          <a:xfrm xmlns:a="http://schemas.openxmlformats.org/drawingml/2006/main">
-            <a:off x="704850" y="2914650"/>
-            <a:ext cx="6286500" cy="304800"/>
+              <a:t>not the decision.</a:t>
+            </a:r>
+          </a:p>
+        </p:txBody>
+      </p:sp>
+      <p:sp>
+        <p:nvSpPr>
+          <p:cNvPr id="6" name="">
+            <a:extLst xmlns:a="http://schemas.openxmlformats.org/drawingml/2006/main">
+              <a:ext uri="{FF2B5EF4-FFF2-40B4-BE49-F238E27FC236}">
+                <a16:creationId xmlns:a16="http://schemas.microsoft.com/office/drawing/2014/main" id="{08B8B259-11FB-4E30-BC21-2957A9AB1A70}"/>
+              </a:ext>
+            </a:extLst>
+          </p:cNvPr>
+          <p:cNvSpPr>
+            <a:spLocks xmlns:a="http://schemas.openxmlformats.org/drawingml/2006/main" noGrp="1"/>
+          </p:cNvSpPr>
+          <p:nvPr/>
+        </p:nvSpPr>
+        <p:spPr>
+          <a:xfrm xmlns:a="http://schemas.openxmlformats.org/drawingml/2006/main">
+            <a:off x="704850" y="2857500"/>
+            <a:ext cx="6572250" cy="571500"/>
           </a:xfrm>
           <a:prstGeom xmlns:a="http://schemas.openxmlformats.org/drawingml/2006/main" prst="rect">
             <a:avLst/>
@@ -1730,28 +1821,28 @@
                 <a:ea typeface="Inter"/>
                 <a:cs typeface="Inter"/>
               </a:rPr>
-              <a:t>Persistent personal agents + transient meeting orchestrator</a:t>
-            </a:r>
-          </a:p>
-        </p:txBody>
-      </p:sp>
-      <p:sp>
-        <p:nvSpPr>
-          <p:cNvPr id="5" name="">
-            <a:extLst xmlns:a="http://schemas.openxmlformats.org/drawingml/2006/main">
-              <a:ext uri="{FF2B5EF4-FFF2-40B4-BE49-F238E27FC236}">
-                <a16:creationId xmlns:a16="http://schemas.microsoft.com/office/drawing/2014/main" id="{5864BC46-05E8-46BA-9DFB-00232A84070D}"/>
-              </a:ext>
-            </a:extLst>
-          </p:cNvPr>
-          <p:cNvSpPr>
-            <a:spLocks xmlns:a="http://schemas.openxmlformats.org/drawingml/2006/main" noGrp="1"/>
-          </p:cNvSpPr>
-          <p:nvPr/>
-        </p:nvSpPr>
-        <p:spPr>
-          <a:xfrm xmlns:a="http://schemas.openxmlformats.org/drawingml/2006/main">
-            <a:off x="704850" y="3429000"/>
+              <a:t>Meet less, decide faster. Mochi clears the easy items in Slack before you meet, so the room opens on the real crux.</a:t>
+            </a:r>
+          </a:p>
+        </p:txBody>
+      </p:sp>
+      <p:sp>
+        <p:nvSpPr>
+          <p:cNvPr id="7" name="">
+            <a:extLst xmlns:a="http://schemas.openxmlformats.org/drawingml/2006/main">
+              <a:ext uri="{FF2B5EF4-FFF2-40B4-BE49-F238E27FC236}">
+                <a16:creationId xmlns:a16="http://schemas.microsoft.com/office/drawing/2014/main" id="{761045AF-BDB7-4898-8DAA-4DE46FC5BA19}"/>
+              </a:ext>
+            </a:extLst>
+          </p:cNvPr>
+          <p:cNvSpPr>
+            <a:spLocks xmlns:a="http://schemas.openxmlformats.org/drawingml/2006/main" noGrp="1"/>
+          </p:cNvSpPr>
+          <p:nvPr/>
+        </p:nvSpPr>
+        <p:spPr>
+          <a:xfrm xmlns:a="http://schemas.openxmlformats.org/drawingml/2006/main">
+            <a:off x="704850" y="3562350"/>
             <a:ext cx="5334000" cy="9525"/>
           </a:xfrm>
           <a:prstGeom xmlns:a="http://schemas.openxmlformats.org/drawingml/2006/main" prst="rect">
@@ -1767,21 +1858,21 @@
       </p:sp>
       <p:sp>
         <p:nvSpPr>
-          <p:cNvPr id="6" name="">
-            <a:extLst xmlns:a="http://schemas.openxmlformats.org/drawingml/2006/main">
-              <a:ext uri="{FF2B5EF4-FFF2-40B4-BE49-F238E27FC236}">
-                <a16:creationId xmlns:a16="http://schemas.microsoft.com/office/drawing/2014/main" id="{CED55B39-860F-4998-87D7-E2B1947DBCAE}"/>
-              </a:ext>
-            </a:extLst>
-          </p:cNvPr>
-          <p:cNvSpPr>
-            <a:spLocks xmlns:a="http://schemas.openxmlformats.org/drawingml/2006/main" noGrp="1"/>
-          </p:cNvSpPr>
-          <p:nvPr/>
-        </p:nvSpPr>
-        <p:spPr>
-          <a:xfrm xmlns:a="http://schemas.openxmlformats.org/drawingml/2006/main">
-            <a:off x="723900" y="3676650"/>
+          <p:cNvPr id="8" name="">
+            <a:extLst xmlns:a="http://schemas.openxmlformats.org/drawingml/2006/main">
+              <a:ext uri="{FF2B5EF4-FFF2-40B4-BE49-F238E27FC236}">
+                <a16:creationId xmlns:a16="http://schemas.microsoft.com/office/drawing/2014/main" id="{D3D9CB1B-E6AD-4C0E-888C-E09083AE0294}"/>
+              </a:ext>
+            </a:extLst>
+          </p:cNvPr>
+          <p:cNvSpPr>
+            <a:spLocks xmlns:a="http://schemas.openxmlformats.org/drawingml/2006/main" noGrp="1"/>
+          </p:cNvSpPr>
+          <p:nvPr/>
+        </p:nvSpPr>
+        <p:spPr>
+          <a:xfrm xmlns:a="http://schemas.openxmlformats.org/drawingml/2006/main">
+            <a:off x="723900" y="3790950"/>
             <a:ext cx="1524000" cy="190500"/>
           </a:xfrm>
           <a:prstGeom xmlns:a="http://schemas.openxmlformats.org/drawingml/2006/main" prst="rect">
@@ -1814,22 +1905,22 @@
       </p:sp>
       <p:sp>
         <p:nvSpPr>
-          <p:cNvPr id="7" name="">
-            <a:extLst xmlns:a="http://schemas.openxmlformats.org/drawingml/2006/main">
-              <a:ext uri="{FF2B5EF4-FFF2-40B4-BE49-F238E27FC236}">
-                <a16:creationId xmlns:a16="http://schemas.microsoft.com/office/drawing/2014/main" id="{06CDD168-EDF0-4751-8C8E-D16E26D72F73}"/>
-              </a:ext>
-            </a:extLst>
-          </p:cNvPr>
-          <p:cNvSpPr>
-            <a:spLocks xmlns:a="http://schemas.openxmlformats.org/drawingml/2006/main" noGrp="1"/>
-          </p:cNvSpPr>
-          <p:nvPr/>
-        </p:nvSpPr>
-        <p:spPr>
-          <a:xfrm xmlns:a="http://schemas.openxmlformats.org/drawingml/2006/main">
-            <a:off x="723900" y="3924300"/>
-            <a:ext cx="5334000" cy="342900"/>
+          <p:cNvPr id="9" name="">
+            <a:extLst xmlns:a="http://schemas.openxmlformats.org/drawingml/2006/main">
+              <a:ext uri="{FF2B5EF4-FFF2-40B4-BE49-F238E27FC236}">
+                <a16:creationId xmlns:a16="http://schemas.microsoft.com/office/drawing/2014/main" id="{75E4266A-15D8-44C5-8F06-9A39A246DBB7}"/>
+              </a:ext>
+            </a:extLst>
+          </p:cNvPr>
+          <p:cNvSpPr>
+            <a:spLocks xmlns:a="http://schemas.openxmlformats.org/drawingml/2006/main" noGrp="1"/>
+          </p:cNvSpPr>
+          <p:nvPr/>
+        </p:nvSpPr>
+        <p:spPr>
+          <a:xfrm xmlns:a="http://schemas.openxmlformats.org/drawingml/2006/main">
+            <a:off x="723900" y="4038600"/>
+            <a:ext cx="3905250" cy="342900"/>
           </a:xfrm>
           <a:prstGeom xmlns:a="http://schemas.openxmlformats.org/drawingml/2006/main" prst="rect">
             <a:avLst/>
@@ -1861,14 +1952,14 @@
       </p:sp>
       <p:pic>
         <p:nvPicPr>
-          <p:cNvPr id="8" name=""/>
+          <p:cNvPr id="10" name=""/>
           <p:cNvPicPr>
             <a:picLocks xmlns:a="http://schemas.openxmlformats.org/drawingml/2006/main" noChangeAspect="1"/>
           </p:cNvPicPr>
           <p:nvPr/>
         </p:nvPicPr>
         <p:blipFill>
-          <a:blip xmlns:r="http://schemas.openxmlformats.org/officeDocument/2006/relationships" xmlns:a="http://schemas.openxmlformats.org/drawingml/2006/main" r:embed="Rf7a3dbd99c52429e"/>
+          <a:blip xmlns:r="http://schemas.openxmlformats.org/officeDocument/2006/relationships" xmlns:a="http://schemas.openxmlformats.org/drawingml/2006/main" r:embed="Rca86d6a5a3f54fa3"/>
           <a:srcRect xmlns:a="http://schemas.openxmlformats.org/drawingml/2006/main" l="0" t="0" r="0" b="0"/>
           <a:stretch xmlns:a="http://schemas.openxmlformats.org/drawingml/2006/main">
             <a:fillRect l="0" t="0" r="0" b="0"/>
@@ -1886,10 +1977,10 @@
       </p:pic>
       <p:sp>
         <p:nvSpPr>
-          <p:cNvPr id="9" name="">
-            <a:extLst xmlns:a="http://schemas.openxmlformats.org/drawingml/2006/main">
-              <a:ext uri="{FF2B5EF4-FFF2-40B4-BE49-F238E27FC236}">
-                <a16:creationId xmlns:a16="http://schemas.microsoft.com/office/drawing/2014/main" id="{A8085751-43CF-411C-91F2-A748EF6D3745}"/>
+          <p:cNvPr id="11" name="">
+            <a:extLst xmlns:a="http://schemas.openxmlformats.org/drawingml/2006/main">
+              <a:ext uri="{FF2B5EF4-FFF2-40B4-BE49-F238E27FC236}">
+                <a16:creationId xmlns:a16="http://schemas.microsoft.com/office/drawing/2014/main" id="{EFFF8DFE-52B4-44C1-A000-C10DD5D134B2}"/>
               </a:ext>
             </a:extLst>
           </p:cNvPr>
@@ -1943,10 +2034,10 @@
       </p:sp>
       <p:sp>
         <p:nvSpPr>
-          <p:cNvPr id="10" name="">
-            <a:extLst xmlns:a="http://schemas.openxmlformats.org/drawingml/2006/main">
-              <a:ext uri="{FF2B5EF4-FFF2-40B4-BE49-F238E27FC236}">
-                <a16:creationId xmlns:a16="http://schemas.microsoft.com/office/drawing/2014/main" id="{7B767B39-9C1F-47AE-9B70-C86DF8CFCC5F}"/>
+          <p:cNvPr id="12" name="">
+            <a:extLst xmlns:a="http://schemas.openxmlformats.org/drawingml/2006/main">
+              <a:ext uri="{FF2B5EF4-FFF2-40B4-BE49-F238E27FC236}">
+                <a16:creationId xmlns:a16="http://schemas.microsoft.com/office/drawing/2014/main" id="{1E43B078-D8AB-4EA2-8D5F-F3A475F66339}"/>
               </a:ext>
             </a:extLst>
           </p:cNvPr>
@@ -1975,10 +2066,10 @@
       </p:sp>
       <p:sp>
         <p:nvSpPr>
-          <p:cNvPr id="11" name="">
-            <a:extLst xmlns:a="http://schemas.openxmlformats.org/drawingml/2006/main">
-              <a:ext uri="{FF2B5EF4-FFF2-40B4-BE49-F238E27FC236}">
-                <a16:creationId xmlns:a16="http://schemas.microsoft.com/office/drawing/2014/main" id="{73CCC529-F69C-4197-B03E-AFA889E87297}"/>
+          <p:cNvPr id="13" name="">
+            <a:extLst xmlns:a="http://schemas.openxmlformats.org/drawingml/2006/main">
+              <a:ext uri="{FF2B5EF4-FFF2-40B4-BE49-F238E27FC236}">
+                <a16:creationId xmlns:a16="http://schemas.microsoft.com/office/drawing/2014/main" id="{05DD280E-778C-4CD6-A15B-82E6245EF77C}"/>
               </a:ext>
             </a:extLst>
           </p:cNvPr>
@@ -1990,7 +2081,7 @@
         <p:spPr>
           <a:xfrm xmlns:a="http://schemas.openxmlformats.org/drawingml/2006/main">
             <a:off x="7696200" y="1352550"/>
-            <a:ext cx="2667000" cy="209550"/>
+            <a:ext cx="2857500" cy="209550"/>
           </a:xfrm>
           <a:prstGeom xmlns:a="http://schemas.openxmlformats.org/drawingml/2006/main" prst="rect">
             <a:avLst/>
@@ -2015,17 +2106,17 @@
                 <a:ea typeface="Inter"/>
                 <a:cs typeface="Inter"/>
               </a:rPr>
-              <a:t>Slack pre-meeting digest</a:t>
-            </a:r>
-          </a:p>
-        </p:txBody>
-      </p:sp>
-      <p:sp>
-        <p:nvSpPr>
-          <p:cNvPr id="12" name="">
-            <a:extLst xmlns:a="http://schemas.openxmlformats.org/drawingml/2006/main">
-              <a:ext uri="{FF2B5EF4-FFF2-40B4-BE49-F238E27FC236}">
-                <a16:creationId xmlns:a16="http://schemas.microsoft.com/office/drawing/2014/main" id="{D9FFABB3-0B2E-436B-9712-99E11F14067B}"/>
+              <a:t>Shorter meeting, fewer items</a:t>
+            </a:r>
+          </a:p>
+        </p:txBody>
+      </p:sp>
+      <p:sp>
+        <p:nvSpPr>
+          <p:cNvPr id="14" name="">
+            <a:extLst xmlns:a="http://schemas.openxmlformats.org/drawingml/2006/main">
+              <a:ext uri="{FF2B5EF4-FFF2-40B4-BE49-F238E27FC236}">
+                <a16:creationId xmlns:a16="http://schemas.microsoft.com/office/drawing/2014/main" id="{8CCD2696-BDB1-4AA5-B365-375D33E63848}"/>
               </a:ext>
             </a:extLst>
           </p:cNvPr>
@@ -2079,10 +2170,10 @@
       </p:sp>
       <p:sp>
         <p:nvSpPr>
-          <p:cNvPr id="13" name="">
-            <a:extLst xmlns:a="http://schemas.openxmlformats.org/drawingml/2006/main">
-              <a:ext uri="{FF2B5EF4-FFF2-40B4-BE49-F238E27FC236}">
-                <a16:creationId xmlns:a16="http://schemas.microsoft.com/office/drawing/2014/main" id="{8E6D84BC-452F-4C03-9E06-A6500D86AFCB}"/>
+          <p:cNvPr id="15" name="">
+            <a:extLst xmlns:a="http://schemas.openxmlformats.org/drawingml/2006/main">
+              <a:ext uri="{FF2B5EF4-FFF2-40B4-BE49-F238E27FC236}">
+                <a16:creationId xmlns:a16="http://schemas.microsoft.com/office/drawing/2014/main" id="{48B6A66C-68F3-489C-B9B5-36CFA72FD546}"/>
               </a:ext>
             </a:extLst>
           </p:cNvPr>
@@ -2136,10 +2227,10 @@
       </p:sp>
       <p:sp>
         <p:nvSpPr>
-          <p:cNvPr id="14" name="">
-            <a:extLst xmlns:a="http://schemas.openxmlformats.org/drawingml/2006/main">
-              <a:ext uri="{FF2B5EF4-FFF2-40B4-BE49-F238E27FC236}">
-                <a16:creationId xmlns:a16="http://schemas.microsoft.com/office/drawing/2014/main" id="{CB203EFE-D194-4282-93A3-93E59EAAC141}"/>
+          <p:cNvPr id="16" name="">
+            <a:extLst xmlns:a="http://schemas.openxmlformats.org/drawingml/2006/main">
+              <a:ext uri="{FF2B5EF4-FFF2-40B4-BE49-F238E27FC236}">
+                <a16:creationId xmlns:a16="http://schemas.microsoft.com/office/drawing/2014/main" id="{365C8F9D-64C6-4BD9-BB81-E843F2542FAC}"/>
               </a:ext>
             </a:extLst>
           </p:cNvPr>
@@ -2193,10 +2284,10 @@
       </p:sp>
       <p:sp>
         <p:nvSpPr>
-          <p:cNvPr id="15" name="">
-            <a:extLst xmlns:a="http://schemas.openxmlformats.org/drawingml/2006/main">
-              <a:ext uri="{FF2B5EF4-FFF2-40B4-BE49-F238E27FC236}">
-                <a16:creationId xmlns:a16="http://schemas.microsoft.com/office/drawing/2014/main" id="{3B9E127A-024D-45EE-89A3-3B7E2D733A37}"/>
+          <p:cNvPr id="17" name="">
+            <a:extLst xmlns:a="http://schemas.openxmlformats.org/drawingml/2006/main">
+              <a:ext uri="{FF2B5EF4-FFF2-40B4-BE49-F238E27FC236}">
+                <a16:creationId xmlns:a16="http://schemas.microsoft.com/office/drawing/2014/main" id="{85D09BEC-6FCF-48A5-AD7A-420459D5612A}"/>
               </a:ext>
             </a:extLst>
           </p:cNvPr>
@@ -2250,10 +2341,10 @@
       </p:sp>
       <p:sp>
         <p:nvSpPr>
-          <p:cNvPr id="16" name="">
-            <a:extLst xmlns:a="http://schemas.openxmlformats.org/drawingml/2006/main">
-              <a:ext uri="{FF2B5EF4-FFF2-40B4-BE49-F238E27FC236}">
-                <a16:creationId xmlns:a16="http://schemas.microsoft.com/office/drawing/2014/main" id="{9EB802BA-310C-44D7-9A73-21CD48A2C77B}"/>
+          <p:cNvPr id="18" name="">
+            <a:extLst xmlns:a="http://schemas.openxmlformats.org/drawingml/2006/main">
+              <a:ext uri="{FF2B5EF4-FFF2-40B4-BE49-F238E27FC236}">
+                <a16:creationId xmlns:a16="http://schemas.microsoft.com/office/drawing/2014/main" id="{F27564CD-40A5-4A66-AADA-ECB5C6F8FBFC}"/>
               </a:ext>
             </a:extLst>
           </p:cNvPr>
@@ -2307,10 +2398,10 @@
       </p:sp>
       <p:sp>
         <p:nvSpPr>
-          <p:cNvPr id="17" name="">
-            <a:extLst xmlns:a="http://schemas.openxmlformats.org/drawingml/2006/main">
-              <a:ext uri="{FF2B5EF4-FFF2-40B4-BE49-F238E27FC236}">
-                <a16:creationId xmlns:a16="http://schemas.microsoft.com/office/drawing/2014/main" id="{5511D130-999A-4149-8372-24F3D4CBF08E}"/>
+          <p:cNvPr id="19" name="">
+            <a:extLst xmlns:a="http://schemas.openxmlformats.org/drawingml/2006/main">
+              <a:ext uri="{FF2B5EF4-FFF2-40B4-BE49-F238E27FC236}">
+                <a16:creationId xmlns:a16="http://schemas.microsoft.com/office/drawing/2014/main" id="{3838989E-DF74-4B5B-AE0C-CC46D393C893}"/>
               </a:ext>
             </a:extLst>
           </p:cNvPr>
@@ -2337,10 +2428,10 @@
       </p:sp>
       <p:sp>
         <p:nvSpPr>
-          <p:cNvPr id="18" name="">
-            <a:extLst xmlns:a="http://schemas.openxmlformats.org/drawingml/2006/main">
-              <a:ext uri="{FF2B5EF4-FFF2-40B4-BE49-F238E27FC236}">
-                <a16:creationId xmlns:a16="http://schemas.microsoft.com/office/drawing/2014/main" id="{564FB06C-87D1-49B6-A6E0-FCD912BB5F4D}"/>
+          <p:cNvPr id="20" name="">
+            <a:extLst xmlns:a="http://schemas.openxmlformats.org/drawingml/2006/main">
+              <a:ext uri="{FF2B5EF4-FFF2-40B4-BE49-F238E27FC236}">
+                <a16:creationId xmlns:a16="http://schemas.microsoft.com/office/drawing/2014/main" id="{0937AB40-6408-4047-8013-6605D3E9FCFF}"/>
               </a:ext>
             </a:extLst>
           </p:cNvPr>
@@ -2410,10 +2501,10 @@
       </p:sp>
       <p:sp>
         <p:nvSpPr>
-          <p:cNvPr id="19" name="">
-            <a:extLst xmlns:a="http://schemas.openxmlformats.org/drawingml/2006/main">
-              <a:ext uri="{FF2B5EF4-FFF2-40B4-BE49-F238E27FC236}">
-                <a16:creationId xmlns:a16="http://schemas.microsoft.com/office/drawing/2014/main" id="{03F611BB-B89B-4B84-9D02-7DF6AEADC2D0}"/>
+          <p:cNvPr id="21" name="">
+            <a:extLst xmlns:a="http://schemas.openxmlformats.org/drawingml/2006/main">
+              <a:ext uri="{FF2B5EF4-FFF2-40B4-BE49-F238E27FC236}">
+                <a16:creationId xmlns:a16="http://schemas.microsoft.com/office/drawing/2014/main" id="{3F373B01-C8F7-43BB-8BA6-B501D584F0E9}"/>
               </a:ext>
             </a:extLst>
           </p:cNvPr>
@@ -2457,10 +2548,10 @@
       </p:sp>
       <p:sp>
         <p:nvSpPr>
-          <p:cNvPr id="20" name="">
-            <a:extLst xmlns:a="http://schemas.openxmlformats.org/drawingml/2006/main">
-              <a:ext uri="{FF2B5EF4-FFF2-40B4-BE49-F238E27FC236}">
-                <a16:creationId xmlns:a16="http://schemas.microsoft.com/office/drawing/2014/main" id="{4B2C9248-CD4D-4121-8316-D5E6BE427A5F}"/>
+          <p:cNvPr id="22" name="">
+            <a:extLst xmlns:a="http://schemas.openxmlformats.org/drawingml/2006/main">
+              <a:ext uri="{FF2B5EF4-FFF2-40B4-BE49-F238E27FC236}">
+                <a16:creationId xmlns:a16="http://schemas.microsoft.com/office/drawing/2014/main" id="{93A7BB5E-022E-4EFE-8C9A-5D75C9006FF4}"/>
               </a:ext>
             </a:extLst>
           </p:cNvPr>
@@ -2515,7 +2606,7 @@
     </p:spTree>
     <p:extLst>
       <p:ext uri="{BB962C8B-B14F-4D97-AF65-F5344CB8AC3E}">
-        <p14:creationId xmlns:p14="http://schemas.microsoft.com/office/powerpoint/2010/main" val="1906370453"/>
+        <p14:creationId xmlns:p14="http://schemas.microsoft.com/office/powerpoint/2010/main" val="1515950008"/>
       </p:ext>
     </p:extLst>
   </p:cSld>
@@ -2550,7 +2641,7 @@
           <p:nvPr/>
         </p:nvPicPr>
         <p:blipFill>
-          <a:blip xmlns:r="http://schemas.openxmlformats.org/officeDocument/2006/relationships" xmlns:a="http://schemas.openxmlformats.org/drawingml/2006/main" r:embed="Rcbb7445d90fb41db"/>
+          <a:blip xmlns:r="http://schemas.openxmlformats.org/officeDocument/2006/relationships" xmlns:a="http://schemas.openxmlformats.org/drawingml/2006/main" r:embed="R50d13fc6094c45aa"/>
           <a:srcRect xmlns:a="http://schemas.openxmlformats.org/drawingml/2006/main" l="0" t="0" r="0" b="0"/>
           <a:stretch xmlns:a="http://schemas.openxmlformats.org/drawingml/2006/main">
             <a:fillRect l="0" t="0" r="0" b="0"/>
@@ -2571,7 +2662,7 @@
           <p:cNvPr id="2" name="">
             <a:extLst xmlns:a="http://schemas.openxmlformats.org/drawingml/2006/main">
               <a:ext uri="{FF2B5EF4-FFF2-40B4-BE49-F238E27FC236}">
-                <a16:creationId xmlns:a16="http://schemas.microsoft.com/office/drawing/2014/main" id="{98A6EC8A-A9DC-49D3-ABD4-4FA8569DD12C}"/>
+                <a16:creationId xmlns:a16="http://schemas.microsoft.com/office/drawing/2014/main" id="{A075D9CD-4A97-465F-9CEF-43B2C2BEF473}"/>
               </a:ext>
             </a:extLst>
           </p:cNvPr>
@@ -2618,7 +2709,7 @@
           <p:cNvPr id="3" name="">
             <a:extLst xmlns:a="http://schemas.openxmlformats.org/drawingml/2006/main">
               <a:ext uri="{FF2B5EF4-FFF2-40B4-BE49-F238E27FC236}">
-                <a16:creationId xmlns:a16="http://schemas.microsoft.com/office/drawing/2014/main" id="{35659218-6810-4807-B618-E9050D117253}"/>
+                <a16:creationId xmlns:a16="http://schemas.microsoft.com/office/drawing/2014/main" id="{E01E38A4-FABD-4FE0-B010-BE313B9B51FC}"/>
               </a:ext>
             </a:extLst>
           </p:cNvPr>
@@ -2678,7 +2769,7 @@
           <p:cNvPr id="4" name="">
             <a:extLst xmlns:a="http://schemas.openxmlformats.org/drawingml/2006/main">
               <a:ext uri="{FF2B5EF4-FFF2-40B4-BE49-F238E27FC236}">
-                <a16:creationId xmlns:a16="http://schemas.microsoft.com/office/drawing/2014/main" id="{4CE857B3-877A-41E8-8D40-67367131B905}"/>
+                <a16:creationId xmlns:a16="http://schemas.microsoft.com/office/drawing/2014/main" id="{16720C64-7553-4F23-889E-6E2E2A6496C1}"/>
               </a:ext>
             </a:extLst>
           </p:cNvPr>
@@ -2725,7 +2816,7 @@
           <p:cNvPr id="5" name="">
             <a:extLst xmlns:a="http://schemas.openxmlformats.org/drawingml/2006/main">
               <a:ext uri="{FF2B5EF4-FFF2-40B4-BE49-F238E27FC236}">
-                <a16:creationId xmlns:a16="http://schemas.microsoft.com/office/drawing/2014/main" id="{A0BBE1E8-87D0-42F9-9454-87ED9BD0AA5E}"/>
+                <a16:creationId xmlns:a16="http://schemas.microsoft.com/office/drawing/2014/main" id="{0360C2D2-A447-44F0-AE72-2A3764CFAB82}"/>
               </a:ext>
             </a:extLst>
           </p:cNvPr>
@@ -2782,7 +2873,7 @@
           <p:cNvPr id="6" name="">
             <a:extLst xmlns:a="http://schemas.openxmlformats.org/drawingml/2006/main">
               <a:ext uri="{FF2B5EF4-FFF2-40B4-BE49-F238E27FC236}">
-                <a16:creationId xmlns:a16="http://schemas.microsoft.com/office/drawing/2014/main" id="{84EC3426-36AB-4AAC-A038-8A854A498214}"/>
+                <a16:creationId xmlns:a16="http://schemas.microsoft.com/office/drawing/2014/main" id="{A99B405A-D115-4433-9628-7DAB4FE1D181}"/>
               </a:ext>
             </a:extLst>
           </p:cNvPr>
@@ -2816,7 +2907,7 @@
           <p:cNvPr id="7" name="">
             <a:extLst xmlns:a="http://schemas.openxmlformats.org/drawingml/2006/main">
               <a:ext uri="{FF2B5EF4-FFF2-40B4-BE49-F238E27FC236}">
-                <a16:creationId xmlns:a16="http://schemas.microsoft.com/office/drawing/2014/main" id="{5DC269F6-B610-44AB-AD66-FAEF6E26B6ED}"/>
+                <a16:creationId xmlns:a16="http://schemas.microsoft.com/office/drawing/2014/main" id="{F5AB5A5D-BF4B-430C-A991-E3DECE1B71BF}"/>
               </a:ext>
             </a:extLst>
           </p:cNvPr>
@@ -2876,7 +2967,7 @@
           <p:cNvPr id="8" name="">
             <a:extLst xmlns:a="http://schemas.openxmlformats.org/drawingml/2006/main">
               <a:ext uri="{FF2B5EF4-FFF2-40B4-BE49-F238E27FC236}">
-                <a16:creationId xmlns:a16="http://schemas.microsoft.com/office/drawing/2014/main" id="{C6123999-E9FC-471F-AF39-8608F789FF04}"/>
+                <a16:creationId xmlns:a16="http://schemas.microsoft.com/office/drawing/2014/main" id="{A98C1A8C-4763-4370-98A3-011BDE99E814}"/>
               </a:ext>
             </a:extLst>
           </p:cNvPr>
@@ -2923,7 +3014,7 @@
           <p:cNvPr id="9" name="">
             <a:extLst xmlns:a="http://schemas.openxmlformats.org/drawingml/2006/main">
               <a:ext uri="{FF2B5EF4-FFF2-40B4-BE49-F238E27FC236}">
-                <a16:creationId xmlns:a16="http://schemas.microsoft.com/office/drawing/2014/main" id="{65508ADF-062C-4360-86F9-FD2927177EA6}"/>
+                <a16:creationId xmlns:a16="http://schemas.microsoft.com/office/drawing/2014/main" id="{3387FCA9-E807-4FB2-9867-E6A1EDDAC890}"/>
               </a:ext>
             </a:extLst>
           </p:cNvPr>
@@ -2970,7 +3061,7 @@
           <p:cNvPr id="10" name="">
             <a:extLst xmlns:a="http://schemas.openxmlformats.org/drawingml/2006/main">
               <a:ext uri="{FF2B5EF4-FFF2-40B4-BE49-F238E27FC236}">
-                <a16:creationId xmlns:a16="http://schemas.microsoft.com/office/drawing/2014/main" id="{344E66EB-CE17-46A3-8030-4F2BA9884757}"/>
+                <a16:creationId xmlns:a16="http://schemas.microsoft.com/office/drawing/2014/main" id="{5925B920-398B-4730-B4A9-CCA806F642F5}"/>
               </a:ext>
             </a:extLst>
           </p:cNvPr>
@@ -3004,7 +3095,7 @@
           <p:cNvPr id="11" name="">
             <a:extLst xmlns:a="http://schemas.openxmlformats.org/drawingml/2006/main">
               <a:ext uri="{FF2B5EF4-FFF2-40B4-BE49-F238E27FC236}">
-                <a16:creationId xmlns:a16="http://schemas.microsoft.com/office/drawing/2014/main" id="{78A903FF-FD39-460A-8305-5C2286C7F29D}"/>
+                <a16:creationId xmlns:a16="http://schemas.microsoft.com/office/drawing/2014/main" id="{B6CF99B9-982C-451B-B3CB-03EF16C80F5D}"/>
               </a:ext>
             </a:extLst>
           </p:cNvPr>
@@ -3051,7 +3142,7 @@
           <p:cNvPr id="12" name="">
             <a:extLst xmlns:a="http://schemas.openxmlformats.org/drawingml/2006/main">
               <a:ext uri="{FF2B5EF4-FFF2-40B4-BE49-F238E27FC236}">
-                <a16:creationId xmlns:a16="http://schemas.microsoft.com/office/drawing/2014/main" id="{B9C2C1A7-5B9C-4224-8616-DD1523F062B8}"/>
+                <a16:creationId xmlns:a16="http://schemas.microsoft.com/office/drawing/2014/main" id="{35504C91-1300-435E-88F9-DA5676F4B857}"/>
               </a:ext>
             </a:extLst>
           </p:cNvPr>
@@ -3098,7 +3189,7 @@
           <p:cNvPr id="13" name="">
             <a:extLst xmlns:a="http://schemas.openxmlformats.org/drawingml/2006/main">
               <a:ext uri="{FF2B5EF4-FFF2-40B4-BE49-F238E27FC236}">
-                <a16:creationId xmlns:a16="http://schemas.microsoft.com/office/drawing/2014/main" id="{D41A4E23-1D4F-454F-B4FE-7181BC4CD58A}"/>
+                <a16:creationId xmlns:a16="http://schemas.microsoft.com/office/drawing/2014/main" id="{18B30376-72DF-4E01-916B-A1EA8FF07DF6}"/>
               </a:ext>
             </a:extLst>
           </p:cNvPr>
@@ -3132,7 +3223,7 @@
           <p:cNvPr id="14" name="">
             <a:extLst xmlns:a="http://schemas.openxmlformats.org/drawingml/2006/main">
               <a:ext uri="{FF2B5EF4-FFF2-40B4-BE49-F238E27FC236}">
-                <a16:creationId xmlns:a16="http://schemas.microsoft.com/office/drawing/2014/main" id="{C8477AFD-13C8-4F86-8A12-D7574965B042}"/>
+                <a16:creationId xmlns:a16="http://schemas.microsoft.com/office/drawing/2014/main" id="{DB978575-D007-4936-AEDF-74F2F159FF0C}"/>
               </a:ext>
             </a:extLst>
           </p:cNvPr>
@@ -3179,7 +3270,7 @@
           <p:cNvPr id="15" name="">
             <a:extLst xmlns:a="http://schemas.openxmlformats.org/drawingml/2006/main">
               <a:ext uri="{FF2B5EF4-FFF2-40B4-BE49-F238E27FC236}">
-                <a16:creationId xmlns:a16="http://schemas.microsoft.com/office/drawing/2014/main" id="{48274D32-A0D4-42D9-80A6-2F5218402D41}"/>
+                <a16:creationId xmlns:a16="http://schemas.microsoft.com/office/drawing/2014/main" id="{FAF71905-CA34-499D-BF32-C330C804BC91}"/>
               </a:ext>
             </a:extLst>
           </p:cNvPr>
@@ -3226,7 +3317,7 @@
           <p:cNvPr id="16" name="">
             <a:extLst xmlns:a="http://schemas.openxmlformats.org/drawingml/2006/main">
               <a:ext uri="{FF2B5EF4-FFF2-40B4-BE49-F238E27FC236}">
-                <a16:creationId xmlns:a16="http://schemas.microsoft.com/office/drawing/2014/main" id="{7A722787-ADF4-460A-A283-6730ADC5FC3C}"/>
+                <a16:creationId xmlns:a16="http://schemas.microsoft.com/office/drawing/2014/main" id="{55AB1194-00F8-4629-9865-749DE670E609}"/>
               </a:ext>
             </a:extLst>
           </p:cNvPr>
@@ -3260,7 +3351,7 @@
           <p:cNvPr id="17" name="">
             <a:extLst xmlns:a="http://schemas.openxmlformats.org/drawingml/2006/main">
               <a:ext uri="{FF2B5EF4-FFF2-40B4-BE49-F238E27FC236}">
-                <a16:creationId xmlns:a16="http://schemas.microsoft.com/office/drawing/2014/main" id="{7206D37E-03D3-4CB5-BF5A-6C579DE95395}"/>
+                <a16:creationId xmlns:a16="http://schemas.microsoft.com/office/drawing/2014/main" id="{78F5D1AE-0242-4AB7-8411-E7EAF8617B79}"/>
               </a:ext>
             </a:extLst>
           </p:cNvPr>
@@ -3307,7 +3398,7 @@
           <p:cNvPr id="18" name="">
             <a:extLst xmlns:a="http://schemas.openxmlformats.org/drawingml/2006/main">
               <a:ext uri="{FF2B5EF4-FFF2-40B4-BE49-F238E27FC236}">
-                <a16:creationId xmlns:a16="http://schemas.microsoft.com/office/drawing/2014/main" id="{A7A58612-0B89-48A4-9929-AA5CF7E4A56D}"/>
+                <a16:creationId xmlns:a16="http://schemas.microsoft.com/office/drawing/2014/main" id="{9C5C6CDA-9B88-4B67-85F3-0C63C2436061}"/>
               </a:ext>
             </a:extLst>
           </p:cNvPr>
@@ -3354,7 +3445,7 @@
           <p:cNvPr id="19" name="">
             <a:extLst xmlns:a="http://schemas.openxmlformats.org/drawingml/2006/main">
               <a:ext uri="{FF2B5EF4-FFF2-40B4-BE49-F238E27FC236}">
-                <a16:creationId xmlns:a16="http://schemas.microsoft.com/office/drawing/2014/main" id="{D2AFA716-9F85-469F-8E3B-DD768958C588}"/>
+                <a16:creationId xmlns:a16="http://schemas.microsoft.com/office/drawing/2014/main" id="{97E6D868-4D5D-4A46-BD54-9B317E036064}"/>
               </a:ext>
             </a:extLst>
           </p:cNvPr>
@@ -3388,7 +3479,7 @@
           <p:cNvPr id="20" name="">
             <a:extLst xmlns:a="http://schemas.openxmlformats.org/drawingml/2006/main">
               <a:ext uri="{FF2B5EF4-FFF2-40B4-BE49-F238E27FC236}">
-                <a16:creationId xmlns:a16="http://schemas.microsoft.com/office/drawing/2014/main" id="{E0BB1C5C-23E8-4830-A11B-F5B3EE9B0873}"/>
+                <a16:creationId xmlns:a16="http://schemas.microsoft.com/office/drawing/2014/main" id="{CD99C3B3-09F5-4845-A094-30E14203812C}"/>
               </a:ext>
             </a:extLst>
           </p:cNvPr>
@@ -3435,7 +3526,7 @@
           <p:cNvPr id="21" name="">
             <a:extLst xmlns:a="http://schemas.openxmlformats.org/drawingml/2006/main">
               <a:ext uri="{FF2B5EF4-FFF2-40B4-BE49-F238E27FC236}">
-                <a16:creationId xmlns:a16="http://schemas.microsoft.com/office/drawing/2014/main" id="{2E669C84-E2BF-441D-A6BB-3573F6774FA3}"/>
+                <a16:creationId xmlns:a16="http://schemas.microsoft.com/office/drawing/2014/main" id="{4F6EACDA-F948-4BA7-9D43-244613102A30}"/>
               </a:ext>
             </a:extLst>
           </p:cNvPr>
@@ -3482,7 +3573,7 @@
           <p:cNvPr id="22" name="">
             <a:extLst xmlns:a="http://schemas.openxmlformats.org/drawingml/2006/main">
               <a:ext uri="{FF2B5EF4-FFF2-40B4-BE49-F238E27FC236}">
-                <a16:creationId xmlns:a16="http://schemas.microsoft.com/office/drawing/2014/main" id="{327D58EC-722D-45D4-9BFF-7C6FF5811939}"/>
+                <a16:creationId xmlns:a16="http://schemas.microsoft.com/office/drawing/2014/main" id="{1EEBB38C-090A-47E6-9081-469F64B8A8BC}"/>
               </a:ext>
             </a:extLst>
           </p:cNvPr>
@@ -3512,7 +3603,7 @@
           <p:cNvPr id="23" name="">
             <a:extLst xmlns:a="http://schemas.openxmlformats.org/drawingml/2006/main">
               <a:ext uri="{FF2B5EF4-FFF2-40B4-BE49-F238E27FC236}">
-                <a16:creationId xmlns:a16="http://schemas.microsoft.com/office/drawing/2014/main" id="{DC227FB2-0C83-4AA8-94A8-9B13DD4CA36F}"/>
+                <a16:creationId xmlns:a16="http://schemas.microsoft.com/office/drawing/2014/main" id="{38A3CB9D-57D6-4902-8CA5-55CD801643B0}"/>
               </a:ext>
             </a:extLst>
           </p:cNvPr>
@@ -3557,7 +3648,7 @@
     </p:spTree>
     <p:extLst>
       <p:ext uri="{BB962C8B-B14F-4D97-AF65-F5344CB8AC3E}">
-        <p14:creationId xmlns:p14="http://schemas.microsoft.com/office/powerpoint/2010/main" val="1713697228"/>
+        <p14:creationId xmlns:p14="http://schemas.microsoft.com/office/powerpoint/2010/main" val="2053052634"/>
       </p:ext>
     </p:extLst>
   </p:cSld>
@@ -3592,7 +3683,7 @@
           <p:nvPr/>
         </p:nvPicPr>
         <p:blipFill>
-          <a:blip xmlns:r="http://schemas.openxmlformats.org/officeDocument/2006/relationships" xmlns:a="http://schemas.openxmlformats.org/drawingml/2006/main" r:embed="Rc9d226f77a324c37"/>
+          <a:blip xmlns:r="http://schemas.openxmlformats.org/officeDocument/2006/relationships" xmlns:a="http://schemas.openxmlformats.org/drawingml/2006/main" r:embed="R90313174aea74cad"/>
           <a:srcRect xmlns:a="http://schemas.openxmlformats.org/drawingml/2006/main" l="0" t="0" r="0" b="0"/>
           <a:stretch xmlns:a="http://schemas.openxmlformats.org/drawingml/2006/main">
             <a:fillRect l="0" t="0" r="0" b="0"/>
@@ -3613,7 +3704,7 @@
           <p:cNvPr id="2" name="">
             <a:extLst xmlns:a="http://schemas.openxmlformats.org/drawingml/2006/main">
               <a:ext uri="{FF2B5EF4-FFF2-40B4-BE49-F238E27FC236}">
-                <a16:creationId xmlns:a16="http://schemas.microsoft.com/office/drawing/2014/main" id="{408B9863-61C9-426E-A639-92FE13A84469}"/>
+                <a16:creationId xmlns:a16="http://schemas.microsoft.com/office/drawing/2014/main" id="{BFDACDF7-48F7-44C8-A729-601B3E1BE950}"/>
               </a:ext>
             </a:extLst>
           </p:cNvPr>
@@ -3660,7 +3751,7 @@
           <p:cNvPr id="3" name="">
             <a:extLst xmlns:a="http://schemas.openxmlformats.org/drawingml/2006/main">
               <a:ext uri="{FF2B5EF4-FFF2-40B4-BE49-F238E27FC236}">
-                <a16:creationId xmlns:a16="http://schemas.microsoft.com/office/drawing/2014/main" id="{020C174C-E092-4706-85DF-5FFA03A7DA5D}"/>
+                <a16:creationId xmlns:a16="http://schemas.microsoft.com/office/drawing/2014/main" id="{C8430216-9EC6-4701-9901-BD2DC5F436D5}"/>
               </a:ext>
             </a:extLst>
           </p:cNvPr>
@@ -3720,7 +3811,7 @@
           <p:cNvPr id="4" name="">
             <a:extLst xmlns:a="http://schemas.openxmlformats.org/drawingml/2006/main">
               <a:ext uri="{FF2B5EF4-FFF2-40B4-BE49-F238E27FC236}">
-                <a16:creationId xmlns:a16="http://schemas.microsoft.com/office/drawing/2014/main" id="{A760066B-D69E-4AAF-908B-055C57BD0F93}"/>
+                <a16:creationId xmlns:a16="http://schemas.microsoft.com/office/drawing/2014/main" id="{92CFAC22-E2AF-4FAB-8CF6-2213718B0E33}"/>
               </a:ext>
             </a:extLst>
           </p:cNvPr>
@@ -3767,7 +3858,7 @@
           <p:cNvPr id="5" name="">
             <a:extLst xmlns:a="http://schemas.openxmlformats.org/drawingml/2006/main">
               <a:ext uri="{FF2B5EF4-FFF2-40B4-BE49-F238E27FC236}">
-                <a16:creationId xmlns:a16="http://schemas.microsoft.com/office/drawing/2014/main" id="{990F3318-81EE-48F1-9620-270FD1DE1D0E}"/>
+                <a16:creationId xmlns:a16="http://schemas.microsoft.com/office/drawing/2014/main" id="{B91E98EE-FC88-4693-AFF6-811676641AB1}"/>
               </a:ext>
             </a:extLst>
           </p:cNvPr>
@@ -3824,7 +3915,7 @@
           <p:cNvPr id="6" name="">
             <a:extLst xmlns:a="http://schemas.openxmlformats.org/drawingml/2006/main">
               <a:ext uri="{FF2B5EF4-FFF2-40B4-BE49-F238E27FC236}">
-                <a16:creationId xmlns:a16="http://schemas.microsoft.com/office/drawing/2014/main" id="{E90F2354-E4F4-4361-967B-FF8C0607AD43}"/>
+                <a16:creationId xmlns:a16="http://schemas.microsoft.com/office/drawing/2014/main" id="{1EA0A5F4-AD84-428A-ADD8-75939700D0F5}"/>
               </a:ext>
             </a:extLst>
           </p:cNvPr>
@@ -3858,7 +3949,7 @@
           <p:cNvPr id="7" name="">
             <a:extLst xmlns:a="http://schemas.openxmlformats.org/drawingml/2006/main">
               <a:ext uri="{FF2B5EF4-FFF2-40B4-BE49-F238E27FC236}">
-                <a16:creationId xmlns:a16="http://schemas.microsoft.com/office/drawing/2014/main" id="{F8A6E604-4CB6-4235-B96A-DD97B17B29B7}"/>
+                <a16:creationId xmlns:a16="http://schemas.microsoft.com/office/drawing/2014/main" id="{3E1ADCC0-901D-46DB-9EC0-816BFF9685A7}"/>
               </a:ext>
             </a:extLst>
           </p:cNvPr>
@@ -3905,7 +3996,7 @@
           <p:cNvPr id="8" name="">
             <a:extLst xmlns:a="http://schemas.openxmlformats.org/drawingml/2006/main">
               <a:ext uri="{FF2B5EF4-FFF2-40B4-BE49-F238E27FC236}">
-                <a16:creationId xmlns:a16="http://schemas.microsoft.com/office/drawing/2014/main" id="{AFB92DC3-6306-4082-AC68-F502468E048B}"/>
+                <a16:creationId xmlns:a16="http://schemas.microsoft.com/office/drawing/2014/main" id="{B0D5F83A-C52A-49E8-BEEE-3D918FBC681B}"/>
               </a:ext>
             </a:extLst>
           </p:cNvPr>
@@ -3965,7 +4056,7 @@
           <p:cNvPr id="9" name="">
             <a:extLst xmlns:a="http://schemas.openxmlformats.org/drawingml/2006/main">
               <a:ext uri="{FF2B5EF4-FFF2-40B4-BE49-F238E27FC236}">
-                <a16:creationId xmlns:a16="http://schemas.microsoft.com/office/drawing/2014/main" id="{14643AD5-E759-4E60-95E5-5CBD801EFC19}"/>
+                <a16:creationId xmlns:a16="http://schemas.microsoft.com/office/drawing/2014/main" id="{7E930DD4-8704-4BB0-980C-6F95E10E5378}"/>
               </a:ext>
             </a:extLst>
           </p:cNvPr>
@@ -3995,7 +4086,7 @@
           <p:cNvPr id="10" name="">
             <a:extLst xmlns:a="http://schemas.openxmlformats.org/drawingml/2006/main">
               <a:ext uri="{FF2B5EF4-FFF2-40B4-BE49-F238E27FC236}">
-                <a16:creationId xmlns:a16="http://schemas.microsoft.com/office/drawing/2014/main" id="{A50FFF4C-6ABE-4024-952D-C83C7C7AD72D}"/>
+                <a16:creationId xmlns:a16="http://schemas.microsoft.com/office/drawing/2014/main" id="{B3DB0933-B1BC-45CF-BF68-3288BBCF91ED}"/>
               </a:ext>
             </a:extLst>
           </p:cNvPr>
@@ -4025,7 +4116,7 @@
           <p:cNvPr id="11" name="">
             <a:extLst xmlns:a="http://schemas.openxmlformats.org/drawingml/2006/main">
               <a:ext uri="{FF2B5EF4-FFF2-40B4-BE49-F238E27FC236}">
-                <a16:creationId xmlns:a16="http://schemas.microsoft.com/office/drawing/2014/main" id="{A0457C8C-D7B6-4AB3-BFF5-6477FEA14099}"/>
+                <a16:creationId xmlns:a16="http://schemas.microsoft.com/office/drawing/2014/main" id="{F6A2CA78-4A38-4E3C-8231-B4615E9FDB24}"/>
               </a:ext>
             </a:extLst>
           </p:cNvPr>
@@ -4059,7 +4150,7 @@
           <p:cNvPr id="12" name="">
             <a:extLst xmlns:a="http://schemas.openxmlformats.org/drawingml/2006/main">
               <a:ext uri="{FF2B5EF4-FFF2-40B4-BE49-F238E27FC236}">
-                <a16:creationId xmlns:a16="http://schemas.microsoft.com/office/drawing/2014/main" id="{9A38FBBC-B6B1-40ED-8FB0-FBA22AAAB002}"/>
+                <a16:creationId xmlns:a16="http://schemas.microsoft.com/office/drawing/2014/main" id="{A70D695F-8562-48BC-88FB-BFFFD62CCFCA}"/>
               </a:ext>
             </a:extLst>
           </p:cNvPr>
@@ -4106,7 +4197,7 @@
           <p:cNvPr id="13" name="">
             <a:extLst xmlns:a="http://schemas.openxmlformats.org/drawingml/2006/main">
               <a:ext uri="{FF2B5EF4-FFF2-40B4-BE49-F238E27FC236}">
-                <a16:creationId xmlns:a16="http://schemas.microsoft.com/office/drawing/2014/main" id="{AEA4750B-6823-4AF7-A0C9-44650DCB39C2}"/>
+                <a16:creationId xmlns:a16="http://schemas.microsoft.com/office/drawing/2014/main" id="{BA2E1791-E583-49F1-82FD-A29C609F6011}"/>
               </a:ext>
             </a:extLst>
           </p:cNvPr>
@@ -4166,7 +4257,7 @@
           <p:cNvPr id="14" name="">
             <a:extLst xmlns:a="http://schemas.openxmlformats.org/drawingml/2006/main">
               <a:ext uri="{FF2B5EF4-FFF2-40B4-BE49-F238E27FC236}">
-                <a16:creationId xmlns:a16="http://schemas.microsoft.com/office/drawing/2014/main" id="{BBB9BF0D-63DA-4596-BF3C-89525A5FADE7}"/>
+                <a16:creationId xmlns:a16="http://schemas.microsoft.com/office/drawing/2014/main" id="{A5BA3623-72AC-4C0A-BDD6-9D4284A8369D}"/>
               </a:ext>
             </a:extLst>
           </p:cNvPr>
@@ -4196,7 +4287,7 @@
           <p:cNvPr id="15" name="">
             <a:extLst xmlns:a="http://schemas.openxmlformats.org/drawingml/2006/main">
               <a:ext uri="{FF2B5EF4-FFF2-40B4-BE49-F238E27FC236}">
-                <a16:creationId xmlns:a16="http://schemas.microsoft.com/office/drawing/2014/main" id="{2D07D621-A317-4608-BDC4-F643EDD59D3B}"/>
+                <a16:creationId xmlns:a16="http://schemas.microsoft.com/office/drawing/2014/main" id="{1DFD22DC-148B-4520-81EE-D77D5158F703}"/>
               </a:ext>
             </a:extLst>
           </p:cNvPr>
@@ -4226,7 +4317,7 @@
           <p:cNvPr id="16" name="">
             <a:extLst xmlns:a="http://schemas.openxmlformats.org/drawingml/2006/main">
               <a:ext uri="{FF2B5EF4-FFF2-40B4-BE49-F238E27FC236}">
-                <a16:creationId xmlns:a16="http://schemas.microsoft.com/office/drawing/2014/main" id="{A9456E0A-3E7C-43E3-8D38-1C38CC497FC3}"/>
+                <a16:creationId xmlns:a16="http://schemas.microsoft.com/office/drawing/2014/main" id="{F0EC5604-DA9C-4089-BFFD-1C1FB6E3F425}"/>
               </a:ext>
             </a:extLst>
           </p:cNvPr>
@@ -4260,7 +4351,7 @@
           <p:cNvPr id="17" name="">
             <a:extLst xmlns:a="http://schemas.openxmlformats.org/drawingml/2006/main">
               <a:ext uri="{FF2B5EF4-FFF2-40B4-BE49-F238E27FC236}">
-                <a16:creationId xmlns:a16="http://schemas.microsoft.com/office/drawing/2014/main" id="{B40AFB2A-1DDC-4D97-A1E7-5A880114E051}"/>
+                <a16:creationId xmlns:a16="http://schemas.microsoft.com/office/drawing/2014/main" id="{0BF9A376-B02C-40B3-8691-BFC1BFE506CF}"/>
               </a:ext>
             </a:extLst>
           </p:cNvPr>
@@ -4307,7 +4398,7 @@
           <p:cNvPr id="18" name="">
             <a:extLst xmlns:a="http://schemas.openxmlformats.org/drawingml/2006/main">
               <a:ext uri="{FF2B5EF4-FFF2-40B4-BE49-F238E27FC236}">
-                <a16:creationId xmlns:a16="http://schemas.microsoft.com/office/drawing/2014/main" id="{EDC3BDCA-D1F5-433D-AB15-6724E51E74FC}"/>
+                <a16:creationId xmlns:a16="http://schemas.microsoft.com/office/drawing/2014/main" id="{EAB0B18D-EC4E-4526-9DB2-B9FFD5C99335}"/>
               </a:ext>
             </a:extLst>
           </p:cNvPr>
@@ -4367,7 +4458,7 @@
           <p:cNvPr id="19" name="">
             <a:extLst xmlns:a="http://schemas.openxmlformats.org/drawingml/2006/main">
               <a:ext uri="{FF2B5EF4-FFF2-40B4-BE49-F238E27FC236}">
-                <a16:creationId xmlns:a16="http://schemas.microsoft.com/office/drawing/2014/main" id="{8C6E3153-CD78-4DF5-9FC2-1215264A9ED2}"/>
+                <a16:creationId xmlns:a16="http://schemas.microsoft.com/office/drawing/2014/main" id="{F0FBD15C-DEE5-483E-8697-1AA9B60420B2}"/>
               </a:ext>
             </a:extLst>
           </p:cNvPr>
@@ -4397,7 +4488,7 @@
           <p:cNvPr id="20" name="">
             <a:extLst xmlns:a="http://schemas.openxmlformats.org/drawingml/2006/main">
               <a:ext uri="{FF2B5EF4-FFF2-40B4-BE49-F238E27FC236}">
-                <a16:creationId xmlns:a16="http://schemas.microsoft.com/office/drawing/2014/main" id="{953FD6F7-B392-4ED5-A2F7-F372EDBEE286}"/>
+                <a16:creationId xmlns:a16="http://schemas.microsoft.com/office/drawing/2014/main" id="{7AE82E50-F042-4CB1-A7FF-9B61CCA5FC97}"/>
               </a:ext>
             </a:extLst>
           </p:cNvPr>
@@ -4427,7 +4518,7 @@
           <p:cNvPr id="21" name="">
             <a:extLst xmlns:a="http://schemas.openxmlformats.org/drawingml/2006/main">
               <a:ext uri="{FF2B5EF4-FFF2-40B4-BE49-F238E27FC236}">
-                <a16:creationId xmlns:a16="http://schemas.microsoft.com/office/drawing/2014/main" id="{50EBBFB6-D9D7-4601-8415-66CB5C83D53F}"/>
+                <a16:creationId xmlns:a16="http://schemas.microsoft.com/office/drawing/2014/main" id="{FFCC54E0-C1EF-4172-AAC8-E858267246EE}"/>
               </a:ext>
             </a:extLst>
           </p:cNvPr>
@@ -4461,7 +4552,7 @@
           <p:cNvPr id="22" name="">
             <a:extLst xmlns:a="http://schemas.openxmlformats.org/drawingml/2006/main">
               <a:ext uri="{FF2B5EF4-FFF2-40B4-BE49-F238E27FC236}">
-                <a16:creationId xmlns:a16="http://schemas.microsoft.com/office/drawing/2014/main" id="{C8F363ED-2B4D-4B73-842F-376CD328A1A1}"/>
+                <a16:creationId xmlns:a16="http://schemas.microsoft.com/office/drawing/2014/main" id="{9AF81413-0233-4A8F-B8B7-D4D6D04072B6}"/>
               </a:ext>
             </a:extLst>
           </p:cNvPr>
@@ -4508,7 +4599,7 @@
           <p:cNvPr id="23" name="">
             <a:extLst xmlns:a="http://schemas.openxmlformats.org/drawingml/2006/main">
               <a:ext uri="{FF2B5EF4-FFF2-40B4-BE49-F238E27FC236}">
-                <a16:creationId xmlns:a16="http://schemas.microsoft.com/office/drawing/2014/main" id="{3E6AAE50-5C45-4F93-8FE1-554C9C6BF581}"/>
+                <a16:creationId xmlns:a16="http://schemas.microsoft.com/office/drawing/2014/main" id="{9F1C4399-66A6-4465-9EC0-60F3F72DD064}"/>
               </a:ext>
             </a:extLst>
           </p:cNvPr>
@@ -4568,7 +4659,7 @@
           <p:cNvPr id="24" name="">
             <a:extLst xmlns:a="http://schemas.openxmlformats.org/drawingml/2006/main">
               <a:ext uri="{FF2B5EF4-FFF2-40B4-BE49-F238E27FC236}">
-                <a16:creationId xmlns:a16="http://schemas.microsoft.com/office/drawing/2014/main" id="{8813BAF9-EEFB-4E2D-8DA7-F798D6832936}"/>
+                <a16:creationId xmlns:a16="http://schemas.microsoft.com/office/drawing/2014/main" id="{248B36B1-5D7E-4970-9CE0-20DE6A7F16F5}"/>
               </a:ext>
             </a:extLst>
           </p:cNvPr>
@@ -4598,7 +4689,7 @@
           <p:cNvPr id="25" name="">
             <a:extLst xmlns:a="http://schemas.openxmlformats.org/drawingml/2006/main">
               <a:ext uri="{FF2B5EF4-FFF2-40B4-BE49-F238E27FC236}">
-                <a16:creationId xmlns:a16="http://schemas.microsoft.com/office/drawing/2014/main" id="{54BC855A-494F-4821-856F-49B4AEA42CCD}"/>
+                <a16:creationId xmlns:a16="http://schemas.microsoft.com/office/drawing/2014/main" id="{5F7814D6-AEAE-4B12-B1EC-3767C8DB8E88}"/>
               </a:ext>
             </a:extLst>
           </p:cNvPr>
@@ -4628,7 +4719,7 @@
           <p:cNvPr id="26" name="">
             <a:extLst xmlns:a="http://schemas.openxmlformats.org/drawingml/2006/main">
               <a:ext uri="{FF2B5EF4-FFF2-40B4-BE49-F238E27FC236}">
-                <a16:creationId xmlns:a16="http://schemas.microsoft.com/office/drawing/2014/main" id="{0DEE4FD6-2A7D-4A07-89FE-E92C2820027E}"/>
+                <a16:creationId xmlns:a16="http://schemas.microsoft.com/office/drawing/2014/main" id="{17BD1FC6-1333-4719-A385-C9972F74D8CA}"/>
               </a:ext>
             </a:extLst>
           </p:cNvPr>
@@ -4662,7 +4753,7 @@
           <p:cNvPr id="27" name="">
             <a:extLst xmlns:a="http://schemas.openxmlformats.org/drawingml/2006/main">
               <a:ext uri="{FF2B5EF4-FFF2-40B4-BE49-F238E27FC236}">
-                <a16:creationId xmlns:a16="http://schemas.microsoft.com/office/drawing/2014/main" id="{5BBDED15-9781-4A3A-BB8B-8DFCA607E9F5}"/>
+                <a16:creationId xmlns:a16="http://schemas.microsoft.com/office/drawing/2014/main" id="{FBCC18B8-544A-4AFD-BFD0-D2777D832677}"/>
               </a:ext>
             </a:extLst>
           </p:cNvPr>
@@ -4709,7 +4800,7 @@
           <p:cNvPr id="28" name="">
             <a:extLst xmlns:a="http://schemas.openxmlformats.org/drawingml/2006/main">
               <a:ext uri="{FF2B5EF4-FFF2-40B4-BE49-F238E27FC236}">
-                <a16:creationId xmlns:a16="http://schemas.microsoft.com/office/drawing/2014/main" id="{A28B20CA-71CE-4BBE-B657-9B7D7BC3BB3D}"/>
+                <a16:creationId xmlns:a16="http://schemas.microsoft.com/office/drawing/2014/main" id="{722642FD-16F1-4DBE-90EC-EDDCF2A8D4A1}"/>
               </a:ext>
             </a:extLst>
           </p:cNvPr>
@@ -4769,65 +4860,18 @@
           <p:cNvPr id="29" name="">
             <a:extLst xmlns:a="http://schemas.openxmlformats.org/drawingml/2006/main">
               <a:ext uri="{FF2B5EF4-FFF2-40B4-BE49-F238E27FC236}">
-                <a16:creationId xmlns:a16="http://schemas.microsoft.com/office/drawing/2014/main" id="{95034E76-CAB5-4125-A273-ECEE16746EA9}"/>
-              </a:ext>
-            </a:extLst>
-          </p:cNvPr>
-          <p:cNvSpPr>
-            <a:spLocks xmlns:a="http://schemas.openxmlformats.org/drawingml/2006/main" noGrp="1"/>
-          </p:cNvSpPr>
-          <p:nvPr/>
-        </p:nvSpPr>
-        <p:spPr>
-          <a:xfrm xmlns:a="http://schemas.openxmlformats.org/drawingml/2006/main">
-            <a:off x="838200" y="4743450"/>
-            <a:ext cx="1619250" cy="209550"/>
-          </a:xfrm>
-          <a:prstGeom xmlns:a="http://schemas.openxmlformats.org/drawingml/2006/main" prst="rect">
-            <a:avLst/>
-          </a:prstGeom>
-          <a:noFill xmlns:a="http://schemas.openxmlformats.org/drawingml/2006/main"/>
-          <a:ln xmlns:a="http://schemas.openxmlformats.org/drawingml/2006/main" w="0">
-            <a:noFill/>
-          </a:ln>
-        </p:spPr>
-        <p:txBody>
-          <a:bodyPr xmlns:a="http://schemas.openxmlformats.org/drawingml/2006/main" wrap="square" lIns="38100" tIns="38100" rIns="38100" bIns="38100">
-            <a:noAutofit/>
-          </a:bodyPr>
-          <a:lstStyle xmlns:a="http://schemas.openxmlformats.org/drawingml/2006/main"/>
-          <a:p xmlns:a="http://schemas.openxmlformats.org/drawingml/2006/main">
-            <a:r>
-              <a:rPr sz="975" b="1">
-                <a:solidFill>
-                  <a:srgbClr val="5D605E"/>
-                </a:solidFill>
-                <a:latin typeface="Inter"/>
-                <a:ea typeface="Inter"/>
-                <a:cs typeface="Inter"/>
-              </a:rPr>
-              <a:t>Trust boundary</a:t>
-            </a:r>
-          </a:p>
-        </p:txBody>
-      </p:sp>
-      <p:sp>
-        <p:nvSpPr>
-          <p:cNvPr id="30" name="">
-            <a:extLst xmlns:a="http://schemas.openxmlformats.org/drawingml/2006/main">
-              <a:ext uri="{FF2B5EF4-FFF2-40B4-BE49-F238E27FC236}">
-                <a16:creationId xmlns:a16="http://schemas.microsoft.com/office/drawing/2014/main" id="{299D111C-7BCF-4827-A0CF-F5FCB390D626}"/>
-              </a:ext>
-            </a:extLst>
-          </p:cNvPr>
-          <p:cNvSpPr>
-            <a:spLocks xmlns:a="http://schemas.openxmlformats.org/drawingml/2006/main" noGrp="1"/>
-          </p:cNvSpPr>
-          <p:nvPr/>
-        </p:nvSpPr>
-        <p:spPr>
-          <a:xfrm xmlns:a="http://schemas.openxmlformats.org/drawingml/2006/main">
-            <a:off x="838200" y="5029200"/>
+                <a16:creationId xmlns:a16="http://schemas.microsoft.com/office/drawing/2014/main" id="{4FFDB390-6432-4D38-8508-4BC9188F498E}"/>
+              </a:ext>
+            </a:extLst>
+          </p:cNvPr>
+          <p:cNvSpPr>
+            <a:spLocks xmlns:a="http://schemas.openxmlformats.org/drawingml/2006/main" noGrp="1"/>
+          </p:cNvSpPr>
+          <p:nvPr/>
+        </p:nvSpPr>
+        <p:spPr>
+          <a:xfrm xmlns:a="http://schemas.openxmlformats.org/drawingml/2006/main">
+            <a:off x="838200" y="4876800"/>
             <a:ext cx="8858250" cy="514350"/>
           </a:xfrm>
           <a:prstGeom xmlns:a="http://schemas.openxmlformats.org/drawingml/2006/main" prst="rect">
@@ -4861,7 +4905,7 @@
     </p:spTree>
     <p:extLst>
       <p:ext uri="{BB962C8B-B14F-4D97-AF65-F5344CB8AC3E}">
-        <p14:creationId xmlns:p14="http://schemas.microsoft.com/office/powerpoint/2010/main" val="49783594"/>
+        <p14:creationId xmlns:p14="http://schemas.microsoft.com/office/powerpoint/2010/main" val="1375759587"/>
       </p:ext>
     </p:extLst>
   </p:cSld>
@@ -4896,7 +4940,7 @@
           <p:nvPr/>
         </p:nvPicPr>
         <p:blipFill>
-          <a:blip xmlns:r="http://schemas.openxmlformats.org/officeDocument/2006/relationships" xmlns:a="http://schemas.openxmlformats.org/drawingml/2006/main" r:embed="R0199069fecff424f"/>
+          <a:blip xmlns:r="http://schemas.openxmlformats.org/officeDocument/2006/relationships" xmlns:a="http://schemas.openxmlformats.org/drawingml/2006/main" r:embed="R5685f96ce99847dc"/>
           <a:srcRect xmlns:a="http://schemas.openxmlformats.org/drawingml/2006/main" l="0" t="0" r="0" b="0"/>
           <a:stretch xmlns:a="http://schemas.openxmlformats.org/drawingml/2006/main">
             <a:fillRect l="0" t="0" r="0" b="0"/>
@@ -4917,7 +4961,7 @@
           <p:cNvPr id="2" name="">
             <a:extLst xmlns:a="http://schemas.openxmlformats.org/drawingml/2006/main">
               <a:ext uri="{FF2B5EF4-FFF2-40B4-BE49-F238E27FC236}">
-                <a16:creationId xmlns:a16="http://schemas.microsoft.com/office/drawing/2014/main" id="{FC2C05DC-FB5D-4739-A72E-8886804A052E}"/>
+                <a16:creationId xmlns:a16="http://schemas.microsoft.com/office/drawing/2014/main" id="{727D26AF-C40B-4115-AE80-BD1DE61367E9}"/>
               </a:ext>
             </a:extLst>
           </p:cNvPr>
@@ -4954,7 +4998,7 @@
                 <a:ea typeface="Inter"/>
                 <a:cs typeface="Inter"/>
               </a:rPr>
-              <a:t>DEMO PROOF</a:t>
+              <a:t>WEDGE</a:t>
             </a:r>
           </a:p>
         </p:txBody>
@@ -4964,7 +5008,7 @@
           <p:cNvPr id="3" name="">
             <a:extLst xmlns:a="http://schemas.openxmlformats.org/drawingml/2006/main">
               <a:ext uri="{FF2B5EF4-FFF2-40B4-BE49-F238E27FC236}">
-                <a16:creationId xmlns:a16="http://schemas.microsoft.com/office/drawing/2014/main" id="{8598895F-F89B-4194-97A6-F7AA00D5CAE1}"/>
+                <a16:creationId xmlns:a16="http://schemas.microsoft.com/office/drawing/2014/main" id="{F43D13FD-3A42-4E67-AB31-92A8882E8142}"/>
               </a:ext>
             </a:extLst>
           </p:cNvPr>
@@ -5001,7 +5045,20 @@
                 <a:ea typeface="Inter"/>
                 <a:cs typeface="Inter"/>
               </a:rPr>
-              <a:t>The room starts with two real decisions.</a:t>
+              <a:t>Position-only classification misses</a:t>
+            </a:r>
+          </a:p>
+          <a:p xmlns:a="http://schemas.openxmlformats.org/drawingml/2006/main">
+            <a:r>
+              <a:rPr sz="3000">
+                <a:solidFill>
+                  <a:srgbClr val="181818"/>
+                </a:solidFill>
+                <a:latin typeface="Inter"/>
+                <a:ea typeface="Inter"/>
+                <a:cs typeface="Inter"/>
+              </a:rPr>
+              <a:t>the dangerous case.</a:t>
             </a:r>
           </a:p>
         </p:txBody>
@@ -5011,7 +5068,7 @@
           <p:cNvPr id="4" name="">
             <a:extLst xmlns:a="http://schemas.openxmlformats.org/drawingml/2006/main">
               <a:ext uri="{FF2B5EF4-FFF2-40B4-BE49-F238E27FC236}">
-                <a16:creationId xmlns:a16="http://schemas.microsoft.com/office/drawing/2014/main" id="{92FE4F6E-E5BB-473D-85EA-4A187B67D4FC}"/>
+                <a16:creationId xmlns:a16="http://schemas.microsoft.com/office/drawing/2014/main" id="{19F62702-37E8-4EB3-83DB-93709872494A}"/>
               </a:ext>
             </a:extLst>
           </p:cNvPr>
@@ -5048,7 +5105,7 @@
                 <a:ea typeface="Inter"/>
                 <a:cs typeface="Inter"/>
               </a:rPr>
-              <a:t>Sources: docs/pitch-script.md, docs/build-plan.md</a:t>
+              <a:t>Sources: docs/design-spec.md, docs/pitch-script.md</a:t>
             </a:r>
           </a:p>
         </p:txBody>
@@ -5058,7 +5115,7 @@
           <p:cNvPr id="5" name="">
             <a:extLst xmlns:a="http://schemas.openxmlformats.org/drawingml/2006/main">
               <a:ext uri="{FF2B5EF4-FFF2-40B4-BE49-F238E27FC236}">
-                <a16:creationId xmlns:a16="http://schemas.microsoft.com/office/drawing/2014/main" id="{3917A201-6E64-4C04-ADED-1B70C689AA24}"/>
+                <a16:creationId xmlns:a16="http://schemas.microsoft.com/office/drawing/2014/main" id="{621664F5-3AF9-4FDA-BD9F-F08BF3170584}"/>
               </a:ext>
             </a:extLst>
           </p:cNvPr>
@@ -5115,23 +5172,23 @@
           <p:cNvPr id="6" name="">
             <a:extLst xmlns:a="http://schemas.openxmlformats.org/drawingml/2006/main">
               <a:ext uri="{FF2B5EF4-FFF2-40B4-BE49-F238E27FC236}">
-                <a16:creationId xmlns:a16="http://schemas.microsoft.com/office/drawing/2014/main" id="{8874FC28-FF9B-4158-B056-57810E3FD2AD}"/>
-              </a:ext>
-            </a:extLst>
-          </p:cNvPr>
-          <p:cNvSpPr>
-            <a:spLocks xmlns:a="http://schemas.openxmlformats.org/drawingml/2006/main" noGrp="1"/>
-          </p:cNvSpPr>
-          <p:nvPr/>
-        </p:nvSpPr>
-        <p:spPr>
-          <a:xfrm xmlns:a="http://schemas.openxmlformats.org/drawingml/2006/main">
-            <a:off x="781050" y="2038350"/>
-            <a:ext cx="3905250" cy="2876550"/>
+                <a16:creationId xmlns:a16="http://schemas.microsoft.com/office/drawing/2014/main" id="{E3B21232-67B0-4D40-9AE5-06A963CC6FD0}"/>
+              </a:ext>
+            </a:extLst>
+          </p:cNvPr>
+          <p:cNvSpPr>
+            <a:spLocks xmlns:a="http://schemas.openxmlformats.org/drawingml/2006/main" noGrp="1"/>
+          </p:cNvSpPr>
+          <p:nvPr/>
+        </p:nvSpPr>
+        <p:spPr>
+          <a:xfrm xmlns:a="http://schemas.openxmlformats.org/drawingml/2006/main">
+            <a:off x="876300" y="2114550"/>
+            <a:ext cx="4095750" cy="2495550"/>
           </a:xfrm>
           <a:prstGeom xmlns:a="http://schemas.openxmlformats.org/drawingml/2006/main" prst="roundRect">
             <a:avLst>
-              <a:gd name="adj" fmla="val 2649"/>
+              <a:gd name="adj" fmla="val 3053"/>
             </a:avLst>
           </a:prstGeom>
           <a:solidFill xmlns:a="http://schemas.openxmlformats.org/drawingml/2006/main">
@@ -5149,19 +5206,19 @@
           <p:cNvPr id="7" name="">
             <a:extLst xmlns:a="http://schemas.openxmlformats.org/drawingml/2006/main">
               <a:ext uri="{FF2B5EF4-FFF2-40B4-BE49-F238E27FC236}">
-                <a16:creationId xmlns:a16="http://schemas.microsoft.com/office/drawing/2014/main" id="{CD56F57B-50FA-4E9C-ADEA-3EA79C144051}"/>
-              </a:ext>
-            </a:extLst>
-          </p:cNvPr>
-          <p:cNvSpPr>
-            <a:spLocks xmlns:a="http://schemas.openxmlformats.org/drawingml/2006/main" noGrp="1"/>
-          </p:cNvSpPr>
-          <p:nvPr/>
-        </p:nvSpPr>
-        <p:spPr>
-          <a:xfrm xmlns:a="http://schemas.openxmlformats.org/drawingml/2006/main">
-            <a:off x="1104900" y="2343150"/>
-            <a:ext cx="3048000" cy="228600"/>
+                <a16:creationId xmlns:a16="http://schemas.microsoft.com/office/drawing/2014/main" id="{76EC590A-F379-430D-90F6-18DB929029AE}"/>
+              </a:ext>
+            </a:extLst>
+          </p:cNvPr>
+          <p:cNvSpPr>
+            <a:spLocks xmlns:a="http://schemas.openxmlformats.org/drawingml/2006/main" noGrp="1"/>
+          </p:cNvSpPr>
+          <p:nvPr/>
+        </p:nvSpPr>
+        <p:spPr>
+          <a:xfrm xmlns:a="http://schemas.openxmlformats.org/drawingml/2006/main">
+            <a:off x="1181100" y="2400300"/>
+            <a:ext cx="2476500" cy="247650"/>
           </a:xfrm>
           <a:prstGeom xmlns:a="http://schemas.openxmlformats.org/drawingml/2006/main" prst="rect">
             <a:avLst/>
@@ -5180,35 +5237,82 @@
             <a:r>
               <a:rPr sz="1350" b="1">
                 <a:solidFill>
+                  <a:srgbClr val="181818"/>
+                </a:solidFill>
+                <a:latin typeface="Inter"/>
+                <a:ea typeface="Inter"/>
+                <a:cs typeface="Inter"/>
+              </a:rPr>
+              <a:t>Naive baseline</a:t>
+            </a:r>
+          </a:p>
+        </p:txBody>
+      </p:sp>
+      <p:sp>
+        <p:nvSpPr>
+          <p:cNvPr id="8" name="">
+            <a:extLst xmlns:a="http://schemas.openxmlformats.org/drawingml/2006/main">
+              <a:ext uri="{FF2B5EF4-FFF2-40B4-BE49-F238E27FC236}">
+                <a16:creationId xmlns:a16="http://schemas.microsoft.com/office/drawing/2014/main" id="{27AFF37E-00BA-46FE-87AB-946400352265}"/>
+              </a:ext>
+            </a:extLst>
+          </p:cNvPr>
+          <p:cNvSpPr>
+            <a:spLocks xmlns:a="http://schemas.openxmlformats.org/drawingml/2006/main" noGrp="1"/>
+          </p:cNvSpPr>
+          <p:nvPr/>
+        </p:nvSpPr>
+        <p:spPr>
+          <a:xfrm xmlns:a="http://schemas.openxmlformats.org/drawingml/2006/main">
+            <a:off x="1181100" y="2952750"/>
+            <a:ext cx="666750" cy="152400"/>
+          </a:xfrm>
+          <a:prstGeom xmlns:a="http://schemas.openxmlformats.org/drawingml/2006/main" prst="rect">
+            <a:avLst/>
+          </a:prstGeom>
+          <a:noFill xmlns:a="http://schemas.openxmlformats.org/drawingml/2006/main"/>
+          <a:ln xmlns:a="http://schemas.openxmlformats.org/drawingml/2006/main" w="0">
+            <a:noFill/>
+          </a:ln>
+        </p:spPr>
+        <p:txBody>
+          <a:bodyPr xmlns:a="http://schemas.openxmlformats.org/drawingml/2006/main" wrap="square" lIns="38100" tIns="38100" rIns="38100" bIns="38100">
+            <a:noAutofit/>
+          </a:bodyPr>
+          <a:lstStyle xmlns:a="http://schemas.openxmlformats.org/drawingml/2006/main"/>
+          <a:p xmlns:a="http://schemas.openxmlformats.org/drawingml/2006/main">
+            <a:r>
+              <a:rPr sz="825" b="1">
+                <a:solidFill>
                   <a:srgbClr val="5D605E"/>
                 </a:solidFill>
                 <a:latin typeface="Inter"/>
                 <a:ea typeface="Inter"/>
                 <a:cs typeface="Inter"/>
               </a:rPr>
-              <a:t>Mochi pre-meeting brief</a:t>
-            </a:r>
-          </a:p>
-        </p:txBody>
-      </p:sp>
-      <p:sp>
-        <p:nvSpPr>
-          <p:cNvPr id="8" name="">
-            <a:extLst xmlns:a="http://schemas.openxmlformats.org/drawingml/2006/main">
-              <a:ext uri="{FF2B5EF4-FFF2-40B4-BE49-F238E27FC236}">
-                <a16:creationId xmlns:a16="http://schemas.microsoft.com/office/drawing/2014/main" id="{99CDBF31-5EF7-4336-87A3-BB70869322A9}"/>
-              </a:ext>
-            </a:extLst>
-          </p:cNvPr>
-          <p:cNvSpPr>
-            <a:spLocks xmlns:a="http://schemas.openxmlformats.org/drawingml/2006/main" noGrp="1"/>
-          </p:cNvSpPr>
-          <p:nvPr/>
-        </p:nvSpPr>
-        <p:spPr>
-          <a:xfrm xmlns:a="http://schemas.openxmlformats.org/drawingml/2006/main">
-            <a:off x="1104900" y="2800350"/>
-            <a:ext cx="1066800" cy="914400"/>
+              <a:t>Input</a:t>
+            </a:r>
+          </a:p>
+        </p:txBody>
+      </p:sp>
+      <p:sp>
+        <p:nvSpPr>
+          <p:cNvPr id="9" name="">
+            <a:extLst xmlns:a="http://schemas.openxmlformats.org/drawingml/2006/main">
+              <a:ext uri="{FF2B5EF4-FFF2-40B4-BE49-F238E27FC236}">
+                <a16:creationId xmlns:a16="http://schemas.microsoft.com/office/drawing/2014/main" id="{29B66CC9-9514-4323-8D24-218B5547E842}"/>
+              </a:ext>
+            </a:extLst>
+          </p:cNvPr>
+          <p:cNvSpPr>
+            <a:spLocks xmlns:a="http://schemas.openxmlformats.org/drawingml/2006/main" noGrp="1"/>
+          </p:cNvSpPr>
+          <p:nvPr/>
+        </p:nvSpPr>
+        <p:spPr>
+          <a:xfrm xmlns:a="http://schemas.openxmlformats.org/drawingml/2006/main">
+            <a:off x="1181100" y="3162300"/>
+            <a:ext cx="3048000" cy="419100"/>
           </a:xfrm>
           <a:prstGeom xmlns:a="http://schemas.openxmlformats.org/drawingml/2006/main" prst="rect">
             <a:avLst/>
@@ -5224,48 +5328,38 @@
           </a:bodyPr>
           <a:lstStyle xmlns:a="http://schemas.openxmlformats.org/drawingml/2006/main"/>
           <a:p xmlns:a="http://schemas.openxmlformats.org/drawingml/2006/main">
-            <a:pPr algn="ctr">
-              <a:defRPr sz="6900" b="1">
+            <a:r>
+              <a:rPr sz="1650">
                 <a:solidFill>
                   <a:srgbClr val="181818"/>
                 </a:solidFill>
                 <a:latin typeface="Inter"/>
                 <a:ea typeface="Inter"/>
                 <a:cs typeface="Inter"/>
-              </a:defRPr>
-            </a:pPr>
-            <a:r>
-              <a:rPr sz="6900" b="1">
-                <a:solidFill>
-                  <a:srgbClr val="181818"/>
-                </a:solidFill>
-                <a:latin typeface="Inter"/>
-                <a:ea typeface="Inter"/>
-                <a:cs typeface="Inter"/>
-              </a:rPr>
-              <a:t>9</a:t>
-            </a:r>
-          </a:p>
-        </p:txBody>
-      </p:sp>
-      <p:sp>
-        <p:nvSpPr>
-          <p:cNvPr id="9" name="">
-            <a:extLst xmlns:a="http://schemas.openxmlformats.org/drawingml/2006/main">
-              <a:ext uri="{FF2B5EF4-FFF2-40B4-BE49-F238E27FC236}">
-                <a16:creationId xmlns:a16="http://schemas.microsoft.com/office/drawing/2014/main" id="{EBE64446-C78E-4C25-83D8-EF48989E26C7}"/>
-              </a:ext>
-            </a:extLst>
-          </p:cNvPr>
-          <p:cNvSpPr>
-            <a:spLocks xmlns:a="http://schemas.openxmlformats.org/drawingml/2006/main" noGrp="1"/>
-          </p:cNvSpPr>
-          <p:nvPr/>
-        </p:nvSpPr>
-        <p:spPr>
-          <a:xfrm xmlns:a="http://schemas.openxmlformats.org/drawingml/2006/main">
-            <a:off x="1123950" y="3752850"/>
-            <a:ext cx="1066800" cy="228600"/>
+              </a:rPr>
+              <a:t>Everyone supports reaching younger shoppers.</a:t>
+            </a:r>
+          </a:p>
+        </p:txBody>
+      </p:sp>
+      <p:sp>
+        <p:nvSpPr>
+          <p:cNvPr id="10" name="">
+            <a:extLst xmlns:a="http://schemas.openxmlformats.org/drawingml/2006/main">
+              <a:ext uri="{FF2B5EF4-FFF2-40B4-BE49-F238E27FC236}">
+                <a16:creationId xmlns:a16="http://schemas.microsoft.com/office/drawing/2014/main" id="{234EA946-DA7F-4DD5-9468-C904B0D52A43}"/>
+              </a:ext>
+            </a:extLst>
+          </p:cNvPr>
+          <p:cNvSpPr>
+            <a:spLocks xmlns:a="http://schemas.openxmlformats.org/drawingml/2006/main" noGrp="1"/>
+          </p:cNvSpPr>
+          <p:nvPr/>
+        </p:nvSpPr>
+        <p:spPr>
+          <a:xfrm xmlns:a="http://schemas.openxmlformats.org/drawingml/2006/main">
+            <a:off x="1181100" y="3810000"/>
+            <a:ext cx="762000" cy="152400"/>
           </a:xfrm>
           <a:prstGeom xmlns:a="http://schemas.openxmlformats.org/drawingml/2006/main" prst="rect">
             <a:avLst/>
@@ -5281,48 +5375,38 @@
           </a:bodyPr>
           <a:lstStyle xmlns:a="http://schemas.openxmlformats.org/drawingml/2006/main"/>
           <a:p xmlns:a="http://schemas.openxmlformats.org/drawingml/2006/main">
-            <a:pPr algn="ctr">
-              <a:defRPr sz="1200">
+            <a:r>
+              <a:rPr sz="825" b="1">
                 <a:solidFill>
                   <a:srgbClr val="5D605E"/>
                 </a:solidFill>
                 <a:latin typeface="Inter"/>
                 <a:ea typeface="Inter"/>
                 <a:cs typeface="Inter"/>
-              </a:defRPr>
-            </a:pPr>
-            <a:r>
-              <a:rPr sz="1200">
-                <a:solidFill>
-                  <a:srgbClr val="5D605E"/>
-                </a:solidFill>
-                <a:latin typeface="Inter"/>
-                <a:ea typeface="Inter"/>
-                <a:cs typeface="Inter"/>
-              </a:rPr>
-              <a:t>agenda items</a:t>
-            </a:r>
-          </a:p>
-        </p:txBody>
-      </p:sp>
-      <p:sp>
-        <p:nvSpPr>
-          <p:cNvPr id="10" name="">
-            <a:extLst xmlns:a="http://schemas.openxmlformats.org/drawingml/2006/main">
-              <a:ext uri="{FF2B5EF4-FFF2-40B4-BE49-F238E27FC236}">
-                <a16:creationId xmlns:a16="http://schemas.microsoft.com/office/drawing/2014/main" id="{B2B6965B-4BA6-4405-B641-43E0BD29C880}"/>
-              </a:ext>
-            </a:extLst>
-          </p:cNvPr>
-          <p:cNvSpPr>
-            <a:spLocks xmlns:a="http://schemas.openxmlformats.org/drawingml/2006/main" noGrp="1"/>
-          </p:cNvSpPr>
-          <p:nvPr/>
-        </p:nvSpPr>
-        <p:spPr>
-          <a:xfrm xmlns:a="http://schemas.openxmlformats.org/drawingml/2006/main">
-            <a:off x="2419350" y="3105150"/>
-            <a:ext cx="514350" cy="323850"/>
+              </a:rPr>
+              <a:t>Output</a:t>
+            </a:r>
+          </a:p>
+        </p:txBody>
+      </p:sp>
+      <p:sp>
+        <p:nvSpPr>
+          <p:cNvPr id="11" name="">
+            <a:extLst xmlns:a="http://schemas.openxmlformats.org/drawingml/2006/main">
+              <a:ext uri="{FF2B5EF4-FFF2-40B4-BE49-F238E27FC236}">
+                <a16:creationId xmlns:a16="http://schemas.microsoft.com/office/drawing/2014/main" id="{3473197D-DA83-4004-B45C-AB2E9AF86C95}"/>
+              </a:ext>
+            </a:extLst>
+          </p:cNvPr>
+          <p:cNvSpPr>
+            <a:spLocks xmlns:a="http://schemas.openxmlformats.org/drawingml/2006/main" noGrp="1"/>
+          </p:cNvSpPr>
+          <p:nvPr/>
+        </p:nvSpPr>
+        <p:spPr>
+          <a:xfrm xmlns:a="http://schemas.openxmlformats.org/drawingml/2006/main">
+            <a:off x="1181100" y="4057650"/>
+            <a:ext cx="1428750" cy="323850"/>
           </a:xfrm>
           <a:prstGeom xmlns:a="http://schemas.openxmlformats.org/drawingml/2006/main" prst="rect">
             <a:avLst/>
@@ -5338,83 +5422,16 @@
           </a:bodyPr>
           <a:lstStyle xmlns:a="http://schemas.openxmlformats.org/drawingml/2006/main"/>
           <a:p xmlns:a="http://schemas.openxmlformats.org/drawingml/2006/main">
-            <a:pPr algn="ctr">
-              <a:defRPr sz="2250">
-                <a:solidFill>
-                  <a:srgbClr val="5D605E"/>
-                </a:solidFill>
-                <a:latin typeface="Inter"/>
-                <a:ea typeface="Inter"/>
-                <a:cs typeface="Inter"/>
-              </a:defRPr>
-            </a:pPr>
-            <a:r>
-              <a:rPr sz="2250">
-                <a:solidFill>
-                  <a:srgbClr val="5D605E"/>
-                </a:solidFill>
-                <a:latin typeface="Inter"/>
-                <a:ea typeface="Inter"/>
-                <a:cs typeface="Inter"/>
-              </a:rPr>
-              <a:t>-&gt;</a:t>
-            </a:r>
-          </a:p>
-        </p:txBody>
-      </p:sp>
-      <p:sp>
-        <p:nvSpPr>
-          <p:cNvPr id="11" name="">
-            <a:extLst xmlns:a="http://schemas.openxmlformats.org/drawingml/2006/main">
-              <a:ext uri="{FF2B5EF4-FFF2-40B4-BE49-F238E27FC236}">
-                <a16:creationId xmlns:a16="http://schemas.microsoft.com/office/drawing/2014/main" id="{50C154BF-CE48-4D28-A783-CFB9838CBFEE}"/>
-              </a:ext>
-            </a:extLst>
-          </p:cNvPr>
-          <p:cNvSpPr>
-            <a:spLocks xmlns:a="http://schemas.openxmlformats.org/drawingml/2006/main" noGrp="1"/>
-          </p:cNvSpPr>
-          <p:nvPr/>
-        </p:nvSpPr>
-        <p:spPr>
-          <a:xfrm xmlns:a="http://schemas.openxmlformats.org/drawingml/2006/main">
-            <a:off x="3162300" y="2800350"/>
-            <a:ext cx="895350" cy="914400"/>
-          </a:xfrm>
-          <a:prstGeom xmlns:a="http://schemas.openxmlformats.org/drawingml/2006/main" prst="rect">
-            <a:avLst/>
-          </a:prstGeom>
-          <a:noFill xmlns:a="http://schemas.openxmlformats.org/drawingml/2006/main"/>
-          <a:ln xmlns:a="http://schemas.openxmlformats.org/drawingml/2006/main" w="0">
-            <a:noFill/>
-          </a:ln>
-        </p:spPr>
-        <p:txBody>
-          <a:bodyPr xmlns:a="http://schemas.openxmlformats.org/drawingml/2006/main" wrap="square" lIns="38100" tIns="38100" rIns="38100" bIns="38100">
-            <a:noAutofit/>
-          </a:bodyPr>
-          <a:lstStyle xmlns:a="http://schemas.openxmlformats.org/drawingml/2006/main"/>
-          <a:p xmlns:a="http://schemas.openxmlformats.org/drawingml/2006/main">
-            <a:pPr algn="ctr">
-              <a:defRPr sz="6900" b="1">
-                <a:solidFill>
-                  <a:srgbClr val="181818"/>
-                </a:solidFill>
-                <a:latin typeface="Inter"/>
-                <a:ea typeface="Inter"/>
-                <a:cs typeface="Inter"/>
-              </a:defRPr>
-            </a:pPr>
-            <a:r>
-              <a:rPr sz="6900" b="1">
-                <a:solidFill>
-                  <a:srgbClr val="181818"/>
-                </a:solidFill>
-                <a:latin typeface="Inter"/>
-                <a:ea typeface="Inter"/>
-                <a:cs typeface="Inter"/>
-              </a:rPr>
-              <a:t>2</a:t>
+            <a:r>
+              <a:rPr sz="2025" b="1">
+                <a:solidFill>
+                  <a:srgbClr val="282828"/>
+                </a:solidFill>
+                <a:latin typeface="Inter"/>
+                <a:ea typeface="Inter"/>
+                <a:cs typeface="Inter"/>
+              </a:rPr>
+              <a:t>AGREED</a:t>
             </a:r>
           </a:p>
         </p:txBody>
@@ -5424,76 +5441,19 @@
           <p:cNvPr id="12" name="">
             <a:extLst xmlns:a="http://schemas.openxmlformats.org/drawingml/2006/main">
               <a:ext uri="{FF2B5EF4-FFF2-40B4-BE49-F238E27FC236}">
-                <a16:creationId xmlns:a16="http://schemas.microsoft.com/office/drawing/2014/main" id="{1EF2A74B-A034-44D0-98D8-49CBD597C9E8}"/>
-              </a:ext>
-            </a:extLst>
-          </p:cNvPr>
-          <p:cNvSpPr>
-            <a:spLocks xmlns:a="http://schemas.openxmlformats.org/drawingml/2006/main" noGrp="1"/>
-          </p:cNvSpPr>
-          <p:nvPr/>
-        </p:nvSpPr>
-        <p:spPr>
-          <a:xfrm xmlns:a="http://schemas.openxmlformats.org/drawingml/2006/main">
-            <a:off x="3028950" y="3752850"/>
-            <a:ext cx="1162050" cy="228600"/>
-          </a:xfrm>
-          <a:prstGeom xmlns:a="http://schemas.openxmlformats.org/drawingml/2006/main" prst="rect">
-            <a:avLst/>
-          </a:prstGeom>
-          <a:noFill xmlns:a="http://schemas.openxmlformats.org/drawingml/2006/main"/>
-          <a:ln xmlns:a="http://schemas.openxmlformats.org/drawingml/2006/main" w="0">
-            <a:noFill/>
-          </a:ln>
-        </p:spPr>
-        <p:txBody>
-          <a:bodyPr xmlns:a="http://schemas.openxmlformats.org/drawingml/2006/main" wrap="square" lIns="38100" tIns="38100" rIns="38100" bIns="38100">
-            <a:noAutofit/>
-          </a:bodyPr>
-          <a:lstStyle xmlns:a="http://schemas.openxmlformats.org/drawingml/2006/main"/>
-          <a:p xmlns:a="http://schemas.openxmlformats.org/drawingml/2006/main">
-            <a:pPr algn="ctr">
-              <a:defRPr sz="1200">
-                <a:solidFill>
-                  <a:srgbClr val="5D605E"/>
-                </a:solidFill>
-                <a:latin typeface="Inter"/>
-                <a:ea typeface="Inter"/>
-                <a:cs typeface="Inter"/>
-              </a:defRPr>
-            </a:pPr>
-            <a:r>
-              <a:rPr sz="1200">
-                <a:solidFill>
-                  <a:srgbClr val="5D605E"/>
-                </a:solidFill>
-                <a:latin typeface="Inter"/>
-                <a:ea typeface="Inter"/>
-                <a:cs typeface="Inter"/>
-              </a:rPr>
-              <a:t>live decisions</a:t>
-            </a:r>
-          </a:p>
-        </p:txBody>
-      </p:sp>
-      <p:sp>
-        <p:nvSpPr>
-          <p:cNvPr id="13" name="">
-            <a:extLst xmlns:a="http://schemas.openxmlformats.org/drawingml/2006/main">
-              <a:ext uri="{FF2B5EF4-FFF2-40B4-BE49-F238E27FC236}">
-                <a16:creationId xmlns:a16="http://schemas.microsoft.com/office/drawing/2014/main" id="{884E0F20-E799-4CE5-9891-B9D4D8DE0101}"/>
-              </a:ext>
-            </a:extLst>
-          </p:cNvPr>
-          <p:cNvSpPr>
-            <a:spLocks xmlns:a="http://schemas.openxmlformats.org/drawingml/2006/main" noGrp="1"/>
-          </p:cNvSpPr>
-          <p:nvPr/>
-        </p:nvSpPr>
-        <p:spPr>
-          <a:xfrm xmlns:a="http://schemas.openxmlformats.org/drawingml/2006/main">
-            <a:off x="1104900" y="4229100"/>
-            <a:ext cx="3105150" cy="9525"/>
+                <a16:creationId xmlns:a16="http://schemas.microsoft.com/office/drawing/2014/main" id="{BDDF9424-54BC-4883-9975-E81C48C4D6BF}"/>
+              </a:ext>
+            </a:extLst>
+          </p:cNvPr>
+          <p:cNvSpPr>
+            <a:spLocks xmlns:a="http://schemas.openxmlformats.org/drawingml/2006/main" noGrp="1"/>
+          </p:cNvSpPr>
+          <p:nvPr/>
+        </p:nvSpPr>
+        <p:spPr>
+          <a:xfrm xmlns:a="http://schemas.openxmlformats.org/drawingml/2006/main">
+            <a:off x="5257800" y="3333750"/>
+            <a:ext cx="647700" cy="19050"/>
           </a:xfrm>
           <a:prstGeom xmlns:a="http://schemas.openxmlformats.org/drawingml/2006/main" prst="rect">
             <a:avLst/>
@@ -5508,77 +5468,60 @@
       </p:sp>
       <p:sp>
         <p:nvSpPr>
+          <p:cNvPr id="13" name="">
+            <a:extLst xmlns:a="http://schemas.openxmlformats.org/drawingml/2006/main">
+              <a:ext uri="{FF2B5EF4-FFF2-40B4-BE49-F238E27FC236}">
+                <a16:creationId xmlns:a16="http://schemas.microsoft.com/office/drawing/2014/main" id="{8B9FE5A0-0A99-413D-A44F-5F9045E40856}"/>
+              </a:ext>
+            </a:extLst>
+          </p:cNvPr>
+          <p:cNvSpPr>
+            <a:spLocks xmlns:a="http://schemas.openxmlformats.org/drawingml/2006/main" noGrp="1"/>
+          </p:cNvSpPr>
+          <p:nvPr/>
+        </p:nvSpPr>
+        <p:spPr>
+          <a:xfrm xmlns:a="http://schemas.openxmlformats.org/drawingml/2006/main">
+            <a:off x="5886450" y="3295650"/>
+            <a:ext cx="133350" cy="95250"/>
+          </a:xfrm>
+          <a:prstGeom xmlns:a="http://schemas.openxmlformats.org/drawingml/2006/main" prst="triangle">
+            <a:avLst/>
+          </a:prstGeom>
+          <a:solidFill xmlns:a="http://schemas.openxmlformats.org/drawingml/2006/main">
+            <a:srgbClr val="EDEDED"/>
+          </a:solidFill>
+          <a:ln xmlns:a="http://schemas.openxmlformats.org/drawingml/2006/main" w="0">
+            <a:noFill/>
+          </a:ln>
+        </p:spPr>
+      </p:sp>
+      <p:sp>
+        <p:nvSpPr>
           <p:cNvPr id="14" name="">
             <a:extLst xmlns:a="http://schemas.openxmlformats.org/drawingml/2006/main">
               <a:ext uri="{FF2B5EF4-FFF2-40B4-BE49-F238E27FC236}">
-                <a16:creationId xmlns:a16="http://schemas.microsoft.com/office/drawing/2014/main" id="{4647C0F5-76A0-4749-A436-AF7C6C4BA4B4}"/>
-              </a:ext>
-            </a:extLst>
-          </p:cNvPr>
-          <p:cNvSpPr>
-            <a:spLocks xmlns:a="http://schemas.openxmlformats.org/drawingml/2006/main" noGrp="1"/>
-          </p:cNvSpPr>
-          <p:nvPr/>
-        </p:nvSpPr>
-        <p:spPr>
-          <a:xfrm xmlns:a="http://schemas.openxmlformats.org/drawingml/2006/main">
-            <a:off x="1104900" y="4438650"/>
-            <a:ext cx="3048000" cy="228600"/>
-          </a:xfrm>
-          <a:prstGeom xmlns:a="http://schemas.openxmlformats.org/drawingml/2006/main" prst="rect">
-            <a:avLst/>
-          </a:prstGeom>
-          <a:noFill xmlns:a="http://schemas.openxmlformats.org/drawingml/2006/main"/>
-          <a:ln xmlns:a="http://schemas.openxmlformats.org/drawingml/2006/main" w="0">
-            <a:noFill/>
-          </a:ln>
-        </p:spPr>
-        <p:txBody>
-          <a:bodyPr xmlns:a="http://schemas.openxmlformats.org/drawingml/2006/main" wrap="square" lIns="38100" tIns="38100" rIns="38100" bIns="38100">
-            <a:noAutofit/>
-          </a:bodyPr>
-          <a:lstStyle xmlns:a="http://schemas.openxmlformats.org/drawingml/2006/main"/>
-          <a:p xmlns:a="http://schemas.openxmlformats.org/drawingml/2006/main">
-            <a:r>
-              <a:rPr sz="1350" b="1">
-                <a:solidFill>
-                  <a:srgbClr val="282828"/>
-                </a:solidFill>
-                <a:latin typeface="Inter"/>
-                <a:ea typeface="Inter"/>
-                <a:cs typeface="Inter"/>
-              </a:rPr>
-              <a:t>Action items: 3 resolved, 0 need an owner</a:t>
-            </a:r>
-          </a:p>
-        </p:txBody>
-      </p:sp>
-      <p:sp>
-        <p:nvSpPr>
-          <p:cNvPr id="15" name="">
-            <a:extLst xmlns:a="http://schemas.openxmlformats.org/drawingml/2006/main">
-              <a:ext uri="{FF2B5EF4-FFF2-40B4-BE49-F238E27FC236}">
-                <a16:creationId xmlns:a16="http://schemas.microsoft.com/office/drawing/2014/main" id="{7F65E770-19E0-4B33-A02A-D1D7AD27AED0}"/>
-              </a:ext>
-            </a:extLst>
-          </p:cNvPr>
-          <p:cNvSpPr>
-            <a:spLocks xmlns:a="http://schemas.openxmlformats.org/drawingml/2006/main" noGrp="1"/>
-          </p:cNvSpPr>
-          <p:nvPr/>
-        </p:nvSpPr>
-        <p:spPr>
-          <a:xfrm xmlns:a="http://schemas.openxmlformats.org/drawingml/2006/main">
-            <a:off x="5276850" y="2038350"/>
-            <a:ext cx="5334000" cy="1524000"/>
+                <a16:creationId xmlns:a16="http://schemas.microsoft.com/office/drawing/2014/main" id="{F56407A6-219D-455E-ABE5-5A488B849FD0}"/>
+              </a:ext>
+            </a:extLst>
+          </p:cNvPr>
+          <p:cNvSpPr>
+            <a:spLocks xmlns:a="http://schemas.openxmlformats.org/drawingml/2006/main" noGrp="1"/>
+          </p:cNvSpPr>
+          <p:nvPr/>
+        </p:nvSpPr>
+        <p:spPr>
+          <a:xfrm xmlns:a="http://schemas.openxmlformats.org/drawingml/2006/main">
+            <a:off x="6286500" y="2114550"/>
+            <a:ext cx="4419600" cy="2495550"/>
           </a:xfrm>
           <a:prstGeom xmlns:a="http://schemas.openxmlformats.org/drawingml/2006/main" prst="roundRect">
             <a:avLst>
-              <a:gd name="adj" fmla="val 5000"/>
+              <a:gd name="adj" fmla="val 3053"/>
             </a:avLst>
           </a:prstGeom>
           <a:solidFill xmlns:a="http://schemas.openxmlformats.org/drawingml/2006/main">
-            <a:srgbClr val="F3F3F3"/>
+            <a:srgbClr val="F9F9F9"/>
           </a:solidFill>
           <a:ln xmlns:a="http://schemas.openxmlformats.org/drawingml/2006/main" w="9525">
             <a:solidFill>
@@ -5589,22 +5532,69 @@
       </p:sp>
       <p:sp>
         <p:nvSpPr>
+          <p:cNvPr id="15" name="">
+            <a:extLst xmlns:a="http://schemas.openxmlformats.org/drawingml/2006/main">
+              <a:ext uri="{FF2B5EF4-FFF2-40B4-BE49-F238E27FC236}">
+                <a16:creationId xmlns:a16="http://schemas.microsoft.com/office/drawing/2014/main" id="{732E7089-B65F-4701-8249-815A6A3637F2}"/>
+              </a:ext>
+            </a:extLst>
+          </p:cNvPr>
+          <p:cNvSpPr>
+            <a:spLocks xmlns:a="http://schemas.openxmlformats.org/drawingml/2006/main" noGrp="1"/>
+          </p:cNvSpPr>
+          <p:nvPr/>
+        </p:nvSpPr>
+        <p:spPr>
+          <a:xfrm xmlns:a="http://schemas.openxmlformats.org/drawingml/2006/main">
+            <a:off x="6591300" y="2400300"/>
+            <a:ext cx="3143250" cy="247650"/>
+          </a:xfrm>
+          <a:prstGeom xmlns:a="http://schemas.openxmlformats.org/drawingml/2006/main" prst="rect">
+            <a:avLst/>
+          </a:prstGeom>
+          <a:noFill xmlns:a="http://schemas.openxmlformats.org/drawingml/2006/main"/>
+          <a:ln xmlns:a="http://schemas.openxmlformats.org/drawingml/2006/main" w="0">
+            <a:noFill/>
+          </a:ln>
+        </p:spPr>
+        <p:txBody>
+          <a:bodyPr xmlns:a="http://schemas.openxmlformats.org/drawingml/2006/main" wrap="square" lIns="38100" tIns="38100" rIns="38100" bIns="38100">
+            <a:noAutofit/>
+          </a:bodyPr>
+          <a:lstStyle xmlns:a="http://schemas.openxmlformats.org/drawingml/2006/main"/>
+          <a:p xmlns:a="http://schemas.openxmlformats.org/drawingml/2006/main">
+            <a:r>
+              <a:rPr sz="1350" b="1">
+                <a:solidFill>
+                  <a:srgbClr val="282828"/>
+                </a:solidFill>
+                <a:latin typeface="Inter"/>
+                <a:ea typeface="Inter"/>
+                <a:cs typeface="Inter"/>
+              </a:rPr>
+              <a:t>Assumption-aware classifier</a:t>
+            </a:r>
+          </a:p>
+        </p:txBody>
+      </p:sp>
+      <p:sp>
+        <p:nvSpPr>
           <p:cNvPr id="16" name="">
             <a:extLst xmlns:a="http://schemas.openxmlformats.org/drawingml/2006/main">
               <a:ext uri="{FF2B5EF4-FFF2-40B4-BE49-F238E27FC236}">
-                <a16:creationId xmlns:a16="http://schemas.microsoft.com/office/drawing/2014/main" id="{4F69D8AB-9BF0-4851-85E1-0B74ACFDFD0B}"/>
-              </a:ext>
-            </a:extLst>
-          </p:cNvPr>
-          <p:cNvSpPr>
-            <a:spLocks xmlns:a="http://schemas.openxmlformats.org/drawingml/2006/main" noGrp="1"/>
-          </p:cNvSpPr>
-          <p:nvPr/>
-        </p:nvSpPr>
-        <p:spPr>
-          <a:xfrm xmlns:a="http://schemas.openxmlformats.org/drawingml/2006/main">
-            <a:off x="5581650" y="2324100"/>
-            <a:ext cx="4381500" cy="285750"/>
+                <a16:creationId xmlns:a16="http://schemas.microsoft.com/office/drawing/2014/main" id="{4D218BFE-6DEE-492E-9FCB-5E73A710BBC4}"/>
+              </a:ext>
+            </a:extLst>
+          </p:cNvPr>
+          <p:cNvSpPr>
+            <a:spLocks xmlns:a="http://schemas.openxmlformats.org/drawingml/2006/main" noGrp="1"/>
+          </p:cNvSpPr>
+          <p:nvPr/>
+        </p:nvSpPr>
+        <p:spPr>
+          <a:xfrm xmlns:a="http://schemas.openxmlformats.org/drawingml/2006/main">
+            <a:off x="6591300" y="2952750"/>
+            <a:ext cx="666750" cy="152400"/>
           </a:xfrm>
           <a:prstGeom xmlns:a="http://schemas.openxmlformats.org/drawingml/2006/main" prst="rect">
             <a:avLst/>
@@ -5621,7 +5611,54 @@
           <a:lstStyle xmlns:a="http://schemas.openxmlformats.org/drawingml/2006/main"/>
           <a:p xmlns:a="http://schemas.openxmlformats.org/drawingml/2006/main">
             <a:r>
-              <a:rPr sz="1800" b="1">
+              <a:rPr sz="825" b="1">
+                <a:solidFill>
+                  <a:srgbClr val="5D605E"/>
+                </a:solidFill>
+                <a:latin typeface="Inter"/>
+                <a:ea typeface="Inter"/>
+                <a:cs typeface="Inter"/>
+              </a:rPr>
+              <a:t>Input</a:t>
+            </a:r>
+          </a:p>
+        </p:txBody>
+      </p:sp>
+      <p:sp>
+        <p:nvSpPr>
+          <p:cNvPr id="17" name="">
+            <a:extLst xmlns:a="http://schemas.openxmlformats.org/drawingml/2006/main">
+              <a:ext uri="{FF2B5EF4-FFF2-40B4-BE49-F238E27FC236}">
+                <a16:creationId xmlns:a16="http://schemas.microsoft.com/office/drawing/2014/main" id="{1EC5BFE6-850C-4E91-BBC2-0E80AB50EC46}"/>
+              </a:ext>
+            </a:extLst>
+          </p:cNvPr>
+          <p:cNvSpPr>
+            <a:spLocks xmlns:a="http://schemas.openxmlformats.org/drawingml/2006/main" noGrp="1"/>
+          </p:cNvSpPr>
+          <p:nvPr/>
+        </p:nvSpPr>
+        <p:spPr>
+          <a:xfrm xmlns:a="http://schemas.openxmlformats.org/drawingml/2006/main">
+            <a:off x="6591300" y="3124200"/>
+            <a:ext cx="3257550" cy="685800"/>
+          </a:xfrm>
+          <a:prstGeom xmlns:a="http://schemas.openxmlformats.org/drawingml/2006/main" prst="rect">
+            <a:avLst/>
+          </a:prstGeom>
+          <a:noFill xmlns:a="http://schemas.openxmlformats.org/drawingml/2006/main"/>
+          <a:ln xmlns:a="http://schemas.openxmlformats.org/drawingml/2006/main" w="0">
+            <a:noFill/>
+          </a:ln>
+        </p:spPr>
+        <p:txBody>
+          <a:bodyPr xmlns:a="http://schemas.openxmlformats.org/drawingml/2006/main" wrap="square" lIns="38100" tIns="38100" rIns="38100" bIns="38100">
+            <a:noAutofit/>
+          </a:bodyPr>
+          <a:lstStyle xmlns:a="http://schemas.openxmlformats.org/drawingml/2006/main"/>
+          <a:p xmlns:a="http://schemas.openxmlformats.org/drawingml/2006/main">
+            <a:r>
+              <a:rPr sz="1500">
                 <a:solidFill>
                   <a:srgbClr val="181818"/>
                 </a:solidFill>
@@ -5629,29 +5666,55 @@
                 <a:ea typeface="Inter"/>
                 <a:cs typeface="Inter"/>
               </a:rPr>
-              <a:t>1. Align the success objective</a:t>
-            </a:r>
-          </a:p>
-        </p:txBody>
-      </p:sp>
-      <p:sp>
-        <p:nvSpPr>
-          <p:cNvPr id="17" name="">
-            <a:extLst xmlns:a="http://schemas.openxmlformats.org/drawingml/2006/main">
-              <a:ext uri="{FF2B5EF4-FFF2-40B4-BE49-F238E27FC236}">
-                <a16:creationId xmlns:a16="http://schemas.microsoft.com/office/drawing/2014/main" id="{E6D1CA8C-D994-4869-9292-7E8F0266E8E3}"/>
-              </a:ext>
-            </a:extLst>
-          </p:cNvPr>
-          <p:cNvSpPr>
-            <a:spLocks xmlns:a="http://schemas.openxmlformats.org/drawingml/2006/main" noGrp="1"/>
-          </p:cNvSpPr>
-          <p:nvPr/>
-        </p:nvSpPr>
-        <p:spPr>
-          <a:xfrm xmlns:a="http://schemas.openxmlformats.org/drawingml/2006/main">
-            <a:off x="5581650" y="2781300"/>
-            <a:ext cx="4476750" cy="609600"/>
+              <a:t>Growth: app installs</a:t>
+            </a:r>
+          </a:p>
+          <a:p xmlns:a="http://schemas.openxmlformats.org/drawingml/2006/main">
+            <a:r>
+              <a:rPr sz="1500">
+                <a:solidFill>
+                  <a:srgbClr val="181818"/>
+                </a:solidFill>
+                <a:latin typeface="Inter"/>
+                <a:ea typeface="Inter"/>
+                <a:cs typeface="Inter"/>
+              </a:rPr>
+              <a:t>Commerce: GMV</a:t>
+            </a:r>
+          </a:p>
+          <a:p xmlns:a="http://schemas.openxmlformats.org/drawingml/2006/main">
+            <a:r>
+              <a:rPr sz="1500">
+                <a:solidFill>
+                  <a:srgbClr val="181818"/>
+                </a:solidFill>
+                <a:latin typeface="Inter"/>
+                <a:ea typeface="Inter"/>
+                <a:cs typeface="Inter"/>
+              </a:rPr>
+              <a:t>Lead: safe youth reach</a:t>
+            </a:r>
+          </a:p>
+        </p:txBody>
+      </p:sp>
+      <p:sp>
+        <p:nvSpPr>
+          <p:cNvPr id="18" name="">
+            <a:extLst xmlns:a="http://schemas.openxmlformats.org/drawingml/2006/main">
+              <a:ext uri="{FF2B5EF4-FFF2-40B4-BE49-F238E27FC236}">
+                <a16:creationId xmlns:a16="http://schemas.microsoft.com/office/drawing/2014/main" id="{514BA200-3A12-465F-8F11-BA47BC781D94}"/>
+              </a:ext>
+            </a:extLst>
+          </p:cNvPr>
+          <p:cNvSpPr>
+            <a:spLocks xmlns:a="http://schemas.openxmlformats.org/drawingml/2006/main" noGrp="1"/>
+          </p:cNvSpPr>
+          <p:nvPr/>
+        </p:nvSpPr>
+        <p:spPr>
+          <a:xfrm xmlns:a="http://schemas.openxmlformats.org/drawingml/2006/main">
+            <a:off x="6591300" y="3924300"/>
+            <a:ext cx="762000" cy="152400"/>
           </a:xfrm>
           <a:prstGeom xmlns:a="http://schemas.openxmlformats.org/drawingml/2006/main" prst="rect">
             <a:avLst/>
@@ -5668,7 +5731,54 @@
           <a:lstStyle xmlns:a="http://schemas.openxmlformats.org/drawingml/2006/main"/>
           <a:p xmlns:a="http://schemas.openxmlformats.org/drawingml/2006/main">
             <a:r>
-              <a:rPr sz="1350">
+              <a:rPr sz="825" b="1">
+                <a:solidFill>
+                  <a:srgbClr val="5D605E"/>
+                </a:solidFill>
+                <a:latin typeface="Inter"/>
+                <a:ea typeface="Inter"/>
+                <a:cs typeface="Inter"/>
+              </a:rPr>
+              <a:t>Output</a:t>
+            </a:r>
+          </a:p>
+        </p:txBody>
+      </p:sp>
+      <p:sp>
+        <p:nvSpPr>
+          <p:cNvPr id="19" name="">
+            <a:extLst xmlns:a="http://schemas.openxmlformats.org/drawingml/2006/main">
+              <a:ext uri="{FF2B5EF4-FFF2-40B4-BE49-F238E27FC236}">
+                <a16:creationId xmlns:a16="http://schemas.microsoft.com/office/drawing/2014/main" id="{134EC26C-3926-46DB-BC82-2AA18134A4E9}"/>
+              </a:ext>
+            </a:extLst>
+          </p:cNvPr>
+          <p:cNvSpPr>
+            <a:spLocks xmlns:a="http://schemas.openxmlformats.org/drawingml/2006/main" noGrp="1"/>
+          </p:cNvSpPr>
+          <p:nvPr/>
+        </p:nvSpPr>
+        <p:spPr>
+          <a:xfrm xmlns:a="http://schemas.openxmlformats.org/drawingml/2006/main">
+            <a:off x="6591300" y="4171950"/>
+            <a:ext cx="2686050" cy="323850"/>
+          </a:xfrm>
+          <a:prstGeom xmlns:a="http://schemas.openxmlformats.org/drawingml/2006/main" prst="rect">
+            <a:avLst/>
+          </a:prstGeom>
+          <a:noFill xmlns:a="http://schemas.openxmlformats.org/drawingml/2006/main"/>
+          <a:ln xmlns:a="http://schemas.openxmlformats.org/drawingml/2006/main" w="0">
+            <a:noFill/>
+          </a:ln>
+        </p:spPr>
+        <p:txBody>
+          <a:bodyPr xmlns:a="http://schemas.openxmlformats.org/drawingml/2006/main" wrap="square" lIns="38100" tIns="38100" rIns="38100" bIns="38100">
+            <a:noAutofit/>
+          </a:bodyPr>
+          <a:lstStyle xmlns:a="http://schemas.openxmlformats.org/drawingml/2006/main"/>
+          <a:p xmlns:a="http://schemas.openxmlformats.org/drawingml/2006/main">
+            <a:r>
+              <a:rPr sz="2025" b="1">
                 <a:solidFill>
                   <a:srgbClr val="282828"/>
                 </a:solidFill>
@@ -5676,63 +5786,108 @@
                 <a:ea typeface="Inter"/>
                 <a:cs typeface="Inter"/>
               </a:rPr>
-              <a:t>Growth wants acquisition. Commerce wants GMV. The campaign lead wants mainstream-safe youth reach.</a:t>
-            </a:r>
-          </a:p>
-        </p:txBody>
-      </p:sp>
-      <p:sp>
-        <p:nvSpPr>
-          <p:cNvPr id="18" name="">
-            <a:extLst xmlns:a="http://schemas.openxmlformats.org/drawingml/2006/main">
-              <a:ext uri="{FF2B5EF4-FFF2-40B4-BE49-F238E27FC236}">
-                <a16:creationId xmlns:a16="http://schemas.microsoft.com/office/drawing/2014/main" id="{9F7346F2-FC34-49F9-A6DF-35C2EE32373E}"/>
-              </a:ext>
-            </a:extLst>
-          </p:cNvPr>
-          <p:cNvSpPr>
-            <a:spLocks xmlns:a="http://schemas.openxmlformats.org/drawingml/2006/main" noGrp="1"/>
-          </p:cNvSpPr>
-          <p:nvPr/>
-        </p:nvSpPr>
-        <p:spPr>
-          <a:xfrm xmlns:a="http://schemas.openxmlformats.org/drawingml/2006/main">
-            <a:off x="5276850" y="3790950"/>
-            <a:ext cx="5334000" cy="1390650"/>
+              <a:t>FAKE AGREEMENT</a:t>
+            </a:r>
+          </a:p>
+        </p:txBody>
+      </p:sp>
+      <p:sp>
+        <p:nvSpPr>
+          <p:cNvPr id="20" name="">
+            <a:extLst xmlns:a="http://schemas.openxmlformats.org/drawingml/2006/main">
+              <a:ext uri="{FF2B5EF4-FFF2-40B4-BE49-F238E27FC236}">
+                <a16:creationId xmlns:a16="http://schemas.microsoft.com/office/drawing/2014/main" id="{30BE319D-1B71-419C-974D-227461ABAD77}"/>
+              </a:ext>
+            </a:extLst>
+          </p:cNvPr>
+          <p:cNvSpPr>
+            <a:spLocks xmlns:a="http://schemas.openxmlformats.org/drawingml/2006/main" noGrp="1"/>
+          </p:cNvSpPr>
+          <p:nvPr/>
+        </p:nvSpPr>
+        <p:spPr>
+          <a:xfrm xmlns:a="http://schemas.openxmlformats.org/drawingml/2006/main">
+            <a:off x="876300" y="4762500"/>
+            <a:ext cx="9829800" cy="190500"/>
+          </a:xfrm>
+          <a:prstGeom xmlns:a="http://schemas.openxmlformats.org/drawingml/2006/main" prst="rect">
+            <a:avLst/>
+          </a:prstGeom>
+          <a:noFill xmlns:a="http://schemas.openxmlformats.org/drawingml/2006/main"/>
+          <a:ln xmlns:a="http://schemas.openxmlformats.org/drawingml/2006/main" w="0">
+            <a:noFill/>
+          </a:ln>
+        </p:spPr>
+        <p:txBody>
+          <a:bodyPr xmlns:a="http://schemas.openxmlformats.org/drawingml/2006/main" wrap="square" lIns="38100" tIns="38100" rIns="38100" bIns="38100">
+            <a:noAutofit/>
+          </a:bodyPr>
+          <a:lstStyle xmlns:a="http://schemas.openxmlformats.org/drawingml/2006/main"/>
+          <a:p xmlns:a="http://schemas.openxmlformats.org/drawingml/2006/main">
+            <a:r>
+              <a:rPr sz="975">
+                <a:solidFill>
+                  <a:srgbClr val="5D605E"/>
+                </a:solidFill>
+                <a:latin typeface="Inter"/>
+                <a:ea typeface="Inter"/>
+                <a:cs typeface="Inter"/>
+              </a:rPr>
+              <a:t>Both paths shipped and tested — naive_baseline vs classify_item in src/pmle/crux_engine.py</a:t>
+            </a:r>
+          </a:p>
+        </p:txBody>
+      </p:sp>
+      <p:sp>
+        <p:nvSpPr>
+          <p:cNvPr id="21" name="">
+            <a:extLst xmlns:a="http://schemas.openxmlformats.org/drawingml/2006/main">
+              <a:ext uri="{FF2B5EF4-FFF2-40B4-BE49-F238E27FC236}">
+                <a16:creationId xmlns:a16="http://schemas.microsoft.com/office/drawing/2014/main" id="{CFF33047-7CEF-4D55-9533-B1ADC0FD65C7}"/>
+              </a:ext>
+            </a:extLst>
+          </p:cNvPr>
+          <p:cNvSpPr>
+            <a:spLocks xmlns:a="http://schemas.openxmlformats.org/drawingml/2006/main" noGrp="1"/>
+          </p:cNvSpPr>
+          <p:nvPr/>
+        </p:nvSpPr>
+        <p:spPr>
+          <a:xfrm xmlns:a="http://schemas.openxmlformats.org/drawingml/2006/main">
+            <a:off x="1066800" y="5105400"/>
+            <a:ext cx="8953500" cy="742950"/>
           </a:xfrm>
           <a:prstGeom xmlns:a="http://schemas.openxmlformats.org/drawingml/2006/main" prst="roundRect">
             <a:avLst>
-              <a:gd name="adj" fmla="val 5479"/>
+              <a:gd name="adj" fmla="val 10256"/>
             </a:avLst>
           </a:prstGeom>
           <a:solidFill xmlns:a="http://schemas.openxmlformats.org/drawingml/2006/main">
-            <a:srgbClr val="FFFFFF"/>
+            <a:srgbClr val="17191A"/>
           </a:solidFill>
-          <a:ln xmlns:a="http://schemas.openxmlformats.org/drawingml/2006/main" w="9525">
-            <a:solidFill>
-              <a:srgbClr val="282828"/>
-            </a:solidFill>
-          </a:ln>
-        </p:spPr>
-      </p:sp>
-      <p:sp>
-        <p:nvSpPr>
-          <p:cNvPr id="19" name="">
-            <a:extLst xmlns:a="http://schemas.openxmlformats.org/drawingml/2006/main">
-              <a:ext uri="{FF2B5EF4-FFF2-40B4-BE49-F238E27FC236}">
-                <a16:creationId xmlns:a16="http://schemas.microsoft.com/office/drawing/2014/main" id="{1B03AB1A-49C5-46CA-8280-ECB000549725}"/>
-              </a:ext>
-            </a:extLst>
-          </p:cNvPr>
-          <p:cNvSpPr>
-            <a:spLocks xmlns:a="http://schemas.openxmlformats.org/drawingml/2006/main" noGrp="1"/>
-          </p:cNvSpPr>
-          <p:nvPr/>
-        </p:nvSpPr>
-        <p:spPr>
-          <a:xfrm xmlns:a="http://schemas.openxmlformats.org/drawingml/2006/main">
-            <a:off x="5581650" y="4076700"/>
-            <a:ext cx="4381500" cy="285750"/>
+          <a:ln xmlns:a="http://schemas.openxmlformats.org/drawingml/2006/main" w="0">
+            <a:noFill/>
+          </a:ln>
+        </p:spPr>
+      </p:sp>
+      <p:sp>
+        <p:nvSpPr>
+          <p:cNvPr id="22" name="">
+            <a:extLst xmlns:a="http://schemas.openxmlformats.org/drawingml/2006/main">
+              <a:ext uri="{FF2B5EF4-FFF2-40B4-BE49-F238E27FC236}">
+                <a16:creationId xmlns:a16="http://schemas.microsoft.com/office/drawing/2014/main" id="{3A5F8B02-1D63-4EDA-BD47-A21478050238}"/>
+              </a:ext>
+            </a:extLst>
+          </p:cNvPr>
+          <p:cNvSpPr>
+            <a:spLocks xmlns:a="http://schemas.openxmlformats.org/drawingml/2006/main" noGrp="1"/>
+          </p:cNvSpPr>
+          <p:nvPr/>
+        </p:nvSpPr>
+        <p:spPr>
+          <a:xfrm xmlns:a="http://schemas.openxmlformats.org/drawingml/2006/main">
+            <a:off x="1219200" y="5257800"/>
+            <a:ext cx="8572500" cy="476250"/>
           </a:xfrm>
           <a:prstGeom xmlns:a="http://schemas.openxmlformats.org/drawingml/2006/main" prst="rect">
             <a:avLst/>
@@ -5749,156 +5904,15 @@
           <a:lstStyle xmlns:a="http://schemas.openxmlformats.org/drawingml/2006/main"/>
           <a:p xmlns:a="http://schemas.openxmlformats.org/drawingml/2006/main">
             <a:r>
-              <a:rPr sz="1800" b="1">
-                <a:solidFill>
-                  <a:srgbClr val="181818"/>
-                </a:solidFill>
-                <a:latin typeface="Inter"/>
-                <a:ea typeface="Inter"/>
-                <a:cs typeface="Inter"/>
-              </a:rPr>
-              <a:t>2. Decide the creator role split</a:t>
-            </a:r>
-          </a:p>
-        </p:txBody>
-      </p:sp>
-      <p:sp>
-        <p:nvSpPr>
-          <p:cNvPr id="20" name="">
-            <a:extLst xmlns:a="http://schemas.openxmlformats.org/drawingml/2006/main">
-              <a:ext uri="{FF2B5EF4-FFF2-40B4-BE49-F238E27FC236}">
-                <a16:creationId xmlns:a16="http://schemas.microsoft.com/office/drawing/2014/main" id="{F8ACD8D5-8271-4823-AB0C-4F4867B6FCF1}"/>
-              </a:ext>
-            </a:extLst>
-          </p:cNvPr>
-          <p:cNvSpPr>
-            <a:spLocks xmlns:a="http://schemas.openxmlformats.org/drawingml/2006/main" noGrp="1"/>
-          </p:cNvSpPr>
-          <p:nvPr/>
-        </p:nvSpPr>
-        <p:spPr>
-          <a:xfrm xmlns:a="http://schemas.openxmlformats.org/drawingml/2006/main">
-            <a:off x="5581650" y="4533900"/>
-            <a:ext cx="4476750" cy="419100"/>
-          </a:xfrm>
-          <a:prstGeom xmlns:a="http://schemas.openxmlformats.org/drawingml/2006/main" prst="rect">
-            <a:avLst/>
-          </a:prstGeom>
-          <a:noFill xmlns:a="http://schemas.openxmlformats.org/drawingml/2006/main"/>
-          <a:ln xmlns:a="http://schemas.openxmlformats.org/drawingml/2006/main" w="0">
-            <a:noFill/>
-          </a:ln>
-        </p:spPr>
-        <p:txBody>
-          <a:bodyPr xmlns:a="http://schemas.openxmlformats.org/drawingml/2006/main" wrap="square" lIns="38100" tIns="38100" rIns="38100" bIns="38100">
-            <a:noAutofit/>
-          </a:bodyPr>
-          <a:lstStyle xmlns:a="http://schemas.openxmlformats.org/drawingml/2006/main"/>
-          <a:p xmlns:a="http://schemas.openxmlformats.org/drawingml/2006/main">
-            <a:r>
-              <a:rPr sz="1425">
-                <a:solidFill>
-                  <a:srgbClr val="282828"/>
-                </a:solidFill>
-                <a:latin typeface="Inter"/>
-                <a:ea typeface="Inter"/>
-                <a:cs typeface="Inter"/>
-              </a:rPr>
-              <a:t>One hero face, or hero plus Shopee Live conversion partner. John owns the final call.</a:t>
-            </a:r>
-          </a:p>
-        </p:txBody>
-      </p:sp>
-      <p:sp>
-        <p:nvSpPr>
-          <p:cNvPr id="21" name="">
-            <a:extLst xmlns:a="http://schemas.openxmlformats.org/drawingml/2006/main">
-              <a:ext uri="{FF2B5EF4-FFF2-40B4-BE49-F238E27FC236}">
-                <a16:creationId xmlns:a16="http://schemas.microsoft.com/office/drawing/2014/main" id="{422A8E58-9DE2-4EC8-908B-FBBE63BBB226}"/>
-              </a:ext>
-            </a:extLst>
-          </p:cNvPr>
-          <p:cNvSpPr>
-            <a:spLocks xmlns:a="http://schemas.openxmlformats.org/drawingml/2006/main" noGrp="1"/>
-          </p:cNvSpPr>
-          <p:nvPr/>
-        </p:nvSpPr>
-        <p:spPr>
-          <a:xfrm xmlns:a="http://schemas.openxmlformats.org/drawingml/2006/main">
-            <a:off x="857250" y="5562600"/>
-            <a:ext cx="2095500" cy="190500"/>
-          </a:xfrm>
-          <a:prstGeom xmlns:a="http://schemas.openxmlformats.org/drawingml/2006/main" prst="rect">
-            <a:avLst/>
-          </a:prstGeom>
-          <a:noFill xmlns:a="http://schemas.openxmlformats.org/drawingml/2006/main"/>
-          <a:ln xmlns:a="http://schemas.openxmlformats.org/drawingml/2006/main" w="0">
-            <a:noFill/>
-          </a:ln>
-        </p:spPr>
-        <p:txBody>
-          <a:bodyPr xmlns:a="http://schemas.openxmlformats.org/drawingml/2006/main" wrap="square" lIns="38100" tIns="38100" rIns="38100" bIns="38100">
-            <a:noAutofit/>
-          </a:bodyPr>
-          <a:lstStyle xmlns:a="http://schemas.openxmlformats.org/drawingml/2006/main"/>
-          <a:p xmlns:a="http://schemas.openxmlformats.org/drawingml/2006/main">
-            <a:r>
-              <a:rPr sz="1050" b="1">
-                <a:solidFill>
-                  <a:srgbClr val="5D605E"/>
-                </a:solidFill>
-                <a:latin typeface="Inter"/>
-                <a:ea typeface="Inter"/>
-                <a:cs typeface="Inter"/>
-              </a:rPr>
-              <a:t>Pre-read, not live debate</a:t>
-            </a:r>
-          </a:p>
-        </p:txBody>
-      </p:sp>
-      <p:sp>
-        <p:nvSpPr>
-          <p:cNvPr id="22" name="">
-            <a:extLst xmlns:a="http://schemas.openxmlformats.org/drawingml/2006/main">
-              <a:ext uri="{FF2B5EF4-FFF2-40B4-BE49-F238E27FC236}">
-                <a16:creationId xmlns:a16="http://schemas.microsoft.com/office/drawing/2014/main" id="{3D242C1E-33A9-4BA4-B0EB-4E69E3E5C065}"/>
-              </a:ext>
-            </a:extLst>
-          </p:cNvPr>
-          <p:cNvSpPr>
-            <a:spLocks xmlns:a="http://schemas.openxmlformats.org/drawingml/2006/main" noGrp="1"/>
-          </p:cNvSpPr>
-          <p:nvPr/>
-        </p:nvSpPr>
-        <p:spPr>
-          <a:xfrm xmlns:a="http://schemas.openxmlformats.org/drawingml/2006/main">
-            <a:off x="857250" y="5829300"/>
-            <a:ext cx="8572500" cy="266700"/>
-          </a:xfrm>
-          <a:prstGeom xmlns:a="http://schemas.openxmlformats.org/drawingml/2006/main" prst="rect">
-            <a:avLst/>
-          </a:prstGeom>
-          <a:noFill xmlns:a="http://schemas.openxmlformats.org/drawingml/2006/main"/>
-          <a:ln xmlns:a="http://schemas.openxmlformats.org/drawingml/2006/main" w="0">
-            <a:noFill/>
-          </a:ln>
-        </p:spPr>
-        <p:txBody>
-          <a:bodyPr xmlns:a="http://schemas.openxmlformats.org/drawingml/2006/main" wrap="square" lIns="38100" tIns="38100" rIns="38100" bIns="38100">
-            <a:noAutofit/>
-          </a:bodyPr>
-          <a:lstStyle xmlns:a="http://schemas.openxmlformats.org/drawingml/2006/main"/>
-          <a:p xmlns:a="http://schemas.openxmlformats.org/drawingml/2006/main">
-            <a:r>
-              <a:rPr sz="1275">
-                <a:solidFill>
-                  <a:srgbClr val="282828"/>
-                </a:solidFill>
-                <a:latin typeface="Inter"/>
-                <a:ea typeface="Inter"/>
-                <a:cs typeface="Inter"/>
-              </a:rPr>
-              <a:t>Short-form + Shopee Live, tracking, hero categories, paid amplification, brand-safety review, backup creators.</a:t>
+              <a:rPr sz="1650" b="1">
+                <a:solidFill>
+                  <a:srgbClr val="FFFFFF"/>
+                </a:solidFill>
+                <a:latin typeface="Inter"/>
+                <a:ea typeface="Inter"/>
+                <a:cs typeface="Inter"/>
+              </a:rPr>
+              <a:t>Judge takeaway: Mochi catches the objective mismatch before the creator decision meeting.</a:t>
             </a:r>
           </a:p>
         </p:txBody>
@@ -5906,7 +5920,7 @@
     </p:spTree>
     <p:extLst>
       <p:ext uri="{BB962C8B-B14F-4D97-AF65-F5344CB8AC3E}">
-        <p14:creationId xmlns:p14="http://schemas.microsoft.com/office/powerpoint/2010/main" val="293712618"/>
+        <p14:creationId xmlns:p14="http://schemas.microsoft.com/office/powerpoint/2010/main" val="191750982"/>
       </p:ext>
     </p:extLst>
   </p:cSld>
@@ -5941,7 +5955,7 @@
           <p:nvPr/>
         </p:nvPicPr>
         <p:blipFill>
-          <a:blip xmlns:r="http://schemas.openxmlformats.org/officeDocument/2006/relationships" xmlns:a="http://schemas.openxmlformats.org/drawingml/2006/main" r:embed="R769248a49960408b"/>
+          <a:blip xmlns:r="http://schemas.openxmlformats.org/officeDocument/2006/relationships" xmlns:a="http://schemas.openxmlformats.org/drawingml/2006/main" r:embed="R36222a3aec564ee4"/>
           <a:srcRect xmlns:a="http://schemas.openxmlformats.org/drawingml/2006/main" l="0" t="0" r="0" b="0"/>
           <a:stretch xmlns:a="http://schemas.openxmlformats.org/drawingml/2006/main">
             <a:fillRect l="0" t="0" r="0" b="0"/>
@@ -5962,7 +5976,7 @@
           <p:cNvPr id="2" name="">
             <a:extLst xmlns:a="http://schemas.openxmlformats.org/drawingml/2006/main">
               <a:ext uri="{FF2B5EF4-FFF2-40B4-BE49-F238E27FC236}">
-                <a16:creationId xmlns:a16="http://schemas.microsoft.com/office/drawing/2014/main" id="{36864187-B143-4B3C-99BD-50848595FDF7}"/>
+                <a16:creationId xmlns:a16="http://schemas.microsoft.com/office/drawing/2014/main" id="{FF82EAB5-A2E8-4DA8-9341-B40EFA283A42}"/>
               </a:ext>
             </a:extLst>
           </p:cNvPr>
@@ -5999,7 +6013,7 @@
                 <a:ea typeface="Inter"/>
                 <a:cs typeface="Inter"/>
               </a:rPr>
-              <a:t>WEDGE</a:t>
+              <a:t>DEMO PROOF</a:t>
             </a:r>
           </a:p>
         </p:txBody>
@@ -6009,7 +6023,7 @@
           <p:cNvPr id="3" name="">
             <a:extLst xmlns:a="http://schemas.openxmlformats.org/drawingml/2006/main">
               <a:ext uri="{FF2B5EF4-FFF2-40B4-BE49-F238E27FC236}">
-                <a16:creationId xmlns:a16="http://schemas.microsoft.com/office/drawing/2014/main" id="{562FA2E0-E344-4799-A533-BF86CF30A807}"/>
+                <a16:creationId xmlns:a16="http://schemas.microsoft.com/office/drawing/2014/main" id="{BE6CF71D-D3E0-4409-ABAF-8DB9620EB559}"/>
               </a:ext>
             </a:extLst>
           </p:cNvPr>
@@ -6046,20 +6060,7 @@
                 <a:ea typeface="Inter"/>
                 <a:cs typeface="Inter"/>
               </a:rPr>
-              <a:t>Position-only classification misses</a:t>
-            </a:r>
-          </a:p>
-          <a:p xmlns:a="http://schemas.openxmlformats.org/drawingml/2006/main">
-            <a:r>
-              <a:rPr sz="3000">
-                <a:solidFill>
-                  <a:srgbClr val="181818"/>
-                </a:solidFill>
-                <a:latin typeface="Inter"/>
-                <a:ea typeface="Inter"/>
-                <a:cs typeface="Inter"/>
-              </a:rPr>
-              <a:t>the dangerous case.</a:t>
+              <a:t>The room starts with two real decisions.</a:t>
             </a:r>
           </a:p>
         </p:txBody>
@@ -6069,7 +6070,7 @@
           <p:cNvPr id="4" name="">
             <a:extLst xmlns:a="http://schemas.openxmlformats.org/drawingml/2006/main">
               <a:ext uri="{FF2B5EF4-FFF2-40B4-BE49-F238E27FC236}">
-                <a16:creationId xmlns:a16="http://schemas.microsoft.com/office/drawing/2014/main" id="{DF860328-BE55-472D-9AAD-82681940D816}"/>
+                <a16:creationId xmlns:a16="http://schemas.microsoft.com/office/drawing/2014/main" id="{C2FADCA4-75C4-419C-8B27-05B69BF1688C}"/>
               </a:ext>
             </a:extLst>
           </p:cNvPr>
@@ -6106,7 +6107,7 @@
                 <a:ea typeface="Inter"/>
                 <a:cs typeface="Inter"/>
               </a:rPr>
-              <a:t>Sources: docs/design-spec.md, docs/pitch-script.md</a:t>
+              <a:t>Sources: docs/pitch-script.md, docs/build-plan.md</a:t>
             </a:r>
           </a:p>
         </p:txBody>
@@ -6116,7 +6117,7 @@
           <p:cNvPr id="5" name="">
             <a:extLst xmlns:a="http://schemas.openxmlformats.org/drawingml/2006/main">
               <a:ext uri="{FF2B5EF4-FFF2-40B4-BE49-F238E27FC236}">
-                <a16:creationId xmlns:a16="http://schemas.microsoft.com/office/drawing/2014/main" id="{7436AF8B-6432-4950-B881-428969ACD771}"/>
+                <a16:creationId xmlns:a16="http://schemas.microsoft.com/office/drawing/2014/main" id="{A6FA0362-80A9-4F61-B511-F6FD3F5DFAC6}"/>
               </a:ext>
             </a:extLst>
           </p:cNvPr>
@@ -6173,23 +6174,23 @@
           <p:cNvPr id="6" name="">
             <a:extLst xmlns:a="http://schemas.openxmlformats.org/drawingml/2006/main">
               <a:ext uri="{FF2B5EF4-FFF2-40B4-BE49-F238E27FC236}">
-                <a16:creationId xmlns:a16="http://schemas.microsoft.com/office/drawing/2014/main" id="{5A046B70-6FAF-4F46-9824-DBD13370D3B1}"/>
-              </a:ext>
-            </a:extLst>
-          </p:cNvPr>
-          <p:cNvSpPr>
-            <a:spLocks xmlns:a="http://schemas.openxmlformats.org/drawingml/2006/main" noGrp="1"/>
-          </p:cNvSpPr>
-          <p:nvPr/>
-        </p:nvSpPr>
-        <p:spPr>
-          <a:xfrm xmlns:a="http://schemas.openxmlformats.org/drawingml/2006/main">
-            <a:off x="876300" y="2190750"/>
-            <a:ext cx="4095750" cy="2571750"/>
+                <a16:creationId xmlns:a16="http://schemas.microsoft.com/office/drawing/2014/main" id="{1567E6F4-653E-4CF3-88EB-5358CDF24D12}"/>
+              </a:ext>
+            </a:extLst>
+          </p:cNvPr>
+          <p:cNvSpPr>
+            <a:spLocks xmlns:a="http://schemas.openxmlformats.org/drawingml/2006/main" noGrp="1"/>
+          </p:cNvSpPr>
+          <p:nvPr/>
+        </p:nvSpPr>
+        <p:spPr>
+          <a:xfrm xmlns:a="http://schemas.openxmlformats.org/drawingml/2006/main">
+            <a:off x="781050" y="1962150"/>
+            <a:ext cx="4267200" cy="3333750"/>
           </a:xfrm>
           <a:prstGeom xmlns:a="http://schemas.openxmlformats.org/drawingml/2006/main" prst="roundRect">
             <a:avLst>
-              <a:gd name="adj" fmla="val 2963"/>
+              <a:gd name="adj" fmla="val 2286"/>
             </a:avLst>
           </a:prstGeom>
           <a:solidFill xmlns:a="http://schemas.openxmlformats.org/drawingml/2006/main">
@@ -6207,19 +6208,19 @@
           <p:cNvPr id="7" name="">
             <a:extLst xmlns:a="http://schemas.openxmlformats.org/drawingml/2006/main">
               <a:ext uri="{FF2B5EF4-FFF2-40B4-BE49-F238E27FC236}">
-                <a16:creationId xmlns:a16="http://schemas.microsoft.com/office/drawing/2014/main" id="{D6F0E06C-87FE-4B2B-BBF9-BA4B8D9D5574}"/>
-              </a:ext>
-            </a:extLst>
-          </p:cNvPr>
-          <p:cNvSpPr>
-            <a:spLocks xmlns:a="http://schemas.openxmlformats.org/drawingml/2006/main" noGrp="1"/>
-          </p:cNvSpPr>
-          <p:nvPr/>
-        </p:nvSpPr>
-        <p:spPr>
-          <a:xfrm xmlns:a="http://schemas.openxmlformats.org/drawingml/2006/main">
-            <a:off x="1181100" y="2476500"/>
-            <a:ext cx="2476500" cy="247650"/>
+                <a16:creationId xmlns:a16="http://schemas.microsoft.com/office/drawing/2014/main" id="{28C713BF-DA0F-4515-8C3F-9B3D576CCD8B}"/>
+              </a:ext>
+            </a:extLst>
+          </p:cNvPr>
+          <p:cNvSpPr>
+            <a:spLocks xmlns:a="http://schemas.openxmlformats.org/drawingml/2006/main" noGrp="1"/>
+          </p:cNvSpPr>
+          <p:nvPr/>
+        </p:nvSpPr>
+        <p:spPr>
+          <a:xfrm xmlns:a="http://schemas.openxmlformats.org/drawingml/2006/main">
+            <a:off x="1047750" y="2133600"/>
+            <a:ext cx="3048000" cy="209550"/>
           </a:xfrm>
           <a:prstGeom xmlns:a="http://schemas.openxmlformats.org/drawingml/2006/main" prst="rect">
             <a:avLst/>
@@ -6236,15 +6237,15 @@
           <a:lstStyle xmlns:a="http://schemas.openxmlformats.org/drawingml/2006/main"/>
           <a:p xmlns:a="http://schemas.openxmlformats.org/drawingml/2006/main">
             <a:r>
-              <a:rPr sz="1350" b="1">
-                <a:solidFill>
-                  <a:srgbClr val="181818"/>
-                </a:solidFill>
-                <a:latin typeface="Inter"/>
-                <a:ea typeface="Inter"/>
-                <a:cs typeface="Inter"/>
-              </a:rPr>
-              <a:t>Naive baseline</a:t>
+              <a:rPr sz="1050" b="1">
+                <a:solidFill>
+                  <a:srgbClr val="5D605E"/>
+                </a:solidFill>
+                <a:latin typeface="Inter"/>
+                <a:ea typeface="Inter"/>
+                <a:cs typeface="Inter"/>
+              </a:rPr>
+              <a:t>Mochi pre-meeting digest</a:t>
             </a:r>
           </a:p>
         </p:txBody>
@@ -6254,19 +6255,19 @@
           <p:cNvPr id="8" name="">
             <a:extLst xmlns:a="http://schemas.openxmlformats.org/drawingml/2006/main">
               <a:ext uri="{FF2B5EF4-FFF2-40B4-BE49-F238E27FC236}">
-                <a16:creationId xmlns:a16="http://schemas.microsoft.com/office/drawing/2014/main" id="{E359C6AA-29DE-4BB0-AE7A-7B5D5B04FC97}"/>
-              </a:ext>
-            </a:extLst>
-          </p:cNvPr>
-          <p:cNvSpPr>
-            <a:spLocks xmlns:a="http://schemas.openxmlformats.org/drawingml/2006/main" noGrp="1"/>
-          </p:cNvSpPr>
-          <p:nvPr/>
-        </p:nvSpPr>
-        <p:spPr>
-          <a:xfrm xmlns:a="http://schemas.openxmlformats.org/drawingml/2006/main">
-            <a:off x="1181100" y="3028950"/>
-            <a:ext cx="666750" cy="152400"/>
+                <a16:creationId xmlns:a16="http://schemas.microsoft.com/office/drawing/2014/main" id="{66BC07AC-254C-456E-9FFF-A1BD4F5CBCC4}"/>
+              </a:ext>
+            </a:extLst>
+          </p:cNvPr>
+          <p:cNvSpPr>
+            <a:spLocks xmlns:a="http://schemas.openxmlformats.org/drawingml/2006/main" noGrp="1"/>
+          </p:cNvSpPr>
+          <p:nvPr/>
+        </p:nvSpPr>
+        <p:spPr>
+          <a:xfrm xmlns:a="http://schemas.openxmlformats.org/drawingml/2006/main">
+            <a:off x="1047750" y="2362200"/>
+            <a:ext cx="3429000" cy="190500"/>
           </a:xfrm>
           <a:prstGeom xmlns:a="http://schemas.openxmlformats.org/drawingml/2006/main" prst="rect">
             <a:avLst/>
@@ -6283,7 +6284,7 @@
           <a:lstStyle xmlns:a="http://schemas.openxmlformats.org/drawingml/2006/main"/>
           <a:p xmlns:a="http://schemas.openxmlformats.org/drawingml/2006/main">
             <a:r>
-              <a:rPr sz="825" b="1">
+              <a:rPr sz="975">
                 <a:solidFill>
                   <a:srgbClr val="5D605E"/>
                 </a:solidFill>
@@ -6291,7 +6292,7 @@
                 <a:ea typeface="Inter"/>
                 <a:cs typeface="Inter"/>
               </a:rPr>
-              <a:t>Input</a:t>
+              <a:t>Slack DM · agenda compressed 9 -&gt; 2</a:t>
             </a:r>
           </a:p>
         </p:txBody>
@@ -6301,224 +6302,373 @@
           <p:cNvPr id="9" name="">
             <a:extLst xmlns:a="http://schemas.openxmlformats.org/drawingml/2006/main">
               <a:ext uri="{FF2B5EF4-FFF2-40B4-BE49-F238E27FC236}">
-                <a16:creationId xmlns:a16="http://schemas.microsoft.com/office/drawing/2014/main" id="{80146307-8DF5-4559-9305-02A65BA6A6A1}"/>
-              </a:ext>
-            </a:extLst>
-          </p:cNvPr>
-          <p:cNvSpPr>
-            <a:spLocks xmlns:a="http://schemas.openxmlformats.org/drawingml/2006/main" noGrp="1"/>
-          </p:cNvSpPr>
-          <p:nvPr/>
-        </p:nvSpPr>
-        <p:spPr>
-          <a:xfrm xmlns:a="http://schemas.openxmlformats.org/drawingml/2006/main">
-            <a:off x="1181100" y="3238500"/>
-            <a:ext cx="3048000" cy="419100"/>
-          </a:xfrm>
-          <a:prstGeom xmlns:a="http://schemas.openxmlformats.org/drawingml/2006/main" prst="rect">
-            <a:avLst/>
-          </a:prstGeom>
-          <a:noFill xmlns:a="http://schemas.openxmlformats.org/drawingml/2006/main"/>
-          <a:ln xmlns:a="http://schemas.openxmlformats.org/drawingml/2006/main" w="0">
-            <a:noFill/>
-          </a:ln>
-        </p:spPr>
-        <p:txBody>
-          <a:bodyPr xmlns:a="http://schemas.openxmlformats.org/drawingml/2006/main" wrap="square" lIns="38100" tIns="38100" rIns="38100" bIns="38100">
-            <a:noAutofit/>
-          </a:bodyPr>
-          <a:lstStyle xmlns:a="http://schemas.openxmlformats.org/drawingml/2006/main"/>
-          <a:p xmlns:a="http://schemas.openxmlformats.org/drawingml/2006/main">
-            <a:r>
-              <a:rPr sz="1650">
-                <a:solidFill>
-                  <a:srgbClr val="181818"/>
-                </a:solidFill>
-                <a:latin typeface="Inter"/>
-                <a:ea typeface="Inter"/>
-                <a:cs typeface="Inter"/>
-              </a:rPr>
-              <a:t>Everyone supports reaching younger shoppers.</a:t>
-            </a:r>
-          </a:p>
-        </p:txBody>
-      </p:sp>
-      <p:sp>
-        <p:nvSpPr>
-          <p:cNvPr id="10" name="">
-            <a:extLst xmlns:a="http://schemas.openxmlformats.org/drawingml/2006/main">
-              <a:ext uri="{FF2B5EF4-FFF2-40B4-BE49-F238E27FC236}">
-                <a16:creationId xmlns:a16="http://schemas.microsoft.com/office/drawing/2014/main" id="{D72A74F6-DF1A-4D18-B1D0-D7392F6B0CE6}"/>
-              </a:ext>
-            </a:extLst>
-          </p:cNvPr>
-          <p:cNvSpPr>
-            <a:spLocks xmlns:a="http://schemas.openxmlformats.org/drawingml/2006/main" noGrp="1"/>
-          </p:cNvSpPr>
-          <p:nvPr/>
-        </p:nvSpPr>
-        <p:spPr>
-          <a:xfrm xmlns:a="http://schemas.openxmlformats.org/drawingml/2006/main">
-            <a:off x="1181100" y="3886200"/>
-            <a:ext cx="762000" cy="152400"/>
-          </a:xfrm>
-          <a:prstGeom xmlns:a="http://schemas.openxmlformats.org/drawingml/2006/main" prst="rect">
-            <a:avLst/>
-          </a:prstGeom>
-          <a:noFill xmlns:a="http://schemas.openxmlformats.org/drawingml/2006/main"/>
-          <a:ln xmlns:a="http://schemas.openxmlformats.org/drawingml/2006/main" w="0">
-            <a:noFill/>
-          </a:ln>
-        </p:spPr>
-        <p:txBody>
-          <a:bodyPr xmlns:a="http://schemas.openxmlformats.org/drawingml/2006/main" wrap="square" lIns="38100" tIns="38100" rIns="38100" bIns="38100">
-            <a:noAutofit/>
-          </a:bodyPr>
-          <a:lstStyle xmlns:a="http://schemas.openxmlformats.org/drawingml/2006/main"/>
-          <a:p xmlns:a="http://schemas.openxmlformats.org/drawingml/2006/main">
-            <a:r>
-              <a:rPr sz="825" b="1">
-                <a:solidFill>
-                  <a:srgbClr val="5D605E"/>
-                </a:solidFill>
-                <a:latin typeface="Inter"/>
-                <a:ea typeface="Inter"/>
-                <a:cs typeface="Inter"/>
-              </a:rPr>
-              <a:t>Output</a:t>
-            </a:r>
-          </a:p>
-        </p:txBody>
-      </p:sp>
-      <p:sp>
-        <p:nvSpPr>
-          <p:cNvPr id="11" name="">
-            <a:extLst xmlns:a="http://schemas.openxmlformats.org/drawingml/2006/main">
-              <a:ext uri="{FF2B5EF4-FFF2-40B4-BE49-F238E27FC236}">
-                <a16:creationId xmlns:a16="http://schemas.microsoft.com/office/drawing/2014/main" id="{516CCD34-EA7A-46B1-A83C-A085DA51F2C0}"/>
-              </a:ext>
-            </a:extLst>
-          </p:cNvPr>
-          <p:cNvSpPr>
-            <a:spLocks xmlns:a="http://schemas.openxmlformats.org/drawingml/2006/main" noGrp="1"/>
-          </p:cNvSpPr>
-          <p:nvPr/>
-        </p:nvSpPr>
-        <p:spPr>
-          <a:xfrm xmlns:a="http://schemas.openxmlformats.org/drawingml/2006/main">
-            <a:off x="1181100" y="4133850"/>
-            <a:ext cx="1428750" cy="323850"/>
-          </a:xfrm>
-          <a:prstGeom xmlns:a="http://schemas.openxmlformats.org/drawingml/2006/main" prst="rect">
-            <a:avLst/>
-          </a:prstGeom>
-          <a:noFill xmlns:a="http://schemas.openxmlformats.org/drawingml/2006/main"/>
-          <a:ln xmlns:a="http://schemas.openxmlformats.org/drawingml/2006/main" w="0">
-            <a:noFill/>
-          </a:ln>
-        </p:spPr>
-        <p:txBody>
-          <a:bodyPr xmlns:a="http://schemas.openxmlformats.org/drawingml/2006/main" wrap="square" lIns="38100" tIns="38100" rIns="38100" bIns="38100">
-            <a:noAutofit/>
-          </a:bodyPr>
-          <a:lstStyle xmlns:a="http://schemas.openxmlformats.org/drawingml/2006/main"/>
-          <a:p xmlns:a="http://schemas.openxmlformats.org/drawingml/2006/main">
-            <a:r>
-              <a:rPr sz="2025" b="1">
-                <a:solidFill>
-                  <a:srgbClr val="282828"/>
-                </a:solidFill>
-                <a:latin typeface="Inter"/>
-                <a:ea typeface="Inter"/>
-                <a:cs typeface="Inter"/>
-              </a:rPr>
-              <a:t>AGREED</a:t>
-            </a:r>
-          </a:p>
-        </p:txBody>
-      </p:sp>
-      <p:sp>
-        <p:nvSpPr>
-          <p:cNvPr id="12" name="">
-            <a:extLst xmlns:a="http://schemas.openxmlformats.org/drawingml/2006/main">
-              <a:ext uri="{FF2B5EF4-FFF2-40B4-BE49-F238E27FC236}">
-                <a16:creationId xmlns:a16="http://schemas.microsoft.com/office/drawing/2014/main" id="{A72704EA-1135-4267-80BD-13C3E9BF1364}"/>
-              </a:ext>
-            </a:extLst>
-          </p:cNvPr>
-          <p:cNvSpPr>
-            <a:spLocks xmlns:a="http://schemas.openxmlformats.org/drawingml/2006/main" noGrp="1"/>
-          </p:cNvSpPr>
-          <p:nvPr/>
-        </p:nvSpPr>
-        <p:spPr>
-          <a:xfrm xmlns:a="http://schemas.openxmlformats.org/drawingml/2006/main">
-            <a:off x="5257800" y="3409950"/>
-            <a:ext cx="647700" cy="19050"/>
-          </a:xfrm>
-          <a:prstGeom xmlns:a="http://schemas.openxmlformats.org/drawingml/2006/main" prst="rect">
-            <a:avLst/>
-          </a:prstGeom>
-          <a:solidFill xmlns:a="http://schemas.openxmlformats.org/drawingml/2006/main">
-            <a:srgbClr val="EDEDED"/>
-          </a:solidFill>
-          <a:ln xmlns:a="http://schemas.openxmlformats.org/drawingml/2006/main" w="0">
-            <a:noFill/>
-          </a:ln>
-        </p:spPr>
-      </p:sp>
-      <p:sp>
-        <p:nvSpPr>
-          <p:cNvPr id="13" name="">
-            <a:extLst xmlns:a="http://schemas.openxmlformats.org/drawingml/2006/main">
-              <a:ext uri="{FF2B5EF4-FFF2-40B4-BE49-F238E27FC236}">
-                <a16:creationId xmlns:a16="http://schemas.microsoft.com/office/drawing/2014/main" id="{9FC350EC-73C7-49AA-B0A8-48F4C1B02680}"/>
-              </a:ext>
-            </a:extLst>
-          </p:cNvPr>
-          <p:cNvSpPr>
-            <a:spLocks xmlns:a="http://schemas.openxmlformats.org/drawingml/2006/main" noGrp="1"/>
-          </p:cNvSpPr>
-          <p:nvPr/>
-        </p:nvSpPr>
-        <p:spPr>
-          <a:xfrm xmlns:a="http://schemas.openxmlformats.org/drawingml/2006/main">
-            <a:off x="5886450" y="3371850"/>
-            <a:ext cx="133350" cy="95250"/>
-          </a:xfrm>
-          <a:prstGeom xmlns:a="http://schemas.openxmlformats.org/drawingml/2006/main" prst="triangle">
-            <a:avLst/>
-          </a:prstGeom>
-          <a:solidFill xmlns:a="http://schemas.openxmlformats.org/drawingml/2006/main">
-            <a:srgbClr val="EDEDED"/>
-          </a:solidFill>
-          <a:ln xmlns:a="http://schemas.openxmlformats.org/drawingml/2006/main" w="0">
-            <a:noFill/>
-          </a:ln>
-        </p:spPr>
-      </p:sp>
-      <p:sp>
-        <p:nvSpPr>
-          <p:cNvPr id="14" name="">
-            <a:extLst xmlns:a="http://schemas.openxmlformats.org/drawingml/2006/main">
-              <a:ext uri="{FF2B5EF4-FFF2-40B4-BE49-F238E27FC236}">
-                <a16:creationId xmlns:a16="http://schemas.microsoft.com/office/drawing/2014/main" id="{DF7F90F5-5C7E-4AD3-9239-63F6504CDFD2}"/>
-              </a:ext>
-            </a:extLst>
-          </p:cNvPr>
-          <p:cNvSpPr>
-            <a:spLocks xmlns:a="http://schemas.openxmlformats.org/drawingml/2006/main" noGrp="1"/>
-          </p:cNvSpPr>
-          <p:nvPr/>
-        </p:nvSpPr>
-        <p:spPr>
-          <a:xfrm xmlns:a="http://schemas.openxmlformats.org/drawingml/2006/main">
-            <a:off x="6286500" y="2190750"/>
-            <a:ext cx="4419600" cy="2571750"/>
+                <a16:creationId xmlns:a16="http://schemas.microsoft.com/office/drawing/2014/main" id="{B6C5CA12-9A2D-4FF3-A9FE-9122E22DA9EC}"/>
+              </a:ext>
+            </a:extLst>
+          </p:cNvPr>
+          <p:cNvSpPr>
+            <a:spLocks xmlns:a="http://schemas.openxmlformats.org/drawingml/2006/main" noGrp="1"/>
+          </p:cNvSpPr>
+          <p:nvPr/>
+        </p:nvSpPr>
+        <p:spPr>
+          <a:xfrm xmlns:a="http://schemas.openxmlformats.org/drawingml/2006/main">
+            <a:off x="971550" y="2686050"/>
+            <a:ext cx="3886200" cy="762000"/>
           </a:xfrm>
           <a:prstGeom xmlns:a="http://schemas.openxmlformats.org/drawingml/2006/main" prst="roundRect">
             <a:avLst>
-              <a:gd name="adj" fmla="val 2963"/>
+              <a:gd name="adj" fmla="val 8750"/>
+            </a:avLst>
+          </a:prstGeom>
+          <a:solidFill xmlns:a="http://schemas.openxmlformats.org/drawingml/2006/main">
+            <a:srgbClr val="F3F3F3"/>
+          </a:solidFill>
+          <a:ln xmlns:a="http://schemas.openxmlformats.org/drawingml/2006/main" w="9525">
+            <a:solidFill>
+              <a:srgbClr val="282828"/>
+            </a:solidFill>
+          </a:ln>
+        </p:spPr>
+      </p:sp>
+      <p:sp>
+        <p:nvSpPr>
+          <p:cNvPr id="10" name="">
+            <a:extLst xmlns:a="http://schemas.openxmlformats.org/drawingml/2006/main">
+              <a:ext uri="{FF2B5EF4-FFF2-40B4-BE49-F238E27FC236}">
+                <a16:creationId xmlns:a16="http://schemas.microsoft.com/office/drawing/2014/main" id="{A9EEEB2B-22F1-423B-AD03-CA716302D9A1}"/>
+              </a:ext>
+            </a:extLst>
+          </p:cNvPr>
+          <p:cNvSpPr>
+            <a:spLocks xmlns:a="http://schemas.openxmlformats.org/drawingml/2006/main" noGrp="1"/>
+          </p:cNvSpPr>
+          <p:nvPr/>
+        </p:nvSpPr>
+        <p:spPr>
+          <a:xfrm xmlns:a="http://schemas.openxmlformats.org/drawingml/2006/main">
+            <a:off x="1104900" y="2800350"/>
+            <a:ext cx="3619500" cy="152400"/>
+          </a:xfrm>
+          <a:prstGeom xmlns:a="http://schemas.openxmlformats.org/drawingml/2006/main" prst="rect">
+            <a:avLst/>
+          </a:prstGeom>
+          <a:noFill xmlns:a="http://schemas.openxmlformats.org/drawingml/2006/main"/>
+          <a:ln xmlns:a="http://schemas.openxmlformats.org/drawingml/2006/main" w="0">
+            <a:noFill/>
+          </a:ln>
+        </p:spPr>
+        <p:txBody>
+          <a:bodyPr xmlns:a="http://schemas.openxmlformats.org/drawingml/2006/main" wrap="square" lIns="0" tIns="0" rIns="0" bIns="0">
+            <a:noAutofit/>
+          </a:bodyPr>
+          <a:lstStyle xmlns:a="http://schemas.openxmlformats.org/drawingml/2006/main"/>
+          <a:p xmlns:a="http://schemas.openxmlformats.org/drawingml/2006/main">
+            <a:r>
+              <a:rPr sz="750" b="1">
+                <a:solidFill>
+                  <a:srgbClr val="282828"/>
+                </a:solidFill>
+                <a:latin typeface="Inter"/>
+                <a:ea typeface="Inter"/>
+                <a:cs typeface="Inter"/>
+              </a:rPr>
+              <a:t>FAKE AGREEMENT</a:t>
+            </a:r>
+          </a:p>
+        </p:txBody>
+      </p:sp>
+      <p:sp>
+        <p:nvSpPr>
+          <p:cNvPr id="11" name="">
+            <a:extLst xmlns:a="http://schemas.openxmlformats.org/drawingml/2006/main">
+              <a:ext uri="{FF2B5EF4-FFF2-40B4-BE49-F238E27FC236}">
+                <a16:creationId xmlns:a16="http://schemas.microsoft.com/office/drawing/2014/main" id="{DEAD1696-E4C5-4BCE-BDB6-BD94A1F099A3}"/>
+              </a:ext>
+            </a:extLst>
+          </p:cNvPr>
+          <p:cNvSpPr>
+            <a:spLocks xmlns:a="http://schemas.openxmlformats.org/drawingml/2006/main" noGrp="1"/>
+          </p:cNvSpPr>
+          <p:nvPr/>
+        </p:nvSpPr>
+        <p:spPr>
+          <a:xfrm xmlns:a="http://schemas.openxmlformats.org/drawingml/2006/main">
+            <a:off x="1104900" y="3009900"/>
+            <a:ext cx="3619500" cy="419100"/>
+          </a:xfrm>
+          <a:prstGeom xmlns:a="http://schemas.openxmlformats.org/drawingml/2006/main" prst="rect">
+            <a:avLst/>
+          </a:prstGeom>
+          <a:noFill xmlns:a="http://schemas.openxmlformats.org/drawingml/2006/main"/>
+          <a:ln xmlns:a="http://schemas.openxmlformats.org/drawingml/2006/main" w="0">
+            <a:noFill/>
+          </a:ln>
+        </p:spPr>
+        <p:txBody>
+          <a:bodyPr xmlns:a="http://schemas.openxmlformats.org/drawingml/2006/main" wrap="square" lIns="0" tIns="0" rIns="0" bIns="0">
+            <a:noAutofit/>
+          </a:bodyPr>
+          <a:lstStyle xmlns:a="http://schemas.openxmlformats.org/drawingml/2006/main"/>
+          <a:p xmlns:a="http://schemas.openxmlformats.org/drawingml/2006/main">
+            <a:r>
+              <a:rPr sz="1275" b="1">
+                <a:solidFill>
+                  <a:srgbClr val="181818"/>
+                </a:solidFill>
+                <a:latin typeface="Inter"/>
+                <a:ea typeface="Inter"/>
+                <a:cs typeface="Inter"/>
+              </a:rPr>
+              <a:t>Objective: success criteria differ</a:t>
+            </a:r>
+          </a:p>
+        </p:txBody>
+      </p:sp>
+      <p:sp>
+        <p:nvSpPr>
+          <p:cNvPr id="12" name="">
+            <a:extLst xmlns:a="http://schemas.openxmlformats.org/drawingml/2006/main">
+              <a:ext uri="{FF2B5EF4-FFF2-40B4-BE49-F238E27FC236}">
+                <a16:creationId xmlns:a16="http://schemas.microsoft.com/office/drawing/2014/main" id="{BB32DBD1-6E9D-4B8F-81C3-A9575279058B}"/>
+              </a:ext>
+            </a:extLst>
+          </p:cNvPr>
+          <p:cNvSpPr>
+            <a:spLocks xmlns:a="http://schemas.openxmlformats.org/drawingml/2006/main" noGrp="1"/>
+          </p:cNvSpPr>
+          <p:nvPr/>
+        </p:nvSpPr>
+        <p:spPr>
+          <a:xfrm xmlns:a="http://schemas.openxmlformats.org/drawingml/2006/main">
+            <a:off x="1104900" y="3162300"/>
+            <a:ext cx="3619500" cy="171450"/>
+          </a:xfrm>
+          <a:prstGeom xmlns:a="http://schemas.openxmlformats.org/drawingml/2006/main" prst="rect">
+            <a:avLst/>
+          </a:prstGeom>
+          <a:noFill xmlns:a="http://schemas.openxmlformats.org/drawingml/2006/main"/>
+          <a:ln xmlns:a="http://schemas.openxmlformats.org/drawingml/2006/main" w="0">
+            <a:noFill/>
+          </a:ln>
+        </p:spPr>
+        <p:txBody>
+          <a:bodyPr xmlns:a="http://schemas.openxmlformats.org/drawingml/2006/main" wrap="square" lIns="0" tIns="0" rIns="0" bIns="0">
+            <a:noAutofit/>
+          </a:bodyPr>
+          <a:lstStyle xmlns:a="http://schemas.openxmlformats.org/drawingml/2006/main"/>
+          <a:p xmlns:a="http://schemas.openxmlformats.org/drawingml/2006/main">
+            <a:r>
+              <a:rPr sz="825">
+                <a:solidFill>
+                  <a:srgbClr val="5D605E"/>
+                </a:solidFill>
+                <a:latin typeface="Inter"/>
+                <a:ea typeface="Inter"/>
+                <a:cs typeface="Inter"/>
+              </a:rPr>
+              <a:t>Growth · Commerce · Campaign Lead</a:t>
+            </a:r>
+          </a:p>
+        </p:txBody>
+      </p:sp>
+      <p:sp>
+        <p:nvSpPr>
+          <p:cNvPr id="13" name="">
+            <a:extLst xmlns:a="http://schemas.openxmlformats.org/drawingml/2006/main">
+              <a:ext uri="{FF2B5EF4-FFF2-40B4-BE49-F238E27FC236}">
+                <a16:creationId xmlns:a16="http://schemas.microsoft.com/office/drawing/2014/main" id="{92233C20-098D-4D04-B95A-0D15DAAD41DE}"/>
+              </a:ext>
+            </a:extLst>
+          </p:cNvPr>
+          <p:cNvSpPr>
+            <a:spLocks xmlns:a="http://schemas.openxmlformats.org/drawingml/2006/main" noGrp="1"/>
+          </p:cNvSpPr>
+          <p:nvPr/>
+        </p:nvSpPr>
+        <p:spPr>
+          <a:xfrm xmlns:a="http://schemas.openxmlformats.org/drawingml/2006/main">
+            <a:off x="971550" y="3543300"/>
+            <a:ext cx="3886200" cy="762000"/>
+          </a:xfrm>
+          <a:prstGeom xmlns:a="http://schemas.openxmlformats.org/drawingml/2006/main" prst="roundRect">
+            <a:avLst>
+              <a:gd name="adj" fmla="val 8750"/>
+            </a:avLst>
+          </a:prstGeom>
+          <a:solidFill xmlns:a="http://schemas.openxmlformats.org/drawingml/2006/main">
+            <a:srgbClr val="FFFFFF"/>
+          </a:solidFill>
+          <a:ln xmlns:a="http://schemas.openxmlformats.org/drawingml/2006/main" w="9525">
+            <a:solidFill>
+              <a:srgbClr val="282828"/>
+            </a:solidFill>
+          </a:ln>
+        </p:spPr>
+      </p:sp>
+      <p:sp>
+        <p:nvSpPr>
+          <p:cNvPr id="14" name="">
+            <a:extLst xmlns:a="http://schemas.openxmlformats.org/drawingml/2006/main">
+              <a:ext uri="{FF2B5EF4-FFF2-40B4-BE49-F238E27FC236}">
+                <a16:creationId xmlns:a16="http://schemas.microsoft.com/office/drawing/2014/main" id="{5C33FFB3-FB0D-4866-9531-BCF8F13EB61F}"/>
+              </a:ext>
+            </a:extLst>
+          </p:cNvPr>
+          <p:cNvSpPr>
+            <a:spLocks xmlns:a="http://schemas.openxmlformats.org/drawingml/2006/main" noGrp="1"/>
+          </p:cNvSpPr>
+          <p:nvPr/>
+        </p:nvSpPr>
+        <p:spPr>
+          <a:xfrm xmlns:a="http://schemas.openxmlformats.org/drawingml/2006/main">
+            <a:off x="1104900" y="3657600"/>
+            <a:ext cx="3619500" cy="152400"/>
+          </a:xfrm>
+          <a:prstGeom xmlns:a="http://schemas.openxmlformats.org/drawingml/2006/main" prst="rect">
+            <a:avLst/>
+          </a:prstGeom>
+          <a:noFill xmlns:a="http://schemas.openxmlformats.org/drawingml/2006/main"/>
+          <a:ln xmlns:a="http://schemas.openxmlformats.org/drawingml/2006/main" w="0">
+            <a:noFill/>
+          </a:ln>
+        </p:spPr>
+        <p:txBody>
+          <a:bodyPr xmlns:a="http://schemas.openxmlformats.org/drawingml/2006/main" wrap="square" lIns="0" tIns="0" rIns="0" bIns="0">
+            <a:noAutofit/>
+          </a:bodyPr>
+          <a:lstStyle xmlns:a="http://schemas.openxmlformats.org/drawingml/2006/main"/>
+          <a:p xmlns:a="http://schemas.openxmlformats.org/drawingml/2006/main">
+            <a:r>
+              <a:rPr sz="750" b="1">
+                <a:solidFill>
+                  <a:srgbClr val="282828"/>
+                </a:solidFill>
+                <a:latin typeface="Inter"/>
+                <a:ea typeface="Inter"/>
+                <a:cs typeface="Inter"/>
+              </a:rPr>
+              <a:t>CRUX</a:t>
+            </a:r>
+          </a:p>
+        </p:txBody>
+      </p:sp>
+      <p:sp>
+        <p:nvSpPr>
+          <p:cNvPr id="15" name="">
+            <a:extLst xmlns:a="http://schemas.openxmlformats.org/drawingml/2006/main">
+              <a:ext uri="{FF2B5EF4-FFF2-40B4-BE49-F238E27FC236}">
+                <a16:creationId xmlns:a16="http://schemas.microsoft.com/office/drawing/2014/main" id="{6F9FA611-4008-4D61-A51E-300A48A0EC20}"/>
+              </a:ext>
+            </a:extLst>
+          </p:cNvPr>
+          <p:cNvSpPr>
+            <a:spLocks xmlns:a="http://schemas.openxmlformats.org/drawingml/2006/main" noGrp="1"/>
+          </p:cNvSpPr>
+          <p:nvPr/>
+        </p:nvSpPr>
+        <p:spPr>
+          <a:xfrm xmlns:a="http://schemas.openxmlformats.org/drawingml/2006/main">
+            <a:off x="1104900" y="3867150"/>
+            <a:ext cx="3619500" cy="419100"/>
+          </a:xfrm>
+          <a:prstGeom xmlns:a="http://schemas.openxmlformats.org/drawingml/2006/main" prst="rect">
+            <a:avLst/>
+          </a:prstGeom>
+          <a:noFill xmlns:a="http://schemas.openxmlformats.org/drawingml/2006/main"/>
+          <a:ln xmlns:a="http://schemas.openxmlformats.org/drawingml/2006/main" w="0">
+            <a:noFill/>
+          </a:ln>
+        </p:spPr>
+        <p:txBody>
+          <a:bodyPr xmlns:a="http://schemas.openxmlformats.org/drawingml/2006/main" wrap="square" lIns="0" tIns="0" rIns="0" bIns="0">
+            <a:noAutofit/>
+          </a:bodyPr>
+          <a:lstStyle xmlns:a="http://schemas.openxmlformats.org/drawingml/2006/main"/>
+          <a:p xmlns:a="http://schemas.openxmlformats.org/drawingml/2006/main">
+            <a:r>
+              <a:rPr sz="1275" b="1">
+                <a:solidFill>
+                  <a:srgbClr val="181818"/>
+                </a:solidFill>
+                <a:latin typeface="Inter"/>
+                <a:ea typeface="Inter"/>
+                <a:cs typeface="Inter"/>
+              </a:rPr>
+              <a:t>Creator role split unresolved</a:t>
+            </a:r>
+          </a:p>
+        </p:txBody>
+      </p:sp>
+      <p:sp>
+        <p:nvSpPr>
+          <p:cNvPr id="16" name="">
+            <a:extLst xmlns:a="http://schemas.openxmlformats.org/drawingml/2006/main">
+              <a:ext uri="{FF2B5EF4-FFF2-40B4-BE49-F238E27FC236}">
+                <a16:creationId xmlns:a16="http://schemas.microsoft.com/office/drawing/2014/main" id="{B7A41467-48A1-40B3-94FF-86DF276CCEED}"/>
+              </a:ext>
+            </a:extLst>
+          </p:cNvPr>
+          <p:cNvSpPr>
+            <a:spLocks xmlns:a="http://schemas.openxmlformats.org/drawingml/2006/main" noGrp="1"/>
+          </p:cNvSpPr>
+          <p:nvPr/>
+        </p:nvSpPr>
+        <p:spPr>
+          <a:xfrm xmlns:a="http://schemas.openxmlformats.org/drawingml/2006/main">
+            <a:off x="1104900" y="4019550"/>
+            <a:ext cx="3619500" cy="171450"/>
+          </a:xfrm>
+          <a:prstGeom xmlns:a="http://schemas.openxmlformats.org/drawingml/2006/main" prst="rect">
+            <a:avLst/>
+          </a:prstGeom>
+          <a:noFill xmlns:a="http://schemas.openxmlformats.org/drawingml/2006/main"/>
+          <a:ln xmlns:a="http://schemas.openxmlformats.org/drawingml/2006/main" w="0">
+            <a:noFill/>
+          </a:ln>
+        </p:spPr>
+        <p:txBody>
+          <a:bodyPr xmlns:a="http://schemas.openxmlformats.org/drawingml/2006/main" wrap="square" lIns="0" tIns="0" rIns="0" bIns="0">
+            <a:noAutofit/>
+          </a:bodyPr>
+          <a:lstStyle xmlns:a="http://schemas.openxmlformats.org/drawingml/2006/main"/>
+          <a:p xmlns:a="http://schemas.openxmlformats.org/drawingml/2006/main">
+            <a:r>
+              <a:rPr sz="825">
+                <a:solidFill>
+                  <a:srgbClr val="5D605E"/>
+                </a:solidFill>
+                <a:latin typeface="Inter"/>
+                <a:ea typeface="Inter"/>
+                <a:cs typeface="Inter"/>
+              </a:rPr>
+              <a:t>Hero face vs hero + Shopee Live</a:t>
+            </a:r>
+          </a:p>
+        </p:txBody>
+      </p:sp>
+      <p:sp>
+        <p:nvSpPr>
+          <p:cNvPr id="17" name="">
+            <a:extLst xmlns:a="http://schemas.openxmlformats.org/drawingml/2006/main">
+              <a:ext uri="{FF2B5EF4-FFF2-40B4-BE49-F238E27FC236}">
+                <a16:creationId xmlns:a16="http://schemas.microsoft.com/office/drawing/2014/main" id="{07AD0C30-2805-47FF-85A5-C8337B2D20E1}"/>
+              </a:ext>
+            </a:extLst>
+          </p:cNvPr>
+          <p:cNvSpPr>
+            <a:spLocks xmlns:a="http://schemas.openxmlformats.org/drawingml/2006/main" noGrp="1"/>
+          </p:cNvSpPr>
+          <p:nvPr/>
+        </p:nvSpPr>
+        <p:spPr>
+          <a:xfrm xmlns:a="http://schemas.openxmlformats.org/drawingml/2006/main">
+            <a:off x="971550" y="4400550"/>
+            <a:ext cx="3886200" cy="762000"/>
+          </a:xfrm>
+          <a:prstGeom xmlns:a="http://schemas.openxmlformats.org/drawingml/2006/main" prst="roundRect">
+            <a:avLst>
+              <a:gd name="adj" fmla="val 8750"/>
             </a:avLst>
           </a:prstGeom>
           <a:solidFill xmlns:a="http://schemas.openxmlformats.org/drawingml/2006/main">
@@ -6526,6 +6676,181 @@
           </a:solidFill>
           <a:ln xmlns:a="http://schemas.openxmlformats.org/drawingml/2006/main" w="9525">
             <a:solidFill>
+              <a:srgbClr val="EDEDED"/>
+            </a:solidFill>
+          </a:ln>
+        </p:spPr>
+      </p:sp>
+      <p:sp>
+        <p:nvSpPr>
+          <p:cNvPr id="18" name="">
+            <a:extLst xmlns:a="http://schemas.openxmlformats.org/drawingml/2006/main">
+              <a:ext uri="{FF2B5EF4-FFF2-40B4-BE49-F238E27FC236}">
+                <a16:creationId xmlns:a16="http://schemas.microsoft.com/office/drawing/2014/main" id="{6CE851E4-7494-49D9-8F83-8592FFCFC4E1}"/>
+              </a:ext>
+            </a:extLst>
+          </p:cNvPr>
+          <p:cNvSpPr>
+            <a:spLocks xmlns:a="http://schemas.openxmlformats.org/drawingml/2006/main" noGrp="1"/>
+          </p:cNvSpPr>
+          <p:nvPr/>
+        </p:nvSpPr>
+        <p:spPr>
+          <a:xfrm xmlns:a="http://schemas.openxmlformats.org/drawingml/2006/main">
+            <a:off x="1104900" y="4514850"/>
+            <a:ext cx="3619500" cy="152400"/>
+          </a:xfrm>
+          <a:prstGeom xmlns:a="http://schemas.openxmlformats.org/drawingml/2006/main" prst="rect">
+            <a:avLst/>
+          </a:prstGeom>
+          <a:noFill xmlns:a="http://schemas.openxmlformats.org/drawingml/2006/main"/>
+          <a:ln xmlns:a="http://schemas.openxmlformats.org/drawingml/2006/main" w="0">
+            <a:noFill/>
+          </a:ln>
+        </p:spPr>
+        <p:txBody>
+          <a:bodyPr xmlns:a="http://schemas.openxmlformats.org/drawingml/2006/main" wrap="square" lIns="0" tIns="0" rIns="0" bIns="0">
+            <a:noAutofit/>
+          </a:bodyPr>
+          <a:lstStyle xmlns:a="http://schemas.openxmlformats.org/drawingml/2006/main"/>
+          <a:p xmlns:a="http://schemas.openxmlformats.org/drawingml/2006/main">
+            <a:r>
+              <a:rPr sz="750" b="1">
+                <a:solidFill>
+                  <a:srgbClr val="5D605E"/>
+                </a:solidFill>
+                <a:latin typeface="Inter"/>
+                <a:ea typeface="Inter"/>
+                <a:cs typeface="Inter"/>
+              </a:rPr>
+              <a:t>CLEARED</a:t>
+            </a:r>
+          </a:p>
+        </p:txBody>
+      </p:sp>
+      <p:sp>
+        <p:nvSpPr>
+          <p:cNvPr id="19" name="">
+            <a:extLst xmlns:a="http://schemas.openxmlformats.org/drawingml/2006/main">
+              <a:ext uri="{FF2B5EF4-FFF2-40B4-BE49-F238E27FC236}">
+                <a16:creationId xmlns:a16="http://schemas.microsoft.com/office/drawing/2014/main" id="{BD3B687A-CB7F-4ECC-BC92-C9B4DA5BD6E9}"/>
+              </a:ext>
+            </a:extLst>
+          </p:cNvPr>
+          <p:cNvSpPr>
+            <a:spLocks xmlns:a="http://schemas.openxmlformats.org/drawingml/2006/main" noGrp="1"/>
+          </p:cNvSpPr>
+          <p:nvPr/>
+        </p:nvSpPr>
+        <p:spPr>
+          <a:xfrm xmlns:a="http://schemas.openxmlformats.org/drawingml/2006/main">
+            <a:off x="1104900" y="4724400"/>
+            <a:ext cx="3619500" cy="419100"/>
+          </a:xfrm>
+          <a:prstGeom xmlns:a="http://schemas.openxmlformats.org/drawingml/2006/main" prst="rect">
+            <a:avLst/>
+          </a:prstGeom>
+          <a:noFill xmlns:a="http://schemas.openxmlformats.org/drawingml/2006/main"/>
+          <a:ln xmlns:a="http://schemas.openxmlformats.org/drawingml/2006/main" w="0">
+            <a:noFill/>
+          </a:ln>
+        </p:spPr>
+        <p:txBody>
+          <a:bodyPr xmlns:a="http://schemas.openxmlformats.org/drawingml/2006/main" wrap="square" lIns="0" tIns="0" rIns="0" bIns="0">
+            <a:noAutofit/>
+          </a:bodyPr>
+          <a:lstStyle xmlns:a="http://schemas.openxmlformats.org/drawingml/2006/main"/>
+          <a:p xmlns:a="http://schemas.openxmlformats.org/drawingml/2006/main">
+            <a:r>
+              <a:rPr sz="1275">
+                <a:solidFill>
+                  <a:srgbClr val="181818"/>
+                </a:solidFill>
+                <a:latin typeface="Inter"/>
+                <a:ea typeface="Inter"/>
+                <a:cs typeface="Inter"/>
+              </a:rPr>
+              <a:t>Action items cleared: 3</a:t>
+            </a:r>
+          </a:p>
+        </p:txBody>
+      </p:sp>
+      <p:sp>
+        <p:nvSpPr>
+          <p:cNvPr id="20" name="">
+            <a:extLst xmlns:a="http://schemas.openxmlformats.org/drawingml/2006/main">
+              <a:ext uri="{FF2B5EF4-FFF2-40B4-BE49-F238E27FC236}">
+                <a16:creationId xmlns:a16="http://schemas.microsoft.com/office/drawing/2014/main" id="{58F3F0E1-5AC1-484C-A520-093D034804F3}"/>
+              </a:ext>
+            </a:extLst>
+          </p:cNvPr>
+          <p:cNvSpPr>
+            <a:spLocks xmlns:a="http://schemas.openxmlformats.org/drawingml/2006/main" noGrp="1"/>
+          </p:cNvSpPr>
+          <p:nvPr/>
+        </p:nvSpPr>
+        <p:spPr>
+          <a:xfrm xmlns:a="http://schemas.openxmlformats.org/drawingml/2006/main">
+            <a:off x="1104900" y="4876800"/>
+            <a:ext cx="3619500" cy="171450"/>
+          </a:xfrm>
+          <a:prstGeom xmlns:a="http://schemas.openxmlformats.org/drawingml/2006/main" prst="rect">
+            <a:avLst/>
+          </a:prstGeom>
+          <a:noFill xmlns:a="http://schemas.openxmlformats.org/drawingml/2006/main"/>
+          <a:ln xmlns:a="http://schemas.openxmlformats.org/drawingml/2006/main" w="0">
+            <a:noFill/>
+          </a:ln>
+        </p:spPr>
+        <p:txBody>
+          <a:bodyPr xmlns:a="http://schemas.openxmlformats.org/drawingml/2006/main" wrap="square" lIns="0" tIns="0" rIns="0" bIns="0">
+            <a:noAutofit/>
+          </a:bodyPr>
+          <a:lstStyle xmlns:a="http://schemas.openxmlformats.org/drawingml/2006/main"/>
+          <a:p xmlns:a="http://schemas.openxmlformats.org/drawingml/2006/main">
+            <a:r>
+              <a:rPr sz="825">
+                <a:solidFill>
+                  <a:srgbClr val="5D605E"/>
+                </a:solidFill>
+                <a:latin typeface="Inter"/>
+                <a:ea typeface="Inter"/>
+                <a:cs typeface="Inter"/>
+              </a:rPr>
+              <a:t>0 need an owner · owner: John Taylor</a:t>
+            </a:r>
+          </a:p>
+        </p:txBody>
+      </p:sp>
+      <p:sp>
+        <p:nvSpPr>
+          <p:cNvPr id="21" name="">
+            <a:extLst xmlns:a="http://schemas.openxmlformats.org/drawingml/2006/main">
+              <a:ext uri="{FF2B5EF4-FFF2-40B4-BE49-F238E27FC236}">
+                <a16:creationId xmlns:a16="http://schemas.microsoft.com/office/drawing/2014/main" id="{F3BBE40A-DF17-45E6-AF06-DEA762BCE80F}"/>
+              </a:ext>
+            </a:extLst>
+          </p:cNvPr>
+          <p:cNvSpPr>
+            <a:spLocks xmlns:a="http://schemas.openxmlformats.org/drawingml/2006/main" noGrp="1"/>
+          </p:cNvSpPr>
+          <p:nvPr/>
+        </p:nvSpPr>
+        <p:spPr>
+          <a:xfrm xmlns:a="http://schemas.openxmlformats.org/drawingml/2006/main">
+            <a:off x="5276850" y="1962150"/>
+            <a:ext cx="5334000" cy="1543050"/>
+          </a:xfrm>
+          <a:prstGeom xmlns:a="http://schemas.openxmlformats.org/drawingml/2006/main" prst="roundRect">
+            <a:avLst>
+              <a:gd name="adj" fmla="val 4938"/>
+            </a:avLst>
+          </a:prstGeom>
+          <a:solidFill xmlns:a="http://schemas.openxmlformats.org/drawingml/2006/main">
+            <a:srgbClr val="F3F3F3"/>
+          </a:solidFill>
+          <a:ln xmlns:a="http://schemas.openxmlformats.org/drawingml/2006/main" w="9525">
+            <a:solidFill>
               <a:srgbClr val="282828"/>
             </a:solidFill>
           </a:ln>
@@ -6533,22 +6858,22 @@
       </p:sp>
       <p:sp>
         <p:nvSpPr>
-          <p:cNvPr id="15" name="">
-            <a:extLst xmlns:a="http://schemas.openxmlformats.org/drawingml/2006/main">
-              <a:ext uri="{FF2B5EF4-FFF2-40B4-BE49-F238E27FC236}">
-                <a16:creationId xmlns:a16="http://schemas.microsoft.com/office/drawing/2014/main" id="{AC1DD191-75B1-4308-8150-C3BA9B6F216F}"/>
-              </a:ext>
-            </a:extLst>
-          </p:cNvPr>
-          <p:cNvSpPr>
-            <a:spLocks xmlns:a="http://schemas.openxmlformats.org/drawingml/2006/main" noGrp="1"/>
-          </p:cNvSpPr>
-          <p:nvPr/>
-        </p:nvSpPr>
-        <p:spPr>
-          <a:xfrm xmlns:a="http://schemas.openxmlformats.org/drawingml/2006/main">
-            <a:off x="6591300" y="2476500"/>
-            <a:ext cx="3143250" cy="247650"/>
+          <p:cNvPr id="22" name="">
+            <a:extLst xmlns:a="http://schemas.openxmlformats.org/drawingml/2006/main">
+              <a:ext uri="{FF2B5EF4-FFF2-40B4-BE49-F238E27FC236}">
+                <a16:creationId xmlns:a16="http://schemas.microsoft.com/office/drawing/2014/main" id="{2AD241ED-6C4F-4959-94B8-4B995ABC31BA}"/>
+              </a:ext>
+            </a:extLst>
+          </p:cNvPr>
+          <p:cNvSpPr>
+            <a:spLocks xmlns:a="http://schemas.openxmlformats.org/drawingml/2006/main" noGrp="1"/>
+          </p:cNvSpPr>
+          <p:nvPr/>
+        </p:nvSpPr>
+        <p:spPr>
+          <a:xfrm xmlns:a="http://schemas.openxmlformats.org/drawingml/2006/main">
+            <a:off x="5581650" y="2247900"/>
+            <a:ext cx="4381500" cy="285750"/>
           </a:xfrm>
           <a:prstGeom xmlns:a="http://schemas.openxmlformats.org/drawingml/2006/main" prst="rect">
             <a:avLst/>
@@ -6565,7 +6890,54 @@
           <a:lstStyle xmlns:a="http://schemas.openxmlformats.org/drawingml/2006/main"/>
           <a:p xmlns:a="http://schemas.openxmlformats.org/drawingml/2006/main">
             <a:r>
-              <a:rPr sz="1350" b="1">
+              <a:rPr sz="1800" b="1">
+                <a:solidFill>
+                  <a:srgbClr val="181818"/>
+                </a:solidFill>
+                <a:latin typeface="Inter"/>
+                <a:ea typeface="Inter"/>
+                <a:cs typeface="Inter"/>
+              </a:rPr>
+              <a:t>1. Align the success objective</a:t>
+            </a:r>
+          </a:p>
+        </p:txBody>
+      </p:sp>
+      <p:sp>
+        <p:nvSpPr>
+          <p:cNvPr id="23" name="">
+            <a:extLst xmlns:a="http://schemas.openxmlformats.org/drawingml/2006/main">
+              <a:ext uri="{FF2B5EF4-FFF2-40B4-BE49-F238E27FC236}">
+                <a16:creationId xmlns:a16="http://schemas.microsoft.com/office/drawing/2014/main" id="{9531EEB3-919D-4F81-B362-0CB2797EB5AD}"/>
+              </a:ext>
+            </a:extLst>
+          </p:cNvPr>
+          <p:cNvSpPr>
+            <a:spLocks xmlns:a="http://schemas.openxmlformats.org/drawingml/2006/main" noGrp="1"/>
+          </p:cNvSpPr>
+          <p:nvPr/>
+        </p:nvSpPr>
+        <p:spPr>
+          <a:xfrm xmlns:a="http://schemas.openxmlformats.org/drawingml/2006/main">
+            <a:off x="5581650" y="2705100"/>
+            <a:ext cx="4476750" cy="609600"/>
+          </a:xfrm>
+          <a:prstGeom xmlns:a="http://schemas.openxmlformats.org/drawingml/2006/main" prst="rect">
+            <a:avLst/>
+          </a:prstGeom>
+          <a:noFill xmlns:a="http://schemas.openxmlformats.org/drawingml/2006/main"/>
+          <a:ln xmlns:a="http://schemas.openxmlformats.org/drawingml/2006/main" w="0">
+            <a:noFill/>
+          </a:ln>
+        </p:spPr>
+        <p:txBody>
+          <a:bodyPr xmlns:a="http://schemas.openxmlformats.org/drawingml/2006/main" wrap="square" lIns="38100" tIns="38100" rIns="38100" bIns="38100">
+            <a:noAutofit/>
+          </a:bodyPr>
+          <a:lstStyle xmlns:a="http://schemas.openxmlformats.org/drawingml/2006/main"/>
+          <a:p xmlns:a="http://schemas.openxmlformats.org/drawingml/2006/main">
+            <a:r>
+              <a:rPr sz="1350">
                 <a:solidFill>
                   <a:srgbClr val="282828"/>
                 </a:solidFill>
@@ -6573,275 +6945,63 @@
                 <a:ea typeface="Inter"/>
                 <a:cs typeface="Inter"/>
               </a:rPr>
-              <a:t>Assumption-aware classifier</a:t>
-            </a:r>
-          </a:p>
-        </p:txBody>
-      </p:sp>
-      <p:sp>
-        <p:nvSpPr>
-          <p:cNvPr id="16" name="">
-            <a:extLst xmlns:a="http://schemas.openxmlformats.org/drawingml/2006/main">
-              <a:ext uri="{FF2B5EF4-FFF2-40B4-BE49-F238E27FC236}">
-                <a16:creationId xmlns:a16="http://schemas.microsoft.com/office/drawing/2014/main" id="{11A892A8-358E-4933-809F-85BDDF51B993}"/>
-              </a:ext>
-            </a:extLst>
-          </p:cNvPr>
-          <p:cNvSpPr>
-            <a:spLocks xmlns:a="http://schemas.openxmlformats.org/drawingml/2006/main" noGrp="1"/>
-          </p:cNvSpPr>
-          <p:nvPr/>
-        </p:nvSpPr>
-        <p:spPr>
-          <a:xfrm xmlns:a="http://schemas.openxmlformats.org/drawingml/2006/main">
-            <a:off x="6591300" y="3028950"/>
-            <a:ext cx="666750" cy="152400"/>
-          </a:xfrm>
-          <a:prstGeom xmlns:a="http://schemas.openxmlformats.org/drawingml/2006/main" prst="rect">
-            <a:avLst/>
-          </a:prstGeom>
-          <a:noFill xmlns:a="http://schemas.openxmlformats.org/drawingml/2006/main"/>
-          <a:ln xmlns:a="http://schemas.openxmlformats.org/drawingml/2006/main" w="0">
-            <a:noFill/>
-          </a:ln>
-        </p:spPr>
-        <p:txBody>
-          <a:bodyPr xmlns:a="http://schemas.openxmlformats.org/drawingml/2006/main" wrap="square" lIns="38100" tIns="38100" rIns="38100" bIns="38100">
-            <a:noAutofit/>
-          </a:bodyPr>
-          <a:lstStyle xmlns:a="http://schemas.openxmlformats.org/drawingml/2006/main"/>
-          <a:p xmlns:a="http://schemas.openxmlformats.org/drawingml/2006/main">
-            <a:r>
-              <a:rPr sz="825" b="1">
-                <a:solidFill>
-                  <a:srgbClr val="5D605E"/>
-                </a:solidFill>
-                <a:latin typeface="Inter"/>
-                <a:ea typeface="Inter"/>
-                <a:cs typeface="Inter"/>
-              </a:rPr>
-              <a:t>Input</a:t>
-            </a:r>
-          </a:p>
-        </p:txBody>
-      </p:sp>
-      <p:sp>
-        <p:nvSpPr>
-          <p:cNvPr id="17" name="">
-            <a:extLst xmlns:a="http://schemas.openxmlformats.org/drawingml/2006/main">
-              <a:ext uri="{FF2B5EF4-FFF2-40B4-BE49-F238E27FC236}">
-                <a16:creationId xmlns:a16="http://schemas.microsoft.com/office/drawing/2014/main" id="{ABD683A1-DD3E-4DF9-A855-8D920713E395}"/>
-              </a:ext>
-            </a:extLst>
-          </p:cNvPr>
-          <p:cNvSpPr>
-            <a:spLocks xmlns:a="http://schemas.openxmlformats.org/drawingml/2006/main" noGrp="1"/>
-          </p:cNvSpPr>
-          <p:nvPr/>
-        </p:nvSpPr>
-        <p:spPr>
-          <a:xfrm xmlns:a="http://schemas.openxmlformats.org/drawingml/2006/main">
-            <a:off x="6591300" y="3200400"/>
-            <a:ext cx="3257550" cy="685800"/>
-          </a:xfrm>
-          <a:prstGeom xmlns:a="http://schemas.openxmlformats.org/drawingml/2006/main" prst="rect">
-            <a:avLst/>
-          </a:prstGeom>
-          <a:noFill xmlns:a="http://schemas.openxmlformats.org/drawingml/2006/main"/>
-          <a:ln xmlns:a="http://schemas.openxmlformats.org/drawingml/2006/main" w="0">
-            <a:noFill/>
-          </a:ln>
-        </p:spPr>
-        <p:txBody>
-          <a:bodyPr xmlns:a="http://schemas.openxmlformats.org/drawingml/2006/main" wrap="square" lIns="38100" tIns="38100" rIns="38100" bIns="38100">
-            <a:noAutofit/>
-          </a:bodyPr>
-          <a:lstStyle xmlns:a="http://schemas.openxmlformats.org/drawingml/2006/main"/>
-          <a:p xmlns:a="http://schemas.openxmlformats.org/drawingml/2006/main">
-            <a:r>
-              <a:rPr sz="1500">
-                <a:solidFill>
-                  <a:srgbClr val="181818"/>
-                </a:solidFill>
-                <a:latin typeface="Inter"/>
-                <a:ea typeface="Inter"/>
-                <a:cs typeface="Inter"/>
-              </a:rPr>
-              <a:t>Growth: app installs</a:t>
-            </a:r>
-          </a:p>
-          <a:p xmlns:a="http://schemas.openxmlformats.org/drawingml/2006/main">
-            <a:r>
-              <a:rPr sz="1500">
-                <a:solidFill>
-                  <a:srgbClr val="181818"/>
-                </a:solidFill>
-                <a:latin typeface="Inter"/>
-                <a:ea typeface="Inter"/>
-                <a:cs typeface="Inter"/>
-              </a:rPr>
-              <a:t>Commerce: GMV</a:t>
-            </a:r>
-          </a:p>
-          <a:p xmlns:a="http://schemas.openxmlformats.org/drawingml/2006/main">
-            <a:r>
-              <a:rPr sz="1500">
-                <a:solidFill>
-                  <a:srgbClr val="181818"/>
-                </a:solidFill>
-                <a:latin typeface="Inter"/>
-                <a:ea typeface="Inter"/>
-                <a:cs typeface="Inter"/>
-              </a:rPr>
-              <a:t>Lead: safe youth reach</a:t>
-            </a:r>
-          </a:p>
-        </p:txBody>
-      </p:sp>
-      <p:sp>
-        <p:nvSpPr>
-          <p:cNvPr id="18" name="">
-            <a:extLst xmlns:a="http://schemas.openxmlformats.org/drawingml/2006/main">
-              <a:ext uri="{FF2B5EF4-FFF2-40B4-BE49-F238E27FC236}">
-                <a16:creationId xmlns:a16="http://schemas.microsoft.com/office/drawing/2014/main" id="{904389B1-3FA0-428A-A3F9-CD4A70733C82}"/>
-              </a:ext>
-            </a:extLst>
-          </p:cNvPr>
-          <p:cNvSpPr>
-            <a:spLocks xmlns:a="http://schemas.openxmlformats.org/drawingml/2006/main" noGrp="1"/>
-          </p:cNvSpPr>
-          <p:nvPr/>
-        </p:nvSpPr>
-        <p:spPr>
-          <a:xfrm xmlns:a="http://schemas.openxmlformats.org/drawingml/2006/main">
-            <a:off x="6591300" y="4000500"/>
-            <a:ext cx="762000" cy="152400"/>
-          </a:xfrm>
-          <a:prstGeom xmlns:a="http://schemas.openxmlformats.org/drawingml/2006/main" prst="rect">
-            <a:avLst/>
-          </a:prstGeom>
-          <a:noFill xmlns:a="http://schemas.openxmlformats.org/drawingml/2006/main"/>
-          <a:ln xmlns:a="http://schemas.openxmlformats.org/drawingml/2006/main" w="0">
-            <a:noFill/>
-          </a:ln>
-        </p:spPr>
-        <p:txBody>
-          <a:bodyPr xmlns:a="http://schemas.openxmlformats.org/drawingml/2006/main" wrap="square" lIns="38100" tIns="38100" rIns="38100" bIns="38100">
-            <a:noAutofit/>
-          </a:bodyPr>
-          <a:lstStyle xmlns:a="http://schemas.openxmlformats.org/drawingml/2006/main"/>
-          <a:p xmlns:a="http://schemas.openxmlformats.org/drawingml/2006/main">
-            <a:r>
-              <a:rPr sz="825" b="1">
-                <a:solidFill>
-                  <a:srgbClr val="5D605E"/>
-                </a:solidFill>
-                <a:latin typeface="Inter"/>
-                <a:ea typeface="Inter"/>
-                <a:cs typeface="Inter"/>
-              </a:rPr>
-              <a:t>Output</a:t>
-            </a:r>
-          </a:p>
-        </p:txBody>
-      </p:sp>
-      <p:sp>
-        <p:nvSpPr>
-          <p:cNvPr id="19" name="">
-            <a:extLst xmlns:a="http://schemas.openxmlformats.org/drawingml/2006/main">
-              <a:ext uri="{FF2B5EF4-FFF2-40B4-BE49-F238E27FC236}">
-                <a16:creationId xmlns:a16="http://schemas.microsoft.com/office/drawing/2014/main" id="{9AF94AF2-BFBC-4E9D-A119-FD240F21F4BE}"/>
-              </a:ext>
-            </a:extLst>
-          </p:cNvPr>
-          <p:cNvSpPr>
-            <a:spLocks xmlns:a="http://schemas.openxmlformats.org/drawingml/2006/main" noGrp="1"/>
-          </p:cNvSpPr>
-          <p:nvPr/>
-        </p:nvSpPr>
-        <p:spPr>
-          <a:xfrm xmlns:a="http://schemas.openxmlformats.org/drawingml/2006/main">
-            <a:off x="6591300" y="4248150"/>
-            <a:ext cx="2686050" cy="323850"/>
-          </a:xfrm>
-          <a:prstGeom xmlns:a="http://schemas.openxmlformats.org/drawingml/2006/main" prst="rect">
-            <a:avLst/>
-          </a:prstGeom>
-          <a:noFill xmlns:a="http://schemas.openxmlformats.org/drawingml/2006/main"/>
-          <a:ln xmlns:a="http://schemas.openxmlformats.org/drawingml/2006/main" w="0">
-            <a:noFill/>
-          </a:ln>
-        </p:spPr>
-        <p:txBody>
-          <a:bodyPr xmlns:a="http://schemas.openxmlformats.org/drawingml/2006/main" wrap="square" lIns="38100" tIns="38100" rIns="38100" bIns="38100">
-            <a:noAutofit/>
-          </a:bodyPr>
-          <a:lstStyle xmlns:a="http://schemas.openxmlformats.org/drawingml/2006/main"/>
-          <a:p xmlns:a="http://schemas.openxmlformats.org/drawingml/2006/main">
-            <a:r>
-              <a:rPr sz="2025" b="1">
-                <a:solidFill>
-                  <a:srgbClr val="282828"/>
-                </a:solidFill>
-                <a:latin typeface="Inter"/>
-                <a:ea typeface="Inter"/>
-                <a:cs typeface="Inter"/>
-              </a:rPr>
-              <a:t>FAKE AGREEMENT</a:t>
-            </a:r>
-          </a:p>
-        </p:txBody>
-      </p:sp>
-      <p:sp>
-        <p:nvSpPr>
-          <p:cNvPr id="20" name="">
-            <a:extLst xmlns:a="http://schemas.openxmlformats.org/drawingml/2006/main">
-              <a:ext uri="{FF2B5EF4-FFF2-40B4-BE49-F238E27FC236}">
-                <a16:creationId xmlns:a16="http://schemas.microsoft.com/office/drawing/2014/main" id="{47136754-A202-4A3B-9157-26CE2933D690}"/>
-              </a:ext>
-            </a:extLst>
-          </p:cNvPr>
-          <p:cNvSpPr>
-            <a:spLocks xmlns:a="http://schemas.openxmlformats.org/drawingml/2006/main" noGrp="1"/>
-          </p:cNvSpPr>
-          <p:nvPr/>
-        </p:nvSpPr>
-        <p:spPr>
-          <a:xfrm xmlns:a="http://schemas.openxmlformats.org/drawingml/2006/main">
-            <a:off x="1066800" y="5105400"/>
-            <a:ext cx="8953500" cy="742950"/>
+              <a:t>Growth wants acquisition. Commerce wants GMV. The campaign lead wants mainstream-safe youth reach.</a:t>
+            </a:r>
+          </a:p>
+        </p:txBody>
+      </p:sp>
+      <p:sp>
+        <p:nvSpPr>
+          <p:cNvPr id="24" name="">
+            <a:extLst xmlns:a="http://schemas.openxmlformats.org/drawingml/2006/main">
+              <a:ext uri="{FF2B5EF4-FFF2-40B4-BE49-F238E27FC236}">
+                <a16:creationId xmlns:a16="http://schemas.microsoft.com/office/drawing/2014/main" id="{EDB4ED5E-8419-4D18-A5CC-E48F8C8DCE30}"/>
+              </a:ext>
+            </a:extLst>
+          </p:cNvPr>
+          <p:cNvSpPr>
+            <a:spLocks xmlns:a="http://schemas.openxmlformats.org/drawingml/2006/main" noGrp="1"/>
+          </p:cNvSpPr>
+          <p:nvPr/>
+        </p:nvSpPr>
+        <p:spPr>
+          <a:xfrm xmlns:a="http://schemas.openxmlformats.org/drawingml/2006/main">
+            <a:off x="5276850" y="3733800"/>
+            <a:ext cx="5334000" cy="1562100"/>
           </a:xfrm>
           <a:prstGeom xmlns:a="http://schemas.openxmlformats.org/drawingml/2006/main" prst="roundRect">
             <a:avLst>
-              <a:gd name="adj" fmla="val 10256"/>
+              <a:gd name="adj" fmla="val 4878"/>
             </a:avLst>
           </a:prstGeom>
           <a:solidFill xmlns:a="http://schemas.openxmlformats.org/drawingml/2006/main">
-            <a:srgbClr val="17191A"/>
+            <a:srgbClr val="FFFFFF"/>
           </a:solidFill>
-          <a:ln xmlns:a="http://schemas.openxmlformats.org/drawingml/2006/main" w="0">
-            <a:noFill/>
-          </a:ln>
-        </p:spPr>
-      </p:sp>
-      <p:sp>
-        <p:nvSpPr>
-          <p:cNvPr id="21" name="">
-            <a:extLst xmlns:a="http://schemas.openxmlformats.org/drawingml/2006/main">
-              <a:ext uri="{FF2B5EF4-FFF2-40B4-BE49-F238E27FC236}">
-                <a16:creationId xmlns:a16="http://schemas.microsoft.com/office/drawing/2014/main" id="{1EB345A4-B9EA-476F-9C7A-5D4BBD9BD1FB}"/>
-              </a:ext>
-            </a:extLst>
-          </p:cNvPr>
-          <p:cNvSpPr>
-            <a:spLocks xmlns:a="http://schemas.openxmlformats.org/drawingml/2006/main" noGrp="1"/>
-          </p:cNvSpPr>
-          <p:nvPr/>
-        </p:nvSpPr>
-        <p:spPr>
-          <a:xfrm xmlns:a="http://schemas.openxmlformats.org/drawingml/2006/main">
-            <a:off x="1219200" y="5257800"/>
-            <a:ext cx="8572500" cy="476250"/>
+          <a:ln xmlns:a="http://schemas.openxmlformats.org/drawingml/2006/main" w="9525">
+            <a:solidFill>
+              <a:srgbClr val="282828"/>
+            </a:solidFill>
+          </a:ln>
+        </p:spPr>
+      </p:sp>
+      <p:sp>
+        <p:nvSpPr>
+          <p:cNvPr id="25" name="">
+            <a:extLst xmlns:a="http://schemas.openxmlformats.org/drawingml/2006/main">
+              <a:ext uri="{FF2B5EF4-FFF2-40B4-BE49-F238E27FC236}">
+                <a16:creationId xmlns:a16="http://schemas.microsoft.com/office/drawing/2014/main" id="{C3253482-E516-46DB-ADBD-D6752E5F07E5}"/>
+              </a:ext>
+            </a:extLst>
+          </p:cNvPr>
+          <p:cNvSpPr>
+            <a:spLocks xmlns:a="http://schemas.openxmlformats.org/drawingml/2006/main" noGrp="1"/>
+          </p:cNvSpPr>
+          <p:nvPr/>
+        </p:nvSpPr>
+        <p:spPr>
+          <a:xfrm xmlns:a="http://schemas.openxmlformats.org/drawingml/2006/main">
+            <a:off x="5581650" y="4019550"/>
+            <a:ext cx="4381500" cy="285750"/>
           </a:xfrm>
           <a:prstGeom xmlns:a="http://schemas.openxmlformats.org/drawingml/2006/main" prst="rect">
             <a:avLst/>
@@ -6858,15 +7018,156 @@
           <a:lstStyle xmlns:a="http://schemas.openxmlformats.org/drawingml/2006/main"/>
           <a:p xmlns:a="http://schemas.openxmlformats.org/drawingml/2006/main">
             <a:r>
-              <a:rPr sz="1650" b="1">
-                <a:solidFill>
-                  <a:srgbClr val="FFFFFF"/>
-                </a:solidFill>
-                <a:latin typeface="Inter"/>
-                <a:ea typeface="Inter"/>
-                <a:cs typeface="Inter"/>
-              </a:rPr>
-              <a:t>Judge takeaway: Mochi catches the objective mismatch before the creator decision meeting.</a:t>
+              <a:rPr sz="1800" b="1">
+                <a:solidFill>
+                  <a:srgbClr val="181818"/>
+                </a:solidFill>
+                <a:latin typeface="Inter"/>
+                <a:ea typeface="Inter"/>
+                <a:cs typeface="Inter"/>
+              </a:rPr>
+              <a:t>2. Decide the creator role split</a:t>
+            </a:r>
+          </a:p>
+        </p:txBody>
+      </p:sp>
+      <p:sp>
+        <p:nvSpPr>
+          <p:cNvPr id="26" name="">
+            <a:extLst xmlns:a="http://schemas.openxmlformats.org/drawingml/2006/main">
+              <a:ext uri="{FF2B5EF4-FFF2-40B4-BE49-F238E27FC236}">
+                <a16:creationId xmlns:a16="http://schemas.microsoft.com/office/drawing/2014/main" id="{837D3E45-BDBC-42E6-8F29-D524A9DC4EA8}"/>
+              </a:ext>
+            </a:extLst>
+          </p:cNvPr>
+          <p:cNvSpPr>
+            <a:spLocks xmlns:a="http://schemas.openxmlformats.org/drawingml/2006/main" noGrp="1"/>
+          </p:cNvSpPr>
+          <p:nvPr/>
+        </p:nvSpPr>
+        <p:spPr>
+          <a:xfrm xmlns:a="http://schemas.openxmlformats.org/drawingml/2006/main">
+            <a:off x="5581650" y="4476750"/>
+            <a:ext cx="4476750" cy="419100"/>
+          </a:xfrm>
+          <a:prstGeom xmlns:a="http://schemas.openxmlformats.org/drawingml/2006/main" prst="rect">
+            <a:avLst/>
+          </a:prstGeom>
+          <a:noFill xmlns:a="http://schemas.openxmlformats.org/drawingml/2006/main"/>
+          <a:ln xmlns:a="http://schemas.openxmlformats.org/drawingml/2006/main" w="0">
+            <a:noFill/>
+          </a:ln>
+        </p:spPr>
+        <p:txBody>
+          <a:bodyPr xmlns:a="http://schemas.openxmlformats.org/drawingml/2006/main" wrap="square" lIns="38100" tIns="38100" rIns="38100" bIns="38100">
+            <a:noAutofit/>
+          </a:bodyPr>
+          <a:lstStyle xmlns:a="http://schemas.openxmlformats.org/drawingml/2006/main"/>
+          <a:p xmlns:a="http://schemas.openxmlformats.org/drawingml/2006/main">
+            <a:r>
+              <a:rPr sz="1425">
+                <a:solidFill>
+                  <a:srgbClr val="282828"/>
+                </a:solidFill>
+                <a:latin typeface="Inter"/>
+                <a:ea typeface="Inter"/>
+                <a:cs typeface="Inter"/>
+              </a:rPr>
+              <a:t>One hero face, or hero plus Shopee Live conversion partner. John owns the final call.</a:t>
+            </a:r>
+          </a:p>
+        </p:txBody>
+      </p:sp>
+      <p:sp>
+        <p:nvSpPr>
+          <p:cNvPr id="27" name="">
+            <a:extLst xmlns:a="http://schemas.openxmlformats.org/drawingml/2006/main">
+              <a:ext uri="{FF2B5EF4-FFF2-40B4-BE49-F238E27FC236}">
+                <a16:creationId xmlns:a16="http://schemas.microsoft.com/office/drawing/2014/main" id="{ED973380-5495-4897-A391-E8804B23D1C3}"/>
+              </a:ext>
+            </a:extLst>
+          </p:cNvPr>
+          <p:cNvSpPr>
+            <a:spLocks xmlns:a="http://schemas.openxmlformats.org/drawingml/2006/main" noGrp="1"/>
+          </p:cNvSpPr>
+          <p:nvPr/>
+        </p:nvSpPr>
+        <p:spPr>
+          <a:xfrm xmlns:a="http://schemas.openxmlformats.org/drawingml/2006/main">
+            <a:off x="857250" y="5562600"/>
+            <a:ext cx="2095500" cy="190500"/>
+          </a:xfrm>
+          <a:prstGeom xmlns:a="http://schemas.openxmlformats.org/drawingml/2006/main" prst="rect">
+            <a:avLst/>
+          </a:prstGeom>
+          <a:noFill xmlns:a="http://schemas.openxmlformats.org/drawingml/2006/main"/>
+          <a:ln xmlns:a="http://schemas.openxmlformats.org/drawingml/2006/main" w="0">
+            <a:noFill/>
+          </a:ln>
+        </p:spPr>
+        <p:txBody>
+          <a:bodyPr xmlns:a="http://schemas.openxmlformats.org/drawingml/2006/main" wrap="square" lIns="38100" tIns="38100" rIns="38100" bIns="38100">
+            <a:noAutofit/>
+          </a:bodyPr>
+          <a:lstStyle xmlns:a="http://schemas.openxmlformats.org/drawingml/2006/main"/>
+          <a:p xmlns:a="http://schemas.openxmlformats.org/drawingml/2006/main">
+            <a:r>
+              <a:rPr sz="1050" b="1">
+                <a:solidFill>
+                  <a:srgbClr val="5D605E"/>
+                </a:solidFill>
+                <a:latin typeface="Inter"/>
+                <a:ea typeface="Inter"/>
+                <a:cs typeface="Inter"/>
+              </a:rPr>
+              <a:t>Pre-read, not live debate</a:t>
+            </a:r>
+          </a:p>
+        </p:txBody>
+      </p:sp>
+      <p:sp>
+        <p:nvSpPr>
+          <p:cNvPr id="28" name="">
+            <a:extLst xmlns:a="http://schemas.openxmlformats.org/drawingml/2006/main">
+              <a:ext uri="{FF2B5EF4-FFF2-40B4-BE49-F238E27FC236}">
+                <a16:creationId xmlns:a16="http://schemas.microsoft.com/office/drawing/2014/main" id="{034E3012-BAF1-4572-9DA3-72F2F547BA79}"/>
+              </a:ext>
+            </a:extLst>
+          </p:cNvPr>
+          <p:cNvSpPr>
+            <a:spLocks xmlns:a="http://schemas.openxmlformats.org/drawingml/2006/main" noGrp="1"/>
+          </p:cNvSpPr>
+          <p:nvPr/>
+        </p:nvSpPr>
+        <p:spPr>
+          <a:xfrm xmlns:a="http://schemas.openxmlformats.org/drawingml/2006/main">
+            <a:off x="857250" y="5829300"/>
+            <a:ext cx="8572500" cy="266700"/>
+          </a:xfrm>
+          <a:prstGeom xmlns:a="http://schemas.openxmlformats.org/drawingml/2006/main" prst="rect">
+            <a:avLst/>
+          </a:prstGeom>
+          <a:noFill xmlns:a="http://schemas.openxmlformats.org/drawingml/2006/main"/>
+          <a:ln xmlns:a="http://schemas.openxmlformats.org/drawingml/2006/main" w="0">
+            <a:noFill/>
+          </a:ln>
+        </p:spPr>
+        <p:txBody>
+          <a:bodyPr xmlns:a="http://schemas.openxmlformats.org/drawingml/2006/main" wrap="square" lIns="38100" tIns="38100" rIns="38100" bIns="38100">
+            <a:noAutofit/>
+          </a:bodyPr>
+          <a:lstStyle xmlns:a="http://schemas.openxmlformats.org/drawingml/2006/main"/>
+          <a:p xmlns:a="http://schemas.openxmlformats.org/drawingml/2006/main">
+            <a:r>
+              <a:rPr sz="1275">
+                <a:solidFill>
+                  <a:srgbClr val="282828"/>
+                </a:solidFill>
+                <a:latin typeface="Inter"/>
+                <a:ea typeface="Inter"/>
+                <a:cs typeface="Inter"/>
+              </a:rPr>
+              <a:t>Short-form + Shopee Live, tracking, hero categories, paid amplification, brand-safety review, backup creators.</a:t>
             </a:r>
           </a:p>
         </p:txBody>
@@ -6874,7 +7175,7 @@
     </p:spTree>
     <p:extLst>
       <p:ext uri="{BB962C8B-B14F-4D97-AF65-F5344CB8AC3E}">
-        <p14:creationId xmlns:p14="http://schemas.microsoft.com/office/powerpoint/2010/main" val="12999975"/>
+        <p14:creationId xmlns:p14="http://schemas.microsoft.com/office/powerpoint/2010/main" val="1190048318"/>
       </p:ext>
     </p:extLst>
   </p:cSld>
@@ -6909,7 +7210,7 @@
           <p:nvPr/>
         </p:nvPicPr>
         <p:blipFill>
-          <a:blip xmlns:r="http://schemas.openxmlformats.org/officeDocument/2006/relationships" xmlns:a="http://schemas.openxmlformats.org/drawingml/2006/main" r:embed="R9ccbbf78483544bb"/>
+          <a:blip xmlns:r="http://schemas.openxmlformats.org/officeDocument/2006/relationships" xmlns:a="http://schemas.openxmlformats.org/drawingml/2006/main" r:embed="Rb00e6114d3174c20"/>
           <a:srcRect xmlns:a="http://schemas.openxmlformats.org/drawingml/2006/main" l="0" t="0" r="0" b="0"/>
           <a:stretch xmlns:a="http://schemas.openxmlformats.org/drawingml/2006/main">
             <a:fillRect l="0" t="0" r="0" b="0"/>
@@ -6930,7 +7231,7 @@
           <p:cNvPr id="2" name="">
             <a:extLst xmlns:a="http://schemas.openxmlformats.org/drawingml/2006/main">
               <a:ext uri="{FF2B5EF4-FFF2-40B4-BE49-F238E27FC236}">
-                <a16:creationId xmlns:a16="http://schemas.microsoft.com/office/drawing/2014/main" id="{A5D4B184-9614-4900-A7BC-B43ADD1B27B3}"/>
+                <a16:creationId xmlns:a16="http://schemas.microsoft.com/office/drawing/2014/main" id="{96AAF935-9C09-4C8D-AB9B-31E386CB6D77}"/>
               </a:ext>
             </a:extLst>
           </p:cNvPr>
@@ -6977,7 +7278,7 @@
           <p:cNvPr id="3" name="">
             <a:extLst xmlns:a="http://schemas.openxmlformats.org/drawingml/2006/main">
               <a:ext uri="{FF2B5EF4-FFF2-40B4-BE49-F238E27FC236}">
-                <a16:creationId xmlns:a16="http://schemas.microsoft.com/office/drawing/2014/main" id="{AE5BD049-F613-42D3-B226-CC26632F6480}"/>
+                <a16:creationId xmlns:a16="http://schemas.microsoft.com/office/drawing/2014/main" id="{7C1E81D5-6232-48F9-8CE3-F1A89D9983E4}"/>
               </a:ext>
             </a:extLst>
           </p:cNvPr>
@@ -7037,7 +7338,7 @@
           <p:cNvPr id="4" name="">
             <a:extLst xmlns:a="http://schemas.openxmlformats.org/drawingml/2006/main">
               <a:ext uri="{FF2B5EF4-FFF2-40B4-BE49-F238E27FC236}">
-                <a16:creationId xmlns:a16="http://schemas.microsoft.com/office/drawing/2014/main" id="{4E086C69-6D2E-49FF-B0F1-1660DC77CE64}"/>
+                <a16:creationId xmlns:a16="http://schemas.microsoft.com/office/drawing/2014/main" id="{6382F162-9168-4773-9C26-ED0442C4CA25}"/>
               </a:ext>
             </a:extLst>
           </p:cNvPr>
@@ -7084,7 +7385,7 @@
           <p:cNvPr id="5" name="">
             <a:extLst xmlns:a="http://schemas.openxmlformats.org/drawingml/2006/main">
               <a:ext uri="{FF2B5EF4-FFF2-40B4-BE49-F238E27FC236}">
-                <a16:creationId xmlns:a16="http://schemas.microsoft.com/office/drawing/2014/main" id="{764C8441-9779-4907-91D0-34FD3D190DD3}"/>
+                <a16:creationId xmlns:a16="http://schemas.microsoft.com/office/drawing/2014/main" id="{9FB6C5F2-C814-495F-9C68-147CBC2997F7}"/>
               </a:ext>
             </a:extLst>
           </p:cNvPr>
@@ -7141,7 +7442,7 @@
           <p:cNvPr id="6" name="">
             <a:extLst xmlns:a="http://schemas.openxmlformats.org/drawingml/2006/main">
               <a:ext uri="{FF2B5EF4-FFF2-40B4-BE49-F238E27FC236}">
-                <a16:creationId xmlns:a16="http://schemas.microsoft.com/office/drawing/2014/main" id="{F9E8DC9C-ECD9-4BAF-BB35-10FA2D9A2AF2}"/>
+                <a16:creationId xmlns:a16="http://schemas.microsoft.com/office/drawing/2014/main" id="{771B69B7-C8C2-4D81-8FF6-60A1C2DB0D95}"/>
               </a:ext>
             </a:extLst>
           </p:cNvPr>
@@ -7175,7 +7476,7 @@
           <p:cNvPr id="7" name="">
             <a:extLst xmlns:a="http://schemas.openxmlformats.org/drawingml/2006/main">
               <a:ext uri="{FF2B5EF4-FFF2-40B4-BE49-F238E27FC236}">
-                <a16:creationId xmlns:a16="http://schemas.microsoft.com/office/drawing/2014/main" id="{D0649CEF-634B-4846-97F5-E354BDFB9338}"/>
+                <a16:creationId xmlns:a16="http://schemas.microsoft.com/office/drawing/2014/main" id="{A618F657-38B9-481E-9889-968D84E7E496}"/>
               </a:ext>
             </a:extLst>
           </p:cNvPr>
@@ -7222,7 +7523,7 @@
           <p:cNvPr id="8" name="">
             <a:extLst xmlns:a="http://schemas.openxmlformats.org/drawingml/2006/main">
               <a:ext uri="{FF2B5EF4-FFF2-40B4-BE49-F238E27FC236}">
-                <a16:creationId xmlns:a16="http://schemas.microsoft.com/office/drawing/2014/main" id="{8814D91D-8495-4696-9479-44AC90CF3203}"/>
+                <a16:creationId xmlns:a16="http://schemas.microsoft.com/office/drawing/2014/main" id="{65BB05DC-FD4C-4561-B19F-B9ACEC5C501D}"/>
               </a:ext>
             </a:extLst>
           </p:cNvPr>
@@ -7295,7 +7596,7 @@
           <p:cNvPr id="9" name="">
             <a:extLst xmlns:a="http://schemas.openxmlformats.org/drawingml/2006/main">
               <a:ext uri="{FF2B5EF4-FFF2-40B4-BE49-F238E27FC236}">
-                <a16:creationId xmlns:a16="http://schemas.microsoft.com/office/drawing/2014/main" id="{08ED2173-1E37-482E-9EEF-EF927615E4CE}"/>
+                <a16:creationId xmlns:a16="http://schemas.microsoft.com/office/drawing/2014/main" id="{3D32FF3E-566D-4D19-AE7F-5D205D43721D}"/>
               </a:ext>
             </a:extLst>
           </p:cNvPr>
@@ -7325,7 +7626,7 @@
           <p:cNvPr id="10" name="">
             <a:extLst xmlns:a="http://schemas.openxmlformats.org/drawingml/2006/main">
               <a:ext uri="{FF2B5EF4-FFF2-40B4-BE49-F238E27FC236}">
-                <a16:creationId xmlns:a16="http://schemas.microsoft.com/office/drawing/2014/main" id="{6E57E3F8-B534-4734-97E8-0CA66505A9C6}"/>
+                <a16:creationId xmlns:a16="http://schemas.microsoft.com/office/drawing/2014/main" id="{774A8A88-C92D-4B66-A9CE-19D58F3FEE9A}"/>
               </a:ext>
             </a:extLst>
           </p:cNvPr>
@@ -7355,7 +7656,7 @@
           <p:cNvPr id="11" name="">
             <a:extLst xmlns:a="http://schemas.openxmlformats.org/drawingml/2006/main">
               <a:ext uri="{FF2B5EF4-FFF2-40B4-BE49-F238E27FC236}">
-                <a16:creationId xmlns:a16="http://schemas.microsoft.com/office/drawing/2014/main" id="{D8208CE7-C1C3-476D-AC23-7727C071FB30}"/>
+                <a16:creationId xmlns:a16="http://schemas.microsoft.com/office/drawing/2014/main" id="{CAC9D20D-4A4C-47AB-BEA7-346A074EF23F}"/>
               </a:ext>
             </a:extLst>
           </p:cNvPr>
@@ -7389,7 +7690,7 @@
           <p:cNvPr id="12" name="">
             <a:extLst xmlns:a="http://schemas.openxmlformats.org/drawingml/2006/main">
               <a:ext uri="{FF2B5EF4-FFF2-40B4-BE49-F238E27FC236}">
-                <a16:creationId xmlns:a16="http://schemas.microsoft.com/office/drawing/2014/main" id="{29250639-DA74-4778-A5D4-AC57706DC4CA}"/>
+                <a16:creationId xmlns:a16="http://schemas.microsoft.com/office/drawing/2014/main" id="{8288D67B-9C96-4DB6-AF52-F48C9C86A2FD}"/>
               </a:ext>
             </a:extLst>
           </p:cNvPr>
@@ -7436,7 +7737,7 @@
           <p:cNvPr id="13" name="">
             <a:extLst xmlns:a="http://schemas.openxmlformats.org/drawingml/2006/main">
               <a:ext uri="{FF2B5EF4-FFF2-40B4-BE49-F238E27FC236}">
-                <a16:creationId xmlns:a16="http://schemas.microsoft.com/office/drawing/2014/main" id="{39C0A4BB-7092-485A-9DE3-FC666BF32DC7}"/>
+                <a16:creationId xmlns:a16="http://schemas.microsoft.com/office/drawing/2014/main" id="{6E74F71B-E202-46BF-B034-F4708A3B94F7}"/>
               </a:ext>
             </a:extLst>
           </p:cNvPr>
@@ -7509,7 +7810,7 @@
           <p:cNvPr id="14" name="">
             <a:extLst xmlns:a="http://schemas.openxmlformats.org/drawingml/2006/main">
               <a:ext uri="{FF2B5EF4-FFF2-40B4-BE49-F238E27FC236}">
-                <a16:creationId xmlns:a16="http://schemas.microsoft.com/office/drawing/2014/main" id="{706760D5-10C5-4183-B54D-424D6FC78B43}"/>
+                <a16:creationId xmlns:a16="http://schemas.microsoft.com/office/drawing/2014/main" id="{4DCFE65E-0907-4194-8035-30240D609757}"/>
               </a:ext>
             </a:extLst>
           </p:cNvPr>
@@ -7539,7 +7840,7 @@
           <p:cNvPr id="15" name="">
             <a:extLst xmlns:a="http://schemas.openxmlformats.org/drawingml/2006/main">
               <a:ext uri="{FF2B5EF4-FFF2-40B4-BE49-F238E27FC236}">
-                <a16:creationId xmlns:a16="http://schemas.microsoft.com/office/drawing/2014/main" id="{9DBB557E-6A0B-4FCE-B4AF-2BA518DB1BC8}"/>
+                <a16:creationId xmlns:a16="http://schemas.microsoft.com/office/drawing/2014/main" id="{B27E8FDC-E9B9-46C0-9694-0668C4F1994A}"/>
               </a:ext>
             </a:extLst>
           </p:cNvPr>
@@ -7569,7 +7870,7 @@
           <p:cNvPr id="16" name="">
             <a:extLst xmlns:a="http://schemas.openxmlformats.org/drawingml/2006/main">
               <a:ext uri="{FF2B5EF4-FFF2-40B4-BE49-F238E27FC236}">
-                <a16:creationId xmlns:a16="http://schemas.microsoft.com/office/drawing/2014/main" id="{AE90316A-E649-48D1-AD40-7ADC79844029}"/>
+                <a16:creationId xmlns:a16="http://schemas.microsoft.com/office/drawing/2014/main" id="{DEC91BC7-E18C-4D75-A2DE-096DB4B3FCC6}"/>
               </a:ext>
             </a:extLst>
           </p:cNvPr>
@@ -7603,7 +7904,7 @@
           <p:cNvPr id="17" name="">
             <a:extLst xmlns:a="http://schemas.openxmlformats.org/drawingml/2006/main">
               <a:ext uri="{FF2B5EF4-FFF2-40B4-BE49-F238E27FC236}">
-                <a16:creationId xmlns:a16="http://schemas.microsoft.com/office/drawing/2014/main" id="{4B840A07-6401-4948-9E3E-056BE245B0BD}"/>
+                <a16:creationId xmlns:a16="http://schemas.microsoft.com/office/drawing/2014/main" id="{ADD90DEF-15DB-4BD0-BA3B-60C1ADB0C07D}"/>
               </a:ext>
             </a:extLst>
           </p:cNvPr>
@@ -7650,7 +7951,7 @@
           <p:cNvPr id="18" name="">
             <a:extLst xmlns:a="http://schemas.openxmlformats.org/drawingml/2006/main">
               <a:ext uri="{FF2B5EF4-FFF2-40B4-BE49-F238E27FC236}">
-                <a16:creationId xmlns:a16="http://schemas.microsoft.com/office/drawing/2014/main" id="{DBD18496-DB5B-4980-8295-69F421D25066}"/>
+                <a16:creationId xmlns:a16="http://schemas.microsoft.com/office/drawing/2014/main" id="{D4E3262E-7D46-4D50-9147-462DD7CDC558}"/>
               </a:ext>
             </a:extLst>
           </p:cNvPr>
@@ -7723,7 +8024,7 @@
           <p:cNvPr id="19" name="">
             <a:extLst xmlns:a="http://schemas.openxmlformats.org/drawingml/2006/main">
               <a:ext uri="{FF2B5EF4-FFF2-40B4-BE49-F238E27FC236}">
-                <a16:creationId xmlns:a16="http://schemas.microsoft.com/office/drawing/2014/main" id="{A0AC6429-2E16-4A54-A38C-ADA41647200D}"/>
+                <a16:creationId xmlns:a16="http://schemas.microsoft.com/office/drawing/2014/main" id="{A752E7C8-CCF2-4A9A-BC59-D9E8C149EAA9}"/>
               </a:ext>
             </a:extLst>
           </p:cNvPr>
@@ -7753,7 +8054,7 @@
           <p:cNvPr id="20" name="">
             <a:extLst xmlns:a="http://schemas.openxmlformats.org/drawingml/2006/main">
               <a:ext uri="{FF2B5EF4-FFF2-40B4-BE49-F238E27FC236}">
-                <a16:creationId xmlns:a16="http://schemas.microsoft.com/office/drawing/2014/main" id="{4310B5F0-6775-4144-A78F-1831A1768422}"/>
+                <a16:creationId xmlns:a16="http://schemas.microsoft.com/office/drawing/2014/main" id="{AF3D1E59-C6AB-4A3F-A93A-6B89C6293CAE}"/>
               </a:ext>
             </a:extLst>
           </p:cNvPr>
@@ -7783,7 +8084,7 @@
           <p:cNvPr id="21" name="">
             <a:extLst xmlns:a="http://schemas.openxmlformats.org/drawingml/2006/main">
               <a:ext uri="{FF2B5EF4-FFF2-40B4-BE49-F238E27FC236}">
-                <a16:creationId xmlns:a16="http://schemas.microsoft.com/office/drawing/2014/main" id="{CB5B6945-58A7-4E45-BE2F-93E0D73FAA30}"/>
+                <a16:creationId xmlns:a16="http://schemas.microsoft.com/office/drawing/2014/main" id="{A61D269C-48C1-48B6-8EAC-A25149842AAE}"/>
               </a:ext>
             </a:extLst>
           </p:cNvPr>
@@ -7817,7 +8118,7 @@
           <p:cNvPr id="22" name="">
             <a:extLst xmlns:a="http://schemas.openxmlformats.org/drawingml/2006/main">
               <a:ext uri="{FF2B5EF4-FFF2-40B4-BE49-F238E27FC236}">
-                <a16:creationId xmlns:a16="http://schemas.microsoft.com/office/drawing/2014/main" id="{7AFDF31E-0AAB-4375-9522-B8257D88A61E}"/>
+                <a16:creationId xmlns:a16="http://schemas.microsoft.com/office/drawing/2014/main" id="{2A6F7FDE-6C9A-4AA3-B389-D1ADDB2D77CF}"/>
               </a:ext>
             </a:extLst>
           </p:cNvPr>
@@ -7864,7 +8165,7 @@
           <p:cNvPr id="23" name="">
             <a:extLst xmlns:a="http://schemas.openxmlformats.org/drawingml/2006/main">
               <a:ext uri="{FF2B5EF4-FFF2-40B4-BE49-F238E27FC236}">
-                <a16:creationId xmlns:a16="http://schemas.microsoft.com/office/drawing/2014/main" id="{897605A1-28AA-4ABF-A69C-555EFEC3F72A}"/>
+                <a16:creationId xmlns:a16="http://schemas.microsoft.com/office/drawing/2014/main" id="{F129D3F2-9309-4B23-B1F3-E28B7A927096}"/>
               </a:ext>
             </a:extLst>
           </p:cNvPr>
@@ -7937,23 +8238,104 @@
           <p:cNvPr id="24" name="">
             <a:extLst xmlns:a="http://schemas.openxmlformats.org/drawingml/2006/main">
               <a:ext uri="{FF2B5EF4-FFF2-40B4-BE49-F238E27FC236}">
-                <a16:creationId xmlns:a16="http://schemas.microsoft.com/office/drawing/2014/main" id="{47E3C794-766C-427C-BF3F-939D3199A93A}"/>
-              </a:ext>
-            </a:extLst>
-          </p:cNvPr>
-          <p:cNvSpPr>
-            <a:spLocks xmlns:a="http://schemas.openxmlformats.org/drawingml/2006/main" noGrp="1"/>
-          </p:cNvSpPr>
-          <p:nvPr/>
-        </p:nvSpPr>
-        <p:spPr>
-          <a:xfrm xmlns:a="http://schemas.openxmlformats.org/drawingml/2006/main">
-            <a:off x="914400" y="4953000"/>
-            <a:ext cx="9715500" cy="685800"/>
+                <a16:creationId xmlns:a16="http://schemas.microsoft.com/office/drawing/2014/main" id="{DD67A836-CB74-4966-A7ED-B4C96B8D83C5}"/>
+              </a:ext>
+            </a:extLst>
+          </p:cNvPr>
+          <p:cNvSpPr>
+            <a:spLocks xmlns:a="http://schemas.openxmlformats.org/drawingml/2006/main" noGrp="1"/>
+          </p:cNvSpPr>
+          <p:nvPr/>
+        </p:nvSpPr>
+        <p:spPr>
+          <a:xfrm xmlns:a="http://schemas.openxmlformats.org/drawingml/2006/main">
+            <a:off x="914400" y="4572000"/>
+            <a:ext cx="9715500" cy="323850"/>
           </a:xfrm>
           <a:prstGeom xmlns:a="http://schemas.openxmlformats.org/drawingml/2006/main" prst="roundRect">
             <a:avLst>
-              <a:gd name="adj" fmla="val 11111"/>
+              <a:gd name="adj" fmla="val 23529"/>
+            </a:avLst>
+          </a:prstGeom>
+          <a:solidFill xmlns:a="http://schemas.openxmlformats.org/drawingml/2006/main">
+            <a:srgbClr val="F9F9F9"/>
+          </a:solidFill>
+          <a:ln xmlns:a="http://schemas.openxmlformats.org/drawingml/2006/main" w="9525">
+            <a:solidFill>
+              <a:srgbClr val="EDEDED"/>
+            </a:solidFill>
+          </a:ln>
+        </p:spPr>
+      </p:sp>
+      <p:sp>
+        <p:nvSpPr>
+          <p:cNvPr id="25" name="">
+            <a:extLst xmlns:a="http://schemas.openxmlformats.org/drawingml/2006/main">
+              <a:ext uri="{FF2B5EF4-FFF2-40B4-BE49-F238E27FC236}">
+                <a16:creationId xmlns:a16="http://schemas.microsoft.com/office/drawing/2014/main" id="{991E8C57-7B39-4D85-AE2C-B4B39C7DD635}"/>
+              </a:ext>
+            </a:extLst>
+          </p:cNvPr>
+          <p:cNvSpPr>
+            <a:spLocks xmlns:a="http://schemas.openxmlformats.org/drawingml/2006/main" noGrp="1"/>
+          </p:cNvSpPr>
+          <p:nvPr/>
+        </p:nvSpPr>
+        <p:spPr>
+          <a:xfrm xmlns:a="http://schemas.openxmlformats.org/drawingml/2006/main">
+            <a:off x="1066800" y="4648200"/>
+            <a:ext cx="9448800" cy="190500"/>
+          </a:xfrm>
+          <a:prstGeom xmlns:a="http://schemas.openxmlformats.org/drawingml/2006/main" prst="rect">
+            <a:avLst/>
+          </a:prstGeom>
+          <a:noFill xmlns:a="http://schemas.openxmlformats.org/drawingml/2006/main"/>
+          <a:ln xmlns:a="http://schemas.openxmlformats.org/drawingml/2006/main" w="0">
+            <a:noFill/>
+          </a:ln>
+        </p:spPr>
+        <p:txBody>
+          <a:bodyPr xmlns:a="http://schemas.openxmlformats.org/drawingml/2006/main" wrap="square" lIns="38100" tIns="38100" rIns="38100" bIns="38100">
+            <a:noAutofit/>
+          </a:bodyPr>
+          <a:lstStyle xmlns:a="http://schemas.openxmlformats.org/drawingml/2006/main"/>
+          <a:p xmlns:a="http://schemas.openxmlformats.org/drawingml/2006/main">
+            <a:r>
+              <a:rPr sz="975" b="1">
+                <a:solidFill>
+                  <a:srgbClr val="282828"/>
+                </a:solidFill>
+                <a:latin typeface="Inter"/>
+                <a:ea typeface="Inter"/>
+                <a:cs typeface="Inter"/>
+              </a:rPr>
+              <a:t>58 tests passing  ·  pydantic v2 contracts  ·  SQLiteSession persistence  ·  Block Kit digest  ·  assumption-aware vs naive baseline</a:t>
+            </a:r>
+          </a:p>
+        </p:txBody>
+      </p:sp>
+      <p:sp>
+        <p:nvSpPr>
+          <p:cNvPr id="26" name="">
+            <a:extLst xmlns:a="http://schemas.openxmlformats.org/drawingml/2006/main">
+              <a:ext uri="{FF2B5EF4-FFF2-40B4-BE49-F238E27FC236}">
+                <a16:creationId xmlns:a16="http://schemas.microsoft.com/office/drawing/2014/main" id="{08450D1C-90D2-433C-AD68-D0F65AF2B0DC}"/>
+              </a:ext>
+            </a:extLst>
+          </p:cNvPr>
+          <p:cNvSpPr>
+            <a:spLocks xmlns:a="http://schemas.openxmlformats.org/drawingml/2006/main" noGrp="1"/>
+          </p:cNvSpPr>
+          <p:nvPr/>
+        </p:nvSpPr>
+        <p:spPr>
+          <a:xfrm xmlns:a="http://schemas.openxmlformats.org/drawingml/2006/main">
+            <a:off x="914400" y="5029200"/>
+            <a:ext cx="9715500" cy="609600"/>
+          </a:xfrm>
+          <a:prstGeom xmlns:a="http://schemas.openxmlformats.org/drawingml/2006/main" prst="roundRect">
+            <a:avLst>
+              <a:gd name="adj" fmla="val 12500"/>
             </a:avLst>
           </a:prstGeom>
           <a:solidFill xmlns:a="http://schemas.openxmlformats.org/drawingml/2006/main">
@@ -7966,10 +8348,10 @@
       </p:sp>
       <p:sp>
         <p:nvSpPr>
-          <p:cNvPr id="25" name="">
-            <a:extLst xmlns:a="http://schemas.openxmlformats.org/drawingml/2006/main">
-              <a:ext uri="{FF2B5EF4-FFF2-40B4-BE49-F238E27FC236}">
-                <a16:creationId xmlns:a16="http://schemas.microsoft.com/office/drawing/2014/main" id="{FB38AF67-BE91-4B28-AA37-C3D5C3981A0E}"/>
+          <p:cNvPr id="27" name="">
+            <a:extLst xmlns:a="http://schemas.openxmlformats.org/drawingml/2006/main">
+              <a:ext uri="{FF2B5EF4-FFF2-40B4-BE49-F238E27FC236}">
+                <a16:creationId xmlns:a16="http://schemas.microsoft.com/office/drawing/2014/main" id="{C34E554F-BE29-4C18-A16B-026F74DE096F}"/>
               </a:ext>
             </a:extLst>
           </p:cNvPr>
@@ -8013,10 +8395,10 @@
       </p:sp>
       <p:sp>
         <p:nvSpPr>
-          <p:cNvPr id="26" name="">
-            <a:extLst xmlns:a="http://schemas.openxmlformats.org/drawingml/2006/main">
-              <a:ext uri="{FF2B5EF4-FFF2-40B4-BE49-F238E27FC236}">
-                <a16:creationId xmlns:a16="http://schemas.microsoft.com/office/drawing/2014/main" id="{144CE73D-CAD4-4B2C-B142-F8ED5F664811}"/>
+          <p:cNvPr id="28" name="">
+            <a:extLst xmlns:a="http://schemas.openxmlformats.org/drawingml/2006/main">
+              <a:ext uri="{FF2B5EF4-FFF2-40B4-BE49-F238E27FC236}">
+                <a16:creationId xmlns:a16="http://schemas.microsoft.com/office/drawing/2014/main" id="{5E1BEA9E-D5FB-4EF1-84DD-60640C960848}"/>
               </a:ext>
             </a:extLst>
           </p:cNvPr>
@@ -8061,7 +8443,7 @@
     </p:spTree>
     <p:extLst>
       <p:ext uri="{BB962C8B-B14F-4D97-AF65-F5344CB8AC3E}">
-        <p14:creationId xmlns:p14="http://schemas.microsoft.com/office/powerpoint/2010/main" val="716218487"/>
+        <p14:creationId xmlns:p14="http://schemas.microsoft.com/office/powerpoint/2010/main" val="600463836"/>
       </p:ext>
     </p:extLst>
   </p:cSld>
@@ -8096,7 +8478,7 @@
           <p:nvPr/>
         </p:nvPicPr>
         <p:blipFill>
-          <a:blip xmlns:r="http://schemas.openxmlformats.org/officeDocument/2006/relationships" xmlns:a="http://schemas.openxmlformats.org/drawingml/2006/main" r:embed="R6559693d8d964fea"/>
+          <a:blip xmlns:r="http://schemas.openxmlformats.org/officeDocument/2006/relationships" xmlns:a="http://schemas.openxmlformats.org/drawingml/2006/main" r:embed="R12fd535eb42b484b"/>
           <a:srcRect xmlns:a="http://schemas.openxmlformats.org/drawingml/2006/main" l="0" t="0" r="0" b="0"/>
           <a:stretch xmlns:a="http://schemas.openxmlformats.org/drawingml/2006/main">
             <a:fillRect l="0" t="0" r="0" b="0"/>
@@ -8117,7 +8499,7 @@
           <p:cNvPr id="2" name="">
             <a:extLst xmlns:a="http://schemas.openxmlformats.org/drawingml/2006/main">
               <a:ext uri="{FF2B5EF4-FFF2-40B4-BE49-F238E27FC236}">
-                <a16:creationId xmlns:a16="http://schemas.microsoft.com/office/drawing/2014/main" id="{EE2C9C85-1CEE-4B12-9078-50B2989F2E9E}"/>
+                <a16:creationId xmlns:a16="http://schemas.microsoft.com/office/drawing/2014/main" id="{CB1F4748-0BC5-457D-B408-949A6D614AFE}"/>
               </a:ext>
             </a:extLst>
           </p:cNvPr>
@@ -8154,7 +8536,7 @@
                 <a:ea typeface="Inter"/>
                 <a:cs typeface="Inter"/>
               </a:rPr>
-              <a:t>PITCH FLOW</a:t>
+              <a:t>USE OF CODEX</a:t>
             </a:r>
           </a:p>
         </p:txBody>
@@ -8164,7 +8546,7 @@
           <p:cNvPr id="3" name="">
             <a:extLst xmlns:a="http://schemas.openxmlformats.org/drawingml/2006/main">
               <a:ext uri="{FF2B5EF4-FFF2-40B4-BE49-F238E27FC236}">
-                <a16:creationId xmlns:a16="http://schemas.microsoft.com/office/drawing/2014/main" id="{FD25407B-AF76-4FCE-8564-B76317B8F296}"/>
+                <a16:creationId xmlns:a16="http://schemas.microsoft.com/office/drawing/2014/main" id="{6C523A4A-4FC1-44F0-A6E8-894F1667E9A9}"/>
               </a:ext>
             </a:extLst>
           </p:cNvPr>
@@ -8201,7 +8583,20 @@
                 <a:ea typeface="Inter"/>
                 <a:cs typeface="Inter"/>
               </a:rPr>
-              <a:t>Six minutes, one narrative arc.</a:t>
+              <a:t>Codex shaped the product and</a:t>
+            </a:r>
+          </a:p>
+          <a:p xmlns:a="http://schemas.openxmlformats.org/drawingml/2006/main">
+            <a:r>
+              <a:rPr sz="3000">
+                <a:solidFill>
+                  <a:srgbClr val="181818"/>
+                </a:solidFill>
+                <a:latin typeface="Inter"/>
+                <a:ea typeface="Inter"/>
+                <a:cs typeface="Inter"/>
+              </a:rPr>
+              <a:t>wrote the build.</a:t>
             </a:r>
           </a:p>
         </p:txBody>
@@ -8211,7 +8606,7 @@
           <p:cNvPr id="4" name="">
             <a:extLst xmlns:a="http://schemas.openxmlformats.org/drawingml/2006/main">
               <a:ext uri="{FF2B5EF4-FFF2-40B4-BE49-F238E27FC236}">
-                <a16:creationId xmlns:a16="http://schemas.microsoft.com/office/drawing/2014/main" id="{A03BDF30-1BFE-4768-8624-B4ACC6BCC740}"/>
+                <a16:creationId xmlns:a16="http://schemas.microsoft.com/office/drawing/2014/main" id="{0B55B1FF-370E-4990-9136-812ED5D82300}"/>
               </a:ext>
             </a:extLst>
           </p:cNvPr>
@@ -8248,7 +8643,7 @@
                 <a:ea typeface="Inter"/>
                 <a:cs typeface="Inter"/>
               </a:rPr>
-              <a:t>Sources: docs/pitch-script.md, docs/judging-alignment.md</a:t>
+              <a:t>Sources: AGENTS.md, docs/pitch-script.md</a:t>
             </a:r>
           </a:p>
         </p:txBody>
@@ -8258,7 +8653,7 @@
           <p:cNvPr id="5" name="">
             <a:extLst xmlns:a="http://schemas.openxmlformats.org/drawingml/2006/main">
               <a:ext uri="{FF2B5EF4-FFF2-40B4-BE49-F238E27FC236}">
-                <a16:creationId xmlns:a16="http://schemas.microsoft.com/office/drawing/2014/main" id="{7795E5EF-12FE-494E-AE4B-2F5024A31EB5}"/>
+                <a16:creationId xmlns:a16="http://schemas.microsoft.com/office/drawing/2014/main" id="{04618A75-2047-409A-8661-0EC5C646677A}"/>
               </a:ext>
             </a:extLst>
           </p:cNvPr>
@@ -8315,23 +8710,23 @@
           <p:cNvPr id="6" name="">
             <a:extLst xmlns:a="http://schemas.openxmlformats.org/drawingml/2006/main">
               <a:ext uri="{FF2B5EF4-FFF2-40B4-BE49-F238E27FC236}">
-                <a16:creationId xmlns:a16="http://schemas.microsoft.com/office/drawing/2014/main" id="{93A44FC8-84D7-4C94-B756-35219F68FEBD}"/>
-              </a:ext>
-            </a:extLst>
-          </p:cNvPr>
-          <p:cNvSpPr>
-            <a:spLocks xmlns:a="http://schemas.openxmlformats.org/drawingml/2006/main" noGrp="1"/>
-          </p:cNvSpPr>
-          <p:nvPr/>
-        </p:nvSpPr>
-        <p:spPr>
-          <a:xfrm xmlns:a="http://schemas.openxmlformats.org/drawingml/2006/main">
-            <a:off x="838200" y="2324100"/>
-            <a:ext cx="2247900" cy="2000250"/>
+                <a16:creationId xmlns:a16="http://schemas.microsoft.com/office/drawing/2014/main" id="{8445C2C3-D98B-43D1-A91C-5B39C6D60323}"/>
+              </a:ext>
+            </a:extLst>
+          </p:cNvPr>
+          <p:cNvSpPr>
+            <a:spLocks xmlns:a="http://schemas.openxmlformats.org/drawingml/2006/main" noGrp="1"/>
+          </p:cNvSpPr>
+          <p:nvPr/>
+        </p:nvSpPr>
+        <p:spPr>
+          <a:xfrm xmlns:a="http://schemas.openxmlformats.org/drawingml/2006/main">
+            <a:off x="838200" y="2247900"/>
+            <a:ext cx="4762500" cy="1314450"/>
           </a:xfrm>
           <a:prstGeom xmlns:a="http://schemas.openxmlformats.org/drawingml/2006/main" prst="roundRect">
             <a:avLst>
-              <a:gd name="adj" fmla="val 3810"/>
+              <a:gd name="adj" fmla="val 5797"/>
             </a:avLst>
           </a:prstGeom>
           <a:solidFill xmlns:a="http://schemas.openxmlformats.org/drawingml/2006/main">
@@ -8349,19 +8744,19 @@
           <p:cNvPr id="7" name="">
             <a:extLst xmlns:a="http://schemas.openxmlformats.org/drawingml/2006/main">
               <a:ext uri="{FF2B5EF4-FFF2-40B4-BE49-F238E27FC236}">
-                <a16:creationId xmlns:a16="http://schemas.microsoft.com/office/drawing/2014/main" id="{5FE56C7D-2E46-474D-9CB4-5A29E495AC47}"/>
-              </a:ext>
-            </a:extLst>
-          </p:cNvPr>
-          <p:cNvSpPr>
-            <a:spLocks xmlns:a="http://schemas.openxmlformats.org/drawingml/2006/main" noGrp="1"/>
-          </p:cNvSpPr>
-          <p:nvPr/>
-        </p:nvSpPr>
-        <p:spPr>
-          <a:xfrm xmlns:a="http://schemas.openxmlformats.org/drawingml/2006/main">
-            <a:off x="1066800" y="2552700"/>
-            <a:ext cx="457200" cy="438150"/>
+                <a16:creationId xmlns:a16="http://schemas.microsoft.com/office/drawing/2014/main" id="{E90D2AAD-983C-4C07-A0A8-41D2BFADE0F0}"/>
+              </a:ext>
+            </a:extLst>
+          </p:cNvPr>
+          <p:cNvSpPr>
+            <a:spLocks xmlns:a="http://schemas.openxmlformats.org/drawingml/2006/main" noGrp="1"/>
+          </p:cNvSpPr>
+          <p:nvPr/>
+        </p:nvSpPr>
+        <p:spPr>
+          <a:xfrm xmlns:a="http://schemas.openxmlformats.org/drawingml/2006/main">
+            <a:off x="1085850" y="2457450"/>
+            <a:ext cx="4267200" cy="266700"/>
           </a:xfrm>
           <a:prstGeom xmlns:a="http://schemas.openxmlformats.org/drawingml/2006/main" prst="rect">
             <a:avLst/>
@@ -8378,7 +8773,7 @@
           <a:lstStyle xmlns:a="http://schemas.openxmlformats.org/drawingml/2006/main"/>
           <a:p xmlns:a="http://schemas.openxmlformats.org/drawingml/2006/main">
             <a:r>
-              <a:rPr sz="3150" b="1">
+              <a:rPr sz="1650" b="1">
                 <a:solidFill>
                   <a:srgbClr val="181818"/>
                 </a:solidFill>
@@ -8386,7 +8781,7 @@
                 <a:ea typeface="Inter"/>
                 <a:cs typeface="Inter"/>
               </a:rPr>
-              <a:t>1</a:t>
+              <a:t>Scenario pivot</a:t>
             </a:r>
           </a:p>
         </p:txBody>
@@ -8396,19 +8791,19 @@
           <p:cNvPr id="8" name="">
             <a:extLst xmlns:a="http://schemas.openxmlformats.org/drawingml/2006/main">
               <a:ext uri="{FF2B5EF4-FFF2-40B4-BE49-F238E27FC236}">
-                <a16:creationId xmlns:a16="http://schemas.microsoft.com/office/drawing/2014/main" id="{A2EB3E21-F7E3-4A32-89AE-423803A28D76}"/>
-              </a:ext>
-            </a:extLst>
-          </p:cNvPr>
-          <p:cNvSpPr>
-            <a:spLocks xmlns:a="http://schemas.openxmlformats.org/drawingml/2006/main" noGrp="1"/>
-          </p:cNvSpPr>
-          <p:nvPr/>
-        </p:nvSpPr>
-        <p:spPr>
-          <a:xfrm xmlns:a="http://schemas.openxmlformats.org/drawingml/2006/main">
-            <a:off x="1066800" y="3143250"/>
-            <a:ext cx="1714500" cy="247650"/>
+                <a16:creationId xmlns:a16="http://schemas.microsoft.com/office/drawing/2014/main" id="{EE8B45F5-205B-44D9-89A0-22F286B5BABB}"/>
+              </a:ext>
+            </a:extLst>
+          </p:cNvPr>
+          <p:cNvSpPr>
+            <a:spLocks xmlns:a="http://schemas.openxmlformats.org/drawingml/2006/main" noGrp="1"/>
+          </p:cNvSpPr>
+          <p:nvPr/>
+        </p:nvSpPr>
+        <p:spPr>
+          <a:xfrm xmlns:a="http://schemas.openxmlformats.org/drawingml/2006/main">
+            <a:off x="1085850" y="2857500"/>
+            <a:ext cx="4267200" cy="571500"/>
           </a:xfrm>
           <a:prstGeom xmlns:a="http://schemas.openxmlformats.org/drawingml/2006/main" prst="rect">
             <a:avLst/>
@@ -8425,15 +8820,15 @@
           <a:lstStyle xmlns:a="http://schemas.openxmlformats.org/drawingml/2006/main"/>
           <a:p xmlns:a="http://schemas.openxmlformats.org/drawingml/2006/main">
             <a:r>
-              <a:rPr sz="1650" b="1">
-                <a:solidFill>
-                  <a:srgbClr val="181818"/>
-                </a:solidFill>
-                <a:latin typeface="Inter"/>
-                <a:ea typeface="Inter"/>
-                <a:cs typeface="Inter"/>
-              </a:rPr>
-              <a:t>Name the pain</a:t>
+              <a:rPr sz="1350">
+                <a:solidFill>
+                  <a:srgbClr val="282828"/>
+                </a:solidFill>
+                <a:latin typeface="Inter"/>
+                <a:ea typeface="Inter"/>
+                <a:cs typeface="Inter"/>
+              </a:rPr>
+              <a:t>Reframed the project into a Slack-native pre-meeting crux finder.</a:t>
             </a:r>
           </a:p>
         </p:txBody>
@@ -8443,70 +8838,23 @@
           <p:cNvPr id="9" name="">
             <a:extLst xmlns:a="http://schemas.openxmlformats.org/drawingml/2006/main">
               <a:ext uri="{FF2B5EF4-FFF2-40B4-BE49-F238E27FC236}">
-                <a16:creationId xmlns:a16="http://schemas.microsoft.com/office/drawing/2014/main" id="{49799A3F-BBFC-4481-901A-7E44719AE213}"/>
-              </a:ext>
-            </a:extLst>
-          </p:cNvPr>
-          <p:cNvSpPr>
-            <a:spLocks xmlns:a="http://schemas.openxmlformats.org/drawingml/2006/main" noGrp="1"/>
-          </p:cNvSpPr>
-          <p:nvPr/>
-        </p:nvSpPr>
-        <p:spPr>
-          <a:xfrm xmlns:a="http://schemas.openxmlformats.org/drawingml/2006/main">
-            <a:off x="1066800" y="3562350"/>
-            <a:ext cx="1714500" cy="514350"/>
-          </a:xfrm>
-          <a:prstGeom xmlns:a="http://schemas.openxmlformats.org/drawingml/2006/main" prst="rect">
-            <a:avLst/>
-          </a:prstGeom>
-          <a:noFill xmlns:a="http://schemas.openxmlformats.org/drawingml/2006/main"/>
-          <a:ln xmlns:a="http://schemas.openxmlformats.org/drawingml/2006/main" w="0">
-            <a:noFill/>
-          </a:ln>
-        </p:spPr>
-        <p:txBody>
-          <a:bodyPr xmlns:a="http://schemas.openxmlformats.org/drawingml/2006/main" wrap="square" lIns="38100" tIns="38100" rIns="38100" bIns="38100">
-            <a:noAutofit/>
-          </a:bodyPr>
-          <a:lstStyle xmlns:a="http://schemas.openxmlformats.org/drawingml/2006/main"/>
-          <a:p xmlns:a="http://schemas.openxmlformats.org/drawingml/2006/main">
-            <a:r>
-              <a:rPr sz="1275">
-                <a:solidFill>
-                  <a:srgbClr val="282828"/>
-                </a:solidFill>
-                <a:latin typeface="Inter"/>
-                <a:ea typeface="Inter"/>
-                <a:cs typeface="Inter"/>
-              </a:rPr>
-              <a:t>Meetings waste time resolving vague assumptions.</a:t>
-            </a:r>
-          </a:p>
-        </p:txBody>
-      </p:sp>
-      <p:sp>
-        <p:nvSpPr>
-          <p:cNvPr id="10" name="">
-            <a:extLst xmlns:a="http://schemas.openxmlformats.org/drawingml/2006/main">
-              <a:ext uri="{FF2B5EF4-FFF2-40B4-BE49-F238E27FC236}">
-                <a16:creationId xmlns:a16="http://schemas.microsoft.com/office/drawing/2014/main" id="{9982D9EA-016E-4611-BB48-EA77B34BBC90}"/>
-              </a:ext>
-            </a:extLst>
-          </p:cNvPr>
-          <p:cNvSpPr>
-            <a:spLocks xmlns:a="http://schemas.openxmlformats.org/drawingml/2006/main" noGrp="1"/>
-          </p:cNvSpPr>
-          <p:nvPr/>
-        </p:nvSpPr>
-        <p:spPr>
-          <a:xfrm xmlns:a="http://schemas.openxmlformats.org/drawingml/2006/main">
-            <a:off x="3524250" y="2324100"/>
-            <a:ext cx="2247900" cy="2000250"/>
+                <a16:creationId xmlns:a16="http://schemas.microsoft.com/office/drawing/2014/main" id="{DD97560D-ADFC-495C-9CEF-63108A66AA76}"/>
+              </a:ext>
+            </a:extLst>
+          </p:cNvPr>
+          <p:cNvSpPr>
+            <a:spLocks xmlns:a="http://schemas.openxmlformats.org/drawingml/2006/main" noGrp="1"/>
+          </p:cNvSpPr>
+          <p:nvPr/>
+        </p:nvSpPr>
+        <p:spPr>
+          <a:xfrm xmlns:a="http://schemas.openxmlformats.org/drawingml/2006/main">
+            <a:off x="5829300" y="2247900"/>
+            <a:ext cx="4762500" cy="1314450"/>
           </a:xfrm>
           <a:prstGeom xmlns:a="http://schemas.openxmlformats.org/drawingml/2006/main" prst="roundRect">
             <a:avLst>
-              <a:gd name="adj" fmla="val 3810"/>
+              <a:gd name="adj" fmla="val 5797"/>
             </a:avLst>
           </a:prstGeom>
           <a:solidFill xmlns:a="http://schemas.openxmlformats.org/drawingml/2006/main">
@@ -8521,22 +8869,69 @@
       </p:sp>
       <p:sp>
         <p:nvSpPr>
+          <p:cNvPr id="10" name="">
+            <a:extLst xmlns:a="http://schemas.openxmlformats.org/drawingml/2006/main">
+              <a:ext uri="{FF2B5EF4-FFF2-40B4-BE49-F238E27FC236}">
+                <a16:creationId xmlns:a16="http://schemas.microsoft.com/office/drawing/2014/main" id="{C60EAAE5-7199-4073-BA9C-659AD235A982}"/>
+              </a:ext>
+            </a:extLst>
+          </p:cNvPr>
+          <p:cNvSpPr>
+            <a:spLocks xmlns:a="http://schemas.openxmlformats.org/drawingml/2006/main" noGrp="1"/>
+          </p:cNvSpPr>
+          <p:nvPr/>
+        </p:nvSpPr>
+        <p:spPr>
+          <a:xfrm xmlns:a="http://schemas.openxmlformats.org/drawingml/2006/main">
+            <a:off x="6076950" y="2457450"/>
+            <a:ext cx="4267200" cy="266700"/>
+          </a:xfrm>
+          <a:prstGeom xmlns:a="http://schemas.openxmlformats.org/drawingml/2006/main" prst="rect">
+            <a:avLst/>
+          </a:prstGeom>
+          <a:noFill xmlns:a="http://schemas.openxmlformats.org/drawingml/2006/main"/>
+          <a:ln xmlns:a="http://schemas.openxmlformats.org/drawingml/2006/main" w="0">
+            <a:noFill/>
+          </a:ln>
+        </p:spPr>
+        <p:txBody>
+          <a:bodyPr xmlns:a="http://schemas.openxmlformats.org/drawingml/2006/main" wrap="square" lIns="38100" tIns="38100" rIns="38100" bIns="38100">
+            <a:noAutofit/>
+          </a:bodyPr>
+          <a:lstStyle xmlns:a="http://schemas.openxmlformats.org/drawingml/2006/main"/>
+          <a:p xmlns:a="http://schemas.openxmlformats.org/drawingml/2006/main">
+            <a:r>
+              <a:rPr sz="1650" b="1">
+                <a:solidFill>
+                  <a:srgbClr val="181818"/>
+                </a:solidFill>
+                <a:latin typeface="Inter"/>
+                <a:ea typeface="Inter"/>
+                <a:cs typeface="Inter"/>
+              </a:rPr>
+              <a:t>Orchestrator + Slack path</a:t>
+            </a:r>
+          </a:p>
+        </p:txBody>
+      </p:sp>
+      <p:sp>
+        <p:nvSpPr>
           <p:cNvPr id="11" name="">
             <a:extLst xmlns:a="http://schemas.openxmlformats.org/drawingml/2006/main">
               <a:ext uri="{FF2B5EF4-FFF2-40B4-BE49-F238E27FC236}">
-                <a16:creationId xmlns:a16="http://schemas.microsoft.com/office/drawing/2014/main" id="{861B7834-D345-4A82-A3A8-369F8FCD8EEB}"/>
-              </a:ext>
-            </a:extLst>
-          </p:cNvPr>
-          <p:cNvSpPr>
-            <a:spLocks xmlns:a="http://schemas.openxmlformats.org/drawingml/2006/main" noGrp="1"/>
-          </p:cNvSpPr>
-          <p:nvPr/>
-        </p:nvSpPr>
-        <p:spPr>
-          <a:xfrm xmlns:a="http://schemas.openxmlformats.org/drawingml/2006/main">
-            <a:off x="3752850" y="2552700"/>
-            <a:ext cx="457200" cy="438150"/>
+                <a16:creationId xmlns:a16="http://schemas.microsoft.com/office/drawing/2014/main" id="{19F8F2B0-C578-48CB-A552-D126A0D7CD6A}"/>
+              </a:ext>
+            </a:extLst>
+          </p:cNvPr>
+          <p:cNvSpPr>
+            <a:spLocks xmlns:a="http://schemas.openxmlformats.org/drawingml/2006/main" noGrp="1"/>
+          </p:cNvSpPr>
+          <p:nvPr/>
+        </p:nvSpPr>
+        <p:spPr>
+          <a:xfrm xmlns:a="http://schemas.openxmlformats.org/drawingml/2006/main">
+            <a:off x="6076950" y="2857500"/>
+            <a:ext cx="4267200" cy="571500"/>
           </a:xfrm>
           <a:prstGeom xmlns:a="http://schemas.openxmlformats.org/drawingml/2006/main" prst="rect">
             <a:avLst/>
@@ -8553,15 +8948,15 @@
           <a:lstStyle xmlns:a="http://schemas.openxmlformats.org/drawingml/2006/main"/>
           <a:p xmlns:a="http://schemas.openxmlformats.org/drawingml/2006/main">
             <a:r>
-              <a:rPr sz="3150" b="1">
-                <a:solidFill>
-                  <a:srgbClr val="181818"/>
-                </a:solidFill>
-                <a:latin typeface="Inter"/>
-                <a:ea typeface="Inter"/>
-                <a:cs typeface="Inter"/>
-              </a:rPr>
-              <a:t>2</a:t>
+              <a:rPr sz="1350">
+                <a:solidFill>
+                  <a:srgbClr val="282828"/>
+                </a:solidFill>
+                <a:latin typeface="Inter"/>
+                <a:ea typeface="Inter"/>
+                <a:cs typeface="Inter"/>
+              </a:rPr>
+              <a:t>Built the transient orchestrator and free-form DM routing on the OpenAI Agents SDK.</a:t>
             </a:r>
           </a:p>
         </p:txBody>
@@ -8571,117 +8966,23 @@
           <p:cNvPr id="12" name="">
             <a:extLst xmlns:a="http://schemas.openxmlformats.org/drawingml/2006/main">
               <a:ext uri="{FF2B5EF4-FFF2-40B4-BE49-F238E27FC236}">
-                <a16:creationId xmlns:a16="http://schemas.microsoft.com/office/drawing/2014/main" id="{84C68244-E159-433F-9A12-96151B185B80}"/>
-              </a:ext>
-            </a:extLst>
-          </p:cNvPr>
-          <p:cNvSpPr>
-            <a:spLocks xmlns:a="http://schemas.openxmlformats.org/drawingml/2006/main" noGrp="1"/>
-          </p:cNvSpPr>
-          <p:nvPr/>
-        </p:nvSpPr>
-        <p:spPr>
-          <a:xfrm xmlns:a="http://schemas.openxmlformats.org/drawingml/2006/main">
-            <a:off x="3752850" y="3143250"/>
-            <a:ext cx="1714500" cy="247650"/>
-          </a:xfrm>
-          <a:prstGeom xmlns:a="http://schemas.openxmlformats.org/drawingml/2006/main" prst="rect">
-            <a:avLst/>
-          </a:prstGeom>
-          <a:noFill xmlns:a="http://schemas.openxmlformats.org/drawingml/2006/main"/>
-          <a:ln xmlns:a="http://schemas.openxmlformats.org/drawingml/2006/main" w="0">
-            <a:noFill/>
-          </a:ln>
-        </p:spPr>
-        <p:txBody>
-          <a:bodyPr xmlns:a="http://schemas.openxmlformats.org/drawingml/2006/main" wrap="square" lIns="38100" tIns="38100" rIns="38100" bIns="38100">
-            <a:noAutofit/>
-          </a:bodyPr>
-          <a:lstStyle xmlns:a="http://schemas.openxmlformats.org/drawingml/2006/main"/>
-          <a:p xmlns:a="http://schemas.openxmlformats.org/drawingml/2006/main">
-            <a:r>
-              <a:rPr sz="1650" b="1">
-                <a:solidFill>
-                  <a:srgbClr val="181818"/>
-                </a:solidFill>
-                <a:latin typeface="Inter"/>
-                <a:ea typeface="Inter"/>
-                <a:cs typeface="Inter"/>
-              </a:rPr>
-              <a:t>Start in Slack</a:t>
-            </a:r>
-          </a:p>
-        </p:txBody>
-      </p:sp>
-      <p:sp>
-        <p:nvSpPr>
-          <p:cNvPr id="13" name="">
-            <a:extLst xmlns:a="http://schemas.openxmlformats.org/drawingml/2006/main">
-              <a:ext uri="{FF2B5EF4-FFF2-40B4-BE49-F238E27FC236}">
-                <a16:creationId xmlns:a16="http://schemas.microsoft.com/office/drawing/2014/main" id="{9510B524-034F-4374-88BD-C09294FFE9AC}"/>
-              </a:ext>
-            </a:extLst>
-          </p:cNvPr>
-          <p:cNvSpPr>
-            <a:spLocks xmlns:a="http://schemas.openxmlformats.org/drawingml/2006/main" noGrp="1"/>
-          </p:cNvSpPr>
-          <p:nvPr/>
-        </p:nvSpPr>
-        <p:spPr>
-          <a:xfrm xmlns:a="http://schemas.openxmlformats.org/drawingml/2006/main">
-            <a:off x="3752850" y="3562350"/>
-            <a:ext cx="1714500" cy="514350"/>
-          </a:xfrm>
-          <a:prstGeom xmlns:a="http://schemas.openxmlformats.org/drawingml/2006/main" prst="rect">
-            <a:avLst/>
-          </a:prstGeom>
-          <a:noFill xmlns:a="http://schemas.openxmlformats.org/drawingml/2006/main"/>
-          <a:ln xmlns:a="http://schemas.openxmlformats.org/drawingml/2006/main" w="0">
-            <a:noFill/>
-          </a:ln>
-        </p:spPr>
-        <p:txBody>
-          <a:bodyPr xmlns:a="http://schemas.openxmlformats.org/drawingml/2006/main" wrap="square" lIns="38100" tIns="38100" rIns="38100" bIns="38100">
-            <a:noAutofit/>
-          </a:bodyPr>
-          <a:lstStyle xmlns:a="http://schemas.openxmlformats.org/drawingml/2006/main"/>
-          <a:p xmlns:a="http://schemas.openxmlformats.org/drawingml/2006/main">
-            <a:r>
-              <a:rPr sz="1275">
-                <a:solidFill>
-                  <a:srgbClr val="282828"/>
-                </a:solidFill>
-                <a:latin typeface="Inter"/>
-                <a:ea typeface="Inter"/>
-                <a:cs typeface="Inter"/>
-              </a:rPr>
-              <a:t>John asks Mochi to prep the Shopee creator mix.</a:t>
-            </a:r>
-          </a:p>
-        </p:txBody>
-      </p:sp>
-      <p:sp>
-        <p:nvSpPr>
-          <p:cNvPr id="14" name="">
-            <a:extLst xmlns:a="http://schemas.openxmlformats.org/drawingml/2006/main">
-              <a:ext uri="{FF2B5EF4-FFF2-40B4-BE49-F238E27FC236}">
-                <a16:creationId xmlns:a16="http://schemas.microsoft.com/office/drawing/2014/main" id="{15B388A6-BECA-47A3-8BA1-B2FF750404A2}"/>
-              </a:ext>
-            </a:extLst>
-          </p:cNvPr>
-          <p:cNvSpPr>
-            <a:spLocks xmlns:a="http://schemas.openxmlformats.org/drawingml/2006/main" noGrp="1"/>
-          </p:cNvSpPr>
-          <p:nvPr/>
-        </p:nvSpPr>
-        <p:spPr>
-          <a:xfrm xmlns:a="http://schemas.openxmlformats.org/drawingml/2006/main">
-            <a:off x="6210300" y="2324100"/>
-            <a:ext cx="2247900" cy="2000250"/>
+                <a16:creationId xmlns:a16="http://schemas.microsoft.com/office/drawing/2014/main" id="{74A3CAE7-27A4-4777-809A-66011EA27178}"/>
+              </a:ext>
+            </a:extLst>
+          </p:cNvPr>
+          <p:cNvSpPr>
+            <a:spLocks xmlns:a="http://schemas.openxmlformats.org/drawingml/2006/main" noGrp="1"/>
+          </p:cNvSpPr>
+          <p:nvPr/>
+        </p:nvSpPr>
+        <p:spPr>
+          <a:xfrm xmlns:a="http://schemas.openxmlformats.org/drawingml/2006/main">
+            <a:off x="838200" y="3714750"/>
+            <a:ext cx="4762500" cy="1314450"/>
           </a:xfrm>
           <a:prstGeom xmlns:a="http://schemas.openxmlformats.org/drawingml/2006/main" prst="roundRect">
             <a:avLst>
-              <a:gd name="adj" fmla="val 3810"/>
+              <a:gd name="adj" fmla="val 5797"/>
             </a:avLst>
           </a:prstGeom>
           <a:solidFill xmlns:a="http://schemas.openxmlformats.org/drawingml/2006/main">
@@ -8696,167 +8997,120 @@
       </p:sp>
       <p:sp>
         <p:nvSpPr>
+          <p:cNvPr id="13" name="">
+            <a:extLst xmlns:a="http://schemas.openxmlformats.org/drawingml/2006/main">
+              <a:ext uri="{FF2B5EF4-FFF2-40B4-BE49-F238E27FC236}">
+                <a16:creationId xmlns:a16="http://schemas.microsoft.com/office/drawing/2014/main" id="{61B0AB8C-15FE-41D0-9263-1DABE349472B}"/>
+              </a:ext>
+            </a:extLst>
+          </p:cNvPr>
+          <p:cNvSpPr>
+            <a:spLocks xmlns:a="http://schemas.openxmlformats.org/drawingml/2006/main" noGrp="1"/>
+          </p:cNvSpPr>
+          <p:nvPr/>
+        </p:nvSpPr>
+        <p:spPr>
+          <a:xfrm xmlns:a="http://schemas.openxmlformats.org/drawingml/2006/main">
+            <a:off x="1085850" y="3924300"/>
+            <a:ext cx="4267200" cy="266700"/>
+          </a:xfrm>
+          <a:prstGeom xmlns:a="http://schemas.openxmlformats.org/drawingml/2006/main" prst="rect">
+            <a:avLst/>
+          </a:prstGeom>
+          <a:noFill xmlns:a="http://schemas.openxmlformats.org/drawingml/2006/main"/>
+          <a:ln xmlns:a="http://schemas.openxmlformats.org/drawingml/2006/main" w="0">
+            <a:noFill/>
+          </a:ln>
+        </p:spPr>
+        <p:txBody>
+          <a:bodyPr xmlns:a="http://schemas.openxmlformats.org/drawingml/2006/main" wrap="square" lIns="38100" tIns="38100" rIns="38100" bIns="38100">
+            <a:noAutofit/>
+          </a:bodyPr>
+          <a:lstStyle xmlns:a="http://schemas.openxmlformats.org/drawingml/2006/main"/>
+          <a:p xmlns:a="http://schemas.openxmlformats.org/drawingml/2006/main">
+            <a:r>
+              <a:rPr sz="1650" b="1">
+                <a:solidFill>
+                  <a:srgbClr val="181818"/>
+                </a:solidFill>
+                <a:latin typeface="Inter"/>
+                <a:ea typeface="Inter"/>
+                <a:cs typeface="Inter"/>
+              </a:rPr>
+              <a:t>Docs in sync with code</a:t>
+            </a:r>
+          </a:p>
+        </p:txBody>
+      </p:sp>
+      <p:sp>
+        <p:nvSpPr>
+          <p:cNvPr id="14" name="">
+            <a:extLst xmlns:a="http://schemas.openxmlformats.org/drawingml/2006/main">
+              <a:ext uri="{FF2B5EF4-FFF2-40B4-BE49-F238E27FC236}">
+                <a16:creationId xmlns:a16="http://schemas.microsoft.com/office/drawing/2014/main" id="{EC5B0689-597E-4B8A-9273-61006849CDFB}"/>
+              </a:ext>
+            </a:extLst>
+          </p:cNvPr>
+          <p:cNvSpPr>
+            <a:spLocks xmlns:a="http://schemas.openxmlformats.org/drawingml/2006/main" noGrp="1"/>
+          </p:cNvSpPr>
+          <p:nvPr/>
+        </p:nvSpPr>
+        <p:spPr>
+          <a:xfrm xmlns:a="http://schemas.openxmlformats.org/drawingml/2006/main">
+            <a:off x="1085850" y="4324350"/>
+            <a:ext cx="4267200" cy="571500"/>
+          </a:xfrm>
+          <a:prstGeom xmlns:a="http://schemas.openxmlformats.org/drawingml/2006/main" prst="rect">
+            <a:avLst/>
+          </a:prstGeom>
+          <a:noFill xmlns:a="http://schemas.openxmlformats.org/drawingml/2006/main"/>
+          <a:ln xmlns:a="http://schemas.openxmlformats.org/drawingml/2006/main" w="0">
+            <a:noFill/>
+          </a:ln>
+        </p:spPr>
+        <p:txBody>
+          <a:bodyPr xmlns:a="http://schemas.openxmlformats.org/drawingml/2006/main" wrap="square" lIns="38100" tIns="38100" rIns="38100" bIns="38100">
+            <a:noAutofit/>
+          </a:bodyPr>
+          <a:lstStyle xmlns:a="http://schemas.openxmlformats.org/drawingml/2006/main"/>
+          <a:p xmlns:a="http://schemas.openxmlformats.org/drawingml/2006/main">
+            <a:r>
+              <a:rPr sz="1350">
+                <a:solidFill>
+                  <a:srgbClr val="282828"/>
+                </a:solidFill>
+                <a:latin typeface="Inter"/>
+                <a:ea typeface="Inter"/>
+                <a:cs typeface="Inter"/>
+              </a:rPr>
+              <a:t>Kept README, specs, and implementation aligned as the design changed.</a:t>
+            </a:r>
+          </a:p>
+        </p:txBody>
+      </p:sp>
+      <p:sp>
+        <p:nvSpPr>
           <p:cNvPr id="15" name="">
             <a:extLst xmlns:a="http://schemas.openxmlformats.org/drawingml/2006/main">
               <a:ext uri="{FF2B5EF4-FFF2-40B4-BE49-F238E27FC236}">
-                <a16:creationId xmlns:a16="http://schemas.microsoft.com/office/drawing/2014/main" id="{6981D7AF-D337-4345-BB7C-BB7B1AF9113A}"/>
-              </a:ext>
-            </a:extLst>
-          </p:cNvPr>
-          <p:cNvSpPr>
-            <a:spLocks xmlns:a="http://schemas.openxmlformats.org/drawingml/2006/main" noGrp="1"/>
-          </p:cNvSpPr>
-          <p:nvPr/>
-        </p:nvSpPr>
-        <p:spPr>
-          <a:xfrm xmlns:a="http://schemas.openxmlformats.org/drawingml/2006/main">
-            <a:off x="6438900" y="2552700"/>
-            <a:ext cx="457200" cy="438150"/>
-          </a:xfrm>
-          <a:prstGeom xmlns:a="http://schemas.openxmlformats.org/drawingml/2006/main" prst="rect">
-            <a:avLst/>
-          </a:prstGeom>
-          <a:noFill xmlns:a="http://schemas.openxmlformats.org/drawingml/2006/main"/>
-          <a:ln xmlns:a="http://schemas.openxmlformats.org/drawingml/2006/main" w="0">
-            <a:noFill/>
-          </a:ln>
-        </p:spPr>
-        <p:txBody>
-          <a:bodyPr xmlns:a="http://schemas.openxmlformats.org/drawingml/2006/main" wrap="square" lIns="38100" tIns="38100" rIns="38100" bIns="38100">
-            <a:noAutofit/>
-          </a:bodyPr>
-          <a:lstStyle xmlns:a="http://schemas.openxmlformats.org/drawingml/2006/main"/>
-          <a:p xmlns:a="http://schemas.openxmlformats.org/drawingml/2006/main">
-            <a:r>
-              <a:rPr sz="3150" b="1">
-                <a:solidFill>
-                  <a:srgbClr val="181818"/>
-                </a:solidFill>
-                <a:latin typeface="Inter"/>
-                <a:ea typeface="Inter"/>
-                <a:cs typeface="Inter"/>
-              </a:rPr>
-              <a:t>3</a:t>
-            </a:r>
-          </a:p>
-        </p:txBody>
-      </p:sp>
-      <p:sp>
-        <p:nvSpPr>
-          <p:cNvPr id="16" name="">
-            <a:extLst xmlns:a="http://schemas.openxmlformats.org/drawingml/2006/main">
-              <a:ext uri="{FF2B5EF4-FFF2-40B4-BE49-F238E27FC236}">
-                <a16:creationId xmlns:a16="http://schemas.microsoft.com/office/drawing/2014/main" id="{E472E170-DC54-455D-A980-C5A741664587}"/>
-              </a:ext>
-            </a:extLst>
-          </p:cNvPr>
-          <p:cNvSpPr>
-            <a:spLocks xmlns:a="http://schemas.openxmlformats.org/drawingml/2006/main" noGrp="1"/>
-          </p:cNvSpPr>
-          <p:nvPr/>
-        </p:nvSpPr>
-        <p:spPr>
-          <a:xfrm xmlns:a="http://schemas.openxmlformats.org/drawingml/2006/main">
-            <a:off x="6438900" y="3143250"/>
-            <a:ext cx="1714500" cy="247650"/>
-          </a:xfrm>
-          <a:prstGeom xmlns:a="http://schemas.openxmlformats.org/drawingml/2006/main" prst="rect">
-            <a:avLst/>
-          </a:prstGeom>
-          <a:noFill xmlns:a="http://schemas.openxmlformats.org/drawingml/2006/main"/>
-          <a:ln xmlns:a="http://schemas.openxmlformats.org/drawingml/2006/main" w="0">
-            <a:noFill/>
-          </a:ln>
-        </p:spPr>
-        <p:txBody>
-          <a:bodyPr xmlns:a="http://schemas.openxmlformats.org/drawingml/2006/main" wrap="square" lIns="38100" tIns="38100" rIns="38100" bIns="38100">
-            <a:noAutofit/>
-          </a:bodyPr>
-          <a:lstStyle xmlns:a="http://schemas.openxmlformats.org/drawingml/2006/main"/>
-          <a:p xmlns:a="http://schemas.openxmlformats.org/drawingml/2006/main">
-            <a:r>
-              <a:rPr sz="1650" b="1">
-                <a:solidFill>
-                  <a:srgbClr val="181818"/>
-                </a:solidFill>
-                <a:latin typeface="Inter"/>
-                <a:ea typeface="Inter"/>
-                <a:cs typeface="Inter"/>
-              </a:rPr>
-              <a:t>Agents fan out</a:t>
-            </a:r>
-          </a:p>
-        </p:txBody>
-      </p:sp>
-      <p:sp>
-        <p:nvSpPr>
-          <p:cNvPr id="17" name="">
-            <a:extLst xmlns:a="http://schemas.openxmlformats.org/drawingml/2006/main">
-              <a:ext uri="{FF2B5EF4-FFF2-40B4-BE49-F238E27FC236}">
-                <a16:creationId xmlns:a16="http://schemas.microsoft.com/office/drawing/2014/main" id="{980891FF-FA1B-4462-A5A7-816869C909B3}"/>
-              </a:ext>
-            </a:extLst>
-          </p:cNvPr>
-          <p:cNvSpPr>
-            <a:spLocks xmlns:a="http://schemas.openxmlformats.org/drawingml/2006/main" noGrp="1"/>
-          </p:cNvSpPr>
-          <p:nvPr/>
-        </p:nvSpPr>
-        <p:spPr>
-          <a:xfrm xmlns:a="http://schemas.openxmlformats.org/drawingml/2006/main">
-            <a:off x="6438900" y="3562350"/>
-            <a:ext cx="1714500" cy="514350"/>
-          </a:xfrm>
-          <a:prstGeom xmlns:a="http://schemas.openxmlformats.org/drawingml/2006/main" prst="rect">
-            <a:avLst/>
-          </a:prstGeom>
-          <a:noFill xmlns:a="http://schemas.openxmlformats.org/drawingml/2006/main"/>
-          <a:ln xmlns:a="http://schemas.openxmlformats.org/drawingml/2006/main" w="0">
-            <a:noFill/>
-          </a:ln>
-        </p:spPr>
-        <p:txBody>
-          <a:bodyPr xmlns:a="http://schemas.openxmlformats.org/drawingml/2006/main" wrap="square" lIns="38100" tIns="38100" rIns="38100" bIns="38100">
-            <a:noAutofit/>
-          </a:bodyPr>
-          <a:lstStyle xmlns:a="http://schemas.openxmlformats.org/drawingml/2006/main"/>
-          <a:p xmlns:a="http://schemas.openxmlformats.org/drawingml/2006/main">
-            <a:r>
-              <a:rPr sz="1275">
-                <a:solidFill>
-                  <a:srgbClr val="282828"/>
-                </a:solidFill>
-                <a:latin typeface="Inter"/>
-                <a:ea typeface="Inter"/>
-                <a:cs typeface="Inter"/>
-              </a:rPr>
-              <a:t>Persistent sessions collect each stakeholder stance.</a:t>
-            </a:r>
-          </a:p>
-        </p:txBody>
-      </p:sp>
-      <p:sp>
-        <p:nvSpPr>
-          <p:cNvPr id="18" name="">
-            <a:extLst xmlns:a="http://schemas.openxmlformats.org/drawingml/2006/main">
-              <a:ext uri="{FF2B5EF4-FFF2-40B4-BE49-F238E27FC236}">
-                <a16:creationId xmlns:a16="http://schemas.microsoft.com/office/drawing/2014/main" id="{819EAEFE-318E-40B5-A0DF-2AB1C97DDE74}"/>
-              </a:ext>
-            </a:extLst>
-          </p:cNvPr>
-          <p:cNvSpPr>
-            <a:spLocks xmlns:a="http://schemas.openxmlformats.org/drawingml/2006/main" noGrp="1"/>
-          </p:cNvSpPr>
-          <p:nvPr/>
-        </p:nvSpPr>
-        <p:spPr>
-          <a:xfrm xmlns:a="http://schemas.openxmlformats.org/drawingml/2006/main">
-            <a:off x="8896350" y="2324100"/>
-            <a:ext cx="2247900" cy="2000250"/>
+                <a16:creationId xmlns:a16="http://schemas.microsoft.com/office/drawing/2014/main" id="{7763C3F5-DC81-4A23-95C0-1638B80F017A}"/>
+              </a:ext>
+            </a:extLst>
+          </p:cNvPr>
+          <p:cNvSpPr>
+            <a:spLocks xmlns:a="http://schemas.openxmlformats.org/drawingml/2006/main" noGrp="1"/>
+          </p:cNvSpPr>
+          <p:nvPr/>
+        </p:nvSpPr>
+        <p:spPr>
+          <a:xfrm xmlns:a="http://schemas.openxmlformats.org/drawingml/2006/main">
+            <a:off x="5829300" y="3714750"/>
+            <a:ext cx="4762500" cy="1314450"/>
           </a:xfrm>
           <a:prstGeom xmlns:a="http://schemas.openxmlformats.org/drawingml/2006/main" prst="roundRect">
             <a:avLst>
-              <a:gd name="adj" fmla="val 3810"/>
+              <a:gd name="adj" fmla="val 5797"/>
             </a:avLst>
           </a:prstGeom>
           <a:solidFill xmlns:a="http://schemas.openxmlformats.org/drawingml/2006/main">
@@ -8871,22 +9125,148 @@
       </p:sp>
       <p:sp>
         <p:nvSpPr>
+          <p:cNvPr id="16" name="">
+            <a:extLst xmlns:a="http://schemas.openxmlformats.org/drawingml/2006/main">
+              <a:ext uri="{FF2B5EF4-FFF2-40B4-BE49-F238E27FC236}">
+                <a16:creationId xmlns:a16="http://schemas.microsoft.com/office/drawing/2014/main" id="{6683D1BF-C67A-4CFA-B732-F0F71BE8EF30}"/>
+              </a:ext>
+            </a:extLst>
+          </p:cNvPr>
+          <p:cNvSpPr>
+            <a:spLocks xmlns:a="http://schemas.openxmlformats.org/drawingml/2006/main" noGrp="1"/>
+          </p:cNvSpPr>
+          <p:nvPr/>
+        </p:nvSpPr>
+        <p:spPr>
+          <a:xfrm xmlns:a="http://schemas.openxmlformats.org/drawingml/2006/main">
+            <a:off x="6076950" y="3924300"/>
+            <a:ext cx="4267200" cy="266700"/>
+          </a:xfrm>
+          <a:prstGeom xmlns:a="http://schemas.openxmlformats.org/drawingml/2006/main" prst="rect">
+            <a:avLst/>
+          </a:prstGeom>
+          <a:noFill xmlns:a="http://schemas.openxmlformats.org/drawingml/2006/main"/>
+          <a:ln xmlns:a="http://schemas.openxmlformats.org/drawingml/2006/main" w="0">
+            <a:noFill/>
+          </a:ln>
+        </p:spPr>
+        <p:txBody>
+          <a:bodyPr xmlns:a="http://schemas.openxmlformats.org/drawingml/2006/main" wrap="square" lIns="38100" tIns="38100" rIns="38100" bIns="38100">
+            <a:noAutofit/>
+          </a:bodyPr>
+          <a:lstStyle xmlns:a="http://schemas.openxmlformats.org/drawingml/2006/main"/>
+          <a:p xmlns:a="http://schemas.openxmlformats.org/drawingml/2006/main">
+            <a:r>
+              <a:rPr sz="1650" b="1">
+                <a:solidFill>
+                  <a:srgbClr val="181818"/>
+                </a:solidFill>
+                <a:latin typeface="Inter"/>
+                <a:ea typeface="Inter"/>
+                <a:cs typeface="Inter"/>
+              </a:rPr>
+              <a:t>Tests + hardening</a:t>
+            </a:r>
+          </a:p>
+        </p:txBody>
+      </p:sp>
+      <p:sp>
+        <p:nvSpPr>
+          <p:cNvPr id="17" name="">
+            <a:extLst xmlns:a="http://schemas.openxmlformats.org/drawingml/2006/main">
+              <a:ext uri="{FF2B5EF4-FFF2-40B4-BE49-F238E27FC236}">
+                <a16:creationId xmlns:a16="http://schemas.microsoft.com/office/drawing/2014/main" id="{089D3B8C-E426-472E-9712-E4B37303152D}"/>
+              </a:ext>
+            </a:extLst>
+          </p:cNvPr>
+          <p:cNvSpPr>
+            <a:spLocks xmlns:a="http://schemas.openxmlformats.org/drawingml/2006/main" noGrp="1"/>
+          </p:cNvSpPr>
+          <p:nvPr/>
+        </p:nvSpPr>
+        <p:spPr>
+          <a:xfrm xmlns:a="http://schemas.openxmlformats.org/drawingml/2006/main">
+            <a:off x="6076950" y="4324350"/>
+            <a:ext cx="4267200" cy="571500"/>
+          </a:xfrm>
+          <a:prstGeom xmlns:a="http://schemas.openxmlformats.org/drawingml/2006/main" prst="rect">
+            <a:avLst/>
+          </a:prstGeom>
+          <a:noFill xmlns:a="http://schemas.openxmlformats.org/drawingml/2006/main"/>
+          <a:ln xmlns:a="http://schemas.openxmlformats.org/drawingml/2006/main" w="0">
+            <a:noFill/>
+          </a:ln>
+        </p:spPr>
+        <p:txBody>
+          <a:bodyPr xmlns:a="http://schemas.openxmlformats.org/drawingml/2006/main" wrap="square" lIns="38100" tIns="38100" rIns="38100" bIns="38100">
+            <a:noAutofit/>
+          </a:bodyPr>
+          <a:lstStyle xmlns:a="http://schemas.openxmlformats.org/drawingml/2006/main"/>
+          <a:p xmlns:a="http://schemas.openxmlformats.org/drawingml/2006/main">
+            <a:r>
+              <a:rPr sz="1350">
+                <a:solidFill>
+                  <a:srgbClr val="282828"/>
+                </a:solidFill>
+                <a:latin typeface="Inter"/>
+                <a:ea typeface="Inter"/>
+                <a:cs typeface="Inter"/>
+              </a:rPr>
+              <a:t>Wrote 58 deterministic offline tests and hardened the demo fallback.</a:t>
+            </a:r>
+          </a:p>
+        </p:txBody>
+      </p:sp>
+      <p:sp>
+        <p:nvSpPr>
+          <p:cNvPr id="18" name="">
+            <a:extLst xmlns:a="http://schemas.openxmlformats.org/drawingml/2006/main">
+              <a:ext uri="{FF2B5EF4-FFF2-40B4-BE49-F238E27FC236}">
+                <a16:creationId xmlns:a16="http://schemas.microsoft.com/office/drawing/2014/main" id="{527AB77B-BD01-429B-BB17-22001B8F69DC}"/>
+              </a:ext>
+            </a:extLst>
+          </p:cNvPr>
+          <p:cNvSpPr>
+            <a:spLocks xmlns:a="http://schemas.openxmlformats.org/drawingml/2006/main" noGrp="1"/>
+          </p:cNvSpPr>
+          <p:nvPr/>
+        </p:nvSpPr>
+        <p:spPr>
+          <a:xfrm xmlns:a="http://schemas.openxmlformats.org/drawingml/2006/main">
+            <a:off x="838200" y="5295900"/>
+            <a:ext cx="9753600" cy="590550"/>
+          </a:xfrm>
+          <a:prstGeom xmlns:a="http://schemas.openxmlformats.org/drawingml/2006/main" prst="roundRect">
+            <a:avLst>
+              <a:gd name="adj" fmla="val 12903"/>
+            </a:avLst>
+          </a:prstGeom>
+          <a:solidFill xmlns:a="http://schemas.openxmlformats.org/drawingml/2006/main">
+            <a:srgbClr val="17191A"/>
+          </a:solidFill>
+          <a:ln xmlns:a="http://schemas.openxmlformats.org/drawingml/2006/main" w="0">
+            <a:noFill/>
+          </a:ln>
+        </p:spPr>
+      </p:sp>
+      <p:sp>
+        <p:nvSpPr>
           <p:cNvPr id="19" name="">
             <a:extLst xmlns:a="http://schemas.openxmlformats.org/drawingml/2006/main">
               <a:ext uri="{FF2B5EF4-FFF2-40B4-BE49-F238E27FC236}">
-                <a16:creationId xmlns:a16="http://schemas.microsoft.com/office/drawing/2014/main" id="{5FE97297-C237-4837-9556-9206B94EA701}"/>
-              </a:ext>
-            </a:extLst>
-          </p:cNvPr>
-          <p:cNvSpPr>
-            <a:spLocks xmlns:a="http://schemas.openxmlformats.org/drawingml/2006/main" noGrp="1"/>
-          </p:cNvSpPr>
-          <p:nvPr/>
-        </p:nvSpPr>
-        <p:spPr>
-          <a:xfrm xmlns:a="http://schemas.openxmlformats.org/drawingml/2006/main">
-            <a:off x="9124950" y="2552700"/>
-            <a:ext cx="457200" cy="438150"/>
+                <a16:creationId xmlns:a16="http://schemas.microsoft.com/office/drawing/2014/main" id="{35114D75-5D65-472C-8333-B152B17BBF58}"/>
+              </a:ext>
+            </a:extLst>
+          </p:cNvPr>
+          <p:cNvSpPr>
+            <a:spLocks xmlns:a="http://schemas.openxmlformats.org/drawingml/2006/main" noGrp="1"/>
+          </p:cNvSpPr>
+          <p:nvPr/>
+        </p:nvSpPr>
+        <p:spPr>
+          <a:xfrm xmlns:a="http://schemas.openxmlformats.org/drawingml/2006/main">
+            <a:off x="1143000" y="5505450"/>
+            <a:ext cx="1714500" cy="171450"/>
           </a:xfrm>
           <a:prstGeom xmlns:a="http://schemas.openxmlformats.org/drawingml/2006/main" prst="rect">
             <a:avLst/>
@@ -8903,15 +9283,15 @@
           <a:lstStyle xmlns:a="http://schemas.openxmlformats.org/drawingml/2006/main"/>
           <a:p xmlns:a="http://schemas.openxmlformats.org/drawingml/2006/main">
             <a:r>
-              <a:rPr sz="3150" b="1">
-                <a:solidFill>
-                  <a:srgbClr val="181818"/>
-                </a:solidFill>
-                <a:latin typeface="Inter"/>
-                <a:ea typeface="Inter"/>
-                <a:cs typeface="Inter"/>
-              </a:rPr>
-              <a:t>4</a:t>
+              <a:rPr sz="975" b="1">
+                <a:solidFill>
+                  <a:srgbClr val="BFC5C9"/>
+                </a:solidFill>
+                <a:latin typeface="Inter"/>
+                <a:ea typeface="Inter"/>
+                <a:cs typeface="Inter"/>
+              </a:rPr>
+              <a:t>Built with Codex</a:t>
             </a:r>
           </a:p>
         </p:txBody>
@@ -8921,19 +9301,19 @@
           <p:cNvPr id="20" name="">
             <a:extLst xmlns:a="http://schemas.openxmlformats.org/drawingml/2006/main">
               <a:ext uri="{FF2B5EF4-FFF2-40B4-BE49-F238E27FC236}">
-                <a16:creationId xmlns:a16="http://schemas.microsoft.com/office/drawing/2014/main" id="{087E97CE-0897-4BF9-BF95-04524734376D}"/>
-              </a:ext>
-            </a:extLst>
-          </p:cNvPr>
-          <p:cNvSpPr>
-            <a:spLocks xmlns:a="http://schemas.openxmlformats.org/drawingml/2006/main" noGrp="1"/>
-          </p:cNvSpPr>
-          <p:nvPr/>
-        </p:nvSpPr>
-        <p:spPr>
-          <a:xfrm xmlns:a="http://schemas.openxmlformats.org/drawingml/2006/main">
-            <a:off x="9124950" y="3143250"/>
-            <a:ext cx="1714500" cy="247650"/>
+                <a16:creationId xmlns:a16="http://schemas.microsoft.com/office/drawing/2014/main" id="{C7B92C3B-5812-4D10-AD54-F6EEF30B879B}"/>
+              </a:ext>
+            </a:extLst>
+          </p:cNvPr>
+          <p:cNvSpPr>
+            <a:spLocks xmlns:a="http://schemas.openxmlformats.org/drawingml/2006/main" noGrp="1"/>
+          </p:cNvSpPr>
+          <p:nvPr/>
+        </p:nvSpPr>
+        <p:spPr>
+          <a:xfrm xmlns:a="http://schemas.openxmlformats.org/drawingml/2006/main">
+            <a:off x="2971800" y="5486400"/>
+            <a:ext cx="7505700" cy="228600"/>
           </a:xfrm>
           <a:prstGeom xmlns:a="http://schemas.openxmlformats.org/drawingml/2006/main" prst="rect">
             <a:avLst/>
@@ -8950,186 +9330,15 @@
           <a:lstStyle xmlns:a="http://schemas.openxmlformats.org/drawingml/2006/main"/>
           <a:p xmlns:a="http://schemas.openxmlformats.org/drawingml/2006/main">
             <a:r>
-              <a:rPr sz="1650" b="1">
-                <a:solidFill>
-                  <a:srgbClr val="181818"/>
-                </a:solidFill>
-                <a:latin typeface="Inter"/>
-                <a:ea typeface="Inter"/>
-                <a:cs typeface="Inter"/>
-              </a:rPr>
-              <a:t>Show the brief</a:t>
-            </a:r>
-          </a:p>
-        </p:txBody>
-      </p:sp>
-      <p:sp>
-        <p:nvSpPr>
-          <p:cNvPr id="21" name="">
-            <a:extLst xmlns:a="http://schemas.openxmlformats.org/drawingml/2006/main">
-              <a:ext uri="{FF2B5EF4-FFF2-40B4-BE49-F238E27FC236}">
-                <a16:creationId xmlns:a16="http://schemas.microsoft.com/office/drawing/2014/main" id="{E55CFAE0-C84F-4308-8335-78E312137CD6}"/>
-              </a:ext>
-            </a:extLst>
-          </p:cNvPr>
-          <p:cNvSpPr>
-            <a:spLocks xmlns:a="http://schemas.openxmlformats.org/drawingml/2006/main" noGrp="1"/>
-          </p:cNvSpPr>
-          <p:nvPr/>
-        </p:nvSpPr>
-        <p:spPr>
-          <a:xfrm xmlns:a="http://schemas.openxmlformats.org/drawingml/2006/main">
-            <a:off x="9124950" y="3562350"/>
-            <a:ext cx="1714500" cy="514350"/>
-          </a:xfrm>
-          <a:prstGeom xmlns:a="http://schemas.openxmlformats.org/drawingml/2006/main" prst="rect">
-            <a:avLst/>
-          </a:prstGeom>
-          <a:noFill xmlns:a="http://schemas.openxmlformats.org/drawingml/2006/main"/>
-          <a:ln xmlns:a="http://schemas.openxmlformats.org/drawingml/2006/main" w="0">
-            <a:noFill/>
-          </a:ln>
-        </p:spPr>
-        <p:txBody>
-          <a:bodyPr xmlns:a="http://schemas.openxmlformats.org/drawingml/2006/main" wrap="square" lIns="38100" tIns="38100" rIns="38100" bIns="38100">
-            <a:noAutofit/>
-          </a:bodyPr>
-          <a:lstStyle xmlns:a="http://schemas.openxmlformats.org/drawingml/2006/main"/>
-          <a:p xmlns:a="http://schemas.openxmlformats.org/drawingml/2006/main">
-            <a:r>
-              <a:rPr sz="1275">
-                <a:solidFill>
-                  <a:srgbClr val="282828"/>
-                </a:solidFill>
-                <a:latin typeface="Inter"/>
-                <a:ea typeface="Inter"/>
-                <a:cs typeface="Inter"/>
-              </a:rPr>
-              <a:t>Nine items become two decisions.</a:t>
-            </a:r>
-          </a:p>
-        </p:txBody>
-      </p:sp>
-      <p:sp>
-        <p:nvSpPr>
-          <p:cNvPr id="22" name="">
-            <a:extLst xmlns:a="http://schemas.openxmlformats.org/drawingml/2006/main">
-              <a:ext uri="{FF2B5EF4-FFF2-40B4-BE49-F238E27FC236}">
-                <a16:creationId xmlns:a16="http://schemas.microsoft.com/office/drawing/2014/main" id="{B78043E1-0B8F-406E-8F94-3F12FCAB2977}"/>
-              </a:ext>
-            </a:extLst>
-          </p:cNvPr>
-          <p:cNvSpPr>
-            <a:spLocks xmlns:a="http://schemas.openxmlformats.org/drawingml/2006/main" noGrp="1"/>
-          </p:cNvSpPr>
-          <p:nvPr/>
-        </p:nvSpPr>
-        <p:spPr>
-          <a:xfrm xmlns:a="http://schemas.openxmlformats.org/drawingml/2006/main">
-            <a:off x="1047750" y="4762500"/>
-            <a:ext cx="9429750" cy="9525"/>
-          </a:xfrm>
-          <a:prstGeom xmlns:a="http://schemas.openxmlformats.org/drawingml/2006/main" prst="rect">
-            <a:avLst/>
-          </a:prstGeom>
-          <a:solidFill xmlns:a="http://schemas.openxmlformats.org/drawingml/2006/main">
-            <a:srgbClr val="EDEDED"/>
-          </a:solidFill>
-          <a:ln xmlns:a="http://schemas.openxmlformats.org/drawingml/2006/main" w="0">
-            <a:noFill/>
-          </a:ln>
-        </p:spPr>
-      </p:sp>
-      <p:sp>
-        <p:nvSpPr>
-          <p:cNvPr id="23" name="">
-            <a:extLst xmlns:a="http://schemas.openxmlformats.org/drawingml/2006/main">
-              <a:ext uri="{FF2B5EF4-FFF2-40B4-BE49-F238E27FC236}">
-                <a16:creationId xmlns:a16="http://schemas.microsoft.com/office/drawing/2014/main" id="{27325C97-5DA2-4315-B3D3-A4705B4342F7}"/>
-              </a:ext>
-            </a:extLst>
-          </p:cNvPr>
-          <p:cNvSpPr>
-            <a:spLocks xmlns:a="http://schemas.openxmlformats.org/drawingml/2006/main" noGrp="1"/>
-          </p:cNvSpPr>
-          <p:nvPr/>
-        </p:nvSpPr>
-        <p:spPr>
-          <a:xfrm xmlns:a="http://schemas.openxmlformats.org/drawingml/2006/main">
-            <a:off x="1066800" y="5067300"/>
-            <a:ext cx="1428750" cy="190500"/>
-          </a:xfrm>
-          <a:prstGeom xmlns:a="http://schemas.openxmlformats.org/drawingml/2006/main" prst="rect">
-            <a:avLst/>
-          </a:prstGeom>
-          <a:noFill xmlns:a="http://schemas.openxmlformats.org/drawingml/2006/main"/>
-          <a:ln xmlns:a="http://schemas.openxmlformats.org/drawingml/2006/main" w="0">
-            <a:noFill/>
-          </a:ln>
-        </p:spPr>
-        <p:txBody>
-          <a:bodyPr xmlns:a="http://schemas.openxmlformats.org/drawingml/2006/main" wrap="square" lIns="38100" tIns="38100" rIns="38100" bIns="38100">
-            <a:noAutofit/>
-          </a:bodyPr>
-          <a:lstStyle xmlns:a="http://schemas.openxmlformats.org/drawingml/2006/main"/>
-          <a:p xmlns:a="http://schemas.openxmlformats.org/drawingml/2006/main">
-            <a:r>
-              <a:rPr sz="1050" b="1">
-                <a:solidFill>
-                  <a:srgbClr val="5D605E"/>
-                </a:solidFill>
-                <a:latin typeface="Inter"/>
-                <a:ea typeface="Inter"/>
-                <a:cs typeface="Inter"/>
-              </a:rPr>
-              <a:t>Narrative turn</a:t>
-            </a:r>
-          </a:p>
-        </p:txBody>
-      </p:sp>
-      <p:sp>
-        <p:nvSpPr>
-          <p:cNvPr id="24" name="">
-            <a:extLst xmlns:a="http://schemas.openxmlformats.org/drawingml/2006/main">
-              <a:ext uri="{FF2B5EF4-FFF2-40B4-BE49-F238E27FC236}">
-                <a16:creationId xmlns:a16="http://schemas.microsoft.com/office/drawing/2014/main" id="{34D72AD4-873D-4029-B130-989FB52D67BA}"/>
-              </a:ext>
-            </a:extLst>
-          </p:cNvPr>
-          <p:cNvSpPr>
-            <a:spLocks xmlns:a="http://schemas.openxmlformats.org/drawingml/2006/main" noGrp="1"/>
-          </p:cNvSpPr>
-          <p:nvPr/>
-        </p:nvSpPr>
-        <p:spPr>
-          <a:xfrm xmlns:a="http://schemas.openxmlformats.org/drawingml/2006/main">
-            <a:off x="2571750" y="5029200"/>
-            <a:ext cx="7239000" cy="266700"/>
-          </a:xfrm>
-          <a:prstGeom xmlns:a="http://schemas.openxmlformats.org/drawingml/2006/main" prst="rect">
-            <a:avLst/>
-          </a:prstGeom>
-          <a:noFill xmlns:a="http://schemas.openxmlformats.org/drawingml/2006/main"/>
-          <a:ln xmlns:a="http://schemas.openxmlformats.org/drawingml/2006/main" w="0">
-            <a:noFill/>
-          </a:ln>
-        </p:spPr>
-        <p:txBody>
-          <a:bodyPr xmlns:a="http://schemas.openxmlformats.org/drawingml/2006/main" wrap="square" lIns="38100" tIns="38100" rIns="38100" bIns="38100">
-            <a:noAutofit/>
-          </a:bodyPr>
-          <a:lstStyle xmlns:a="http://schemas.openxmlformats.org/drawingml/2006/main"/>
-          <a:p xmlns:a="http://schemas.openxmlformats.org/drawingml/2006/main">
-            <a:r>
-              <a:rPr sz="1650" b="1">
-                <a:solidFill>
-                  <a:srgbClr val="181818"/>
-                </a:solidFill>
-                <a:latin typeface="Inter"/>
-                <a:ea typeface="Inter"/>
-                <a:cs typeface="Inter"/>
-              </a:rPr>
-              <a:t>A summarizer sees agreement. Mochi sees the assumptions that would waste the meeting.</a:t>
+              <a:rPr sz="1425" b="1">
+                <a:solidFill>
+                  <a:srgbClr val="FFFFFF"/>
+                </a:solidFill>
+                <a:latin typeface="Inter"/>
+                <a:ea typeface="Inter"/>
+                <a:cs typeface="Inter"/>
+              </a:rPr>
+              <a:t>From scenario pivot to test suite, Codex built alongside — not just autocomplete.</a:t>
             </a:r>
           </a:p>
         </p:txBody>
@@ -9137,7 +9346,7 @@
     </p:spTree>
     <p:extLst>
       <p:ext uri="{BB962C8B-B14F-4D97-AF65-F5344CB8AC3E}">
-        <p14:creationId xmlns:p14="http://schemas.microsoft.com/office/powerpoint/2010/main" val="397624955"/>
+        <p14:creationId xmlns:p14="http://schemas.microsoft.com/office/powerpoint/2010/main" val="1265292124"/>
       </p:ext>
     </p:extLst>
   </p:cSld>
@@ -9172,7 +9381,7 @@
           <p:nvPr/>
         </p:nvPicPr>
         <p:blipFill>
-          <a:blip xmlns:r="http://schemas.openxmlformats.org/officeDocument/2006/relationships" xmlns:a="http://schemas.openxmlformats.org/drawingml/2006/main" r:embed="Rc4917c6199ae4e35"/>
+          <a:blip xmlns:r="http://schemas.openxmlformats.org/officeDocument/2006/relationships" xmlns:a="http://schemas.openxmlformats.org/drawingml/2006/main" r:embed="Rdaced7f1dbb848ce"/>
           <a:srcRect xmlns:a="http://schemas.openxmlformats.org/drawingml/2006/main" l="0" t="0" r="0" b="0"/>
           <a:stretch xmlns:a="http://schemas.openxmlformats.org/drawingml/2006/main">
             <a:fillRect l="0" t="0" r="0" b="0"/>
@@ -9193,7 +9402,7 @@
           <p:cNvPr id="2" name="">
             <a:extLst xmlns:a="http://schemas.openxmlformats.org/drawingml/2006/main">
               <a:ext uri="{FF2B5EF4-FFF2-40B4-BE49-F238E27FC236}">
-                <a16:creationId xmlns:a16="http://schemas.microsoft.com/office/drawing/2014/main" id="{61606D82-7EBF-41C0-AC61-93641D7B6106}"/>
+                <a16:creationId xmlns:a16="http://schemas.microsoft.com/office/drawing/2014/main" id="{8C3E949E-88BA-4B19-AF13-195378FE682F}"/>
               </a:ext>
             </a:extLst>
           </p:cNvPr>
@@ -9240,7 +9449,7 @@
           <p:cNvPr id="3" name="">
             <a:extLst xmlns:a="http://schemas.openxmlformats.org/drawingml/2006/main">
               <a:ext uri="{FF2B5EF4-FFF2-40B4-BE49-F238E27FC236}">
-                <a16:creationId xmlns:a16="http://schemas.microsoft.com/office/drawing/2014/main" id="{7B674922-4975-4487-9942-DBB8CE3E32C9}"/>
+                <a16:creationId xmlns:a16="http://schemas.microsoft.com/office/drawing/2014/main" id="{134C5EC3-98CC-45E3-843A-B7793315376A}"/>
               </a:ext>
             </a:extLst>
           </p:cNvPr>
@@ -9300,7 +9509,7 @@
           <p:cNvPr id="4" name="">
             <a:extLst xmlns:a="http://schemas.openxmlformats.org/drawingml/2006/main">
               <a:ext uri="{FF2B5EF4-FFF2-40B4-BE49-F238E27FC236}">
-                <a16:creationId xmlns:a16="http://schemas.microsoft.com/office/drawing/2014/main" id="{855A4030-FD17-4FDA-8781-5F69FD35D6B0}"/>
+                <a16:creationId xmlns:a16="http://schemas.microsoft.com/office/drawing/2014/main" id="{4C2614A4-5194-4BBD-988E-85EE593BB5E7}"/>
               </a:ext>
             </a:extLst>
           </p:cNvPr>
@@ -9347,7 +9556,7 @@
           <p:cNvPr id="5" name="">
             <a:extLst xmlns:a="http://schemas.openxmlformats.org/drawingml/2006/main">
               <a:ext uri="{FF2B5EF4-FFF2-40B4-BE49-F238E27FC236}">
-                <a16:creationId xmlns:a16="http://schemas.microsoft.com/office/drawing/2014/main" id="{D20E6DA2-E6CC-4B0C-9825-0C4DC22DB84F}"/>
+                <a16:creationId xmlns:a16="http://schemas.microsoft.com/office/drawing/2014/main" id="{6124821F-C353-4DCF-A1AC-196087C98D2E}"/>
               </a:ext>
             </a:extLst>
           </p:cNvPr>
@@ -9404,7 +9613,7 @@
           <p:cNvPr id="6" name="">
             <a:extLst xmlns:a="http://schemas.openxmlformats.org/drawingml/2006/main">
               <a:ext uri="{FF2B5EF4-FFF2-40B4-BE49-F238E27FC236}">
-                <a16:creationId xmlns:a16="http://schemas.microsoft.com/office/drawing/2014/main" id="{043E22A9-8B82-4E5F-85E5-B15616C63CA5}"/>
+                <a16:creationId xmlns:a16="http://schemas.microsoft.com/office/drawing/2014/main" id="{3B8A1C02-63BC-4A15-8FBE-21550EC45D8B}"/>
               </a:ext>
             </a:extLst>
           </p:cNvPr>
@@ -9481,7 +9690,7 @@
           <p:nvPr/>
         </p:nvPicPr>
         <p:blipFill>
-          <a:blip xmlns:r="http://schemas.openxmlformats.org/officeDocument/2006/relationships" xmlns:a="http://schemas.openxmlformats.org/drawingml/2006/main" r:embed="Ra4d07b2cb72c4ee5"/>
+          <a:blip xmlns:r="http://schemas.openxmlformats.org/officeDocument/2006/relationships" xmlns:a="http://schemas.openxmlformats.org/drawingml/2006/main" r:embed="Rc8b73721e51d430d"/>
           <a:srcRect xmlns:a="http://schemas.openxmlformats.org/drawingml/2006/main" l="0" t="0" r="0" b="0"/>
           <a:stretch xmlns:a="http://schemas.openxmlformats.org/drawingml/2006/main">
             <a:fillRect l="0" t="0" r="0" b="0"/>
@@ -9502,7 +9711,7 @@
           <p:cNvPr id="8" name="">
             <a:extLst xmlns:a="http://schemas.openxmlformats.org/drawingml/2006/main">
               <a:ext uri="{FF2B5EF4-FFF2-40B4-BE49-F238E27FC236}">
-                <a16:creationId xmlns:a16="http://schemas.microsoft.com/office/drawing/2014/main" id="{EE88F510-2589-4E16-8932-49734F14D821}"/>
+                <a16:creationId xmlns:a16="http://schemas.microsoft.com/office/drawing/2014/main" id="{8ACCE954-52A4-4208-BD38-83AE3EA19339}"/>
               </a:ext>
             </a:extLst>
           </p:cNvPr>
@@ -9536,7 +9745,7 @@
           <p:cNvPr id="9" name="">
             <a:extLst xmlns:a="http://schemas.openxmlformats.org/drawingml/2006/main">
               <a:ext uri="{FF2B5EF4-FFF2-40B4-BE49-F238E27FC236}">
-                <a16:creationId xmlns:a16="http://schemas.microsoft.com/office/drawing/2014/main" id="{B37D0727-2DC6-48B7-B10D-1D50393C1DFA}"/>
+                <a16:creationId xmlns:a16="http://schemas.microsoft.com/office/drawing/2014/main" id="{4E040C5E-31F8-4E61-A8B6-997834F56477}"/>
               </a:ext>
             </a:extLst>
           </p:cNvPr>
@@ -9583,7 +9792,7 @@
           <p:cNvPr id="10" name="">
             <a:extLst xmlns:a="http://schemas.openxmlformats.org/drawingml/2006/main">
               <a:ext uri="{FF2B5EF4-FFF2-40B4-BE49-F238E27FC236}">
-                <a16:creationId xmlns:a16="http://schemas.microsoft.com/office/drawing/2014/main" id="{11E666AF-F786-40D7-A54B-FD199E0D55A7}"/>
+                <a16:creationId xmlns:a16="http://schemas.microsoft.com/office/drawing/2014/main" id="{ACCB8818-7CE2-4357-814C-EA8A19E2E9CA}"/>
               </a:ext>
             </a:extLst>
           </p:cNvPr>
@@ -9630,7 +9839,7 @@
           <p:cNvPr id="11" name="">
             <a:extLst xmlns:a="http://schemas.openxmlformats.org/drawingml/2006/main">
               <a:ext uri="{FF2B5EF4-FFF2-40B4-BE49-F238E27FC236}">
-                <a16:creationId xmlns:a16="http://schemas.microsoft.com/office/drawing/2014/main" id="{4D08543F-B4D4-4F9C-928D-73084A3C53E3}"/>
+                <a16:creationId xmlns:a16="http://schemas.microsoft.com/office/drawing/2014/main" id="{0031D4D6-F7C7-42C0-81B8-40CDE397A8F3}"/>
               </a:ext>
             </a:extLst>
           </p:cNvPr>
@@ -9667,7 +9876,7 @@
                 <a:ea typeface="Inter"/>
                 <a:cs typeface="Inter"/>
               </a:rPr>
-              <a:t>Problem</a:t>
+              <a:t>Technology</a:t>
             </a:r>
           </a:p>
         </p:txBody>
@@ -9677,19 +9886,19 @@
           <p:cNvPr id="12" name="">
             <a:extLst xmlns:a="http://schemas.openxmlformats.org/drawingml/2006/main">
               <a:ext uri="{FF2B5EF4-FFF2-40B4-BE49-F238E27FC236}">
-                <a16:creationId xmlns:a16="http://schemas.microsoft.com/office/drawing/2014/main" id="{A8DC8FAE-B9EA-41A2-9251-3B36C6BC2579}"/>
-              </a:ext>
-            </a:extLst>
-          </p:cNvPr>
-          <p:cNvSpPr>
-            <a:spLocks xmlns:a="http://schemas.openxmlformats.org/drawingml/2006/main" noGrp="1"/>
-          </p:cNvSpPr>
-          <p:nvPr/>
-        </p:nvSpPr>
-        <p:spPr>
-          <a:xfrm xmlns:a="http://schemas.openxmlformats.org/drawingml/2006/main">
-            <a:off x="9353550" y="4000500"/>
-            <a:ext cx="2190750" cy="190500"/>
+                <a16:creationId xmlns:a16="http://schemas.microsoft.com/office/drawing/2014/main" id="{6E26F4AA-FC5C-4ADA-8C95-C01E7DD1D81A}"/>
+              </a:ext>
+            </a:extLst>
+          </p:cNvPr>
+          <p:cNvSpPr>
+            <a:spLocks xmlns:a="http://schemas.openxmlformats.org/drawingml/2006/main" noGrp="1"/>
+          </p:cNvSpPr>
+          <p:nvPr/>
+        </p:nvSpPr>
+        <p:spPr>
+          <a:xfrm xmlns:a="http://schemas.openxmlformats.org/drawingml/2006/main">
+            <a:off x="9277350" y="4000500"/>
+            <a:ext cx="2381250" cy="190500"/>
           </a:xfrm>
           <a:prstGeom xmlns:a="http://schemas.openxmlformats.org/drawingml/2006/main" prst="rect">
             <a:avLst/>
@@ -9714,7 +9923,7 @@
                 <a:ea typeface="Inter"/>
                 <a:cs typeface="Inter"/>
               </a:rPr>
-              <a:t>unprepared meetings waste time</a:t>
+              <a:t>persistent + ephemeral agents</a:t>
             </a:r>
           </a:p>
         </p:txBody>
@@ -9724,18 +9933,18 @@
           <p:cNvPr id="13" name="">
             <a:extLst xmlns:a="http://schemas.openxmlformats.org/drawingml/2006/main">
               <a:ext uri="{FF2B5EF4-FFF2-40B4-BE49-F238E27FC236}">
-                <a16:creationId xmlns:a16="http://schemas.microsoft.com/office/drawing/2014/main" id="{932ED905-EF1D-454F-94E9-8279D3E340CF}"/>
-              </a:ext>
-            </a:extLst>
-          </p:cNvPr>
-          <p:cNvSpPr>
-            <a:spLocks xmlns:a="http://schemas.openxmlformats.org/drawingml/2006/main" noGrp="1"/>
-          </p:cNvSpPr>
-          <p:nvPr/>
-        </p:nvSpPr>
-        <p:spPr>
-          <a:xfrm xmlns:a="http://schemas.openxmlformats.org/drawingml/2006/main">
-            <a:off x="8020050" y="4400550"/>
+                <a16:creationId xmlns:a16="http://schemas.microsoft.com/office/drawing/2014/main" id="{0A8B431D-D058-4B7F-AE0D-53E1C01E8320}"/>
+              </a:ext>
+            </a:extLst>
+          </p:cNvPr>
+          <p:cNvSpPr>
+            <a:spLocks xmlns:a="http://schemas.openxmlformats.org/drawingml/2006/main" noGrp="1"/>
+          </p:cNvSpPr>
+          <p:nvPr/>
+        </p:nvSpPr>
+        <p:spPr>
+          <a:xfrm xmlns:a="http://schemas.openxmlformats.org/drawingml/2006/main">
+            <a:off x="8020050" y="4381500"/>
             <a:ext cx="1257300" cy="190500"/>
           </a:xfrm>
           <a:prstGeom xmlns:a="http://schemas.openxmlformats.org/drawingml/2006/main" prst="rect">
@@ -9761,7 +9970,7 @@
                 <a:ea typeface="Inter"/>
                 <a:cs typeface="Inter"/>
               </a:rPr>
-              <a:t>Technology</a:t>
+              <a:t>Outcome</a:t>
             </a:r>
           </a:p>
         </p:txBody>
@@ -9771,19 +9980,19 @@
           <p:cNvPr id="14" name="">
             <a:extLst xmlns:a="http://schemas.openxmlformats.org/drawingml/2006/main">
               <a:ext uri="{FF2B5EF4-FFF2-40B4-BE49-F238E27FC236}">
-                <a16:creationId xmlns:a16="http://schemas.microsoft.com/office/drawing/2014/main" id="{9621EADC-72A8-4190-8261-B657DEF977F3}"/>
-              </a:ext>
-            </a:extLst>
-          </p:cNvPr>
-          <p:cNvSpPr>
-            <a:spLocks xmlns:a="http://schemas.openxmlformats.org/drawingml/2006/main" noGrp="1"/>
-          </p:cNvSpPr>
-          <p:nvPr/>
-        </p:nvSpPr>
-        <p:spPr>
-          <a:xfrm xmlns:a="http://schemas.openxmlformats.org/drawingml/2006/main">
-            <a:off x="9353550" y="4400550"/>
-            <a:ext cx="2190750" cy="190500"/>
+                <a16:creationId xmlns:a16="http://schemas.microsoft.com/office/drawing/2014/main" id="{D691BCDB-D516-461D-B5DB-4A6E8283A63A}"/>
+              </a:ext>
+            </a:extLst>
+          </p:cNvPr>
+          <p:cNvSpPr>
+            <a:spLocks xmlns:a="http://schemas.openxmlformats.org/drawingml/2006/main" noGrp="1"/>
+          </p:cNvSpPr>
+          <p:nvPr/>
+        </p:nvSpPr>
+        <p:spPr>
+          <a:xfrm xmlns:a="http://schemas.openxmlformats.org/drawingml/2006/main">
+            <a:off x="9277350" y="4381500"/>
+            <a:ext cx="2381250" cy="190500"/>
           </a:xfrm>
           <a:prstGeom xmlns:a="http://schemas.openxmlformats.org/drawingml/2006/main" prst="rect">
             <a:avLst/>
@@ -9808,7 +10017,7 @@
                 <a:ea typeface="Inter"/>
                 <a:cs typeface="Inter"/>
               </a:rPr>
-              <a:t>persistent + ephemeral agents</a:t>
+              <a:t>two decisions before the meeting</a:t>
             </a:r>
           </a:p>
         </p:txBody>
@@ -9818,18 +10027,18 @@
           <p:cNvPr id="15" name="">
             <a:extLst xmlns:a="http://schemas.openxmlformats.org/drawingml/2006/main">
               <a:ext uri="{FF2B5EF4-FFF2-40B4-BE49-F238E27FC236}">
-                <a16:creationId xmlns:a16="http://schemas.microsoft.com/office/drawing/2014/main" id="{FA4F6946-3848-4842-B484-AC5C55D04883}"/>
-              </a:ext>
-            </a:extLst>
-          </p:cNvPr>
-          <p:cNvSpPr>
-            <a:spLocks xmlns:a="http://schemas.openxmlformats.org/drawingml/2006/main" noGrp="1"/>
-          </p:cNvSpPr>
-          <p:nvPr/>
-        </p:nvSpPr>
-        <p:spPr>
-          <a:xfrm xmlns:a="http://schemas.openxmlformats.org/drawingml/2006/main">
-            <a:off x="8020050" y="4800600"/>
+                <a16:creationId xmlns:a16="http://schemas.microsoft.com/office/drawing/2014/main" id="{DB0190B3-381E-4453-9D7B-60811738C390}"/>
+              </a:ext>
+            </a:extLst>
+          </p:cNvPr>
+          <p:cNvSpPr>
+            <a:spLocks xmlns:a="http://schemas.openxmlformats.org/drawingml/2006/main" noGrp="1"/>
+          </p:cNvSpPr>
+          <p:nvPr/>
+        </p:nvSpPr>
+        <p:spPr>
+          <a:xfrm xmlns:a="http://schemas.openxmlformats.org/drawingml/2006/main">
+            <a:off x="8020050" y="4762500"/>
             <a:ext cx="1257300" cy="190500"/>
           </a:xfrm>
           <a:prstGeom xmlns:a="http://schemas.openxmlformats.org/drawingml/2006/main" prst="rect">
@@ -9855,7 +10064,7 @@
                 <a:ea typeface="Inter"/>
                 <a:cs typeface="Inter"/>
               </a:rPr>
-              <a:t>Outcome</a:t>
+              <a:t>Repo</a:t>
             </a:r>
           </a:p>
         </p:txBody>
@@ -9865,19 +10074,19 @@
           <p:cNvPr id="16" name="">
             <a:extLst xmlns:a="http://schemas.openxmlformats.org/drawingml/2006/main">
               <a:ext uri="{FF2B5EF4-FFF2-40B4-BE49-F238E27FC236}">
-                <a16:creationId xmlns:a16="http://schemas.microsoft.com/office/drawing/2014/main" id="{88011EE1-0CB8-4EC5-A637-DCF96B777A10}"/>
-              </a:ext>
-            </a:extLst>
-          </p:cNvPr>
-          <p:cNvSpPr>
-            <a:spLocks xmlns:a="http://schemas.openxmlformats.org/drawingml/2006/main" noGrp="1"/>
-          </p:cNvSpPr>
-          <p:nvPr/>
-        </p:nvSpPr>
-        <p:spPr>
-          <a:xfrm xmlns:a="http://schemas.openxmlformats.org/drawingml/2006/main">
-            <a:off x="9353550" y="4800600"/>
-            <a:ext cx="2190750" cy="190500"/>
+                <a16:creationId xmlns:a16="http://schemas.microsoft.com/office/drawing/2014/main" id="{619801BB-3049-454A-83C0-48FA7A925342}"/>
+              </a:ext>
+            </a:extLst>
+          </p:cNvPr>
+          <p:cNvSpPr>
+            <a:spLocks xmlns:a="http://schemas.openxmlformats.org/drawingml/2006/main" noGrp="1"/>
+          </p:cNvSpPr>
+          <p:nvPr/>
+        </p:nvSpPr>
+        <p:spPr>
+          <a:xfrm xmlns:a="http://schemas.openxmlformats.org/drawingml/2006/main">
+            <a:off x="8629650" y="4762500"/>
+            <a:ext cx="2857500" cy="190500"/>
           </a:xfrm>
           <a:prstGeom xmlns:a="http://schemas.openxmlformats.org/drawingml/2006/main" prst="rect">
             <a:avLst/>
@@ -9894,15 +10103,15 @@
           <a:lstStyle xmlns:a="http://schemas.openxmlformats.org/drawingml/2006/main"/>
           <a:p xmlns:a="http://schemas.openxmlformats.org/drawingml/2006/main">
             <a:r>
-              <a:rPr sz="1125">
-                <a:solidFill>
-                  <a:srgbClr val="5D605E"/>
-                </a:solidFill>
-                <a:latin typeface="Inter"/>
-                <a:ea typeface="Inter"/>
-                <a:cs typeface="Inter"/>
-              </a:rPr>
-              <a:t>two decisions before the meeting</a:t>
+              <a:rPr sz="1125" b="1">
+                <a:solidFill>
+                  <a:srgbClr val="2636B8"/>
+                </a:solidFill>
+                <a:latin typeface="Inter"/>
+                <a:ea typeface="Inter"/>
+                <a:cs typeface="Inter"/>
+              </a:rPr>
+              <a:t>github.com/leewaichong/opensea</a:t>
             </a:r>
           </a:p>
         </p:txBody>
@@ -9912,7 +10121,7 @@
           <p:cNvPr id="17" name="">
             <a:extLst xmlns:a="http://schemas.openxmlformats.org/drawingml/2006/main">
               <a:ext uri="{FF2B5EF4-FFF2-40B4-BE49-F238E27FC236}">
-                <a16:creationId xmlns:a16="http://schemas.microsoft.com/office/drawing/2014/main" id="{6444AAC1-3DE6-4757-856F-86A624A1204F}"/>
+                <a16:creationId xmlns:a16="http://schemas.microsoft.com/office/drawing/2014/main" id="{7528D991-F51F-44D2-A949-8AF1C3C3BA92}"/>
               </a:ext>
             </a:extLst>
           </p:cNvPr>
@@ -9944,7 +10153,7 @@
           <p:cNvPr id="18" name="">
             <a:extLst xmlns:a="http://schemas.openxmlformats.org/drawingml/2006/main">
               <a:ext uri="{FF2B5EF4-FFF2-40B4-BE49-F238E27FC236}">
-                <a16:creationId xmlns:a16="http://schemas.microsoft.com/office/drawing/2014/main" id="{2414F88B-E4A6-4281-B810-02ACC5572062}"/>
+                <a16:creationId xmlns:a16="http://schemas.microsoft.com/office/drawing/2014/main" id="{8C1EB426-CF08-4F17-AB2A-AA5FA2D8BB04}"/>
               </a:ext>
             </a:extLst>
           </p:cNvPr>
@@ -9991,7 +10200,7 @@
           <p:cNvPr id="19" name="">
             <a:extLst xmlns:a="http://schemas.openxmlformats.org/drawingml/2006/main">
               <a:ext uri="{FF2B5EF4-FFF2-40B4-BE49-F238E27FC236}">
-                <a16:creationId xmlns:a16="http://schemas.microsoft.com/office/drawing/2014/main" id="{09176E2F-4E63-48D3-9111-0A4D25458FF1}"/>
+                <a16:creationId xmlns:a16="http://schemas.microsoft.com/office/drawing/2014/main" id="{CEF6751B-20E6-44FE-B08D-F6E8626108A4}"/>
               </a:ext>
             </a:extLst>
           </p:cNvPr>
@@ -10036,7 +10245,7 @@
     </p:spTree>
     <p:extLst>
       <p:ext uri="{BB962C8B-B14F-4D97-AF65-F5344CB8AC3E}">
-        <p14:creationId xmlns:p14="http://schemas.microsoft.com/office/powerpoint/2010/main" val="296975193"/>
+        <p14:creationId xmlns:p14="http://schemas.microsoft.com/office/powerpoint/2010/main" val="1164750939"/>
       </p:ext>
     </p:extLst>
   </p:cSld>

--- a/docs/pitch-deck/output/per-my-last-email-hackathon-pitch.pptx
+++ b/docs/pitch-deck/output/per-my-last-email-hackathon-pitch.pptx
@@ -2,20 +2,21 @@
 <file path=ppt/presentation.xml><?xml version="1.0" encoding="utf-8"?>
 <p:presentation xmlns:p="http://schemas.openxmlformats.org/presentationml/2006/main">
   <p:sldMasterIdLst>
-    <p:sldMasterId xmlns:r="http://schemas.openxmlformats.org/officeDocument/2006/relationships" id="2147483648" r:id="R3162387ab941485a"/>
+    <p:sldMasterId xmlns:r="http://schemas.openxmlformats.org/officeDocument/2006/relationships" id="2147483648" r:id="Rd1b8f314d8594d3b"/>
   </p:sldMasterIdLst>
   <p:notesMasterIdLst>
-    <p:notesMasterId xmlns:r="http://schemas.openxmlformats.org/officeDocument/2006/relationships" r:id="R27258a725f5f4bf4"/>
+    <p:notesMasterId xmlns:r="http://schemas.openxmlformats.org/officeDocument/2006/relationships" r:id="R09eedc72819543be"/>
   </p:notesMasterIdLst>
   <p:sldIdLst>
-    <p:sldId xmlns:r="http://schemas.openxmlformats.org/officeDocument/2006/relationships" id="256" r:id="Rb367038a77ec446d"/>
-    <p:sldId xmlns:r="http://schemas.openxmlformats.org/officeDocument/2006/relationships" id="257" r:id="R39a99aa04ea745e4"/>
-    <p:sldId xmlns:r="http://schemas.openxmlformats.org/officeDocument/2006/relationships" id="258" r:id="Rdfcec4295a4e4439"/>
-    <p:sldId xmlns:r="http://schemas.openxmlformats.org/officeDocument/2006/relationships" id="259" r:id="R66ef2503d14b428f"/>
-    <p:sldId xmlns:r="http://schemas.openxmlformats.org/officeDocument/2006/relationships" id="260" r:id="Rb9fd664021fe437a"/>
-    <p:sldId xmlns:r="http://schemas.openxmlformats.org/officeDocument/2006/relationships" id="261" r:id="R7778894b99bd4968"/>
-    <p:sldId xmlns:r="http://schemas.openxmlformats.org/officeDocument/2006/relationships" id="262" r:id="R26ae0c5dc02b460c"/>
-    <p:sldId xmlns:r="http://schemas.openxmlformats.org/officeDocument/2006/relationships" id="263" r:id="Rce954219e1184daa"/>
+    <p:sldId xmlns:r="http://schemas.openxmlformats.org/officeDocument/2006/relationships" id="256" r:id="Rfd67ad8818454f5c"/>
+    <p:sldId xmlns:r="http://schemas.openxmlformats.org/officeDocument/2006/relationships" id="257" r:id="R6f489d4db9ca4e67"/>
+    <p:sldId xmlns:r="http://schemas.openxmlformats.org/officeDocument/2006/relationships" id="258" r:id="Rda1171b1146f40b2"/>
+    <p:sldId xmlns:r="http://schemas.openxmlformats.org/officeDocument/2006/relationships" id="259" r:id="Rbe164bc226434f56"/>
+    <p:sldId xmlns:r="http://schemas.openxmlformats.org/officeDocument/2006/relationships" id="260" r:id="Rf08fc3c621d54011"/>
+    <p:sldId xmlns:r="http://schemas.openxmlformats.org/officeDocument/2006/relationships" id="261" r:id="Rb2f9a058af2a4be6"/>
+    <p:sldId xmlns:r="http://schemas.openxmlformats.org/officeDocument/2006/relationships" id="262" r:id="Rc68fadc79c954c41"/>
+    <p:sldId xmlns:r="http://schemas.openxmlformats.org/officeDocument/2006/relationships" id="263" r:id="R01912ffae2bf4a47"/>
+    <p:sldId xmlns:r="http://schemas.openxmlformats.org/officeDocument/2006/relationships" id="264" r:id="R31e1be4df9d64229"/>
   </p:sldIdLst>
   <p:sldSz cx="12192000" cy="6858000"/>
   <p:notesSz cx="6858000" cy="9144000"/>
@@ -988,7 +989,77 @@
           <a:lstStyle xmlns:a="http://schemas.openxmlformats.org/drawingml/2006/main"/>
           <a:p xmlns:a="http://schemas.openxmlformats.org/drawingml/2006/main">
             <a:r>
-              <a:t>Close. Bring the judges back to the sentence from the live script: meetings do not fail because people think they agree. Mochi catches the fake agreement before the hour is gone, inside Slack. Stop at the generated pre-meeting brief; do not imply a final influencer decision. The repo URL is now on the slide for submission. Still missing for final submission: optional hosted demo link, live trace artifact, and latency/reliability or measured adoption/time-saved only if measured.</a:t>
+              <a:t>Vision slide, framed as architecture and roadmap, not a shipped demo feature. Mochi is an orchestration layer: it coordinates agents rather than replacing them. The structured stance contract (position, rationale, assumptions, confidence) is the open interface. Today, managed agents fill that contract for each participant. The roadmap is bring-your-own-agent: a user points their own personal agent at Mochi; it negotiates their stance in their voice, keeps their context private, and emits only a structured stance. Do not claim BYOA is demoed; label it roadmap. The point is that Mochi is the protocol for pre-meeting agent reasoning, not a silo.</a:t>
+            </a:r>
+          </a:p>
+        </p:txBody>
+      </p:sp>
+      <p:sp>
+        <p:nvSpPr>
+          <p:cNvPr id="4" name="Slide Number Placeholder 3"/>
+          <p:cNvSpPr>
+            <a:spLocks xmlns:a="http://schemas.openxmlformats.org/drawingml/2006/main" noGrp="1"/>
+          </p:cNvSpPr>
+          <p:nvPr>
+            <p:ph type="sldNum" idx="5"/>
+          </p:nvPr>
+        </p:nvSpPr>
+        <p:spPr/>
+        <p:txBody>
+          <a:bodyPr xmlns:a="http://schemas.openxmlformats.org/drawingml/2006/main"/>
+          <a:lstStyle xmlns:a="http://schemas.openxmlformats.org/drawingml/2006/main"/>
+          <a:p xmlns:a="http://schemas.openxmlformats.org/drawingml/2006/main"/>
+        </p:txBody>
+      </p:sp>
+    </p:spTree>
+  </p:cSld>
+  <p:clrMapOvr>
+    <a:masterClrMapping xmlns:a="http://schemas.openxmlformats.org/drawingml/2006/main"/>
+  </p:clrMapOvr>
+</p:notes>
+</file>
+
+<file path=ppt/notesSlides/notesSlide9.xml><?xml version="1.0" encoding="utf-8"?>
+<p:notes xmlns:p="http://schemas.openxmlformats.org/presentationml/2006/main">
+  <p:cSld>
+    <p:spTree>
+      <p:nvGrpSpPr>
+        <p:cNvPr id="1" name=""/>
+        <p:cNvGrpSpPr/>
+        <p:nvPr/>
+      </p:nvGrpSpPr>
+      <p:grpSpPr>
+        <a:xfrm xmlns:a="http://schemas.openxmlformats.org/drawingml/2006/main"/>
+      </p:grpSpPr>
+      <p:sp>
+        <p:nvSpPr>
+          <p:cNvPr id="2" name="Slide Image Placeholder 1"/>
+          <p:cNvSpPr>
+            <a:spLocks xmlns:a="http://schemas.openxmlformats.org/drawingml/2006/main" noGrp="1"/>
+          </p:cNvSpPr>
+          <p:nvPr>
+            <p:ph type="sldImg" idx="0"/>
+          </p:nvPr>
+        </p:nvSpPr>
+        <p:spPr/>
+      </p:sp>
+      <p:sp>
+        <p:nvSpPr>
+          <p:cNvPr id="3" name="Notes Placeholder 2"/>
+          <p:cNvSpPr>
+            <a:spLocks xmlns:a="http://schemas.openxmlformats.org/drawingml/2006/main" noGrp="1"/>
+          </p:cNvSpPr>
+          <p:nvPr>
+            <p:ph type="body" idx="1"/>
+          </p:nvPr>
+        </p:nvSpPr>
+        <p:spPr/>
+        <p:txBody>
+          <a:bodyPr xmlns:a="http://schemas.openxmlformats.org/drawingml/2006/main"/>
+          <a:lstStyle xmlns:a="http://schemas.openxmlformats.org/drawingml/2006/main"/>
+          <a:p xmlns:a="http://schemas.openxmlformats.org/drawingml/2006/main">
+            <a:r>
+              <a:t>Close. Bring the judges back to the sentence from the live script: meetings do not fail because people think they agree. Mochi catches the fake agreement before the hour is gone, inside Slack. Stop at the generated pre-meeting brief; do not imply a final influencer decision. The repo URL is on the slide for submission. Still missing for final submission: optional hosted demo link, live trace artifact, and latency/reliability or measured adoption/time-saved only if measured.</a:t>
             </a:r>
           </a:p>
         </p:txBody>
@@ -1056,7 +1127,7 @@
   </p:cSld>
   <p:clrMap bg1="lt1" tx1="dk1" bg2="lt2" tx2="dk2" accent1="accent1" accent2="accent2" accent3="accent3" accent4="accent4" accent5="accent5" accent6="accent6" hlink="hlink" folHlink="folHlink"/>
   <p:sldLayoutIdLst>
-    <p:sldLayoutId xmlns:r="http://schemas.openxmlformats.org/officeDocument/2006/relationships" id="2147483649" r:id="Rc43a85dd62424c5d"/>
+    <p:sldLayoutId xmlns:r="http://schemas.openxmlformats.org/officeDocument/2006/relationships" id="2147483649" r:id="Rcda8e940c79a41f5"/>
   </p:sldLayoutIdLst>
   <p:txStyles>
     <p:titleStyle>
@@ -1565,7 +1636,7 @@
           <p:nvPr/>
         </p:nvPicPr>
         <p:blipFill>
-          <a:blip xmlns:r="http://schemas.openxmlformats.org/officeDocument/2006/relationships" xmlns:a="http://schemas.openxmlformats.org/drawingml/2006/main" r:embed="Rff28054db3ee4a04"/>
+          <a:blip xmlns:r="http://schemas.openxmlformats.org/officeDocument/2006/relationships" xmlns:a="http://schemas.openxmlformats.org/drawingml/2006/main" r:embed="Rfaa91be96e52443b"/>
           <a:srcRect xmlns:a="http://schemas.openxmlformats.org/drawingml/2006/main" l="0" t="0" r="0" b="0"/>
           <a:stretch xmlns:a="http://schemas.openxmlformats.org/drawingml/2006/main">
             <a:fillRect l="0" t="0" r="0" b="0"/>
@@ -1586,7 +1657,7 @@
           <p:cNvPr id="2" name="">
             <a:extLst xmlns:a="http://schemas.openxmlformats.org/drawingml/2006/main">
               <a:ext uri="{FF2B5EF4-FFF2-40B4-BE49-F238E27FC236}">
-                <a16:creationId xmlns:a16="http://schemas.microsoft.com/office/drawing/2014/main" id="{BD7AE22C-76A0-495B-AAF7-5D6CB94250F3}"/>
+                <a16:creationId xmlns:a16="http://schemas.microsoft.com/office/drawing/2014/main" id="{99173127-8F5C-4FF7-A95E-A8CEC5B5DE9C}"/>
               </a:ext>
             </a:extLst>
           </p:cNvPr>
@@ -1633,7 +1704,7 @@
           <p:cNvPr id="3" name="">
             <a:extLst xmlns:a="http://schemas.openxmlformats.org/drawingml/2006/main">
               <a:ext uri="{FF2B5EF4-FFF2-40B4-BE49-F238E27FC236}">
-                <a16:creationId xmlns:a16="http://schemas.microsoft.com/office/drawing/2014/main" id="{7AE41958-B9A2-45CC-B0D2-9053AE272AD8}"/>
+                <a16:creationId xmlns:a16="http://schemas.microsoft.com/office/drawing/2014/main" id="{2CC1026F-9328-46C8-84D6-40974F1AC588}"/>
               </a:ext>
             </a:extLst>
           </p:cNvPr>
@@ -1667,7 +1738,7 @@
           <p:cNvPr id="4" name="">
             <a:extLst xmlns:a="http://schemas.openxmlformats.org/drawingml/2006/main">
               <a:ext uri="{FF2B5EF4-FFF2-40B4-BE49-F238E27FC236}">
-                <a16:creationId xmlns:a16="http://schemas.microsoft.com/office/drawing/2014/main" id="{8438FFBB-8F0B-4D45-BD42-67209086F54C}"/>
+                <a16:creationId xmlns:a16="http://schemas.microsoft.com/office/drawing/2014/main" id="{A83CC41D-22F1-4DD9-BF36-F28B13930226}"/>
               </a:ext>
             </a:extLst>
           </p:cNvPr>
@@ -1724,7 +1795,7 @@
           <p:cNvPr id="5" name="">
             <a:extLst xmlns:a="http://schemas.openxmlformats.org/drawingml/2006/main">
               <a:ext uri="{FF2B5EF4-FFF2-40B4-BE49-F238E27FC236}">
-                <a16:creationId xmlns:a16="http://schemas.microsoft.com/office/drawing/2014/main" id="{8E416F68-B340-4637-BAF7-0C7F77E473D6}"/>
+                <a16:creationId xmlns:a16="http://schemas.microsoft.com/office/drawing/2014/main" id="{44138AD1-DFCD-4F62-8A9B-0D67964E34B1}"/>
               </a:ext>
             </a:extLst>
           </p:cNvPr>
@@ -1784,7 +1855,7 @@
           <p:cNvPr id="6" name="">
             <a:extLst xmlns:a="http://schemas.openxmlformats.org/drawingml/2006/main">
               <a:ext uri="{FF2B5EF4-FFF2-40B4-BE49-F238E27FC236}">
-                <a16:creationId xmlns:a16="http://schemas.microsoft.com/office/drawing/2014/main" id="{08B8B259-11FB-4E30-BC21-2957A9AB1A70}"/>
+                <a16:creationId xmlns:a16="http://schemas.microsoft.com/office/drawing/2014/main" id="{24F705AD-8E9B-433E-B4A8-5FB5A624A142}"/>
               </a:ext>
             </a:extLst>
           </p:cNvPr>
@@ -1831,7 +1902,7 @@
           <p:cNvPr id="7" name="">
             <a:extLst xmlns:a="http://schemas.openxmlformats.org/drawingml/2006/main">
               <a:ext uri="{FF2B5EF4-FFF2-40B4-BE49-F238E27FC236}">
-                <a16:creationId xmlns:a16="http://schemas.microsoft.com/office/drawing/2014/main" id="{761045AF-BDB7-4898-8DAA-4DE46FC5BA19}"/>
+                <a16:creationId xmlns:a16="http://schemas.microsoft.com/office/drawing/2014/main" id="{97E4694A-6CC9-4DDB-BA54-007F33DE055B}"/>
               </a:ext>
             </a:extLst>
           </p:cNvPr>
@@ -1861,7 +1932,7 @@
           <p:cNvPr id="8" name="">
             <a:extLst xmlns:a="http://schemas.openxmlformats.org/drawingml/2006/main">
               <a:ext uri="{FF2B5EF4-FFF2-40B4-BE49-F238E27FC236}">
-                <a16:creationId xmlns:a16="http://schemas.microsoft.com/office/drawing/2014/main" id="{D3D9CB1B-E6AD-4C0E-888C-E09083AE0294}"/>
+                <a16:creationId xmlns:a16="http://schemas.microsoft.com/office/drawing/2014/main" id="{14FD7E9B-E235-49A8-BFAD-6DD58435E9DF}"/>
               </a:ext>
             </a:extLst>
           </p:cNvPr>
@@ -1908,7 +1979,7 @@
           <p:cNvPr id="9" name="">
             <a:extLst xmlns:a="http://schemas.openxmlformats.org/drawingml/2006/main">
               <a:ext uri="{FF2B5EF4-FFF2-40B4-BE49-F238E27FC236}">
-                <a16:creationId xmlns:a16="http://schemas.microsoft.com/office/drawing/2014/main" id="{75E4266A-15D8-44C5-8F06-9A39A246DBB7}"/>
+                <a16:creationId xmlns:a16="http://schemas.microsoft.com/office/drawing/2014/main" id="{D6BD6E5C-107A-4ED5-8FB9-91C55815E4E0}"/>
               </a:ext>
             </a:extLst>
           </p:cNvPr>
@@ -1959,7 +2030,7 @@
           <p:nvPr/>
         </p:nvPicPr>
         <p:blipFill>
-          <a:blip xmlns:r="http://schemas.openxmlformats.org/officeDocument/2006/relationships" xmlns:a="http://schemas.openxmlformats.org/drawingml/2006/main" r:embed="Rca86d6a5a3f54fa3"/>
+          <a:blip xmlns:r="http://schemas.openxmlformats.org/officeDocument/2006/relationships" xmlns:a="http://schemas.openxmlformats.org/drawingml/2006/main" r:embed="Rd35601a782824e29"/>
           <a:srcRect xmlns:a="http://schemas.openxmlformats.org/drawingml/2006/main" l="0" t="0" r="0" b="0"/>
           <a:stretch xmlns:a="http://schemas.openxmlformats.org/drawingml/2006/main">
             <a:fillRect l="0" t="0" r="0" b="0"/>
@@ -1980,7 +2051,7 @@
           <p:cNvPr id="11" name="">
             <a:extLst xmlns:a="http://schemas.openxmlformats.org/drawingml/2006/main">
               <a:ext uri="{FF2B5EF4-FFF2-40B4-BE49-F238E27FC236}">
-                <a16:creationId xmlns:a16="http://schemas.microsoft.com/office/drawing/2014/main" id="{EFFF8DFE-52B4-44C1-A000-C10DD5D134B2}"/>
+                <a16:creationId xmlns:a16="http://schemas.microsoft.com/office/drawing/2014/main" id="{67D62F32-7FF7-4CD1-80C9-B9D6967F3881}"/>
               </a:ext>
             </a:extLst>
           </p:cNvPr>
@@ -2037,7 +2108,7 @@
           <p:cNvPr id="12" name="">
             <a:extLst xmlns:a="http://schemas.openxmlformats.org/drawingml/2006/main">
               <a:ext uri="{FF2B5EF4-FFF2-40B4-BE49-F238E27FC236}">
-                <a16:creationId xmlns:a16="http://schemas.microsoft.com/office/drawing/2014/main" id="{1E43B078-D8AB-4EA2-8D5F-F3A475F66339}"/>
+                <a16:creationId xmlns:a16="http://schemas.microsoft.com/office/drawing/2014/main" id="{81A5595D-E413-4DF6-BC36-CA261E0AF2C7}"/>
               </a:ext>
             </a:extLst>
           </p:cNvPr>
@@ -2069,7 +2140,7 @@
           <p:cNvPr id="13" name="">
             <a:extLst xmlns:a="http://schemas.openxmlformats.org/drawingml/2006/main">
               <a:ext uri="{FF2B5EF4-FFF2-40B4-BE49-F238E27FC236}">
-                <a16:creationId xmlns:a16="http://schemas.microsoft.com/office/drawing/2014/main" id="{05DD280E-778C-4CD6-A15B-82E6245EF77C}"/>
+                <a16:creationId xmlns:a16="http://schemas.microsoft.com/office/drawing/2014/main" id="{735385D4-B2B6-4623-A582-CE958A0878E3}"/>
               </a:ext>
             </a:extLst>
           </p:cNvPr>
@@ -2116,7 +2187,7 @@
           <p:cNvPr id="14" name="">
             <a:extLst xmlns:a="http://schemas.openxmlformats.org/drawingml/2006/main">
               <a:ext uri="{FF2B5EF4-FFF2-40B4-BE49-F238E27FC236}">
-                <a16:creationId xmlns:a16="http://schemas.microsoft.com/office/drawing/2014/main" id="{8CCD2696-BDB1-4AA5-B365-375D33E63848}"/>
+                <a16:creationId xmlns:a16="http://schemas.microsoft.com/office/drawing/2014/main" id="{A3E48470-4438-4720-8BD8-54465BD3EDAC}"/>
               </a:ext>
             </a:extLst>
           </p:cNvPr>
@@ -2173,7 +2244,7 @@
           <p:cNvPr id="15" name="">
             <a:extLst xmlns:a="http://schemas.openxmlformats.org/drawingml/2006/main">
               <a:ext uri="{FF2B5EF4-FFF2-40B4-BE49-F238E27FC236}">
-                <a16:creationId xmlns:a16="http://schemas.microsoft.com/office/drawing/2014/main" id="{48B6A66C-68F3-489C-B9B5-36CFA72FD546}"/>
+                <a16:creationId xmlns:a16="http://schemas.microsoft.com/office/drawing/2014/main" id="{CBD62B0E-C0DE-45F1-8367-96049B5DDF9D}"/>
               </a:ext>
             </a:extLst>
           </p:cNvPr>
@@ -2230,7 +2301,7 @@
           <p:cNvPr id="16" name="">
             <a:extLst xmlns:a="http://schemas.openxmlformats.org/drawingml/2006/main">
               <a:ext uri="{FF2B5EF4-FFF2-40B4-BE49-F238E27FC236}">
-                <a16:creationId xmlns:a16="http://schemas.microsoft.com/office/drawing/2014/main" id="{365C8F9D-64C6-4BD9-BB81-E843F2542FAC}"/>
+                <a16:creationId xmlns:a16="http://schemas.microsoft.com/office/drawing/2014/main" id="{40DC3540-1332-4B95-B4B0-DA0424A4BA26}"/>
               </a:ext>
             </a:extLst>
           </p:cNvPr>
@@ -2287,7 +2358,7 @@
           <p:cNvPr id="17" name="">
             <a:extLst xmlns:a="http://schemas.openxmlformats.org/drawingml/2006/main">
               <a:ext uri="{FF2B5EF4-FFF2-40B4-BE49-F238E27FC236}">
-                <a16:creationId xmlns:a16="http://schemas.microsoft.com/office/drawing/2014/main" id="{85D09BEC-6FCF-48A5-AD7A-420459D5612A}"/>
+                <a16:creationId xmlns:a16="http://schemas.microsoft.com/office/drawing/2014/main" id="{5F6B9DEC-34AD-4742-B113-20E340A3E2DC}"/>
               </a:ext>
             </a:extLst>
           </p:cNvPr>
@@ -2344,7 +2415,7 @@
           <p:cNvPr id="18" name="">
             <a:extLst xmlns:a="http://schemas.openxmlformats.org/drawingml/2006/main">
               <a:ext uri="{FF2B5EF4-FFF2-40B4-BE49-F238E27FC236}">
-                <a16:creationId xmlns:a16="http://schemas.microsoft.com/office/drawing/2014/main" id="{F27564CD-40A5-4A66-AADA-ECB5C6F8FBFC}"/>
+                <a16:creationId xmlns:a16="http://schemas.microsoft.com/office/drawing/2014/main" id="{17B2F95E-2021-4F96-B189-D4D911B06828}"/>
               </a:ext>
             </a:extLst>
           </p:cNvPr>
@@ -2401,7 +2472,7 @@
           <p:cNvPr id="19" name="">
             <a:extLst xmlns:a="http://schemas.openxmlformats.org/drawingml/2006/main">
               <a:ext uri="{FF2B5EF4-FFF2-40B4-BE49-F238E27FC236}">
-                <a16:creationId xmlns:a16="http://schemas.microsoft.com/office/drawing/2014/main" id="{3838989E-DF74-4B5B-AE0C-CC46D393C893}"/>
+                <a16:creationId xmlns:a16="http://schemas.microsoft.com/office/drawing/2014/main" id="{F8CB6FEE-BC77-4A60-9A63-A898972A0F98}"/>
               </a:ext>
             </a:extLst>
           </p:cNvPr>
@@ -2431,7 +2502,7 @@
           <p:cNvPr id="20" name="">
             <a:extLst xmlns:a="http://schemas.openxmlformats.org/drawingml/2006/main">
               <a:ext uri="{FF2B5EF4-FFF2-40B4-BE49-F238E27FC236}">
-                <a16:creationId xmlns:a16="http://schemas.microsoft.com/office/drawing/2014/main" id="{0937AB40-6408-4047-8013-6605D3E9FCFF}"/>
+                <a16:creationId xmlns:a16="http://schemas.microsoft.com/office/drawing/2014/main" id="{BE34CEE4-3DE6-4045-9EEE-F97BA3377A89}"/>
               </a:ext>
             </a:extLst>
           </p:cNvPr>
@@ -2504,7 +2575,7 @@
           <p:cNvPr id="21" name="">
             <a:extLst xmlns:a="http://schemas.openxmlformats.org/drawingml/2006/main">
               <a:ext uri="{FF2B5EF4-FFF2-40B4-BE49-F238E27FC236}">
-                <a16:creationId xmlns:a16="http://schemas.microsoft.com/office/drawing/2014/main" id="{3F373B01-C8F7-43BB-8BA6-B501D584F0E9}"/>
+                <a16:creationId xmlns:a16="http://schemas.microsoft.com/office/drawing/2014/main" id="{CBA5B887-E59E-4364-940E-1F81E0350F37}"/>
               </a:ext>
             </a:extLst>
           </p:cNvPr>
@@ -2551,7 +2622,7 @@
           <p:cNvPr id="22" name="">
             <a:extLst xmlns:a="http://schemas.openxmlformats.org/drawingml/2006/main">
               <a:ext uri="{FF2B5EF4-FFF2-40B4-BE49-F238E27FC236}">
-                <a16:creationId xmlns:a16="http://schemas.microsoft.com/office/drawing/2014/main" id="{93A7BB5E-022E-4EFE-8C9A-5D75C9006FF4}"/>
+                <a16:creationId xmlns:a16="http://schemas.microsoft.com/office/drawing/2014/main" id="{EB7B498D-7590-4A39-A781-22B766A1D8AE}"/>
               </a:ext>
             </a:extLst>
           </p:cNvPr>
@@ -2606,7 +2677,7 @@
     </p:spTree>
     <p:extLst>
       <p:ext uri="{BB962C8B-B14F-4D97-AF65-F5344CB8AC3E}">
-        <p14:creationId xmlns:p14="http://schemas.microsoft.com/office/powerpoint/2010/main" val="1515950008"/>
+        <p14:creationId xmlns:p14="http://schemas.microsoft.com/office/powerpoint/2010/main" val="1830093650"/>
       </p:ext>
     </p:extLst>
   </p:cSld>
@@ -2641,7 +2712,7 @@
           <p:nvPr/>
         </p:nvPicPr>
         <p:blipFill>
-          <a:blip xmlns:r="http://schemas.openxmlformats.org/officeDocument/2006/relationships" xmlns:a="http://schemas.openxmlformats.org/drawingml/2006/main" r:embed="R50d13fc6094c45aa"/>
+          <a:blip xmlns:r="http://schemas.openxmlformats.org/officeDocument/2006/relationships" xmlns:a="http://schemas.openxmlformats.org/drawingml/2006/main" r:embed="Rb6a8bd8aca6a4ae7"/>
           <a:srcRect xmlns:a="http://schemas.openxmlformats.org/drawingml/2006/main" l="0" t="0" r="0" b="0"/>
           <a:stretch xmlns:a="http://schemas.openxmlformats.org/drawingml/2006/main">
             <a:fillRect l="0" t="0" r="0" b="0"/>
@@ -2662,7 +2733,7 @@
           <p:cNvPr id="2" name="">
             <a:extLst xmlns:a="http://schemas.openxmlformats.org/drawingml/2006/main">
               <a:ext uri="{FF2B5EF4-FFF2-40B4-BE49-F238E27FC236}">
-                <a16:creationId xmlns:a16="http://schemas.microsoft.com/office/drawing/2014/main" id="{A075D9CD-4A97-465F-9CEF-43B2C2BEF473}"/>
+                <a16:creationId xmlns:a16="http://schemas.microsoft.com/office/drawing/2014/main" id="{DEDCF0E3-05E9-4946-A2E8-54EFA87A958E}"/>
               </a:ext>
             </a:extLst>
           </p:cNvPr>
@@ -2709,7 +2780,7 @@
           <p:cNvPr id="3" name="">
             <a:extLst xmlns:a="http://schemas.openxmlformats.org/drawingml/2006/main">
               <a:ext uri="{FF2B5EF4-FFF2-40B4-BE49-F238E27FC236}">
-                <a16:creationId xmlns:a16="http://schemas.microsoft.com/office/drawing/2014/main" id="{E01E38A4-FABD-4FE0-B010-BE313B9B51FC}"/>
+                <a16:creationId xmlns:a16="http://schemas.microsoft.com/office/drawing/2014/main" id="{6A2CE70C-ADAE-474A-937B-C2960D4D6F0F}"/>
               </a:ext>
             </a:extLst>
           </p:cNvPr>
@@ -2769,7 +2840,7 @@
           <p:cNvPr id="4" name="">
             <a:extLst xmlns:a="http://schemas.openxmlformats.org/drawingml/2006/main">
               <a:ext uri="{FF2B5EF4-FFF2-40B4-BE49-F238E27FC236}">
-                <a16:creationId xmlns:a16="http://schemas.microsoft.com/office/drawing/2014/main" id="{16720C64-7553-4F23-889E-6E2E2A6496C1}"/>
+                <a16:creationId xmlns:a16="http://schemas.microsoft.com/office/drawing/2014/main" id="{66577C25-9CE9-4DCD-87C2-274FFBECF642}"/>
               </a:ext>
             </a:extLst>
           </p:cNvPr>
@@ -2816,7 +2887,7 @@
           <p:cNvPr id="5" name="">
             <a:extLst xmlns:a="http://schemas.openxmlformats.org/drawingml/2006/main">
               <a:ext uri="{FF2B5EF4-FFF2-40B4-BE49-F238E27FC236}">
-                <a16:creationId xmlns:a16="http://schemas.microsoft.com/office/drawing/2014/main" id="{0360C2D2-A447-44F0-AE72-2A3764CFAB82}"/>
+                <a16:creationId xmlns:a16="http://schemas.microsoft.com/office/drawing/2014/main" id="{371165B8-EBDB-4A9D-8805-9F9C35887FB1}"/>
               </a:ext>
             </a:extLst>
           </p:cNvPr>
@@ -2873,7 +2944,7 @@
           <p:cNvPr id="6" name="">
             <a:extLst xmlns:a="http://schemas.openxmlformats.org/drawingml/2006/main">
               <a:ext uri="{FF2B5EF4-FFF2-40B4-BE49-F238E27FC236}">
-                <a16:creationId xmlns:a16="http://schemas.microsoft.com/office/drawing/2014/main" id="{A99B405A-D115-4433-9628-7DAB4FE1D181}"/>
+                <a16:creationId xmlns:a16="http://schemas.microsoft.com/office/drawing/2014/main" id="{5711E873-F185-44DB-B43E-104B9E508D67}"/>
               </a:ext>
             </a:extLst>
           </p:cNvPr>
@@ -2907,7 +2978,7 @@
           <p:cNvPr id="7" name="">
             <a:extLst xmlns:a="http://schemas.openxmlformats.org/drawingml/2006/main">
               <a:ext uri="{FF2B5EF4-FFF2-40B4-BE49-F238E27FC236}">
-                <a16:creationId xmlns:a16="http://schemas.microsoft.com/office/drawing/2014/main" id="{F5AB5A5D-BF4B-430C-A991-E3DECE1B71BF}"/>
+                <a16:creationId xmlns:a16="http://schemas.microsoft.com/office/drawing/2014/main" id="{09209C9F-9D4A-4087-961A-4A045374390F}"/>
               </a:ext>
             </a:extLst>
           </p:cNvPr>
@@ -2967,7 +3038,7 @@
           <p:cNvPr id="8" name="">
             <a:extLst xmlns:a="http://schemas.openxmlformats.org/drawingml/2006/main">
               <a:ext uri="{FF2B5EF4-FFF2-40B4-BE49-F238E27FC236}">
-                <a16:creationId xmlns:a16="http://schemas.microsoft.com/office/drawing/2014/main" id="{A98C1A8C-4763-4370-98A3-011BDE99E814}"/>
+                <a16:creationId xmlns:a16="http://schemas.microsoft.com/office/drawing/2014/main" id="{03A5D5B2-DCD1-4511-968E-E66A17E8B48D}"/>
               </a:ext>
             </a:extLst>
           </p:cNvPr>
@@ -3014,7 +3085,7 @@
           <p:cNvPr id="9" name="">
             <a:extLst xmlns:a="http://schemas.openxmlformats.org/drawingml/2006/main">
               <a:ext uri="{FF2B5EF4-FFF2-40B4-BE49-F238E27FC236}">
-                <a16:creationId xmlns:a16="http://schemas.microsoft.com/office/drawing/2014/main" id="{3387FCA9-E807-4FB2-9867-E6A1EDDAC890}"/>
+                <a16:creationId xmlns:a16="http://schemas.microsoft.com/office/drawing/2014/main" id="{1CCF973F-2872-4603-BAC7-4939B56DD30B}"/>
               </a:ext>
             </a:extLst>
           </p:cNvPr>
@@ -3061,7 +3132,7 @@
           <p:cNvPr id="10" name="">
             <a:extLst xmlns:a="http://schemas.openxmlformats.org/drawingml/2006/main">
               <a:ext uri="{FF2B5EF4-FFF2-40B4-BE49-F238E27FC236}">
-                <a16:creationId xmlns:a16="http://schemas.microsoft.com/office/drawing/2014/main" id="{5925B920-398B-4730-B4A9-CCA806F642F5}"/>
+                <a16:creationId xmlns:a16="http://schemas.microsoft.com/office/drawing/2014/main" id="{6EE8C7DE-7FF1-4595-9EE8-988AAAF910B9}"/>
               </a:ext>
             </a:extLst>
           </p:cNvPr>
@@ -3095,7 +3166,7 @@
           <p:cNvPr id="11" name="">
             <a:extLst xmlns:a="http://schemas.openxmlformats.org/drawingml/2006/main">
               <a:ext uri="{FF2B5EF4-FFF2-40B4-BE49-F238E27FC236}">
-                <a16:creationId xmlns:a16="http://schemas.microsoft.com/office/drawing/2014/main" id="{B6CF99B9-982C-451B-B3CB-03EF16C80F5D}"/>
+                <a16:creationId xmlns:a16="http://schemas.microsoft.com/office/drawing/2014/main" id="{5CCA4735-06A7-4A71-91B1-E01EEAFD1C52}"/>
               </a:ext>
             </a:extLst>
           </p:cNvPr>
@@ -3142,7 +3213,7 @@
           <p:cNvPr id="12" name="">
             <a:extLst xmlns:a="http://schemas.openxmlformats.org/drawingml/2006/main">
               <a:ext uri="{FF2B5EF4-FFF2-40B4-BE49-F238E27FC236}">
-                <a16:creationId xmlns:a16="http://schemas.microsoft.com/office/drawing/2014/main" id="{35504C91-1300-435E-88F9-DA5676F4B857}"/>
+                <a16:creationId xmlns:a16="http://schemas.microsoft.com/office/drawing/2014/main" id="{8F81C259-51F5-4760-8194-C8D1C45298AC}"/>
               </a:ext>
             </a:extLst>
           </p:cNvPr>
@@ -3189,7 +3260,7 @@
           <p:cNvPr id="13" name="">
             <a:extLst xmlns:a="http://schemas.openxmlformats.org/drawingml/2006/main">
               <a:ext uri="{FF2B5EF4-FFF2-40B4-BE49-F238E27FC236}">
-                <a16:creationId xmlns:a16="http://schemas.microsoft.com/office/drawing/2014/main" id="{18B30376-72DF-4E01-916B-A1EA8FF07DF6}"/>
+                <a16:creationId xmlns:a16="http://schemas.microsoft.com/office/drawing/2014/main" id="{5E491F3F-2E83-459C-AFD7-EDFAEB4A045D}"/>
               </a:ext>
             </a:extLst>
           </p:cNvPr>
@@ -3223,7 +3294,7 @@
           <p:cNvPr id="14" name="">
             <a:extLst xmlns:a="http://schemas.openxmlformats.org/drawingml/2006/main">
               <a:ext uri="{FF2B5EF4-FFF2-40B4-BE49-F238E27FC236}">
-                <a16:creationId xmlns:a16="http://schemas.microsoft.com/office/drawing/2014/main" id="{DB978575-D007-4936-AEDF-74F2F159FF0C}"/>
+                <a16:creationId xmlns:a16="http://schemas.microsoft.com/office/drawing/2014/main" id="{BC39CD06-C733-4464-BFC6-6DE684A3777B}"/>
               </a:ext>
             </a:extLst>
           </p:cNvPr>
@@ -3270,7 +3341,7 @@
           <p:cNvPr id="15" name="">
             <a:extLst xmlns:a="http://schemas.openxmlformats.org/drawingml/2006/main">
               <a:ext uri="{FF2B5EF4-FFF2-40B4-BE49-F238E27FC236}">
-                <a16:creationId xmlns:a16="http://schemas.microsoft.com/office/drawing/2014/main" id="{FAF71905-CA34-499D-BF32-C330C804BC91}"/>
+                <a16:creationId xmlns:a16="http://schemas.microsoft.com/office/drawing/2014/main" id="{68B49C89-BEA1-4C6E-A034-6DEA57EACD49}"/>
               </a:ext>
             </a:extLst>
           </p:cNvPr>
@@ -3317,7 +3388,7 @@
           <p:cNvPr id="16" name="">
             <a:extLst xmlns:a="http://schemas.openxmlformats.org/drawingml/2006/main">
               <a:ext uri="{FF2B5EF4-FFF2-40B4-BE49-F238E27FC236}">
-                <a16:creationId xmlns:a16="http://schemas.microsoft.com/office/drawing/2014/main" id="{55AB1194-00F8-4629-9865-749DE670E609}"/>
+                <a16:creationId xmlns:a16="http://schemas.microsoft.com/office/drawing/2014/main" id="{149E510E-F51D-4652-B95E-720267A10212}"/>
               </a:ext>
             </a:extLst>
           </p:cNvPr>
@@ -3351,7 +3422,7 @@
           <p:cNvPr id="17" name="">
             <a:extLst xmlns:a="http://schemas.openxmlformats.org/drawingml/2006/main">
               <a:ext uri="{FF2B5EF4-FFF2-40B4-BE49-F238E27FC236}">
-                <a16:creationId xmlns:a16="http://schemas.microsoft.com/office/drawing/2014/main" id="{78F5D1AE-0242-4AB7-8411-E7EAF8617B79}"/>
+                <a16:creationId xmlns:a16="http://schemas.microsoft.com/office/drawing/2014/main" id="{6F9778E3-164A-47E0-B39D-AA035E318BC2}"/>
               </a:ext>
             </a:extLst>
           </p:cNvPr>
@@ -3398,7 +3469,7 @@
           <p:cNvPr id="18" name="">
             <a:extLst xmlns:a="http://schemas.openxmlformats.org/drawingml/2006/main">
               <a:ext uri="{FF2B5EF4-FFF2-40B4-BE49-F238E27FC236}">
-                <a16:creationId xmlns:a16="http://schemas.microsoft.com/office/drawing/2014/main" id="{9C5C6CDA-9B88-4B67-85F3-0C63C2436061}"/>
+                <a16:creationId xmlns:a16="http://schemas.microsoft.com/office/drawing/2014/main" id="{A9656299-5099-45CC-B223-42D86ACA664F}"/>
               </a:ext>
             </a:extLst>
           </p:cNvPr>
@@ -3445,7 +3516,7 @@
           <p:cNvPr id="19" name="">
             <a:extLst xmlns:a="http://schemas.openxmlformats.org/drawingml/2006/main">
               <a:ext uri="{FF2B5EF4-FFF2-40B4-BE49-F238E27FC236}">
-                <a16:creationId xmlns:a16="http://schemas.microsoft.com/office/drawing/2014/main" id="{97E6D868-4D5D-4A46-BD54-9B317E036064}"/>
+                <a16:creationId xmlns:a16="http://schemas.microsoft.com/office/drawing/2014/main" id="{34E91A72-6CA3-4071-AD19-448CEC02E872}"/>
               </a:ext>
             </a:extLst>
           </p:cNvPr>
@@ -3479,7 +3550,7 @@
           <p:cNvPr id="20" name="">
             <a:extLst xmlns:a="http://schemas.openxmlformats.org/drawingml/2006/main">
               <a:ext uri="{FF2B5EF4-FFF2-40B4-BE49-F238E27FC236}">
-                <a16:creationId xmlns:a16="http://schemas.microsoft.com/office/drawing/2014/main" id="{CD99C3B3-09F5-4845-A094-30E14203812C}"/>
+                <a16:creationId xmlns:a16="http://schemas.microsoft.com/office/drawing/2014/main" id="{913C1C82-1ADC-48BF-8E7B-036A5B6F01EC}"/>
               </a:ext>
             </a:extLst>
           </p:cNvPr>
@@ -3526,7 +3597,7 @@
           <p:cNvPr id="21" name="">
             <a:extLst xmlns:a="http://schemas.openxmlformats.org/drawingml/2006/main">
               <a:ext uri="{FF2B5EF4-FFF2-40B4-BE49-F238E27FC236}">
-                <a16:creationId xmlns:a16="http://schemas.microsoft.com/office/drawing/2014/main" id="{4F6EACDA-F948-4BA7-9D43-244613102A30}"/>
+                <a16:creationId xmlns:a16="http://schemas.microsoft.com/office/drawing/2014/main" id="{B97F8635-7662-4812-A4A6-1185BE881F13}"/>
               </a:ext>
             </a:extLst>
           </p:cNvPr>
@@ -3573,7 +3644,7 @@
           <p:cNvPr id="22" name="">
             <a:extLst xmlns:a="http://schemas.openxmlformats.org/drawingml/2006/main">
               <a:ext uri="{FF2B5EF4-FFF2-40B4-BE49-F238E27FC236}">
-                <a16:creationId xmlns:a16="http://schemas.microsoft.com/office/drawing/2014/main" id="{1EEBB38C-090A-47E6-9081-469F64B8A8BC}"/>
+                <a16:creationId xmlns:a16="http://schemas.microsoft.com/office/drawing/2014/main" id="{AFC5163E-7B76-4CA2-9325-F5F432A2C2C6}"/>
               </a:ext>
             </a:extLst>
           </p:cNvPr>
@@ -3603,7 +3674,7 @@
           <p:cNvPr id="23" name="">
             <a:extLst xmlns:a="http://schemas.openxmlformats.org/drawingml/2006/main">
               <a:ext uri="{FF2B5EF4-FFF2-40B4-BE49-F238E27FC236}">
-                <a16:creationId xmlns:a16="http://schemas.microsoft.com/office/drawing/2014/main" id="{38A3CB9D-57D6-4902-8CA5-55CD801643B0}"/>
+                <a16:creationId xmlns:a16="http://schemas.microsoft.com/office/drawing/2014/main" id="{E80F08E0-01BC-4A06-8191-345E939B8391}"/>
               </a:ext>
             </a:extLst>
           </p:cNvPr>
@@ -3648,7 +3719,7 @@
     </p:spTree>
     <p:extLst>
       <p:ext uri="{BB962C8B-B14F-4D97-AF65-F5344CB8AC3E}">
-        <p14:creationId xmlns:p14="http://schemas.microsoft.com/office/powerpoint/2010/main" val="2053052634"/>
+        <p14:creationId xmlns:p14="http://schemas.microsoft.com/office/powerpoint/2010/main" val="1384174491"/>
       </p:ext>
     </p:extLst>
   </p:cSld>
@@ -3683,7 +3754,7 @@
           <p:nvPr/>
         </p:nvPicPr>
         <p:blipFill>
-          <a:blip xmlns:r="http://schemas.openxmlformats.org/officeDocument/2006/relationships" xmlns:a="http://schemas.openxmlformats.org/drawingml/2006/main" r:embed="R90313174aea74cad"/>
+          <a:blip xmlns:r="http://schemas.openxmlformats.org/officeDocument/2006/relationships" xmlns:a="http://schemas.openxmlformats.org/drawingml/2006/main" r:embed="R446febec2fdf485c"/>
           <a:srcRect xmlns:a="http://schemas.openxmlformats.org/drawingml/2006/main" l="0" t="0" r="0" b="0"/>
           <a:stretch xmlns:a="http://schemas.openxmlformats.org/drawingml/2006/main">
             <a:fillRect l="0" t="0" r="0" b="0"/>
@@ -3704,7 +3775,7 @@
           <p:cNvPr id="2" name="">
             <a:extLst xmlns:a="http://schemas.openxmlformats.org/drawingml/2006/main">
               <a:ext uri="{FF2B5EF4-FFF2-40B4-BE49-F238E27FC236}">
-                <a16:creationId xmlns:a16="http://schemas.microsoft.com/office/drawing/2014/main" id="{BFDACDF7-48F7-44C8-A729-601B3E1BE950}"/>
+                <a16:creationId xmlns:a16="http://schemas.microsoft.com/office/drawing/2014/main" id="{1F69E7AD-E981-4FE6-AE8D-017777EAE111}"/>
               </a:ext>
             </a:extLst>
           </p:cNvPr>
@@ -3751,7 +3822,7 @@
           <p:cNvPr id="3" name="">
             <a:extLst xmlns:a="http://schemas.openxmlformats.org/drawingml/2006/main">
               <a:ext uri="{FF2B5EF4-FFF2-40B4-BE49-F238E27FC236}">
-                <a16:creationId xmlns:a16="http://schemas.microsoft.com/office/drawing/2014/main" id="{C8430216-9EC6-4701-9901-BD2DC5F436D5}"/>
+                <a16:creationId xmlns:a16="http://schemas.microsoft.com/office/drawing/2014/main" id="{F84B42C4-53B4-4E0D-B02E-F16E390AE1F1}"/>
               </a:ext>
             </a:extLst>
           </p:cNvPr>
@@ -3811,7 +3882,7 @@
           <p:cNvPr id="4" name="">
             <a:extLst xmlns:a="http://schemas.openxmlformats.org/drawingml/2006/main">
               <a:ext uri="{FF2B5EF4-FFF2-40B4-BE49-F238E27FC236}">
-                <a16:creationId xmlns:a16="http://schemas.microsoft.com/office/drawing/2014/main" id="{92CFAC22-E2AF-4FAB-8CF6-2213718B0E33}"/>
+                <a16:creationId xmlns:a16="http://schemas.microsoft.com/office/drawing/2014/main" id="{E371A1CE-1F29-447B-A369-9ACEE814754C}"/>
               </a:ext>
             </a:extLst>
           </p:cNvPr>
@@ -3858,7 +3929,7 @@
           <p:cNvPr id="5" name="">
             <a:extLst xmlns:a="http://schemas.openxmlformats.org/drawingml/2006/main">
               <a:ext uri="{FF2B5EF4-FFF2-40B4-BE49-F238E27FC236}">
-                <a16:creationId xmlns:a16="http://schemas.microsoft.com/office/drawing/2014/main" id="{B91E98EE-FC88-4693-AFF6-811676641AB1}"/>
+                <a16:creationId xmlns:a16="http://schemas.microsoft.com/office/drawing/2014/main" id="{6F5A0A52-A08A-4766-9199-DE3248A0D3AB}"/>
               </a:ext>
             </a:extLst>
           </p:cNvPr>
@@ -3915,7 +3986,7 @@
           <p:cNvPr id="6" name="">
             <a:extLst xmlns:a="http://schemas.openxmlformats.org/drawingml/2006/main">
               <a:ext uri="{FF2B5EF4-FFF2-40B4-BE49-F238E27FC236}">
-                <a16:creationId xmlns:a16="http://schemas.microsoft.com/office/drawing/2014/main" id="{1EA0A5F4-AD84-428A-ADD8-75939700D0F5}"/>
+                <a16:creationId xmlns:a16="http://schemas.microsoft.com/office/drawing/2014/main" id="{8EAE699B-D50E-41CD-B6BC-AE483E14E70D}"/>
               </a:ext>
             </a:extLst>
           </p:cNvPr>
@@ -3949,7 +4020,7 @@
           <p:cNvPr id="7" name="">
             <a:extLst xmlns:a="http://schemas.openxmlformats.org/drawingml/2006/main">
               <a:ext uri="{FF2B5EF4-FFF2-40B4-BE49-F238E27FC236}">
-                <a16:creationId xmlns:a16="http://schemas.microsoft.com/office/drawing/2014/main" id="{3E1ADCC0-901D-46DB-9EC0-816BFF9685A7}"/>
+                <a16:creationId xmlns:a16="http://schemas.microsoft.com/office/drawing/2014/main" id="{CB9B6D6B-8C3F-49DD-8DF6-22BC0DD1C458}"/>
               </a:ext>
             </a:extLst>
           </p:cNvPr>
@@ -3996,7 +4067,7 @@
           <p:cNvPr id="8" name="">
             <a:extLst xmlns:a="http://schemas.openxmlformats.org/drawingml/2006/main">
               <a:ext uri="{FF2B5EF4-FFF2-40B4-BE49-F238E27FC236}">
-                <a16:creationId xmlns:a16="http://schemas.microsoft.com/office/drawing/2014/main" id="{B0D5F83A-C52A-49E8-BEEE-3D918FBC681B}"/>
+                <a16:creationId xmlns:a16="http://schemas.microsoft.com/office/drawing/2014/main" id="{DE942173-EF2E-4E6D-82C6-C3237023D012}"/>
               </a:ext>
             </a:extLst>
           </p:cNvPr>
@@ -4056,7 +4127,7 @@
           <p:cNvPr id="9" name="">
             <a:extLst xmlns:a="http://schemas.openxmlformats.org/drawingml/2006/main">
               <a:ext uri="{FF2B5EF4-FFF2-40B4-BE49-F238E27FC236}">
-                <a16:creationId xmlns:a16="http://schemas.microsoft.com/office/drawing/2014/main" id="{7E930DD4-8704-4BB0-980C-6F95E10E5378}"/>
+                <a16:creationId xmlns:a16="http://schemas.microsoft.com/office/drawing/2014/main" id="{83F4BF82-23D4-4FF9-992E-9493F913EAE9}"/>
               </a:ext>
             </a:extLst>
           </p:cNvPr>
@@ -4086,7 +4157,7 @@
           <p:cNvPr id="10" name="">
             <a:extLst xmlns:a="http://schemas.openxmlformats.org/drawingml/2006/main">
               <a:ext uri="{FF2B5EF4-FFF2-40B4-BE49-F238E27FC236}">
-                <a16:creationId xmlns:a16="http://schemas.microsoft.com/office/drawing/2014/main" id="{B3DB0933-B1BC-45CF-BF68-3288BBCF91ED}"/>
+                <a16:creationId xmlns:a16="http://schemas.microsoft.com/office/drawing/2014/main" id="{2BC3A905-C6BA-401C-B7B0-5C889C6505B8}"/>
               </a:ext>
             </a:extLst>
           </p:cNvPr>
@@ -4116,7 +4187,7 @@
           <p:cNvPr id="11" name="">
             <a:extLst xmlns:a="http://schemas.openxmlformats.org/drawingml/2006/main">
               <a:ext uri="{FF2B5EF4-FFF2-40B4-BE49-F238E27FC236}">
-                <a16:creationId xmlns:a16="http://schemas.microsoft.com/office/drawing/2014/main" id="{F6A2CA78-4A38-4E3C-8231-B4615E9FDB24}"/>
+                <a16:creationId xmlns:a16="http://schemas.microsoft.com/office/drawing/2014/main" id="{20996AE7-10D4-4C2E-BE5E-99235D8CC8C8}"/>
               </a:ext>
             </a:extLst>
           </p:cNvPr>
@@ -4150,7 +4221,7 @@
           <p:cNvPr id="12" name="">
             <a:extLst xmlns:a="http://schemas.openxmlformats.org/drawingml/2006/main">
               <a:ext uri="{FF2B5EF4-FFF2-40B4-BE49-F238E27FC236}">
-                <a16:creationId xmlns:a16="http://schemas.microsoft.com/office/drawing/2014/main" id="{A70D695F-8562-48BC-88FB-BFFFD62CCFCA}"/>
+                <a16:creationId xmlns:a16="http://schemas.microsoft.com/office/drawing/2014/main" id="{E3D9DEF5-B1DC-4488-B373-744E93384650}"/>
               </a:ext>
             </a:extLst>
           </p:cNvPr>
@@ -4197,7 +4268,7 @@
           <p:cNvPr id="13" name="">
             <a:extLst xmlns:a="http://schemas.openxmlformats.org/drawingml/2006/main">
               <a:ext uri="{FF2B5EF4-FFF2-40B4-BE49-F238E27FC236}">
-                <a16:creationId xmlns:a16="http://schemas.microsoft.com/office/drawing/2014/main" id="{BA2E1791-E583-49F1-82FD-A29C609F6011}"/>
+                <a16:creationId xmlns:a16="http://schemas.microsoft.com/office/drawing/2014/main" id="{46A7BBE8-734D-4541-85D3-87A73AD3FF3E}"/>
               </a:ext>
             </a:extLst>
           </p:cNvPr>
@@ -4257,7 +4328,7 @@
           <p:cNvPr id="14" name="">
             <a:extLst xmlns:a="http://schemas.openxmlformats.org/drawingml/2006/main">
               <a:ext uri="{FF2B5EF4-FFF2-40B4-BE49-F238E27FC236}">
-                <a16:creationId xmlns:a16="http://schemas.microsoft.com/office/drawing/2014/main" id="{A5BA3623-72AC-4C0A-BDD6-9D4284A8369D}"/>
+                <a16:creationId xmlns:a16="http://schemas.microsoft.com/office/drawing/2014/main" id="{4CFFA1A0-7350-4243-9633-29EDA8066F2E}"/>
               </a:ext>
             </a:extLst>
           </p:cNvPr>
@@ -4287,7 +4358,7 @@
           <p:cNvPr id="15" name="">
             <a:extLst xmlns:a="http://schemas.openxmlformats.org/drawingml/2006/main">
               <a:ext uri="{FF2B5EF4-FFF2-40B4-BE49-F238E27FC236}">
-                <a16:creationId xmlns:a16="http://schemas.microsoft.com/office/drawing/2014/main" id="{1DFD22DC-148B-4520-81EE-D77D5158F703}"/>
+                <a16:creationId xmlns:a16="http://schemas.microsoft.com/office/drawing/2014/main" id="{BEA38414-1735-4654-B866-29CDF30C3624}"/>
               </a:ext>
             </a:extLst>
           </p:cNvPr>
@@ -4317,7 +4388,7 @@
           <p:cNvPr id="16" name="">
             <a:extLst xmlns:a="http://schemas.openxmlformats.org/drawingml/2006/main">
               <a:ext uri="{FF2B5EF4-FFF2-40B4-BE49-F238E27FC236}">
-                <a16:creationId xmlns:a16="http://schemas.microsoft.com/office/drawing/2014/main" id="{F0EC5604-DA9C-4089-BFFD-1C1FB6E3F425}"/>
+                <a16:creationId xmlns:a16="http://schemas.microsoft.com/office/drawing/2014/main" id="{82D3085D-E0D5-4F54-8D1B-BDB02195FE82}"/>
               </a:ext>
             </a:extLst>
           </p:cNvPr>
@@ -4351,7 +4422,7 @@
           <p:cNvPr id="17" name="">
             <a:extLst xmlns:a="http://schemas.openxmlformats.org/drawingml/2006/main">
               <a:ext uri="{FF2B5EF4-FFF2-40B4-BE49-F238E27FC236}">
-                <a16:creationId xmlns:a16="http://schemas.microsoft.com/office/drawing/2014/main" id="{0BF9A376-B02C-40B3-8691-BFC1BFE506CF}"/>
+                <a16:creationId xmlns:a16="http://schemas.microsoft.com/office/drawing/2014/main" id="{31AF256F-1566-40D4-B434-D89F44323FAF}"/>
               </a:ext>
             </a:extLst>
           </p:cNvPr>
@@ -4398,7 +4469,7 @@
           <p:cNvPr id="18" name="">
             <a:extLst xmlns:a="http://schemas.openxmlformats.org/drawingml/2006/main">
               <a:ext uri="{FF2B5EF4-FFF2-40B4-BE49-F238E27FC236}">
-                <a16:creationId xmlns:a16="http://schemas.microsoft.com/office/drawing/2014/main" id="{EAB0B18D-EC4E-4526-9DB2-B9FFD5C99335}"/>
+                <a16:creationId xmlns:a16="http://schemas.microsoft.com/office/drawing/2014/main" id="{9C2320E6-FF90-484E-911A-F638364288AD}"/>
               </a:ext>
             </a:extLst>
           </p:cNvPr>
@@ -4458,7 +4529,7 @@
           <p:cNvPr id="19" name="">
             <a:extLst xmlns:a="http://schemas.openxmlformats.org/drawingml/2006/main">
               <a:ext uri="{FF2B5EF4-FFF2-40B4-BE49-F238E27FC236}">
-                <a16:creationId xmlns:a16="http://schemas.microsoft.com/office/drawing/2014/main" id="{F0FBD15C-DEE5-483E-8697-1AA9B60420B2}"/>
+                <a16:creationId xmlns:a16="http://schemas.microsoft.com/office/drawing/2014/main" id="{CE2E72C7-D830-4075-8DC3-DC3A9133877F}"/>
               </a:ext>
             </a:extLst>
           </p:cNvPr>
@@ -4488,7 +4559,7 @@
           <p:cNvPr id="20" name="">
             <a:extLst xmlns:a="http://schemas.openxmlformats.org/drawingml/2006/main">
               <a:ext uri="{FF2B5EF4-FFF2-40B4-BE49-F238E27FC236}">
-                <a16:creationId xmlns:a16="http://schemas.microsoft.com/office/drawing/2014/main" id="{7AE82E50-F042-4CB1-A7FF-9B61CCA5FC97}"/>
+                <a16:creationId xmlns:a16="http://schemas.microsoft.com/office/drawing/2014/main" id="{15D20A9C-3C63-470F-8F33-6FE8A881B934}"/>
               </a:ext>
             </a:extLst>
           </p:cNvPr>
@@ -4518,7 +4589,7 @@
           <p:cNvPr id="21" name="">
             <a:extLst xmlns:a="http://schemas.openxmlformats.org/drawingml/2006/main">
               <a:ext uri="{FF2B5EF4-FFF2-40B4-BE49-F238E27FC236}">
-                <a16:creationId xmlns:a16="http://schemas.microsoft.com/office/drawing/2014/main" id="{FFCC54E0-C1EF-4172-AAC8-E858267246EE}"/>
+                <a16:creationId xmlns:a16="http://schemas.microsoft.com/office/drawing/2014/main" id="{8D07A466-1B05-473C-9E85-7A256F93B1E7}"/>
               </a:ext>
             </a:extLst>
           </p:cNvPr>
@@ -4552,7 +4623,7 @@
           <p:cNvPr id="22" name="">
             <a:extLst xmlns:a="http://schemas.openxmlformats.org/drawingml/2006/main">
               <a:ext uri="{FF2B5EF4-FFF2-40B4-BE49-F238E27FC236}">
-                <a16:creationId xmlns:a16="http://schemas.microsoft.com/office/drawing/2014/main" id="{9AF81413-0233-4A8F-B8B7-D4D6D04072B6}"/>
+                <a16:creationId xmlns:a16="http://schemas.microsoft.com/office/drawing/2014/main" id="{8F59E034-49B6-4693-BCE3-E2FEBA5CB048}"/>
               </a:ext>
             </a:extLst>
           </p:cNvPr>
@@ -4599,7 +4670,7 @@
           <p:cNvPr id="23" name="">
             <a:extLst xmlns:a="http://schemas.openxmlformats.org/drawingml/2006/main">
               <a:ext uri="{FF2B5EF4-FFF2-40B4-BE49-F238E27FC236}">
-                <a16:creationId xmlns:a16="http://schemas.microsoft.com/office/drawing/2014/main" id="{9F1C4399-66A6-4465-9EC0-60F3F72DD064}"/>
+                <a16:creationId xmlns:a16="http://schemas.microsoft.com/office/drawing/2014/main" id="{2C1DE4A3-90D6-449B-9A03-C29E4EE44D28}"/>
               </a:ext>
             </a:extLst>
           </p:cNvPr>
@@ -4659,7 +4730,7 @@
           <p:cNvPr id="24" name="">
             <a:extLst xmlns:a="http://schemas.openxmlformats.org/drawingml/2006/main">
               <a:ext uri="{FF2B5EF4-FFF2-40B4-BE49-F238E27FC236}">
-                <a16:creationId xmlns:a16="http://schemas.microsoft.com/office/drawing/2014/main" id="{248B36B1-5D7E-4970-9CE0-20DE6A7F16F5}"/>
+                <a16:creationId xmlns:a16="http://schemas.microsoft.com/office/drawing/2014/main" id="{33FAFFA5-595B-4CFD-BD55-C77B70132963}"/>
               </a:ext>
             </a:extLst>
           </p:cNvPr>
@@ -4689,7 +4760,7 @@
           <p:cNvPr id="25" name="">
             <a:extLst xmlns:a="http://schemas.openxmlformats.org/drawingml/2006/main">
               <a:ext uri="{FF2B5EF4-FFF2-40B4-BE49-F238E27FC236}">
-                <a16:creationId xmlns:a16="http://schemas.microsoft.com/office/drawing/2014/main" id="{5F7814D6-AEAE-4B12-B1EC-3767C8DB8E88}"/>
+                <a16:creationId xmlns:a16="http://schemas.microsoft.com/office/drawing/2014/main" id="{AAAE3482-D46C-482C-A39E-1114D98922FF}"/>
               </a:ext>
             </a:extLst>
           </p:cNvPr>
@@ -4719,7 +4790,7 @@
           <p:cNvPr id="26" name="">
             <a:extLst xmlns:a="http://schemas.openxmlformats.org/drawingml/2006/main">
               <a:ext uri="{FF2B5EF4-FFF2-40B4-BE49-F238E27FC236}">
-                <a16:creationId xmlns:a16="http://schemas.microsoft.com/office/drawing/2014/main" id="{17BD1FC6-1333-4719-A385-C9972F74D8CA}"/>
+                <a16:creationId xmlns:a16="http://schemas.microsoft.com/office/drawing/2014/main" id="{A303D5EC-751A-44CD-AFC8-BD1B37B36E35}"/>
               </a:ext>
             </a:extLst>
           </p:cNvPr>
@@ -4753,7 +4824,7 @@
           <p:cNvPr id="27" name="">
             <a:extLst xmlns:a="http://schemas.openxmlformats.org/drawingml/2006/main">
               <a:ext uri="{FF2B5EF4-FFF2-40B4-BE49-F238E27FC236}">
-                <a16:creationId xmlns:a16="http://schemas.microsoft.com/office/drawing/2014/main" id="{FBCC18B8-544A-4AFD-BFD0-D2777D832677}"/>
+                <a16:creationId xmlns:a16="http://schemas.microsoft.com/office/drawing/2014/main" id="{8978671C-12F8-4BFF-BFF6-31C35DCA5BE2}"/>
               </a:ext>
             </a:extLst>
           </p:cNvPr>
@@ -4800,7 +4871,7 @@
           <p:cNvPr id="28" name="">
             <a:extLst xmlns:a="http://schemas.openxmlformats.org/drawingml/2006/main">
               <a:ext uri="{FF2B5EF4-FFF2-40B4-BE49-F238E27FC236}">
-                <a16:creationId xmlns:a16="http://schemas.microsoft.com/office/drawing/2014/main" id="{722642FD-16F1-4DBE-90EC-EDDCF2A8D4A1}"/>
+                <a16:creationId xmlns:a16="http://schemas.microsoft.com/office/drawing/2014/main" id="{07307849-BDA5-44F9-B222-297C5AE66663}"/>
               </a:ext>
             </a:extLst>
           </p:cNvPr>
@@ -4860,7 +4931,7 @@
           <p:cNvPr id="29" name="">
             <a:extLst xmlns:a="http://schemas.openxmlformats.org/drawingml/2006/main">
               <a:ext uri="{FF2B5EF4-FFF2-40B4-BE49-F238E27FC236}">
-                <a16:creationId xmlns:a16="http://schemas.microsoft.com/office/drawing/2014/main" id="{4FFDB390-6432-4D38-8508-4BC9188F498E}"/>
+                <a16:creationId xmlns:a16="http://schemas.microsoft.com/office/drawing/2014/main" id="{7607C8F9-153A-449B-B585-61BC868E2DEF}"/>
               </a:ext>
             </a:extLst>
           </p:cNvPr>
@@ -4905,7 +4976,7 @@
     </p:spTree>
     <p:extLst>
       <p:ext uri="{BB962C8B-B14F-4D97-AF65-F5344CB8AC3E}">
-        <p14:creationId xmlns:p14="http://schemas.microsoft.com/office/powerpoint/2010/main" val="1375759587"/>
+        <p14:creationId xmlns:p14="http://schemas.microsoft.com/office/powerpoint/2010/main" val="1401297879"/>
       </p:ext>
     </p:extLst>
   </p:cSld>
@@ -4940,7 +5011,7 @@
           <p:nvPr/>
         </p:nvPicPr>
         <p:blipFill>
-          <a:blip xmlns:r="http://schemas.openxmlformats.org/officeDocument/2006/relationships" xmlns:a="http://schemas.openxmlformats.org/drawingml/2006/main" r:embed="R5685f96ce99847dc"/>
+          <a:blip xmlns:r="http://schemas.openxmlformats.org/officeDocument/2006/relationships" xmlns:a="http://schemas.openxmlformats.org/drawingml/2006/main" r:embed="Ra46d70e7105a4f42"/>
           <a:srcRect xmlns:a="http://schemas.openxmlformats.org/drawingml/2006/main" l="0" t="0" r="0" b="0"/>
           <a:stretch xmlns:a="http://schemas.openxmlformats.org/drawingml/2006/main">
             <a:fillRect l="0" t="0" r="0" b="0"/>
@@ -4961,7 +5032,7 @@
           <p:cNvPr id="2" name="">
             <a:extLst xmlns:a="http://schemas.openxmlformats.org/drawingml/2006/main">
               <a:ext uri="{FF2B5EF4-FFF2-40B4-BE49-F238E27FC236}">
-                <a16:creationId xmlns:a16="http://schemas.microsoft.com/office/drawing/2014/main" id="{727D26AF-C40B-4115-AE80-BD1DE61367E9}"/>
+                <a16:creationId xmlns:a16="http://schemas.microsoft.com/office/drawing/2014/main" id="{49343024-39D3-48C5-A499-6084E0605FD7}"/>
               </a:ext>
             </a:extLst>
           </p:cNvPr>
@@ -5008,7 +5079,7 @@
           <p:cNvPr id="3" name="">
             <a:extLst xmlns:a="http://schemas.openxmlformats.org/drawingml/2006/main">
               <a:ext uri="{FF2B5EF4-FFF2-40B4-BE49-F238E27FC236}">
-                <a16:creationId xmlns:a16="http://schemas.microsoft.com/office/drawing/2014/main" id="{F43D13FD-3A42-4E67-AB31-92A8882E8142}"/>
+                <a16:creationId xmlns:a16="http://schemas.microsoft.com/office/drawing/2014/main" id="{7495D71F-B8F4-4AAB-9E1E-15E94317621C}"/>
               </a:ext>
             </a:extLst>
           </p:cNvPr>
@@ -5068,7 +5139,7 @@
           <p:cNvPr id="4" name="">
             <a:extLst xmlns:a="http://schemas.openxmlformats.org/drawingml/2006/main">
               <a:ext uri="{FF2B5EF4-FFF2-40B4-BE49-F238E27FC236}">
-                <a16:creationId xmlns:a16="http://schemas.microsoft.com/office/drawing/2014/main" id="{19F62702-37E8-4EB3-83DB-93709872494A}"/>
+                <a16:creationId xmlns:a16="http://schemas.microsoft.com/office/drawing/2014/main" id="{26BFEBE8-0044-4580-99E5-B81368C808CD}"/>
               </a:ext>
             </a:extLst>
           </p:cNvPr>
@@ -5115,7 +5186,7 @@
           <p:cNvPr id="5" name="">
             <a:extLst xmlns:a="http://schemas.openxmlformats.org/drawingml/2006/main">
               <a:ext uri="{FF2B5EF4-FFF2-40B4-BE49-F238E27FC236}">
-                <a16:creationId xmlns:a16="http://schemas.microsoft.com/office/drawing/2014/main" id="{621664F5-3AF9-4FDA-BD9F-F08BF3170584}"/>
+                <a16:creationId xmlns:a16="http://schemas.microsoft.com/office/drawing/2014/main" id="{AD02CDBE-FAE2-452E-9AF8-0F7B9C5B794C}"/>
               </a:ext>
             </a:extLst>
           </p:cNvPr>
@@ -5172,7 +5243,7 @@
           <p:cNvPr id="6" name="">
             <a:extLst xmlns:a="http://schemas.openxmlformats.org/drawingml/2006/main">
               <a:ext uri="{FF2B5EF4-FFF2-40B4-BE49-F238E27FC236}">
-                <a16:creationId xmlns:a16="http://schemas.microsoft.com/office/drawing/2014/main" id="{E3B21232-67B0-4D40-9AE5-06A963CC6FD0}"/>
+                <a16:creationId xmlns:a16="http://schemas.microsoft.com/office/drawing/2014/main" id="{744C3FE2-1036-4C11-A2E3-037271410464}"/>
               </a:ext>
             </a:extLst>
           </p:cNvPr>
@@ -5206,7 +5277,7 @@
           <p:cNvPr id="7" name="">
             <a:extLst xmlns:a="http://schemas.openxmlformats.org/drawingml/2006/main">
               <a:ext uri="{FF2B5EF4-FFF2-40B4-BE49-F238E27FC236}">
-                <a16:creationId xmlns:a16="http://schemas.microsoft.com/office/drawing/2014/main" id="{76EC590A-F379-430D-90F6-18DB929029AE}"/>
+                <a16:creationId xmlns:a16="http://schemas.microsoft.com/office/drawing/2014/main" id="{FE15348F-3D9D-40DE-B2C5-BD4EB1DCA7F0}"/>
               </a:ext>
             </a:extLst>
           </p:cNvPr>
@@ -5253,7 +5324,7 @@
           <p:cNvPr id="8" name="">
             <a:extLst xmlns:a="http://schemas.openxmlformats.org/drawingml/2006/main">
               <a:ext uri="{FF2B5EF4-FFF2-40B4-BE49-F238E27FC236}">
-                <a16:creationId xmlns:a16="http://schemas.microsoft.com/office/drawing/2014/main" id="{27AFF37E-00BA-46FE-87AB-946400352265}"/>
+                <a16:creationId xmlns:a16="http://schemas.microsoft.com/office/drawing/2014/main" id="{B14329D1-643B-4897-B7D3-C06908CEF985}"/>
               </a:ext>
             </a:extLst>
           </p:cNvPr>
@@ -5300,7 +5371,7 @@
           <p:cNvPr id="9" name="">
             <a:extLst xmlns:a="http://schemas.openxmlformats.org/drawingml/2006/main">
               <a:ext uri="{FF2B5EF4-FFF2-40B4-BE49-F238E27FC236}">
-                <a16:creationId xmlns:a16="http://schemas.microsoft.com/office/drawing/2014/main" id="{29B66CC9-9514-4323-8D24-218B5547E842}"/>
+                <a16:creationId xmlns:a16="http://schemas.microsoft.com/office/drawing/2014/main" id="{45DD3F18-93E5-4B63-AB86-81C35E051AE7}"/>
               </a:ext>
             </a:extLst>
           </p:cNvPr>
@@ -5347,7 +5418,7 @@
           <p:cNvPr id="10" name="">
             <a:extLst xmlns:a="http://schemas.openxmlformats.org/drawingml/2006/main">
               <a:ext uri="{FF2B5EF4-FFF2-40B4-BE49-F238E27FC236}">
-                <a16:creationId xmlns:a16="http://schemas.microsoft.com/office/drawing/2014/main" id="{234EA946-DA7F-4DD5-9468-C904B0D52A43}"/>
+                <a16:creationId xmlns:a16="http://schemas.microsoft.com/office/drawing/2014/main" id="{2A2E0331-A3E1-4B71-B1F8-53B4C9140379}"/>
               </a:ext>
             </a:extLst>
           </p:cNvPr>
@@ -5394,7 +5465,7 @@
           <p:cNvPr id="11" name="">
             <a:extLst xmlns:a="http://schemas.openxmlformats.org/drawingml/2006/main">
               <a:ext uri="{FF2B5EF4-FFF2-40B4-BE49-F238E27FC236}">
-                <a16:creationId xmlns:a16="http://schemas.microsoft.com/office/drawing/2014/main" id="{3473197D-DA83-4004-B45C-AB2E9AF86C95}"/>
+                <a16:creationId xmlns:a16="http://schemas.microsoft.com/office/drawing/2014/main" id="{9393652F-FD27-454E-8D02-8354FAB7EE41}"/>
               </a:ext>
             </a:extLst>
           </p:cNvPr>
@@ -5441,7 +5512,7 @@
           <p:cNvPr id="12" name="">
             <a:extLst xmlns:a="http://schemas.openxmlformats.org/drawingml/2006/main">
               <a:ext uri="{FF2B5EF4-FFF2-40B4-BE49-F238E27FC236}">
-                <a16:creationId xmlns:a16="http://schemas.microsoft.com/office/drawing/2014/main" id="{BDDF9424-54BC-4883-9975-E81C48C4D6BF}"/>
+                <a16:creationId xmlns:a16="http://schemas.microsoft.com/office/drawing/2014/main" id="{D5E6B229-FCB6-4B3E-AE4A-9FDF35AE0F5E}"/>
               </a:ext>
             </a:extLst>
           </p:cNvPr>
@@ -5471,7 +5542,7 @@
           <p:cNvPr id="13" name="">
             <a:extLst xmlns:a="http://schemas.openxmlformats.org/drawingml/2006/main">
               <a:ext uri="{FF2B5EF4-FFF2-40B4-BE49-F238E27FC236}">
-                <a16:creationId xmlns:a16="http://schemas.microsoft.com/office/drawing/2014/main" id="{8B9FE5A0-0A99-413D-A44F-5F9045E40856}"/>
+                <a16:creationId xmlns:a16="http://schemas.microsoft.com/office/drawing/2014/main" id="{DAFD08D7-05AB-4A4B-9090-76E42A7894B6}"/>
               </a:ext>
             </a:extLst>
           </p:cNvPr>
@@ -5501,7 +5572,7 @@
           <p:cNvPr id="14" name="">
             <a:extLst xmlns:a="http://schemas.openxmlformats.org/drawingml/2006/main">
               <a:ext uri="{FF2B5EF4-FFF2-40B4-BE49-F238E27FC236}">
-                <a16:creationId xmlns:a16="http://schemas.microsoft.com/office/drawing/2014/main" id="{F56407A6-219D-455E-ABE5-5A488B849FD0}"/>
+                <a16:creationId xmlns:a16="http://schemas.microsoft.com/office/drawing/2014/main" id="{2C8BAC71-C1C0-43E9-9D72-74DFFCB88E75}"/>
               </a:ext>
             </a:extLst>
           </p:cNvPr>
@@ -5535,7 +5606,7 @@
           <p:cNvPr id="15" name="">
             <a:extLst xmlns:a="http://schemas.openxmlformats.org/drawingml/2006/main">
               <a:ext uri="{FF2B5EF4-FFF2-40B4-BE49-F238E27FC236}">
-                <a16:creationId xmlns:a16="http://schemas.microsoft.com/office/drawing/2014/main" id="{732E7089-B65F-4701-8249-815A6A3637F2}"/>
+                <a16:creationId xmlns:a16="http://schemas.microsoft.com/office/drawing/2014/main" id="{465D6AF5-DBB4-49DA-840C-2FD3A415BBF6}"/>
               </a:ext>
             </a:extLst>
           </p:cNvPr>
@@ -5582,7 +5653,7 @@
           <p:cNvPr id="16" name="">
             <a:extLst xmlns:a="http://schemas.openxmlformats.org/drawingml/2006/main">
               <a:ext uri="{FF2B5EF4-FFF2-40B4-BE49-F238E27FC236}">
-                <a16:creationId xmlns:a16="http://schemas.microsoft.com/office/drawing/2014/main" id="{4D218BFE-6DEE-492E-9FCB-5E73A710BBC4}"/>
+                <a16:creationId xmlns:a16="http://schemas.microsoft.com/office/drawing/2014/main" id="{61EBFDA2-924F-4690-99A4-3972CEE6FCCB}"/>
               </a:ext>
             </a:extLst>
           </p:cNvPr>
@@ -5629,7 +5700,7 @@
           <p:cNvPr id="17" name="">
             <a:extLst xmlns:a="http://schemas.openxmlformats.org/drawingml/2006/main">
               <a:ext uri="{FF2B5EF4-FFF2-40B4-BE49-F238E27FC236}">
-                <a16:creationId xmlns:a16="http://schemas.microsoft.com/office/drawing/2014/main" id="{1EC5BFE6-850C-4E91-BBC2-0E80AB50EC46}"/>
+                <a16:creationId xmlns:a16="http://schemas.microsoft.com/office/drawing/2014/main" id="{219F9513-4EDF-41B5-AB2F-9FEB9677D322}"/>
               </a:ext>
             </a:extLst>
           </p:cNvPr>
@@ -5702,7 +5773,7 @@
           <p:cNvPr id="18" name="">
             <a:extLst xmlns:a="http://schemas.openxmlformats.org/drawingml/2006/main">
               <a:ext uri="{FF2B5EF4-FFF2-40B4-BE49-F238E27FC236}">
-                <a16:creationId xmlns:a16="http://schemas.microsoft.com/office/drawing/2014/main" id="{514BA200-3A12-465F-8F11-BA47BC781D94}"/>
+                <a16:creationId xmlns:a16="http://schemas.microsoft.com/office/drawing/2014/main" id="{65356181-7918-4C83-86BF-6E297C0B0AB7}"/>
               </a:ext>
             </a:extLst>
           </p:cNvPr>
@@ -5749,7 +5820,7 @@
           <p:cNvPr id="19" name="">
             <a:extLst xmlns:a="http://schemas.openxmlformats.org/drawingml/2006/main">
               <a:ext uri="{FF2B5EF4-FFF2-40B4-BE49-F238E27FC236}">
-                <a16:creationId xmlns:a16="http://schemas.microsoft.com/office/drawing/2014/main" id="{134EC26C-3926-46DB-BC82-2AA18134A4E9}"/>
+                <a16:creationId xmlns:a16="http://schemas.microsoft.com/office/drawing/2014/main" id="{E2C3FCDC-79FB-4992-96C2-47C37B6515AE}"/>
               </a:ext>
             </a:extLst>
           </p:cNvPr>
@@ -5796,7 +5867,7 @@
           <p:cNvPr id="20" name="">
             <a:extLst xmlns:a="http://schemas.openxmlformats.org/drawingml/2006/main">
               <a:ext uri="{FF2B5EF4-FFF2-40B4-BE49-F238E27FC236}">
-                <a16:creationId xmlns:a16="http://schemas.microsoft.com/office/drawing/2014/main" id="{30BE319D-1B71-419C-974D-227461ABAD77}"/>
+                <a16:creationId xmlns:a16="http://schemas.microsoft.com/office/drawing/2014/main" id="{D5C0CE03-175D-4043-9E5E-61F10753F0C3}"/>
               </a:ext>
             </a:extLst>
           </p:cNvPr>
@@ -5843,7 +5914,7 @@
           <p:cNvPr id="21" name="">
             <a:extLst xmlns:a="http://schemas.openxmlformats.org/drawingml/2006/main">
               <a:ext uri="{FF2B5EF4-FFF2-40B4-BE49-F238E27FC236}">
-                <a16:creationId xmlns:a16="http://schemas.microsoft.com/office/drawing/2014/main" id="{CFF33047-7CEF-4D55-9533-B1ADC0FD65C7}"/>
+                <a16:creationId xmlns:a16="http://schemas.microsoft.com/office/drawing/2014/main" id="{76ECCD9E-C01A-4599-99EE-C7438F329469}"/>
               </a:ext>
             </a:extLst>
           </p:cNvPr>
@@ -5875,7 +5946,7 @@
           <p:cNvPr id="22" name="">
             <a:extLst xmlns:a="http://schemas.openxmlformats.org/drawingml/2006/main">
               <a:ext uri="{FF2B5EF4-FFF2-40B4-BE49-F238E27FC236}">
-                <a16:creationId xmlns:a16="http://schemas.microsoft.com/office/drawing/2014/main" id="{3A5F8B02-1D63-4EDA-BD47-A21478050238}"/>
+                <a16:creationId xmlns:a16="http://schemas.microsoft.com/office/drawing/2014/main" id="{0813271D-02FD-4989-AEBE-A36D32B5A748}"/>
               </a:ext>
             </a:extLst>
           </p:cNvPr>
@@ -5920,7 +5991,7 @@
     </p:spTree>
     <p:extLst>
       <p:ext uri="{BB962C8B-B14F-4D97-AF65-F5344CB8AC3E}">
-        <p14:creationId xmlns:p14="http://schemas.microsoft.com/office/powerpoint/2010/main" val="191750982"/>
+        <p14:creationId xmlns:p14="http://schemas.microsoft.com/office/powerpoint/2010/main" val="610982986"/>
       </p:ext>
     </p:extLst>
   </p:cSld>
@@ -5955,7 +6026,7 @@
           <p:nvPr/>
         </p:nvPicPr>
         <p:blipFill>
-          <a:blip xmlns:r="http://schemas.openxmlformats.org/officeDocument/2006/relationships" xmlns:a="http://schemas.openxmlformats.org/drawingml/2006/main" r:embed="R36222a3aec564ee4"/>
+          <a:blip xmlns:r="http://schemas.openxmlformats.org/officeDocument/2006/relationships" xmlns:a="http://schemas.openxmlformats.org/drawingml/2006/main" r:embed="Rccac91a802fb48e9"/>
           <a:srcRect xmlns:a="http://schemas.openxmlformats.org/drawingml/2006/main" l="0" t="0" r="0" b="0"/>
           <a:stretch xmlns:a="http://schemas.openxmlformats.org/drawingml/2006/main">
             <a:fillRect l="0" t="0" r="0" b="0"/>
@@ -5976,7 +6047,7 @@
           <p:cNvPr id="2" name="">
             <a:extLst xmlns:a="http://schemas.openxmlformats.org/drawingml/2006/main">
               <a:ext uri="{FF2B5EF4-FFF2-40B4-BE49-F238E27FC236}">
-                <a16:creationId xmlns:a16="http://schemas.microsoft.com/office/drawing/2014/main" id="{FF82EAB5-A2E8-4DA8-9341-B40EFA283A42}"/>
+                <a16:creationId xmlns:a16="http://schemas.microsoft.com/office/drawing/2014/main" id="{41A0750D-051C-45DF-B1CB-B74DA2F69E27}"/>
               </a:ext>
             </a:extLst>
           </p:cNvPr>
@@ -6023,7 +6094,7 @@
           <p:cNvPr id="3" name="">
             <a:extLst xmlns:a="http://schemas.openxmlformats.org/drawingml/2006/main">
               <a:ext uri="{FF2B5EF4-FFF2-40B4-BE49-F238E27FC236}">
-                <a16:creationId xmlns:a16="http://schemas.microsoft.com/office/drawing/2014/main" id="{BE6CF71D-D3E0-4409-ABAF-8DB9620EB559}"/>
+                <a16:creationId xmlns:a16="http://schemas.microsoft.com/office/drawing/2014/main" id="{99932153-E708-47B4-8876-E775977CA579}"/>
               </a:ext>
             </a:extLst>
           </p:cNvPr>
@@ -6070,7 +6141,7 @@
           <p:cNvPr id="4" name="">
             <a:extLst xmlns:a="http://schemas.openxmlformats.org/drawingml/2006/main">
               <a:ext uri="{FF2B5EF4-FFF2-40B4-BE49-F238E27FC236}">
-                <a16:creationId xmlns:a16="http://schemas.microsoft.com/office/drawing/2014/main" id="{C2FADCA4-75C4-419C-8B27-05B69BF1688C}"/>
+                <a16:creationId xmlns:a16="http://schemas.microsoft.com/office/drawing/2014/main" id="{EEDAE414-5608-43DB-A619-30220C62692F}"/>
               </a:ext>
             </a:extLst>
           </p:cNvPr>
@@ -6117,7 +6188,7 @@
           <p:cNvPr id="5" name="">
             <a:extLst xmlns:a="http://schemas.openxmlformats.org/drawingml/2006/main">
               <a:ext uri="{FF2B5EF4-FFF2-40B4-BE49-F238E27FC236}">
-                <a16:creationId xmlns:a16="http://schemas.microsoft.com/office/drawing/2014/main" id="{A6FA0362-80A9-4F61-B511-F6FD3F5DFAC6}"/>
+                <a16:creationId xmlns:a16="http://schemas.microsoft.com/office/drawing/2014/main" id="{F64D43BE-D619-4222-910F-FDB8B9E86815}"/>
               </a:ext>
             </a:extLst>
           </p:cNvPr>
@@ -6174,7 +6245,7 @@
           <p:cNvPr id="6" name="">
             <a:extLst xmlns:a="http://schemas.openxmlformats.org/drawingml/2006/main">
               <a:ext uri="{FF2B5EF4-FFF2-40B4-BE49-F238E27FC236}">
-                <a16:creationId xmlns:a16="http://schemas.microsoft.com/office/drawing/2014/main" id="{1567E6F4-653E-4CF3-88EB-5358CDF24D12}"/>
+                <a16:creationId xmlns:a16="http://schemas.microsoft.com/office/drawing/2014/main" id="{FE0299CA-6149-4908-9318-8EA43CF8F553}"/>
               </a:ext>
             </a:extLst>
           </p:cNvPr>
@@ -6208,7 +6279,7 @@
           <p:cNvPr id="7" name="">
             <a:extLst xmlns:a="http://schemas.openxmlformats.org/drawingml/2006/main">
               <a:ext uri="{FF2B5EF4-FFF2-40B4-BE49-F238E27FC236}">
-                <a16:creationId xmlns:a16="http://schemas.microsoft.com/office/drawing/2014/main" id="{28C713BF-DA0F-4515-8C3F-9B3D576CCD8B}"/>
+                <a16:creationId xmlns:a16="http://schemas.microsoft.com/office/drawing/2014/main" id="{2FAE1A1C-8D7F-45E2-A90F-CA0CFDAF6B4F}"/>
               </a:ext>
             </a:extLst>
           </p:cNvPr>
@@ -6255,7 +6326,7 @@
           <p:cNvPr id="8" name="">
             <a:extLst xmlns:a="http://schemas.openxmlformats.org/drawingml/2006/main">
               <a:ext uri="{FF2B5EF4-FFF2-40B4-BE49-F238E27FC236}">
-                <a16:creationId xmlns:a16="http://schemas.microsoft.com/office/drawing/2014/main" id="{66BC07AC-254C-456E-9FFF-A1BD4F5CBCC4}"/>
+                <a16:creationId xmlns:a16="http://schemas.microsoft.com/office/drawing/2014/main" id="{41B1B9CB-0466-417E-BEB7-F4152DCB8785}"/>
               </a:ext>
             </a:extLst>
           </p:cNvPr>
@@ -6302,7 +6373,7 @@
           <p:cNvPr id="9" name="">
             <a:extLst xmlns:a="http://schemas.openxmlformats.org/drawingml/2006/main">
               <a:ext uri="{FF2B5EF4-FFF2-40B4-BE49-F238E27FC236}">
-                <a16:creationId xmlns:a16="http://schemas.microsoft.com/office/drawing/2014/main" id="{B6C5CA12-9A2D-4FF3-A9FE-9122E22DA9EC}"/>
+                <a16:creationId xmlns:a16="http://schemas.microsoft.com/office/drawing/2014/main" id="{4EBFEA8E-8920-48CF-9278-7A7243581550}"/>
               </a:ext>
             </a:extLst>
           </p:cNvPr>
@@ -6336,7 +6407,7 @@
           <p:cNvPr id="10" name="">
             <a:extLst xmlns:a="http://schemas.openxmlformats.org/drawingml/2006/main">
               <a:ext uri="{FF2B5EF4-FFF2-40B4-BE49-F238E27FC236}">
-                <a16:creationId xmlns:a16="http://schemas.microsoft.com/office/drawing/2014/main" id="{A9EEEB2B-22F1-423B-AD03-CA716302D9A1}"/>
+                <a16:creationId xmlns:a16="http://schemas.microsoft.com/office/drawing/2014/main" id="{F1D8006D-8CFD-4F24-B95A-FB69B23888DA}"/>
               </a:ext>
             </a:extLst>
           </p:cNvPr>
@@ -6383,7 +6454,7 @@
           <p:cNvPr id="11" name="">
             <a:extLst xmlns:a="http://schemas.openxmlformats.org/drawingml/2006/main">
               <a:ext uri="{FF2B5EF4-FFF2-40B4-BE49-F238E27FC236}">
-                <a16:creationId xmlns:a16="http://schemas.microsoft.com/office/drawing/2014/main" id="{DEAD1696-E4C5-4BCE-BDB6-BD94A1F099A3}"/>
+                <a16:creationId xmlns:a16="http://schemas.microsoft.com/office/drawing/2014/main" id="{DDDC297A-31AD-4873-B4B4-076F41AD239E}"/>
               </a:ext>
             </a:extLst>
           </p:cNvPr>
@@ -6430,7 +6501,7 @@
           <p:cNvPr id="12" name="">
             <a:extLst xmlns:a="http://schemas.openxmlformats.org/drawingml/2006/main">
               <a:ext uri="{FF2B5EF4-FFF2-40B4-BE49-F238E27FC236}">
-                <a16:creationId xmlns:a16="http://schemas.microsoft.com/office/drawing/2014/main" id="{BB32DBD1-6E9D-4B8F-81C3-A9575279058B}"/>
+                <a16:creationId xmlns:a16="http://schemas.microsoft.com/office/drawing/2014/main" id="{E5C749B5-5567-48C0-A434-E2D6B9BD2F96}"/>
               </a:ext>
             </a:extLst>
           </p:cNvPr>
@@ -6477,7 +6548,7 @@
           <p:cNvPr id="13" name="">
             <a:extLst xmlns:a="http://schemas.openxmlformats.org/drawingml/2006/main">
               <a:ext uri="{FF2B5EF4-FFF2-40B4-BE49-F238E27FC236}">
-                <a16:creationId xmlns:a16="http://schemas.microsoft.com/office/drawing/2014/main" id="{92233C20-098D-4D04-B95A-0D15DAAD41DE}"/>
+                <a16:creationId xmlns:a16="http://schemas.microsoft.com/office/drawing/2014/main" id="{6ADFB71F-F8F8-48F8-AA44-7EAF4452CEE7}"/>
               </a:ext>
             </a:extLst>
           </p:cNvPr>
@@ -6511,7 +6582,7 @@
           <p:cNvPr id="14" name="">
             <a:extLst xmlns:a="http://schemas.openxmlformats.org/drawingml/2006/main">
               <a:ext uri="{FF2B5EF4-FFF2-40B4-BE49-F238E27FC236}">
-                <a16:creationId xmlns:a16="http://schemas.microsoft.com/office/drawing/2014/main" id="{5C33FFB3-FB0D-4866-9531-BCF8F13EB61F}"/>
+                <a16:creationId xmlns:a16="http://schemas.microsoft.com/office/drawing/2014/main" id="{F5FBC958-66FD-4889-B37C-8E2CCF9AFBF0}"/>
               </a:ext>
             </a:extLst>
           </p:cNvPr>
@@ -6558,7 +6629,7 @@
           <p:cNvPr id="15" name="">
             <a:extLst xmlns:a="http://schemas.openxmlformats.org/drawingml/2006/main">
               <a:ext uri="{FF2B5EF4-FFF2-40B4-BE49-F238E27FC236}">
-                <a16:creationId xmlns:a16="http://schemas.microsoft.com/office/drawing/2014/main" id="{6F9FA611-4008-4D61-A51E-300A48A0EC20}"/>
+                <a16:creationId xmlns:a16="http://schemas.microsoft.com/office/drawing/2014/main" id="{C11D814E-48A3-4D81-8828-B13417145FC8}"/>
               </a:ext>
             </a:extLst>
           </p:cNvPr>
@@ -6605,7 +6676,7 @@
           <p:cNvPr id="16" name="">
             <a:extLst xmlns:a="http://schemas.openxmlformats.org/drawingml/2006/main">
               <a:ext uri="{FF2B5EF4-FFF2-40B4-BE49-F238E27FC236}">
-                <a16:creationId xmlns:a16="http://schemas.microsoft.com/office/drawing/2014/main" id="{B7A41467-48A1-40B3-94FF-86DF276CCEED}"/>
+                <a16:creationId xmlns:a16="http://schemas.microsoft.com/office/drawing/2014/main" id="{4D981329-4133-495D-BB65-5FF55DB9B025}"/>
               </a:ext>
             </a:extLst>
           </p:cNvPr>
@@ -6652,7 +6723,7 @@
           <p:cNvPr id="17" name="">
             <a:extLst xmlns:a="http://schemas.openxmlformats.org/drawingml/2006/main">
               <a:ext uri="{FF2B5EF4-FFF2-40B4-BE49-F238E27FC236}">
-                <a16:creationId xmlns:a16="http://schemas.microsoft.com/office/drawing/2014/main" id="{07AD0C30-2805-47FF-85A5-C8337B2D20E1}"/>
+                <a16:creationId xmlns:a16="http://schemas.microsoft.com/office/drawing/2014/main" id="{F578FB1B-94D0-45F2-81FF-4EF3DFBFF759}"/>
               </a:ext>
             </a:extLst>
           </p:cNvPr>
@@ -6686,7 +6757,7 @@
           <p:cNvPr id="18" name="">
             <a:extLst xmlns:a="http://schemas.openxmlformats.org/drawingml/2006/main">
               <a:ext uri="{FF2B5EF4-FFF2-40B4-BE49-F238E27FC236}">
-                <a16:creationId xmlns:a16="http://schemas.microsoft.com/office/drawing/2014/main" id="{6CE851E4-7494-49D9-8F83-8592FFCFC4E1}"/>
+                <a16:creationId xmlns:a16="http://schemas.microsoft.com/office/drawing/2014/main" id="{1CB4AA1B-C79B-4EE1-9A5B-19CDAFCA2F1A}"/>
               </a:ext>
             </a:extLst>
           </p:cNvPr>
@@ -6733,7 +6804,7 @@
           <p:cNvPr id="19" name="">
             <a:extLst xmlns:a="http://schemas.openxmlformats.org/drawingml/2006/main">
               <a:ext uri="{FF2B5EF4-FFF2-40B4-BE49-F238E27FC236}">
-                <a16:creationId xmlns:a16="http://schemas.microsoft.com/office/drawing/2014/main" id="{BD3B687A-CB7F-4ECC-BC92-C9B4DA5BD6E9}"/>
+                <a16:creationId xmlns:a16="http://schemas.microsoft.com/office/drawing/2014/main" id="{0D2602BD-0E1D-4BC6-8253-FE3B8094E8D4}"/>
               </a:ext>
             </a:extLst>
           </p:cNvPr>
@@ -6780,7 +6851,7 @@
           <p:cNvPr id="20" name="">
             <a:extLst xmlns:a="http://schemas.openxmlformats.org/drawingml/2006/main">
               <a:ext uri="{FF2B5EF4-FFF2-40B4-BE49-F238E27FC236}">
-                <a16:creationId xmlns:a16="http://schemas.microsoft.com/office/drawing/2014/main" id="{58F3F0E1-5AC1-484C-A520-093D034804F3}"/>
+                <a16:creationId xmlns:a16="http://schemas.microsoft.com/office/drawing/2014/main" id="{2B19ABFD-10DC-47DB-9B7C-A6BD1EBED01A}"/>
               </a:ext>
             </a:extLst>
           </p:cNvPr>
@@ -6827,7 +6898,7 @@
           <p:cNvPr id="21" name="">
             <a:extLst xmlns:a="http://schemas.openxmlformats.org/drawingml/2006/main">
               <a:ext uri="{FF2B5EF4-FFF2-40B4-BE49-F238E27FC236}">
-                <a16:creationId xmlns:a16="http://schemas.microsoft.com/office/drawing/2014/main" id="{F3BBE40A-DF17-45E6-AF06-DEA762BCE80F}"/>
+                <a16:creationId xmlns:a16="http://schemas.microsoft.com/office/drawing/2014/main" id="{B9847A22-9B67-4BC4-ABA1-108C1C097BDE}"/>
               </a:ext>
             </a:extLst>
           </p:cNvPr>
@@ -6861,7 +6932,7 @@
           <p:cNvPr id="22" name="">
             <a:extLst xmlns:a="http://schemas.openxmlformats.org/drawingml/2006/main">
               <a:ext uri="{FF2B5EF4-FFF2-40B4-BE49-F238E27FC236}">
-                <a16:creationId xmlns:a16="http://schemas.microsoft.com/office/drawing/2014/main" id="{2AD241ED-6C4F-4959-94B8-4B995ABC31BA}"/>
+                <a16:creationId xmlns:a16="http://schemas.microsoft.com/office/drawing/2014/main" id="{F0D77265-0C33-4D93-86C2-EE1E6B739F19}"/>
               </a:ext>
             </a:extLst>
           </p:cNvPr>
@@ -6908,7 +6979,7 @@
           <p:cNvPr id="23" name="">
             <a:extLst xmlns:a="http://schemas.openxmlformats.org/drawingml/2006/main">
               <a:ext uri="{FF2B5EF4-FFF2-40B4-BE49-F238E27FC236}">
-                <a16:creationId xmlns:a16="http://schemas.microsoft.com/office/drawing/2014/main" id="{9531EEB3-919D-4F81-B362-0CB2797EB5AD}"/>
+                <a16:creationId xmlns:a16="http://schemas.microsoft.com/office/drawing/2014/main" id="{A0D50540-7503-4E8E-BEDB-8D503171AE6C}"/>
               </a:ext>
             </a:extLst>
           </p:cNvPr>
@@ -6955,7 +7026,7 @@
           <p:cNvPr id="24" name="">
             <a:extLst xmlns:a="http://schemas.openxmlformats.org/drawingml/2006/main">
               <a:ext uri="{FF2B5EF4-FFF2-40B4-BE49-F238E27FC236}">
-                <a16:creationId xmlns:a16="http://schemas.microsoft.com/office/drawing/2014/main" id="{EDB4ED5E-8419-4D18-A5CC-E48F8C8DCE30}"/>
+                <a16:creationId xmlns:a16="http://schemas.microsoft.com/office/drawing/2014/main" id="{5FCA14E9-B847-45C2-AE85-B7C057699765}"/>
               </a:ext>
             </a:extLst>
           </p:cNvPr>
@@ -6989,7 +7060,7 @@
           <p:cNvPr id="25" name="">
             <a:extLst xmlns:a="http://schemas.openxmlformats.org/drawingml/2006/main">
               <a:ext uri="{FF2B5EF4-FFF2-40B4-BE49-F238E27FC236}">
-                <a16:creationId xmlns:a16="http://schemas.microsoft.com/office/drawing/2014/main" id="{C3253482-E516-46DB-ADBD-D6752E5F07E5}"/>
+                <a16:creationId xmlns:a16="http://schemas.microsoft.com/office/drawing/2014/main" id="{4B26ADB7-E8DA-4377-8204-4ED4EDAB3014}"/>
               </a:ext>
             </a:extLst>
           </p:cNvPr>
@@ -7036,7 +7107,7 @@
           <p:cNvPr id="26" name="">
             <a:extLst xmlns:a="http://schemas.openxmlformats.org/drawingml/2006/main">
               <a:ext uri="{FF2B5EF4-FFF2-40B4-BE49-F238E27FC236}">
-                <a16:creationId xmlns:a16="http://schemas.microsoft.com/office/drawing/2014/main" id="{837D3E45-BDBC-42E6-8F29-D524A9DC4EA8}"/>
+                <a16:creationId xmlns:a16="http://schemas.microsoft.com/office/drawing/2014/main" id="{9FC3D0AC-2B28-46AE-BA72-3B990780D110}"/>
               </a:ext>
             </a:extLst>
           </p:cNvPr>
@@ -7083,7 +7154,7 @@
           <p:cNvPr id="27" name="">
             <a:extLst xmlns:a="http://schemas.openxmlformats.org/drawingml/2006/main">
               <a:ext uri="{FF2B5EF4-FFF2-40B4-BE49-F238E27FC236}">
-                <a16:creationId xmlns:a16="http://schemas.microsoft.com/office/drawing/2014/main" id="{ED973380-5495-4897-A391-E8804B23D1C3}"/>
+                <a16:creationId xmlns:a16="http://schemas.microsoft.com/office/drawing/2014/main" id="{8047BCE9-B40B-4078-8F2A-2B35DC07B6A3}"/>
               </a:ext>
             </a:extLst>
           </p:cNvPr>
@@ -7130,7 +7201,7 @@
           <p:cNvPr id="28" name="">
             <a:extLst xmlns:a="http://schemas.openxmlformats.org/drawingml/2006/main">
               <a:ext uri="{FF2B5EF4-FFF2-40B4-BE49-F238E27FC236}">
-                <a16:creationId xmlns:a16="http://schemas.microsoft.com/office/drawing/2014/main" id="{034E3012-BAF1-4572-9DA3-72F2F547BA79}"/>
+                <a16:creationId xmlns:a16="http://schemas.microsoft.com/office/drawing/2014/main" id="{D0412A30-CED7-4272-B293-302602CDA879}"/>
               </a:ext>
             </a:extLst>
           </p:cNvPr>
@@ -7175,7 +7246,7 @@
     </p:spTree>
     <p:extLst>
       <p:ext uri="{BB962C8B-B14F-4D97-AF65-F5344CB8AC3E}">
-        <p14:creationId xmlns:p14="http://schemas.microsoft.com/office/powerpoint/2010/main" val="1190048318"/>
+        <p14:creationId xmlns:p14="http://schemas.microsoft.com/office/powerpoint/2010/main" val="518151377"/>
       </p:ext>
     </p:extLst>
   </p:cSld>
@@ -7210,7 +7281,7 @@
           <p:nvPr/>
         </p:nvPicPr>
         <p:blipFill>
-          <a:blip xmlns:r="http://schemas.openxmlformats.org/officeDocument/2006/relationships" xmlns:a="http://schemas.openxmlformats.org/drawingml/2006/main" r:embed="Rb00e6114d3174c20"/>
+          <a:blip xmlns:r="http://schemas.openxmlformats.org/officeDocument/2006/relationships" xmlns:a="http://schemas.openxmlformats.org/drawingml/2006/main" r:embed="R65b9cc82884e4557"/>
           <a:srcRect xmlns:a="http://schemas.openxmlformats.org/drawingml/2006/main" l="0" t="0" r="0" b="0"/>
           <a:stretch xmlns:a="http://schemas.openxmlformats.org/drawingml/2006/main">
             <a:fillRect l="0" t="0" r="0" b="0"/>
@@ -7231,7 +7302,7 @@
           <p:cNvPr id="2" name="">
             <a:extLst xmlns:a="http://schemas.openxmlformats.org/drawingml/2006/main">
               <a:ext uri="{FF2B5EF4-FFF2-40B4-BE49-F238E27FC236}">
-                <a16:creationId xmlns:a16="http://schemas.microsoft.com/office/drawing/2014/main" id="{96AAF935-9C09-4C8D-AB9B-31E386CB6D77}"/>
+                <a16:creationId xmlns:a16="http://schemas.microsoft.com/office/drawing/2014/main" id="{0159BA41-6F25-4CB0-976D-DD9B7CA52D4B}"/>
               </a:ext>
             </a:extLst>
           </p:cNvPr>
@@ -7278,7 +7349,7 @@
           <p:cNvPr id="3" name="">
             <a:extLst xmlns:a="http://schemas.openxmlformats.org/drawingml/2006/main">
               <a:ext uri="{FF2B5EF4-FFF2-40B4-BE49-F238E27FC236}">
-                <a16:creationId xmlns:a16="http://schemas.microsoft.com/office/drawing/2014/main" id="{7C1E81D5-6232-48F9-8CE3-F1A89D9983E4}"/>
+                <a16:creationId xmlns:a16="http://schemas.microsoft.com/office/drawing/2014/main" id="{E2997099-BB98-43D9-AC22-D99A28851A0A}"/>
               </a:ext>
             </a:extLst>
           </p:cNvPr>
@@ -7338,7 +7409,7 @@
           <p:cNvPr id="4" name="">
             <a:extLst xmlns:a="http://schemas.openxmlformats.org/drawingml/2006/main">
               <a:ext uri="{FF2B5EF4-FFF2-40B4-BE49-F238E27FC236}">
-                <a16:creationId xmlns:a16="http://schemas.microsoft.com/office/drawing/2014/main" id="{6382F162-9168-4773-9C26-ED0442C4CA25}"/>
+                <a16:creationId xmlns:a16="http://schemas.microsoft.com/office/drawing/2014/main" id="{E194AA40-9A12-4897-830A-AD53AB7216E0}"/>
               </a:ext>
             </a:extLst>
           </p:cNvPr>
@@ -7385,7 +7456,7 @@
           <p:cNvPr id="5" name="">
             <a:extLst xmlns:a="http://schemas.openxmlformats.org/drawingml/2006/main">
               <a:ext uri="{FF2B5EF4-FFF2-40B4-BE49-F238E27FC236}">
-                <a16:creationId xmlns:a16="http://schemas.microsoft.com/office/drawing/2014/main" id="{9FB6C5F2-C814-495F-9C68-147CBC2997F7}"/>
+                <a16:creationId xmlns:a16="http://schemas.microsoft.com/office/drawing/2014/main" id="{BE177160-5FB5-48C3-9579-44CDA61D09CE}"/>
               </a:ext>
             </a:extLst>
           </p:cNvPr>
@@ -7442,7 +7513,7 @@
           <p:cNvPr id="6" name="">
             <a:extLst xmlns:a="http://schemas.openxmlformats.org/drawingml/2006/main">
               <a:ext uri="{FF2B5EF4-FFF2-40B4-BE49-F238E27FC236}">
-                <a16:creationId xmlns:a16="http://schemas.microsoft.com/office/drawing/2014/main" id="{771B69B7-C8C2-4D81-8FF6-60A1C2DB0D95}"/>
+                <a16:creationId xmlns:a16="http://schemas.microsoft.com/office/drawing/2014/main" id="{4977CDD4-2841-4A5D-94D2-1BE5B633D026}"/>
               </a:ext>
             </a:extLst>
           </p:cNvPr>
@@ -7476,7 +7547,7 @@
           <p:cNvPr id="7" name="">
             <a:extLst xmlns:a="http://schemas.openxmlformats.org/drawingml/2006/main">
               <a:ext uri="{FF2B5EF4-FFF2-40B4-BE49-F238E27FC236}">
-                <a16:creationId xmlns:a16="http://schemas.microsoft.com/office/drawing/2014/main" id="{A618F657-38B9-481E-9889-968D84E7E496}"/>
+                <a16:creationId xmlns:a16="http://schemas.microsoft.com/office/drawing/2014/main" id="{E0089813-F988-4921-9C31-8A193CE320D8}"/>
               </a:ext>
             </a:extLst>
           </p:cNvPr>
@@ -7523,7 +7594,7 @@
           <p:cNvPr id="8" name="">
             <a:extLst xmlns:a="http://schemas.openxmlformats.org/drawingml/2006/main">
               <a:ext uri="{FF2B5EF4-FFF2-40B4-BE49-F238E27FC236}">
-                <a16:creationId xmlns:a16="http://schemas.microsoft.com/office/drawing/2014/main" id="{65BB05DC-FD4C-4561-B19F-B9ACEC5C501D}"/>
+                <a16:creationId xmlns:a16="http://schemas.microsoft.com/office/drawing/2014/main" id="{5A533106-37D2-4470-A1DA-A22F85721F3E}"/>
               </a:ext>
             </a:extLst>
           </p:cNvPr>
@@ -7596,7 +7667,7 @@
           <p:cNvPr id="9" name="">
             <a:extLst xmlns:a="http://schemas.openxmlformats.org/drawingml/2006/main">
               <a:ext uri="{FF2B5EF4-FFF2-40B4-BE49-F238E27FC236}">
-                <a16:creationId xmlns:a16="http://schemas.microsoft.com/office/drawing/2014/main" id="{3D32FF3E-566D-4D19-AE7F-5D205D43721D}"/>
+                <a16:creationId xmlns:a16="http://schemas.microsoft.com/office/drawing/2014/main" id="{7EC35681-CF44-44F6-8E53-ED203AAE1C41}"/>
               </a:ext>
             </a:extLst>
           </p:cNvPr>
@@ -7626,7 +7697,7 @@
           <p:cNvPr id="10" name="">
             <a:extLst xmlns:a="http://schemas.openxmlformats.org/drawingml/2006/main">
               <a:ext uri="{FF2B5EF4-FFF2-40B4-BE49-F238E27FC236}">
-                <a16:creationId xmlns:a16="http://schemas.microsoft.com/office/drawing/2014/main" id="{774A8A88-C92D-4B66-A9CE-19D58F3FEE9A}"/>
+                <a16:creationId xmlns:a16="http://schemas.microsoft.com/office/drawing/2014/main" id="{E6829A01-5106-455C-918E-AFB750AA58BD}"/>
               </a:ext>
             </a:extLst>
           </p:cNvPr>
@@ -7656,7 +7727,7 @@
           <p:cNvPr id="11" name="">
             <a:extLst xmlns:a="http://schemas.openxmlformats.org/drawingml/2006/main">
               <a:ext uri="{FF2B5EF4-FFF2-40B4-BE49-F238E27FC236}">
-                <a16:creationId xmlns:a16="http://schemas.microsoft.com/office/drawing/2014/main" id="{CAC9D20D-4A4C-47AB-BEA7-346A074EF23F}"/>
+                <a16:creationId xmlns:a16="http://schemas.microsoft.com/office/drawing/2014/main" id="{811C7097-66E6-4A1D-B044-507EDC19A274}"/>
               </a:ext>
             </a:extLst>
           </p:cNvPr>
@@ -7690,7 +7761,7 @@
           <p:cNvPr id="12" name="">
             <a:extLst xmlns:a="http://schemas.openxmlformats.org/drawingml/2006/main">
               <a:ext uri="{FF2B5EF4-FFF2-40B4-BE49-F238E27FC236}">
-                <a16:creationId xmlns:a16="http://schemas.microsoft.com/office/drawing/2014/main" id="{8288D67B-9C96-4DB6-AF52-F48C9C86A2FD}"/>
+                <a16:creationId xmlns:a16="http://schemas.microsoft.com/office/drawing/2014/main" id="{91A176EB-B93F-44BE-A596-F519DF9C3A54}"/>
               </a:ext>
             </a:extLst>
           </p:cNvPr>
@@ -7737,7 +7808,7 @@
           <p:cNvPr id="13" name="">
             <a:extLst xmlns:a="http://schemas.openxmlformats.org/drawingml/2006/main">
               <a:ext uri="{FF2B5EF4-FFF2-40B4-BE49-F238E27FC236}">
-                <a16:creationId xmlns:a16="http://schemas.microsoft.com/office/drawing/2014/main" id="{6E74F71B-E202-46BF-B034-F4708A3B94F7}"/>
+                <a16:creationId xmlns:a16="http://schemas.microsoft.com/office/drawing/2014/main" id="{484A4F28-FC25-4CDC-9859-892C8184E4DD}"/>
               </a:ext>
             </a:extLst>
           </p:cNvPr>
@@ -7810,7 +7881,7 @@
           <p:cNvPr id="14" name="">
             <a:extLst xmlns:a="http://schemas.openxmlformats.org/drawingml/2006/main">
               <a:ext uri="{FF2B5EF4-FFF2-40B4-BE49-F238E27FC236}">
-                <a16:creationId xmlns:a16="http://schemas.microsoft.com/office/drawing/2014/main" id="{4DCFE65E-0907-4194-8035-30240D609757}"/>
+                <a16:creationId xmlns:a16="http://schemas.microsoft.com/office/drawing/2014/main" id="{F0334FBF-CA2C-4113-9DA7-A67968FC7F77}"/>
               </a:ext>
             </a:extLst>
           </p:cNvPr>
@@ -7840,7 +7911,7 @@
           <p:cNvPr id="15" name="">
             <a:extLst xmlns:a="http://schemas.openxmlformats.org/drawingml/2006/main">
               <a:ext uri="{FF2B5EF4-FFF2-40B4-BE49-F238E27FC236}">
-                <a16:creationId xmlns:a16="http://schemas.microsoft.com/office/drawing/2014/main" id="{B27E8FDC-E9B9-46C0-9694-0668C4F1994A}"/>
+                <a16:creationId xmlns:a16="http://schemas.microsoft.com/office/drawing/2014/main" id="{EA6DD7CB-ECB3-4AEB-ADCC-E90B5CB51857}"/>
               </a:ext>
             </a:extLst>
           </p:cNvPr>
@@ -7870,7 +7941,7 @@
           <p:cNvPr id="16" name="">
             <a:extLst xmlns:a="http://schemas.openxmlformats.org/drawingml/2006/main">
               <a:ext uri="{FF2B5EF4-FFF2-40B4-BE49-F238E27FC236}">
-                <a16:creationId xmlns:a16="http://schemas.microsoft.com/office/drawing/2014/main" id="{DEC91BC7-E18C-4D75-A2DE-096DB4B3FCC6}"/>
+                <a16:creationId xmlns:a16="http://schemas.microsoft.com/office/drawing/2014/main" id="{5C784AC0-4874-4B7F-89B6-0236D618C65A}"/>
               </a:ext>
             </a:extLst>
           </p:cNvPr>
@@ -7904,7 +7975,7 @@
           <p:cNvPr id="17" name="">
             <a:extLst xmlns:a="http://schemas.openxmlformats.org/drawingml/2006/main">
               <a:ext uri="{FF2B5EF4-FFF2-40B4-BE49-F238E27FC236}">
-                <a16:creationId xmlns:a16="http://schemas.microsoft.com/office/drawing/2014/main" id="{ADD90DEF-15DB-4BD0-BA3B-60C1ADB0C07D}"/>
+                <a16:creationId xmlns:a16="http://schemas.microsoft.com/office/drawing/2014/main" id="{2FEE6BA6-D224-45CD-AC3A-C9AA46D9ABA9}"/>
               </a:ext>
             </a:extLst>
           </p:cNvPr>
@@ -7951,7 +8022,7 @@
           <p:cNvPr id="18" name="">
             <a:extLst xmlns:a="http://schemas.openxmlformats.org/drawingml/2006/main">
               <a:ext uri="{FF2B5EF4-FFF2-40B4-BE49-F238E27FC236}">
-                <a16:creationId xmlns:a16="http://schemas.microsoft.com/office/drawing/2014/main" id="{D4E3262E-7D46-4D50-9147-462DD7CDC558}"/>
+                <a16:creationId xmlns:a16="http://schemas.microsoft.com/office/drawing/2014/main" id="{6E69E722-AE8A-47E1-BC03-F83664B3E4DD}"/>
               </a:ext>
             </a:extLst>
           </p:cNvPr>
@@ -8024,7 +8095,7 @@
           <p:cNvPr id="19" name="">
             <a:extLst xmlns:a="http://schemas.openxmlformats.org/drawingml/2006/main">
               <a:ext uri="{FF2B5EF4-FFF2-40B4-BE49-F238E27FC236}">
-                <a16:creationId xmlns:a16="http://schemas.microsoft.com/office/drawing/2014/main" id="{A752E7C8-CCF2-4A9A-BC59-D9E8C149EAA9}"/>
+                <a16:creationId xmlns:a16="http://schemas.microsoft.com/office/drawing/2014/main" id="{A8D3B64E-5445-4DC7-93CE-0FD3B69A37E0}"/>
               </a:ext>
             </a:extLst>
           </p:cNvPr>
@@ -8054,7 +8125,7 @@
           <p:cNvPr id="20" name="">
             <a:extLst xmlns:a="http://schemas.openxmlformats.org/drawingml/2006/main">
               <a:ext uri="{FF2B5EF4-FFF2-40B4-BE49-F238E27FC236}">
-                <a16:creationId xmlns:a16="http://schemas.microsoft.com/office/drawing/2014/main" id="{AF3D1E59-C6AB-4A3F-A93A-6B89C6293CAE}"/>
+                <a16:creationId xmlns:a16="http://schemas.microsoft.com/office/drawing/2014/main" id="{80988089-101F-4B1E-A39F-FD28B22CCD6E}"/>
               </a:ext>
             </a:extLst>
           </p:cNvPr>
@@ -8084,7 +8155,7 @@
           <p:cNvPr id="21" name="">
             <a:extLst xmlns:a="http://schemas.openxmlformats.org/drawingml/2006/main">
               <a:ext uri="{FF2B5EF4-FFF2-40B4-BE49-F238E27FC236}">
-                <a16:creationId xmlns:a16="http://schemas.microsoft.com/office/drawing/2014/main" id="{A61D269C-48C1-48B6-8EAC-A25149842AAE}"/>
+                <a16:creationId xmlns:a16="http://schemas.microsoft.com/office/drawing/2014/main" id="{B0545BBA-6A2E-443F-8CC9-D8BBB562FFF1}"/>
               </a:ext>
             </a:extLst>
           </p:cNvPr>
@@ -8118,7 +8189,7 @@
           <p:cNvPr id="22" name="">
             <a:extLst xmlns:a="http://schemas.openxmlformats.org/drawingml/2006/main">
               <a:ext uri="{FF2B5EF4-FFF2-40B4-BE49-F238E27FC236}">
-                <a16:creationId xmlns:a16="http://schemas.microsoft.com/office/drawing/2014/main" id="{2A6F7FDE-6C9A-4AA3-B389-D1ADDB2D77CF}"/>
+                <a16:creationId xmlns:a16="http://schemas.microsoft.com/office/drawing/2014/main" id="{DF96544F-10A8-45ED-A248-0A8523F975B8}"/>
               </a:ext>
             </a:extLst>
           </p:cNvPr>
@@ -8165,7 +8236,7 @@
           <p:cNvPr id="23" name="">
             <a:extLst xmlns:a="http://schemas.openxmlformats.org/drawingml/2006/main">
               <a:ext uri="{FF2B5EF4-FFF2-40B4-BE49-F238E27FC236}">
-                <a16:creationId xmlns:a16="http://schemas.microsoft.com/office/drawing/2014/main" id="{F129D3F2-9309-4B23-B1F3-E28B7A927096}"/>
+                <a16:creationId xmlns:a16="http://schemas.microsoft.com/office/drawing/2014/main" id="{088281EC-3A9E-4A31-AD19-A3F995993CC2}"/>
               </a:ext>
             </a:extLst>
           </p:cNvPr>
@@ -8238,7 +8309,7 @@
           <p:cNvPr id="24" name="">
             <a:extLst xmlns:a="http://schemas.openxmlformats.org/drawingml/2006/main">
               <a:ext uri="{FF2B5EF4-FFF2-40B4-BE49-F238E27FC236}">
-                <a16:creationId xmlns:a16="http://schemas.microsoft.com/office/drawing/2014/main" id="{DD67A836-CB74-4966-A7ED-B4C96B8D83C5}"/>
+                <a16:creationId xmlns:a16="http://schemas.microsoft.com/office/drawing/2014/main" id="{F9A5E4E7-31DF-4BAF-BCB4-90A1A3A91798}"/>
               </a:ext>
             </a:extLst>
           </p:cNvPr>
@@ -8272,7 +8343,7 @@
           <p:cNvPr id="25" name="">
             <a:extLst xmlns:a="http://schemas.openxmlformats.org/drawingml/2006/main">
               <a:ext uri="{FF2B5EF4-FFF2-40B4-BE49-F238E27FC236}">
-                <a16:creationId xmlns:a16="http://schemas.microsoft.com/office/drawing/2014/main" id="{991E8C57-7B39-4D85-AE2C-B4B39C7DD635}"/>
+                <a16:creationId xmlns:a16="http://schemas.microsoft.com/office/drawing/2014/main" id="{EBA14001-06E3-4799-AE78-4B4CCF8BE01E}"/>
               </a:ext>
             </a:extLst>
           </p:cNvPr>
@@ -8319,7 +8390,7 @@
           <p:cNvPr id="26" name="">
             <a:extLst xmlns:a="http://schemas.openxmlformats.org/drawingml/2006/main">
               <a:ext uri="{FF2B5EF4-FFF2-40B4-BE49-F238E27FC236}">
-                <a16:creationId xmlns:a16="http://schemas.microsoft.com/office/drawing/2014/main" id="{08450D1C-90D2-433C-AD68-D0F65AF2B0DC}"/>
+                <a16:creationId xmlns:a16="http://schemas.microsoft.com/office/drawing/2014/main" id="{12DE3D1C-D498-41FE-82C8-22A2499EA8CB}"/>
               </a:ext>
             </a:extLst>
           </p:cNvPr>
@@ -8351,7 +8422,7 @@
           <p:cNvPr id="27" name="">
             <a:extLst xmlns:a="http://schemas.openxmlformats.org/drawingml/2006/main">
               <a:ext uri="{FF2B5EF4-FFF2-40B4-BE49-F238E27FC236}">
-                <a16:creationId xmlns:a16="http://schemas.microsoft.com/office/drawing/2014/main" id="{C34E554F-BE29-4C18-A16B-026F74DE096F}"/>
+                <a16:creationId xmlns:a16="http://schemas.microsoft.com/office/drawing/2014/main" id="{0C9CB5AA-5878-42A5-B80C-9260B7A8B070}"/>
               </a:ext>
             </a:extLst>
           </p:cNvPr>
@@ -8398,7 +8469,7 @@
           <p:cNvPr id="28" name="">
             <a:extLst xmlns:a="http://schemas.openxmlformats.org/drawingml/2006/main">
               <a:ext uri="{FF2B5EF4-FFF2-40B4-BE49-F238E27FC236}">
-                <a16:creationId xmlns:a16="http://schemas.microsoft.com/office/drawing/2014/main" id="{5E1BEA9E-D5FB-4EF1-84DD-60640C960848}"/>
+                <a16:creationId xmlns:a16="http://schemas.microsoft.com/office/drawing/2014/main" id="{D1EC0990-E385-44DA-B2E7-634F4933DA2A}"/>
               </a:ext>
             </a:extLst>
           </p:cNvPr>
@@ -8443,7 +8514,7 @@
     </p:spTree>
     <p:extLst>
       <p:ext uri="{BB962C8B-B14F-4D97-AF65-F5344CB8AC3E}">
-        <p14:creationId xmlns:p14="http://schemas.microsoft.com/office/powerpoint/2010/main" val="600463836"/>
+        <p14:creationId xmlns:p14="http://schemas.microsoft.com/office/powerpoint/2010/main" val="1863406762"/>
       </p:ext>
     </p:extLst>
   </p:cSld>
@@ -8478,7 +8549,7 @@
           <p:nvPr/>
         </p:nvPicPr>
         <p:blipFill>
-          <a:blip xmlns:r="http://schemas.openxmlformats.org/officeDocument/2006/relationships" xmlns:a="http://schemas.openxmlformats.org/drawingml/2006/main" r:embed="R12fd535eb42b484b"/>
+          <a:blip xmlns:r="http://schemas.openxmlformats.org/officeDocument/2006/relationships" xmlns:a="http://schemas.openxmlformats.org/drawingml/2006/main" r:embed="R1d6c33b6b6874d77"/>
           <a:srcRect xmlns:a="http://schemas.openxmlformats.org/drawingml/2006/main" l="0" t="0" r="0" b="0"/>
           <a:stretch xmlns:a="http://schemas.openxmlformats.org/drawingml/2006/main">
             <a:fillRect l="0" t="0" r="0" b="0"/>
@@ -8499,7 +8570,7 @@
           <p:cNvPr id="2" name="">
             <a:extLst xmlns:a="http://schemas.openxmlformats.org/drawingml/2006/main">
               <a:ext uri="{FF2B5EF4-FFF2-40B4-BE49-F238E27FC236}">
-                <a16:creationId xmlns:a16="http://schemas.microsoft.com/office/drawing/2014/main" id="{CB1F4748-0BC5-457D-B408-949A6D614AFE}"/>
+                <a16:creationId xmlns:a16="http://schemas.microsoft.com/office/drawing/2014/main" id="{F075F4CB-8618-4B73-A8A6-E74F71761718}"/>
               </a:ext>
             </a:extLst>
           </p:cNvPr>
@@ -8546,7 +8617,7 @@
           <p:cNvPr id="3" name="">
             <a:extLst xmlns:a="http://schemas.openxmlformats.org/drawingml/2006/main">
               <a:ext uri="{FF2B5EF4-FFF2-40B4-BE49-F238E27FC236}">
-                <a16:creationId xmlns:a16="http://schemas.microsoft.com/office/drawing/2014/main" id="{6C523A4A-4FC1-44F0-A6E8-894F1667E9A9}"/>
+                <a16:creationId xmlns:a16="http://schemas.microsoft.com/office/drawing/2014/main" id="{7E10F14B-D139-4033-8FD3-7951CD4B7FDA}"/>
               </a:ext>
             </a:extLst>
           </p:cNvPr>
@@ -8606,7 +8677,7 @@
           <p:cNvPr id="4" name="">
             <a:extLst xmlns:a="http://schemas.openxmlformats.org/drawingml/2006/main">
               <a:ext uri="{FF2B5EF4-FFF2-40B4-BE49-F238E27FC236}">
-                <a16:creationId xmlns:a16="http://schemas.microsoft.com/office/drawing/2014/main" id="{0B55B1FF-370E-4990-9136-812ED5D82300}"/>
+                <a16:creationId xmlns:a16="http://schemas.microsoft.com/office/drawing/2014/main" id="{5531BDC1-6C15-4540-A013-2470E5C2208E}"/>
               </a:ext>
             </a:extLst>
           </p:cNvPr>
@@ -8653,7 +8724,7 @@
           <p:cNvPr id="5" name="">
             <a:extLst xmlns:a="http://schemas.openxmlformats.org/drawingml/2006/main">
               <a:ext uri="{FF2B5EF4-FFF2-40B4-BE49-F238E27FC236}">
-                <a16:creationId xmlns:a16="http://schemas.microsoft.com/office/drawing/2014/main" id="{04618A75-2047-409A-8661-0EC5C646677A}"/>
+                <a16:creationId xmlns:a16="http://schemas.microsoft.com/office/drawing/2014/main" id="{9DF22DF8-C0A5-4C1C-8D26-77FA7840E902}"/>
               </a:ext>
             </a:extLst>
           </p:cNvPr>
@@ -8710,7 +8781,7 @@
           <p:cNvPr id="6" name="">
             <a:extLst xmlns:a="http://schemas.openxmlformats.org/drawingml/2006/main">
               <a:ext uri="{FF2B5EF4-FFF2-40B4-BE49-F238E27FC236}">
-                <a16:creationId xmlns:a16="http://schemas.microsoft.com/office/drawing/2014/main" id="{8445C2C3-D98B-43D1-A91C-5B39C6D60323}"/>
+                <a16:creationId xmlns:a16="http://schemas.microsoft.com/office/drawing/2014/main" id="{934BFBFA-A66F-4D91-91A9-8F31F84FB505}"/>
               </a:ext>
             </a:extLst>
           </p:cNvPr>
@@ -8744,7 +8815,7 @@
           <p:cNvPr id="7" name="">
             <a:extLst xmlns:a="http://schemas.openxmlformats.org/drawingml/2006/main">
               <a:ext uri="{FF2B5EF4-FFF2-40B4-BE49-F238E27FC236}">
-                <a16:creationId xmlns:a16="http://schemas.microsoft.com/office/drawing/2014/main" id="{E90D2AAD-983C-4C07-A0A8-41D2BFADE0F0}"/>
+                <a16:creationId xmlns:a16="http://schemas.microsoft.com/office/drawing/2014/main" id="{8C4A70C6-8BD3-4E89-85C4-8848C4117257}"/>
               </a:ext>
             </a:extLst>
           </p:cNvPr>
@@ -8791,7 +8862,7 @@
           <p:cNvPr id="8" name="">
             <a:extLst xmlns:a="http://schemas.openxmlformats.org/drawingml/2006/main">
               <a:ext uri="{FF2B5EF4-FFF2-40B4-BE49-F238E27FC236}">
-                <a16:creationId xmlns:a16="http://schemas.microsoft.com/office/drawing/2014/main" id="{EE8B45F5-205B-44D9-89A0-22F286B5BABB}"/>
+                <a16:creationId xmlns:a16="http://schemas.microsoft.com/office/drawing/2014/main" id="{6D92D3CC-5E10-46BF-A316-98FBB1DE8766}"/>
               </a:ext>
             </a:extLst>
           </p:cNvPr>
@@ -8838,7 +8909,7 @@
           <p:cNvPr id="9" name="">
             <a:extLst xmlns:a="http://schemas.openxmlformats.org/drawingml/2006/main">
               <a:ext uri="{FF2B5EF4-FFF2-40B4-BE49-F238E27FC236}">
-                <a16:creationId xmlns:a16="http://schemas.microsoft.com/office/drawing/2014/main" id="{DD97560D-ADFC-495C-9CEF-63108A66AA76}"/>
+                <a16:creationId xmlns:a16="http://schemas.microsoft.com/office/drawing/2014/main" id="{F9598C28-7B16-4583-8238-FC41F1EDC4A3}"/>
               </a:ext>
             </a:extLst>
           </p:cNvPr>
@@ -8872,7 +8943,7 @@
           <p:cNvPr id="10" name="">
             <a:extLst xmlns:a="http://schemas.openxmlformats.org/drawingml/2006/main">
               <a:ext uri="{FF2B5EF4-FFF2-40B4-BE49-F238E27FC236}">
-                <a16:creationId xmlns:a16="http://schemas.microsoft.com/office/drawing/2014/main" id="{C60EAAE5-7199-4073-BA9C-659AD235A982}"/>
+                <a16:creationId xmlns:a16="http://schemas.microsoft.com/office/drawing/2014/main" id="{A0122FD0-040D-49CD-8691-784ADD260FFB}"/>
               </a:ext>
             </a:extLst>
           </p:cNvPr>
@@ -8919,7 +8990,7 @@
           <p:cNvPr id="11" name="">
             <a:extLst xmlns:a="http://schemas.openxmlformats.org/drawingml/2006/main">
               <a:ext uri="{FF2B5EF4-FFF2-40B4-BE49-F238E27FC236}">
-                <a16:creationId xmlns:a16="http://schemas.microsoft.com/office/drawing/2014/main" id="{19F8F2B0-C578-48CB-A552-D126A0D7CD6A}"/>
+                <a16:creationId xmlns:a16="http://schemas.microsoft.com/office/drawing/2014/main" id="{0D54949F-1F08-425A-8877-4653255AFFC2}"/>
               </a:ext>
             </a:extLst>
           </p:cNvPr>
@@ -8966,7 +9037,7 @@
           <p:cNvPr id="12" name="">
             <a:extLst xmlns:a="http://schemas.openxmlformats.org/drawingml/2006/main">
               <a:ext uri="{FF2B5EF4-FFF2-40B4-BE49-F238E27FC236}">
-                <a16:creationId xmlns:a16="http://schemas.microsoft.com/office/drawing/2014/main" id="{74A3CAE7-27A4-4777-809A-66011EA27178}"/>
+                <a16:creationId xmlns:a16="http://schemas.microsoft.com/office/drawing/2014/main" id="{A473CDB7-F9CC-4011-A05C-7A0CEF66A454}"/>
               </a:ext>
             </a:extLst>
           </p:cNvPr>
@@ -9000,7 +9071,7 @@
           <p:cNvPr id="13" name="">
             <a:extLst xmlns:a="http://schemas.openxmlformats.org/drawingml/2006/main">
               <a:ext uri="{FF2B5EF4-FFF2-40B4-BE49-F238E27FC236}">
-                <a16:creationId xmlns:a16="http://schemas.microsoft.com/office/drawing/2014/main" id="{61B0AB8C-15FE-41D0-9263-1DABE349472B}"/>
+                <a16:creationId xmlns:a16="http://schemas.microsoft.com/office/drawing/2014/main" id="{144205B4-3D0C-4917-9E8B-C35105CF9211}"/>
               </a:ext>
             </a:extLst>
           </p:cNvPr>
@@ -9047,7 +9118,7 @@
           <p:cNvPr id="14" name="">
             <a:extLst xmlns:a="http://schemas.openxmlformats.org/drawingml/2006/main">
               <a:ext uri="{FF2B5EF4-FFF2-40B4-BE49-F238E27FC236}">
-                <a16:creationId xmlns:a16="http://schemas.microsoft.com/office/drawing/2014/main" id="{EC5B0689-597E-4B8A-9273-61006849CDFB}"/>
+                <a16:creationId xmlns:a16="http://schemas.microsoft.com/office/drawing/2014/main" id="{C1545396-BED5-474E-B0DE-208F06DF3A7A}"/>
               </a:ext>
             </a:extLst>
           </p:cNvPr>
@@ -9094,7 +9165,7 @@
           <p:cNvPr id="15" name="">
             <a:extLst xmlns:a="http://schemas.openxmlformats.org/drawingml/2006/main">
               <a:ext uri="{FF2B5EF4-FFF2-40B4-BE49-F238E27FC236}">
-                <a16:creationId xmlns:a16="http://schemas.microsoft.com/office/drawing/2014/main" id="{7763C3F5-DC81-4A23-95C0-1638B80F017A}"/>
+                <a16:creationId xmlns:a16="http://schemas.microsoft.com/office/drawing/2014/main" id="{B3026721-5FB0-46A2-BA0E-36DB7A336552}"/>
               </a:ext>
             </a:extLst>
           </p:cNvPr>
@@ -9128,7 +9199,7 @@
           <p:cNvPr id="16" name="">
             <a:extLst xmlns:a="http://schemas.openxmlformats.org/drawingml/2006/main">
               <a:ext uri="{FF2B5EF4-FFF2-40B4-BE49-F238E27FC236}">
-                <a16:creationId xmlns:a16="http://schemas.microsoft.com/office/drawing/2014/main" id="{6683D1BF-C67A-4CFA-B732-F0F71BE8EF30}"/>
+                <a16:creationId xmlns:a16="http://schemas.microsoft.com/office/drawing/2014/main" id="{BF762D9B-6505-4797-82E7-E0E64EE4B07D}"/>
               </a:ext>
             </a:extLst>
           </p:cNvPr>
@@ -9175,7 +9246,7 @@
           <p:cNvPr id="17" name="">
             <a:extLst xmlns:a="http://schemas.openxmlformats.org/drawingml/2006/main">
               <a:ext uri="{FF2B5EF4-FFF2-40B4-BE49-F238E27FC236}">
-                <a16:creationId xmlns:a16="http://schemas.microsoft.com/office/drawing/2014/main" id="{089D3B8C-E426-472E-9712-E4B37303152D}"/>
+                <a16:creationId xmlns:a16="http://schemas.microsoft.com/office/drawing/2014/main" id="{FAE62876-79A1-40D9-AA02-A833E03606C6}"/>
               </a:ext>
             </a:extLst>
           </p:cNvPr>
@@ -9222,7 +9293,7 @@
           <p:cNvPr id="18" name="">
             <a:extLst xmlns:a="http://schemas.openxmlformats.org/drawingml/2006/main">
               <a:ext uri="{FF2B5EF4-FFF2-40B4-BE49-F238E27FC236}">
-                <a16:creationId xmlns:a16="http://schemas.microsoft.com/office/drawing/2014/main" id="{527AB77B-BD01-429B-BB17-22001B8F69DC}"/>
+                <a16:creationId xmlns:a16="http://schemas.microsoft.com/office/drawing/2014/main" id="{D0EF4329-DEE8-4F3F-9FD6-BDFD6D6D632F}"/>
               </a:ext>
             </a:extLst>
           </p:cNvPr>
@@ -9254,7 +9325,7 @@
           <p:cNvPr id="19" name="">
             <a:extLst xmlns:a="http://schemas.openxmlformats.org/drawingml/2006/main">
               <a:ext uri="{FF2B5EF4-FFF2-40B4-BE49-F238E27FC236}">
-                <a16:creationId xmlns:a16="http://schemas.microsoft.com/office/drawing/2014/main" id="{35114D75-5D65-472C-8333-B152B17BBF58}"/>
+                <a16:creationId xmlns:a16="http://schemas.microsoft.com/office/drawing/2014/main" id="{AC8C6CC7-1590-4EA1-AFB7-91E24820342E}"/>
               </a:ext>
             </a:extLst>
           </p:cNvPr>
@@ -9301,7 +9372,7 @@
           <p:cNvPr id="20" name="">
             <a:extLst xmlns:a="http://schemas.openxmlformats.org/drawingml/2006/main">
               <a:ext uri="{FF2B5EF4-FFF2-40B4-BE49-F238E27FC236}">
-                <a16:creationId xmlns:a16="http://schemas.microsoft.com/office/drawing/2014/main" id="{C7B92C3B-5812-4D10-AD54-F6EEF30B879B}"/>
+                <a16:creationId xmlns:a16="http://schemas.microsoft.com/office/drawing/2014/main" id="{B435339D-C860-4E3E-BE83-71DEFCD71F80}"/>
               </a:ext>
             </a:extLst>
           </p:cNvPr>
@@ -9346,7 +9417,7 @@
     </p:spTree>
     <p:extLst>
       <p:ext uri="{BB962C8B-B14F-4D97-AF65-F5344CB8AC3E}">
-        <p14:creationId xmlns:p14="http://schemas.microsoft.com/office/powerpoint/2010/main" val="1265292124"/>
+        <p14:creationId xmlns:p14="http://schemas.microsoft.com/office/powerpoint/2010/main" val="2137224476"/>
       </p:ext>
     </p:extLst>
   </p:cSld>
@@ -9381,7 +9452,7 @@
           <p:nvPr/>
         </p:nvPicPr>
         <p:blipFill>
-          <a:blip xmlns:r="http://schemas.openxmlformats.org/officeDocument/2006/relationships" xmlns:a="http://schemas.openxmlformats.org/drawingml/2006/main" r:embed="Rdaced7f1dbb848ce"/>
+          <a:blip xmlns:r="http://schemas.openxmlformats.org/officeDocument/2006/relationships" xmlns:a="http://schemas.openxmlformats.org/drawingml/2006/main" r:embed="Raabad5063b944892"/>
           <a:srcRect xmlns:a="http://schemas.openxmlformats.org/drawingml/2006/main" l="0" t="0" r="0" b="0"/>
           <a:stretch xmlns:a="http://schemas.openxmlformats.org/drawingml/2006/main">
             <a:fillRect l="0" t="0" r="0" b="0"/>
@@ -9402,7 +9473,7 @@
           <p:cNvPr id="2" name="">
             <a:extLst xmlns:a="http://schemas.openxmlformats.org/drawingml/2006/main">
               <a:ext uri="{FF2B5EF4-FFF2-40B4-BE49-F238E27FC236}">
-                <a16:creationId xmlns:a16="http://schemas.microsoft.com/office/drawing/2014/main" id="{8C3E949E-88BA-4B19-AF13-195378FE682F}"/>
+                <a16:creationId xmlns:a16="http://schemas.microsoft.com/office/drawing/2014/main" id="{95193529-291D-419D-A6AB-E3B72F68F986}"/>
               </a:ext>
             </a:extLst>
           </p:cNvPr>
@@ -9439,7 +9510,7 @@
                 <a:ea typeface="Inter"/>
                 <a:cs typeface="Inter"/>
               </a:rPr>
-              <a:t>CLOSE</a:t>
+              <a:t>VISION</a:t>
             </a:r>
           </a:p>
         </p:txBody>
@@ -9449,7 +9520,7 @@
           <p:cNvPr id="3" name="">
             <a:extLst xmlns:a="http://schemas.openxmlformats.org/drawingml/2006/main">
               <a:ext uri="{FF2B5EF4-FFF2-40B4-BE49-F238E27FC236}">
-                <a16:creationId xmlns:a16="http://schemas.microsoft.com/office/drawing/2014/main" id="{134C5EC3-98CC-45E3-843A-B7793315376A}"/>
+                <a16:creationId xmlns:a16="http://schemas.microsoft.com/office/drawing/2014/main" id="{3790AA51-BD9F-4EED-A82B-18431D13189E}"/>
               </a:ext>
             </a:extLst>
           </p:cNvPr>
@@ -9486,7 +9557,7 @@
                 <a:ea typeface="Inter"/>
                 <a:cs typeface="Inter"/>
               </a:rPr>
-              <a:t>Mochi catches fake agreement</a:t>
+              <a:t>An orchestration layer.</a:t>
             </a:r>
           </a:p>
           <a:p xmlns:a="http://schemas.openxmlformats.org/drawingml/2006/main">
@@ -9499,7 +9570,7 @@
                 <a:ea typeface="Inter"/>
                 <a:cs typeface="Inter"/>
               </a:rPr>
-              <a:t>before the hour is gone.</a:t>
+              <a:t>Bring your own agent.</a:t>
             </a:r>
           </a:p>
         </p:txBody>
@@ -9509,7 +9580,7 @@
           <p:cNvPr id="4" name="">
             <a:extLst xmlns:a="http://schemas.openxmlformats.org/drawingml/2006/main">
               <a:ext uri="{FF2B5EF4-FFF2-40B4-BE49-F238E27FC236}">
-                <a16:creationId xmlns:a16="http://schemas.microsoft.com/office/drawing/2014/main" id="{4C2614A4-5194-4BBD-988E-85EE593BB5E7}"/>
+                <a16:creationId xmlns:a16="http://schemas.microsoft.com/office/drawing/2014/main" id="{86497BE4-18D0-40BB-951A-F467348BA007}"/>
               </a:ext>
             </a:extLst>
           </p:cNvPr>
@@ -9546,7 +9617,7 @@
                 <a:ea typeface="Inter"/>
                 <a:cs typeface="Inter"/>
               </a:rPr>
-              <a:t>Sources: docs/pitch-script.md, docs/submission-checklist.md</a:t>
+              <a:t>Sources: docs/design-spec.md, AGENTS.md</a:t>
             </a:r>
           </a:p>
         </p:txBody>
@@ -9556,7 +9627,7 @@
           <p:cNvPr id="5" name="">
             <a:extLst xmlns:a="http://schemas.openxmlformats.org/drawingml/2006/main">
               <a:ext uri="{FF2B5EF4-FFF2-40B4-BE49-F238E27FC236}">
-                <a16:creationId xmlns:a16="http://schemas.microsoft.com/office/drawing/2014/main" id="{6124821F-C353-4DCF-A1AC-196087C98D2E}"/>
+                <a16:creationId xmlns:a16="http://schemas.microsoft.com/office/drawing/2014/main" id="{CF22C0CB-1361-4380-8092-26B5E582D081}"/>
               </a:ext>
             </a:extLst>
           </p:cNvPr>
@@ -9613,121 +9684,23 @@
           <p:cNvPr id="6" name="">
             <a:extLst xmlns:a="http://schemas.openxmlformats.org/drawingml/2006/main">
               <a:ext uri="{FF2B5EF4-FFF2-40B4-BE49-F238E27FC236}">
-                <a16:creationId xmlns:a16="http://schemas.microsoft.com/office/drawing/2014/main" id="{3B8A1C02-63BC-4A15-8FBE-21550EC45D8B}"/>
-              </a:ext>
-            </a:extLst>
-          </p:cNvPr>
-          <p:cNvSpPr>
-            <a:spLocks xmlns:a="http://schemas.openxmlformats.org/drawingml/2006/main" noGrp="1"/>
-          </p:cNvSpPr>
-          <p:nvPr/>
-        </p:nvSpPr>
-        <p:spPr>
-          <a:xfrm xmlns:a="http://schemas.openxmlformats.org/drawingml/2006/main">
-            <a:off x="876300" y="2038350"/>
-            <a:ext cx="5905500" cy="1257300"/>
-          </a:xfrm>
-          <a:prstGeom xmlns:a="http://schemas.openxmlformats.org/drawingml/2006/main" prst="rect">
-            <a:avLst/>
-          </a:prstGeom>
-          <a:noFill xmlns:a="http://schemas.openxmlformats.org/drawingml/2006/main"/>
-          <a:ln xmlns:a="http://schemas.openxmlformats.org/drawingml/2006/main" w="0">
-            <a:noFill/>
-          </a:ln>
-        </p:spPr>
-        <p:txBody>
-          <a:bodyPr xmlns:a="http://schemas.openxmlformats.org/drawingml/2006/main" wrap="square" lIns="38100" tIns="38100" rIns="38100" bIns="38100">
-            <a:noAutofit/>
-          </a:bodyPr>
-          <a:lstStyle xmlns:a="http://schemas.openxmlformats.org/drawingml/2006/main"/>
-          <a:p xmlns:a="http://schemas.openxmlformats.org/drawingml/2006/main">
-            <a:r>
-              <a:rPr sz="2700">
-                <a:solidFill>
-                  <a:srgbClr val="181818"/>
-                </a:solidFill>
-                <a:latin typeface="Inter"/>
-                <a:ea typeface="Inter"/>
-                <a:cs typeface="Inter"/>
-              </a:rPr>
-              <a:t>Not after-meeting summary.</a:t>
-            </a:r>
-          </a:p>
-          <a:p xmlns:a="http://schemas.openxmlformats.org/drawingml/2006/main">
-            <a:r>
-              <a:rPr sz="2700">
-                <a:solidFill>
-                  <a:srgbClr val="181818"/>
-                </a:solidFill>
-                <a:latin typeface="Inter"/>
-                <a:ea typeface="Inter"/>
-                <a:cs typeface="Inter"/>
-              </a:rPr>
-              <a:t>Before-meeting crux.</a:t>
-            </a:r>
-          </a:p>
-          <a:p xmlns:a="http://schemas.openxmlformats.org/drawingml/2006/main">
-            <a:r>
-              <a:rPr sz="2700">
-                <a:solidFill>
-                  <a:srgbClr val="181818"/>
-                </a:solidFill>
-                <a:latin typeface="Inter"/>
-                <a:ea typeface="Inter"/>
-                <a:cs typeface="Inter"/>
-              </a:rPr>
-              <a:t>Inside Slack.</a:t>
-            </a:r>
-          </a:p>
-        </p:txBody>
-      </p:sp>
-      <p:pic>
-        <p:nvPicPr>
-          <p:cNvPr id="7" name=""/>
-          <p:cNvPicPr>
-            <a:picLocks xmlns:a="http://schemas.openxmlformats.org/drawingml/2006/main" noChangeAspect="1"/>
-          </p:cNvPicPr>
-          <p:nvPr/>
-        </p:nvPicPr>
-        <p:blipFill>
-          <a:blip xmlns:r="http://schemas.openxmlformats.org/officeDocument/2006/relationships" xmlns:a="http://schemas.openxmlformats.org/drawingml/2006/main" r:embed="Rc8b73721e51d430d"/>
-          <a:srcRect xmlns:a="http://schemas.openxmlformats.org/drawingml/2006/main" l="0" t="0" r="0" b="0"/>
-          <a:stretch xmlns:a="http://schemas.openxmlformats.org/drawingml/2006/main">
-            <a:fillRect l="0" t="0" r="0" b="0"/>
-          </a:stretch>
-        </p:blipFill>
-        <p:spPr>
-          <a:xfrm xmlns:a="http://schemas.openxmlformats.org/drawingml/2006/main">
-            <a:off x="7524750" y="2019300"/>
-            <a:ext cx="1676400" cy="1676400"/>
-          </a:xfrm>
-          <a:prstGeom xmlns:a="http://schemas.openxmlformats.org/drawingml/2006/main" prst="rect">
-            <a:avLst/>
-          </a:prstGeom>
-        </p:spPr>
-      </p:pic>
-      <p:sp>
-        <p:nvSpPr>
-          <p:cNvPr id="8" name="">
-            <a:extLst xmlns:a="http://schemas.openxmlformats.org/drawingml/2006/main">
-              <a:ext uri="{FF2B5EF4-FFF2-40B4-BE49-F238E27FC236}">
-                <a16:creationId xmlns:a16="http://schemas.microsoft.com/office/drawing/2014/main" id="{8ACCE954-52A4-4208-BD38-83AE3EA19339}"/>
-              </a:ext>
-            </a:extLst>
-          </p:cNvPr>
-          <p:cNvSpPr>
-            <a:spLocks xmlns:a="http://schemas.openxmlformats.org/drawingml/2006/main" noGrp="1"/>
-          </p:cNvSpPr>
-          <p:nvPr/>
-        </p:nvSpPr>
-        <p:spPr>
-          <a:xfrm xmlns:a="http://schemas.openxmlformats.org/drawingml/2006/main">
-            <a:off x="876300" y="3695700"/>
-            <a:ext cx="6610350" cy="1295400"/>
+                <a16:creationId xmlns:a16="http://schemas.microsoft.com/office/drawing/2014/main" id="{3141463E-EA2D-4B0A-9046-D7C92B5B8A00}"/>
+              </a:ext>
+            </a:extLst>
+          </p:cNvPr>
+          <p:cNvSpPr>
+            <a:spLocks xmlns:a="http://schemas.openxmlformats.org/drawingml/2006/main" noGrp="1"/>
+          </p:cNvSpPr>
+          <p:nvPr/>
+        </p:nvSpPr>
+        <p:spPr>
+          <a:xfrm xmlns:a="http://schemas.openxmlformats.org/drawingml/2006/main">
+            <a:off x="895350" y="2133600"/>
+            <a:ext cx="2095500" cy="1676400"/>
           </a:xfrm>
           <a:prstGeom xmlns:a="http://schemas.openxmlformats.org/drawingml/2006/main" prst="roundRect">
             <a:avLst>
-              <a:gd name="adj" fmla="val 5882"/>
+              <a:gd name="adj" fmla="val 4545"/>
             </a:avLst>
           </a:prstGeom>
           <a:solidFill xmlns:a="http://schemas.openxmlformats.org/drawingml/2006/main">
@@ -9742,10 +9715,1642 @@
       </p:sp>
       <p:sp>
         <p:nvSpPr>
+          <p:cNvPr id="7" name="">
+            <a:extLst xmlns:a="http://schemas.openxmlformats.org/drawingml/2006/main">
+              <a:ext uri="{FF2B5EF4-FFF2-40B4-BE49-F238E27FC236}">
+                <a16:creationId xmlns:a16="http://schemas.microsoft.com/office/drawing/2014/main" id="{A6F465F8-CCD9-488C-BDA8-0CB7B4D9AD2D}"/>
+              </a:ext>
+            </a:extLst>
+          </p:cNvPr>
+          <p:cNvSpPr>
+            <a:spLocks xmlns:a="http://schemas.openxmlformats.org/drawingml/2006/main" noGrp="1"/>
+          </p:cNvSpPr>
+          <p:nvPr/>
+        </p:nvSpPr>
+        <p:spPr>
+          <a:xfrm xmlns:a="http://schemas.openxmlformats.org/drawingml/2006/main">
+            <a:off x="1104900" y="2381250"/>
+            <a:ext cx="1676400" cy="247650"/>
+          </a:xfrm>
+          <a:prstGeom xmlns:a="http://schemas.openxmlformats.org/drawingml/2006/main" prst="rect">
+            <a:avLst/>
+          </a:prstGeom>
+          <a:noFill xmlns:a="http://schemas.openxmlformats.org/drawingml/2006/main"/>
+          <a:ln xmlns:a="http://schemas.openxmlformats.org/drawingml/2006/main" w="0">
+            <a:noFill/>
+          </a:ln>
+        </p:spPr>
+        <p:txBody>
+          <a:bodyPr xmlns:a="http://schemas.openxmlformats.org/drawingml/2006/main" wrap="square" lIns="38100" tIns="38100" rIns="38100" bIns="38100">
+            <a:noAutofit/>
+          </a:bodyPr>
+          <a:lstStyle xmlns:a="http://schemas.openxmlformats.org/drawingml/2006/main"/>
+          <a:p xmlns:a="http://schemas.openxmlformats.org/drawingml/2006/main">
+            <a:r>
+              <a:rPr sz="1575" b="1">
+                <a:solidFill>
+                  <a:srgbClr val="181818"/>
+                </a:solidFill>
+                <a:latin typeface="Inter"/>
+                <a:ea typeface="Inter"/>
+                <a:cs typeface="Inter"/>
+              </a:rPr>
+              <a:t>Your agents</a:t>
+            </a:r>
+          </a:p>
+        </p:txBody>
+      </p:sp>
+      <p:sp>
+        <p:nvSpPr>
+          <p:cNvPr id="8" name="">
+            <a:extLst xmlns:a="http://schemas.openxmlformats.org/drawingml/2006/main">
+              <a:ext uri="{FF2B5EF4-FFF2-40B4-BE49-F238E27FC236}">
+                <a16:creationId xmlns:a16="http://schemas.microsoft.com/office/drawing/2014/main" id="{A9DE347A-DE34-47C8-A1D8-6F2346B4C20F}"/>
+              </a:ext>
+            </a:extLst>
+          </p:cNvPr>
+          <p:cNvSpPr>
+            <a:spLocks xmlns:a="http://schemas.openxmlformats.org/drawingml/2006/main" noGrp="1"/>
+          </p:cNvSpPr>
+          <p:nvPr/>
+        </p:nvSpPr>
+        <p:spPr>
+          <a:xfrm xmlns:a="http://schemas.openxmlformats.org/drawingml/2006/main">
+            <a:off x="1104900" y="2819400"/>
+            <a:ext cx="1676400" cy="914400"/>
+          </a:xfrm>
+          <a:prstGeom xmlns:a="http://schemas.openxmlformats.org/drawingml/2006/main" prst="rect">
+            <a:avLst/>
+          </a:prstGeom>
+          <a:noFill xmlns:a="http://schemas.openxmlformats.org/drawingml/2006/main"/>
+          <a:ln xmlns:a="http://schemas.openxmlformats.org/drawingml/2006/main" w="0">
+            <a:noFill/>
+          </a:ln>
+        </p:spPr>
+        <p:txBody>
+          <a:bodyPr xmlns:a="http://schemas.openxmlformats.org/drawingml/2006/main" wrap="square" lIns="38100" tIns="38100" rIns="38100" bIns="38100">
+            <a:noAutofit/>
+          </a:bodyPr>
+          <a:lstStyle xmlns:a="http://schemas.openxmlformats.org/drawingml/2006/main"/>
+          <a:p xmlns:a="http://schemas.openxmlformats.org/drawingml/2006/main">
+            <a:r>
+              <a:rPr sz="1275">
+                <a:solidFill>
+                  <a:srgbClr val="282828"/>
+                </a:solidFill>
+                <a:latin typeface="Inter"/>
+                <a:ea typeface="Inter"/>
+                <a:cs typeface="Inter"/>
+              </a:rPr>
+              <a:t>one per participant</a:t>
+            </a:r>
+          </a:p>
+          <a:p xmlns:a="http://schemas.openxmlformats.org/drawingml/2006/main">
+            <a:r>
+              <a:rPr sz="1275">
+                <a:solidFill>
+                  <a:srgbClr val="282828"/>
+                </a:solidFill>
+                <a:latin typeface="Inter"/>
+                <a:ea typeface="Inter"/>
+                <a:cs typeface="Inter"/>
+              </a:rPr>
+              <a:t>your model + context</a:t>
+            </a:r>
+          </a:p>
+          <a:p xmlns:a="http://schemas.openxmlformats.org/drawingml/2006/main">
+            <a:r>
+              <a:rPr sz="1275">
+                <a:solidFill>
+                  <a:srgbClr val="282828"/>
+                </a:solidFill>
+                <a:latin typeface="Inter"/>
+                <a:ea typeface="Inter"/>
+                <a:cs typeface="Inter"/>
+              </a:rPr>
+              <a:t>your tools</a:t>
+            </a:r>
+          </a:p>
+        </p:txBody>
+      </p:sp>
+      <p:sp>
+        <p:nvSpPr>
           <p:cNvPr id="9" name="">
             <a:extLst xmlns:a="http://schemas.openxmlformats.org/drawingml/2006/main">
               <a:ext uri="{FF2B5EF4-FFF2-40B4-BE49-F238E27FC236}">
-                <a16:creationId xmlns:a16="http://schemas.microsoft.com/office/drawing/2014/main" id="{4E040C5E-31F8-4E61-A8B6-997834F56477}"/>
+                <a16:creationId xmlns:a16="http://schemas.microsoft.com/office/drawing/2014/main" id="{5B695A37-5FE5-4ED5-97CF-3EDE6223EEAC}"/>
+              </a:ext>
+            </a:extLst>
+          </p:cNvPr>
+          <p:cNvSpPr>
+            <a:spLocks xmlns:a="http://schemas.openxmlformats.org/drawingml/2006/main" noGrp="1"/>
+          </p:cNvSpPr>
+          <p:nvPr/>
+        </p:nvSpPr>
+        <p:spPr>
+          <a:xfrm xmlns:a="http://schemas.openxmlformats.org/drawingml/2006/main">
+            <a:off x="3067050" y="2971800"/>
+            <a:ext cx="247650" cy="19050"/>
+          </a:xfrm>
+          <a:prstGeom xmlns:a="http://schemas.openxmlformats.org/drawingml/2006/main" prst="rect">
+            <a:avLst/>
+          </a:prstGeom>
+          <a:solidFill xmlns:a="http://schemas.openxmlformats.org/drawingml/2006/main">
+            <a:srgbClr val="EDEDED"/>
+          </a:solidFill>
+          <a:ln xmlns:a="http://schemas.openxmlformats.org/drawingml/2006/main" w="0">
+            <a:noFill/>
+          </a:ln>
+        </p:spPr>
+      </p:sp>
+      <p:sp>
+        <p:nvSpPr>
+          <p:cNvPr id="10" name="">
+            <a:extLst xmlns:a="http://schemas.openxmlformats.org/drawingml/2006/main">
+              <a:ext uri="{FF2B5EF4-FFF2-40B4-BE49-F238E27FC236}">
+                <a16:creationId xmlns:a16="http://schemas.microsoft.com/office/drawing/2014/main" id="{8BBBC225-F44F-4F12-B8FE-A9C4702471B2}"/>
+              </a:ext>
+            </a:extLst>
+          </p:cNvPr>
+          <p:cNvSpPr>
+            <a:spLocks xmlns:a="http://schemas.openxmlformats.org/drawingml/2006/main" noGrp="1"/>
+          </p:cNvSpPr>
+          <p:nvPr/>
+        </p:nvSpPr>
+        <p:spPr>
+          <a:xfrm xmlns:a="http://schemas.openxmlformats.org/drawingml/2006/main">
+            <a:off x="3295650" y="2933700"/>
+            <a:ext cx="133350" cy="95250"/>
+          </a:xfrm>
+          <a:prstGeom xmlns:a="http://schemas.openxmlformats.org/drawingml/2006/main" prst="triangle">
+            <a:avLst/>
+          </a:prstGeom>
+          <a:solidFill xmlns:a="http://schemas.openxmlformats.org/drawingml/2006/main">
+            <a:srgbClr val="EDEDED"/>
+          </a:solidFill>
+          <a:ln xmlns:a="http://schemas.openxmlformats.org/drawingml/2006/main" w="0">
+            <a:noFill/>
+          </a:ln>
+        </p:spPr>
+      </p:sp>
+      <p:sp>
+        <p:nvSpPr>
+          <p:cNvPr id="11" name="">
+            <a:extLst xmlns:a="http://schemas.openxmlformats.org/drawingml/2006/main">
+              <a:ext uri="{FF2B5EF4-FFF2-40B4-BE49-F238E27FC236}">
+                <a16:creationId xmlns:a16="http://schemas.microsoft.com/office/drawing/2014/main" id="{BB993BE6-89AA-4710-BB22-49E20205D618}"/>
+              </a:ext>
+            </a:extLst>
+          </p:cNvPr>
+          <p:cNvSpPr>
+            <a:spLocks xmlns:a="http://schemas.openxmlformats.org/drawingml/2006/main" noGrp="1"/>
+          </p:cNvSpPr>
+          <p:nvPr/>
+        </p:nvSpPr>
+        <p:spPr>
+          <a:xfrm xmlns:a="http://schemas.openxmlformats.org/drawingml/2006/main">
+            <a:off x="3448050" y="2133600"/>
+            <a:ext cx="2095500" cy="1676400"/>
+          </a:xfrm>
+          <a:prstGeom xmlns:a="http://schemas.openxmlformats.org/drawingml/2006/main" prst="roundRect">
+            <a:avLst>
+              <a:gd name="adj" fmla="val 4545"/>
+            </a:avLst>
+          </a:prstGeom>
+          <a:solidFill xmlns:a="http://schemas.openxmlformats.org/drawingml/2006/main">
+            <a:srgbClr val="F3F3F3"/>
+          </a:solidFill>
+          <a:ln xmlns:a="http://schemas.openxmlformats.org/drawingml/2006/main" w="9525">
+            <a:solidFill>
+              <a:srgbClr val="282828"/>
+            </a:solidFill>
+          </a:ln>
+        </p:spPr>
+      </p:sp>
+      <p:sp>
+        <p:nvSpPr>
+          <p:cNvPr id="12" name="">
+            <a:extLst xmlns:a="http://schemas.openxmlformats.org/drawingml/2006/main">
+              <a:ext uri="{FF2B5EF4-FFF2-40B4-BE49-F238E27FC236}">
+                <a16:creationId xmlns:a16="http://schemas.microsoft.com/office/drawing/2014/main" id="{6C5A0CC4-09E1-4936-89BB-F558F3CE2411}"/>
+              </a:ext>
+            </a:extLst>
+          </p:cNvPr>
+          <p:cNvSpPr>
+            <a:spLocks xmlns:a="http://schemas.openxmlformats.org/drawingml/2006/main" noGrp="1"/>
+          </p:cNvSpPr>
+          <p:nvPr/>
+        </p:nvSpPr>
+        <p:spPr>
+          <a:xfrm xmlns:a="http://schemas.openxmlformats.org/drawingml/2006/main">
+            <a:off x="3657600" y="2381250"/>
+            <a:ext cx="1676400" cy="247650"/>
+          </a:xfrm>
+          <a:prstGeom xmlns:a="http://schemas.openxmlformats.org/drawingml/2006/main" prst="rect">
+            <a:avLst/>
+          </a:prstGeom>
+          <a:noFill xmlns:a="http://schemas.openxmlformats.org/drawingml/2006/main"/>
+          <a:ln xmlns:a="http://schemas.openxmlformats.org/drawingml/2006/main" w="0">
+            <a:noFill/>
+          </a:ln>
+        </p:spPr>
+        <p:txBody>
+          <a:bodyPr xmlns:a="http://schemas.openxmlformats.org/drawingml/2006/main" wrap="square" lIns="38100" tIns="38100" rIns="38100" bIns="38100">
+            <a:noAutofit/>
+          </a:bodyPr>
+          <a:lstStyle xmlns:a="http://schemas.openxmlformats.org/drawingml/2006/main"/>
+          <a:p xmlns:a="http://schemas.openxmlformats.org/drawingml/2006/main">
+            <a:r>
+              <a:rPr sz="1575" b="1">
+                <a:solidFill>
+                  <a:srgbClr val="181818"/>
+                </a:solidFill>
+                <a:latin typeface="Inter"/>
+                <a:ea typeface="Inter"/>
+                <a:cs typeface="Inter"/>
+              </a:rPr>
+              <a:t>Stance contract</a:t>
+            </a:r>
+          </a:p>
+        </p:txBody>
+      </p:sp>
+      <p:sp>
+        <p:nvSpPr>
+          <p:cNvPr id="13" name="">
+            <a:extLst xmlns:a="http://schemas.openxmlformats.org/drawingml/2006/main">
+              <a:ext uri="{FF2B5EF4-FFF2-40B4-BE49-F238E27FC236}">
+                <a16:creationId xmlns:a16="http://schemas.microsoft.com/office/drawing/2014/main" id="{1812E6D8-D7F3-49CE-8FAA-3BA9A8FFA89D}"/>
+              </a:ext>
+            </a:extLst>
+          </p:cNvPr>
+          <p:cNvSpPr>
+            <a:spLocks xmlns:a="http://schemas.openxmlformats.org/drawingml/2006/main" noGrp="1"/>
+          </p:cNvSpPr>
+          <p:nvPr/>
+        </p:nvSpPr>
+        <p:spPr>
+          <a:xfrm xmlns:a="http://schemas.openxmlformats.org/drawingml/2006/main">
+            <a:off x="3657600" y="2819400"/>
+            <a:ext cx="1676400" cy="914400"/>
+          </a:xfrm>
+          <a:prstGeom xmlns:a="http://schemas.openxmlformats.org/drawingml/2006/main" prst="rect">
+            <a:avLst/>
+          </a:prstGeom>
+          <a:noFill xmlns:a="http://schemas.openxmlformats.org/drawingml/2006/main"/>
+          <a:ln xmlns:a="http://schemas.openxmlformats.org/drawingml/2006/main" w="0">
+            <a:noFill/>
+          </a:ln>
+        </p:spPr>
+        <p:txBody>
+          <a:bodyPr xmlns:a="http://schemas.openxmlformats.org/drawingml/2006/main" wrap="square" lIns="38100" tIns="38100" rIns="38100" bIns="38100">
+            <a:noAutofit/>
+          </a:bodyPr>
+          <a:lstStyle xmlns:a="http://schemas.openxmlformats.org/drawingml/2006/main"/>
+          <a:p xmlns:a="http://schemas.openxmlformats.org/drawingml/2006/main">
+            <a:r>
+              <a:rPr sz="1275">
+                <a:solidFill>
+                  <a:srgbClr val="282828"/>
+                </a:solidFill>
+                <a:latin typeface="Inter"/>
+                <a:ea typeface="Inter"/>
+                <a:cs typeface="Inter"/>
+              </a:rPr>
+              <a:t>position</a:t>
+            </a:r>
+          </a:p>
+          <a:p xmlns:a="http://schemas.openxmlformats.org/drawingml/2006/main">
+            <a:r>
+              <a:rPr sz="1275">
+                <a:solidFill>
+                  <a:srgbClr val="282828"/>
+                </a:solidFill>
+                <a:latin typeface="Inter"/>
+                <a:ea typeface="Inter"/>
+                <a:cs typeface="Inter"/>
+              </a:rPr>
+              <a:t>rationale, assumptions</a:t>
+            </a:r>
+          </a:p>
+          <a:p xmlns:a="http://schemas.openxmlformats.org/drawingml/2006/main">
+            <a:r>
+              <a:rPr sz="1275">
+                <a:solidFill>
+                  <a:srgbClr val="282828"/>
+                </a:solidFill>
+                <a:latin typeface="Inter"/>
+                <a:ea typeface="Inter"/>
+                <a:cs typeface="Inter"/>
+              </a:rPr>
+              <a:t>confidence</a:t>
+            </a:r>
+          </a:p>
+        </p:txBody>
+      </p:sp>
+      <p:sp>
+        <p:nvSpPr>
+          <p:cNvPr id="14" name="">
+            <a:extLst xmlns:a="http://schemas.openxmlformats.org/drawingml/2006/main">
+              <a:ext uri="{FF2B5EF4-FFF2-40B4-BE49-F238E27FC236}">
+                <a16:creationId xmlns:a16="http://schemas.microsoft.com/office/drawing/2014/main" id="{9195C212-E93E-4F2C-97C0-15AC0E8F5F42}"/>
+              </a:ext>
+            </a:extLst>
+          </p:cNvPr>
+          <p:cNvSpPr>
+            <a:spLocks xmlns:a="http://schemas.openxmlformats.org/drawingml/2006/main" noGrp="1"/>
+          </p:cNvSpPr>
+          <p:nvPr/>
+        </p:nvSpPr>
+        <p:spPr>
+          <a:xfrm xmlns:a="http://schemas.openxmlformats.org/drawingml/2006/main">
+            <a:off x="5619750" y="2971800"/>
+            <a:ext cx="247650" cy="19050"/>
+          </a:xfrm>
+          <a:prstGeom xmlns:a="http://schemas.openxmlformats.org/drawingml/2006/main" prst="rect">
+            <a:avLst/>
+          </a:prstGeom>
+          <a:solidFill xmlns:a="http://schemas.openxmlformats.org/drawingml/2006/main">
+            <a:srgbClr val="EDEDED"/>
+          </a:solidFill>
+          <a:ln xmlns:a="http://schemas.openxmlformats.org/drawingml/2006/main" w="0">
+            <a:noFill/>
+          </a:ln>
+        </p:spPr>
+      </p:sp>
+      <p:sp>
+        <p:nvSpPr>
+          <p:cNvPr id="15" name="">
+            <a:extLst xmlns:a="http://schemas.openxmlformats.org/drawingml/2006/main">
+              <a:ext uri="{FF2B5EF4-FFF2-40B4-BE49-F238E27FC236}">
+                <a16:creationId xmlns:a16="http://schemas.microsoft.com/office/drawing/2014/main" id="{21F2E357-5AE1-49CF-A0D4-9EDB58179E57}"/>
+              </a:ext>
+            </a:extLst>
+          </p:cNvPr>
+          <p:cNvSpPr>
+            <a:spLocks xmlns:a="http://schemas.openxmlformats.org/drawingml/2006/main" noGrp="1"/>
+          </p:cNvSpPr>
+          <p:nvPr/>
+        </p:nvSpPr>
+        <p:spPr>
+          <a:xfrm xmlns:a="http://schemas.openxmlformats.org/drawingml/2006/main">
+            <a:off x="5848350" y="2933700"/>
+            <a:ext cx="133350" cy="95250"/>
+          </a:xfrm>
+          <a:prstGeom xmlns:a="http://schemas.openxmlformats.org/drawingml/2006/main" prst="triangle">
+            <a:avLst/>
+          </a:prstGeom>
+          <a:solidFill xmlns:a="http://schemas.openxmlformats.org/drawingml/2006/main">
+            <a:srgbClr val="EDEDED"/>
+          </a:solidFill>
+          <a:ln xmlns:a="http://schemas.openxmlformats.org/drawingml/2006/main" w="0">
+            <a:noFill/>
+          </a:ln>
+        </p:spPr>
+      </p:sp>
+      <p:sp>
+        <p:nvSpPr>
+          <p:cNvPr id="16" name="">
+            <a:extLst xmlns:a="http://schemas.openxmlformats.org/drawingml/2006/main">
+              <a:ext uri="{FF2B5EF4-FFF2-40B4-BE49-F238E27FC236}">
+                <a16:creationId xmlns:a16="http://schemas.microsoft.com/office/drawing/2014/main" id="{1B3C72DE-D9B5-4E65-B367-55F2F6FB8058}"/>
+              </a:ext>
+            </a:extLst>
+          </p:cNvPr>
+          <p:cNvSpPr>
+            <a:spLocks xmlns:a="http://schemas.openxmlformats.org/drawingml/2006/main" noGrp="1"/>
+          </p:cNvSpPr>
+          <p:nvPr/>
+        </p:nvSpPr>
+        <p:spPr>
+          <a:xfrm xmlns:a="http://schemas.openxmlformats.org/drawingml/2006/main">
+            <a:off x="6000750" y="2133600"/>
+            <a:ext cx="2095500" cy="1676400"/>
+          </a:xfrm>
+          <a:prstGeom xmlns:a="http://schemas.openxmlformats.org/drawingml/2006/main" prst="roundRect">
+            <a:avLst>
+              <a:gd name="adj" fmla="val 4545"/>
+            </a:avLst>
+          </a:prstGeom>
+          <a:solidFill xmlns:a="http://schemas.openxmlformats.org/drawingml/2006/main">
+            <a:srgbClr val="FFFFFF"/>
+          </a:solidFill>
+          <a:ln xmlns:a="http://schemas.openxmlformats.org/drawingml/2006/main" w="9525">
+            <a:solidFill>
+              <a:srgbClr val="EDEDED"/>
+            </a:solidFill>
+          </a:ln>
+        </p:spPr>
+      </p:sp>
+      <p:sp>
+        <p:nvSpPr>
+          <p:cNvPr id="17" name="">
+            <a:extLst xmlns:a="http://schemas.openxmlformats.org/drawingml/2006/main">
+              <a:ext uri="{FF2B5EF4-FFF2-40B4-BE49-F238E27FC236}">
+                <a16:creationId xmlns:a16="http://schemas.microsoft.com/office/drawing/2014/main" id="{80FE9681-17FC-49EA-B1DD-A8B494EEC60C}"/>
+              </a:ext>
+            </a:extLst>
+          </p:cNvPr>
+          <p:cNvSpPr>
+            <a:spLocks xmlns:a="http://schemas.openxmlformats.org/drawingml/2006/main" noGrp="1"/>
+          </p:cNvSpPr>
+          <p:nvPr/>
+        </p:nvSpPr>
+        <p:spPr>
+          <a:xfrm xmlns:a="http://schemas.openxmlformats.org/drawingml/2006/main">
+            <a:off x="6210300" y="2381250"/>
+            <a:ext cx="1676400" cy="247650"/>
+          </a:xfrm>
+          <a:prstGeom xmlns:a="http://schemas.openxmlformats.org/drawingml/2006/main" prst="rect">
+            <a:avLst/>
+          </a:prstGeom>
+          <a:noFill xmlns:a="http://schemas.openxmlformats.org/drawingml/2006/main"/>
+          <a:ln xmlns:a="http://schemas.openxmlformats.org/drawingml/2006/main" w="0">
+            <a:noFill/>
+          </a:ln>
+        </p:spPr>
+        <p:txBody>
+          <a:bodyPr xmlns:a="http://schemas.openxmlformats.org/drawingml/2006/main" wrap="square" lIns="38100" tIns="38100" rIns="38100" bIns="38100">
+            <a:noAutofit/>
+          </a:bodyPr>
+          <a:lstStyle xmlns:a="http://schemas.openxmlformats.org/drawingml/2006/main"/>
+          <a:p xmlns:a="http://schemas.openxmlformats.org/drawingml/2006/main">
+            <a:r>
+              <a:rPr sz="1575" b="1">
+                <a:solidFill>
+                  <a:srgbClr val="181818"/>
+                </a:solidFill>
+                <a:latin typeface="Inter"/>
+                <a:ea typeface="Inter"/>
+                <a:cs typeface="Inter"/>
+              </a:rPr>
+              <a:t>Mochi orchestrator</a:t>
+            </a:r>
+          </a:p>
+        </p:txBody>
+      </p:sp>
+      <p:sp>
+        <p:nvSpPr>
+          <p:cNvPr id="18" name="">
+            <a:extLst xmlns:a="http://schemas.openxmlformats.org/drawingml/2006/main">
+              <a:ext uri="{FF2B5EF4-FFF2-40B4-BE49-F238E27FC236}">
+                <a16:creationId xmlns:a16="http://schemas.microsoft.com/office/drawing/2014/main" id="{67592BCF-0159-4DAD-A8CE-20CC27773488}"/>
+              </a:ext>
+            </a:extLst>
+          </p:cNvPr>
+          <p:cNvSpPr>
+            <a:spLocks xmlns:a="http://schemas.openxmlformats.org/drawingml/2006/main" noGrp="1"/>
+          </p:cNvSpPr>
+          <p:nvPr/>
+        </p:nvSpPr>
+        <p:spPr>
+          <a:xfrm xmlns:a="http://schemas.openxmlformats.org/drawingml/2006/main">
+            <a:off x="6210300" y="2819400"/>
+            <a:ext cx="1676400" cy="914400"/>
+          </a:xfrm>
+          <a:prstGeom xmlns:a="http://schemas.openxmlformats.org/drawingml/2006/main" prst="rect">
+            <a:avLst/>
+          </a:prstGeom>
+          <a:noFill xmlns:a="http://schemas.openxmlformats.org/drawingml/2006/main"/>
+          <a:ln xmlns:a="http://schemas.openxmlformats.org/drawingml/2006/main" w="0">
+            <a:noFill/>
+          </a:ln>
+        </p:spPr>
+        <p:txBody>
+          <a:bodyPr xmlns:a="http://schemas.openxmlformats.org/drawingml/2006/main" wrap="square" lIns="38100" tIns="38100" rIns="38100" bIns="38100">
+            <a:noAutofit/>
+          </a:bodyPr>
+          <a:lstStyle xmlns:a="http://schemas.openxmlformats.org/drawingml/2006/main"/>
+          <a:p xmlns:a="http://schemas.openxmlformats.org/drawingml/2006/main">
+            <a:r>
+              <a:rPr sz="1275">
+                <a:solidFill>
+                  <a:srgbClr val="282828"/>
+                </a:solidFill>
+                <a:latin typeface="Inter"/>
+                <a:ea typeface="Inter"/>
+                <a:cs typeface="Inter"/>
+              </a:rPr>
+              <a:t>compares assumptions</a:t>
+            </a:r>
+          </a:p>
+          <a:p xmlns:a="http://schemas.openxmlformats.org/drawingml/2006/main">
+            <a:r>
+              <a:rPr sz="1275">
+                <a:solidFill>
+                  <a:srgbClr val="282828"/>
+                </a:solidFill>
+                <a:latin typeface="Inter"/>
+                <a:ea typeface="Inter"/>
+                <a:cs typeface="Inter"/>
+              </a:rPr>
+              <a:t>clears easy items</a:t>
+            </a:r>
+          </a:p>
+          <a:p xmlns:a="http://schemas.openxmlformats.org/drawingml/2006/main">
+            <a:r>
+              <a:rPr sz="1275">
+                <a:solidFill>
+                  <a:srgbClr val="282828"/>
+                </a:solidFill>
+                <a:latin typeface="Inter"/>
+                <a:ea typeface="Inter"/>
+                <a:cs typeface="Inter"/>
+              </a:rPr>
+              <a:t>then dissolves</a:t>
+            </a:r>
+          </a:p>
+        </p:txBody>
+      </p:sp>
+      <p:sp>
+        <p:nvSpPr>
+          <p:cNvPr id="19" name="">
+            <a:extLst xmlns:a="http://schemas.openxmlformats.org/drawingml/2006/main">
+              <a:ext uri="{FF2B5EF4-FFF2-40B4-BE49-F238E27FC236}">
+                <a16:creationId xmlns:a16="http://schemas.microsoft.com/office/drawing/2014/main" id="{18717CB7-5693-4688-AFEF-4FD6D2AA9260}"/>
+              </a:ext>
+            </a:extLst>
+          </p:cNvPr>
+          <p:cNvSpPr>
+            <a:spLocks xmlns:a="http://schemas.openxmlformats.org/drawingml/2006/main" noGrp="1"/>
+          </p:cNvSpPr>
+          <p:nvPr/>
+        </p:nvSpPr>
+        <p:spPr>
+          <a:xfrm xmlns:a="http://schemas.openxmlformats.org/drawingml/2006/main">
+            <a:off x="8172450" y="2971800"/>
+            <a:ext cx="247650" cy="19050"/>
+          </a:xfrm>
+          <a:prstGeom xmlns:a="http://schemas.openxmlformats.org/drawingml/2006/main" prst="rect">
+            <a:avLst/>
+          </a:prstGeom>
+          <a:solidFill xmlns:a="http://schemas.openxmlformats.org/drawingml/2006/main">
+            <a:srgbClr val="EDEDED"/>
+          </a:solidFill>
+          <a:ln xmlns:a="http://schemas.openxmlformats.org/drawingml/2006/main" w="0">
+            <a:noFill/>
+          </a:ln>
+        </p:spPr>
+      </p:sp>
+      <p:sp>
+        <p:nvSpPr>
+          <p:cNvPr id="20" name="">
+            <a:extLst xmlns:a="http://schemas.openxmlformats.org/drawingml/2006/main">
+              <a:ext uri="{FF2B5EF4-FFF2-40B4-BE49-F238E27FC236}">
+                <a16:creationId xmlns:a16="http://schemas.microsoft.com/office/drawing/2014/main" id="{20727AD9-06E6-42F1-AD61-FF3DD77360B8}"/>
+              </a:ext>
+            </a:extLst>
+          </p:cNvPr>
+          <p:cNvSpPr>
+            <a:spLocks xmlns:a="http://schemas.openxmlformats.org/drawingml/2006/main" noGrp="1"/>
+          </p:cNvSpPr>
+          <p:nvPr/>
+        </p:nvSpPr>
+        <p:spPr>
+          <a:xfrm xmlns:a="http://schemas.openxmlformats.org/drawingml/2006/main">
+            <a:off x="8401050" y="2933700"/>
+            <a:ext cx="133350" cy="95250"/>
+          </a:xfrm>
+          <a:prstGeom xmlns:a="http://schemas.openxmlformats.org/drawingml/2006/main" prst="triangle">
+            <a:avLst/>
+          </a:prstGeom>
+          <a:solidFill xmlns:a="http://schemas.openxmlformats.org/drawingml/2006/main">
+            <a:srgbClr val="EDEDED"/>
+          </a:solidFill>
+          <a:ln xmlns:a="http://schemas.openxmlformats.org/drawingml/2006/main" w="0">
+            <a:noFill/>
+          </a:ln>
+        </p:spPr>
+      </p:sp>
+      <p:sp>
+        <p:nvSpPr>
+          <p:cNvPr id="21" name="">
+            <a:extLst xmlns:a="http://schemas.openxmlformats.org/drawingml/2006/main">
+              <a:ext uri="{FF2B5EF4-FFF2-40B4-BE49-F238E27FC236}">
+                <a16:creationId xmlns:a16="http://schemas.microsoft.com/office/drawing/2014/main" id="{F1EA8529-F10E-48B2-9B92-29DEA14EB260}"/>
+              </a:ext>
+            </a:extLst>
+          </p:cNvPr>
+          <p:cNvSpPr>
+            <a:spLocks xmlns:a="http://schemas.openxmlformats.org/drawingml/2006/main" noGrp="1"/>
+          </p:cNvSpPr>
+          <p:nvPr/>
+        </p:nvSpPr>
+        <p:spPr>
+          <a:xfrm xmlns:a="http://schemas.openxmlformats.org/drawingml/2006/main">
+            <a:off x="8553450" y="2133600"/>
+            <a:ext cx="2095500" cy="1676400"/>
+          </a:xfrm>
+          <a:prstGeom xmlns:a="http://schemas.openxmlformats.org/drawingml/2006/main" prst="roundRect">
+            <a:avLst>
+              <a:gd name="adj" fmla="val 4545"/>
+            </a:avLst>
+          </a:prstGeom>
+          <a:solidFill xmlns:a="http://schemas.openxmlformats.org/drawingml/2006/main">
+            <a:srgbClr val="FFFFFF"/>
+          </a:solidFill>
+          <a:ln xmlns:a="http://schemas.openxmlformats.org/drawingml/2006/main" w="9525">
+            <a:solidFill>
+              <a:srgbClr val="EDEDED"/>
+            </a:solidFill>
+          </a:ln>
+        </p:spPr>
+      </p:sp>
+      <p:sp>
+        <p:nvSpPr>
+          <p:cNvPr id="22" name="">
+            <a:extLst xmlns:a="http://schemas.openxmlformats.org/drawingml/2006/main">
+              <a:ext uri="{FF2B5EF4-FFF2-40B4-BE49-F238E27FC236}">
+                <a16:creationId xmlns:a16="http://schemas.microsoft.com/office/drawing/2014/main" id="{8A876ED7-C4F5-4BD9-9B1A-F843FFE0D0AC}"/>
+              </a:ext>
+            </a:extLst>
+          </p:cNvPr>
+          <p:cNvSpPr>
+            <a:spLocks xmlns:a="http://schemas.openxmlformats.org/drawingml/2006/main" noGrp="1"/>
+          </p:cNvSpPr>
+          <p:nvPr/>
+        </p:nvSpPr>
+        <p:spPr>
+          <a:xfrm xmlns:a="http://schemas.openxmlformats.org/drawingml/2006/main">
+            <a:off x="8763000" y="2381250"/>
+            <a:ext cx="1676400" cy="247650"/>
+          </a:xfrm>
+          <a:prstGeom xmlns:a="http://schemas.openxmlformats.org/drawingml/2006/main" prst="rect">
+            <a:avLst/>
+          </a:prstGeom>
+          <a:noFill xmlns:a="http://schemas.openxmlformats.org/drawingml/2006/main"/>
+          <a:ln xmlns:a="http://schemas.openxmlformats.org/drawingml/2006/main" w="0">
+            <a:noFill/>
+          </a:ln>
+        </p:spPr>
+        <p:txBody>
+          <a:bodyPr xmlns:a="http://schemas.openxmlformats.org/drawingml/2006/main" wrap="square" lIns="38100" tIns="38100" rIns="38100" bIns="38100">
+            <a:noAutofit/>
+          </a:bodyPr>
+          <a:lstStyle xmlns:a="http://schemas.openxmlformats.org/drawingml/2006/main"/>
+          <a:p xmlns:a="http://schemas.openxmlformats.org/drawingml/2006/main">
+            <a:r>
+              <a:rPr sz="1575" b="1">
+                <a:solidFill>
+                  <a:srgbClr val="181818"/>
+                </a:solidFill>
+                <a:latin typeface="Inter"/>
+                <a:ea typeface="Inter"/>
+                <a:cs typeface="Inter"/>
+              </a:rPr>
+              <a:t>Compressed brief</a:t>
+            </a:r>
+          </a:p>
+        </p:txBody>
+      </p:sp>
+      <p:sp>
+        <p:nvSpPr>
+          <p:cNvPr id="23" name="">
+            <a:extLst xmlns:a="http://schemas.openxmlformats.org/drawingml/2006/main">
+              <a:ext uri="{FF2B5EF4-FFF2-40B4-BE49-F238E27FC236}">
+                <a16:creationId xmlns:a16="http://schemas.microsoft.com/office/drawing/2014/main" id="{4A6672AD-10CD-42F8-9BFB-E7053D22E318}"/>
+              </a:ext>
+            </a:extLst>
+          </p:cNvPr>
+          <p:cNvSpPr>
+            <a:spLocks xmlns:a="http://schemas.openxmlformats.org/drawingml/2006/main" noGrp="1"/>
+          </p:cNvSpPr>
+          <p:nvPr/>
+        </p:nvSpPr>
+        <p:spPr>
+          <a:xfrm xmlns:a="http://schemas.openxmlformats.org/drawingml/2006/main">
+            <a:off x="8763000" y="2819400"/>
+            <a:ext cx="1676400" cy="914400"/>
+          </a:xfrm>
+          <a:prstGeom xmlns:a="http://schemas.openxmlformats.org/drawingml/2006/main" prst="rect">
+            <a:avLst/>
+          </a:prstGeom>
+          <a:noFill xmlns:a="http://schemas.openxmlformats.org/drawingml/2006/main"/>
+          <a:ln xmlns:a="http://schemas.openxmlformats.org/drawingml/2006/main" w="0">
+            <a:noFill/>
+          </a:ln>
+        </p:spPr>
+        <p:txBody>
+          <a:bodyPr xmlns:a="http://schemas.openxmlformats.org/drawingml/2006/main" wrap="square" lIns="38100" tIns="38100" rIns="38100" bIns="38100">
+            <a:noAutofit/>
+          </a:bodyPr>
+          <a:lstStyle xmlns:a="http://schemas.openxmlformats.org/drawingml/2006/main"/>
+          <a:p xmlns:a="http://schemas.openxmlformats.org/drawingml/2006/main">
+            <a:r>
+              <a:rPr sz="1275">
+                <a:solidFill>
+                  <a:srgbClr val="282828"/>
+                </a:solidFill>
+                <a:latin typeface="Inter"/>
+                <a:ea typeface="Inter"/>
+                <a:cs typeface="Inter"/>
+              </a:rPr>
+              <a:t>only real cruxes</a:t>
+            </a:r>
+          </a:p>
+          <a:p xmlns:a="http://schemas.openxmlformats.org/drawingml/2006/main">
+            <a:r>
+              <a:rPr sz="1275">
+                <a:solidFill>
+                  <a:srgbClr val="282828"/>
+                </a:solidFill>
+                <a:latin typeface="Inter"/>
+                <a:ea typeface="Inter"/>
+                <a:cs typeface="Inter"/>
+              </a:rPr>
+              <a:t>provenance</a:t>
+            </a:r>
+          </a:p>
+          <a:p xmlns:a="http://schemas.openxmlformats.org/drawingml/2006/main">
+            <a:r>
+              <a:rPr sz="1275">
+                <a:solidFill>
+                  <a:srgbClr val="282828"/>
+                </a:solidFill>
+                <a:latin typeface="Inter"/>
+                <a:ea typeface="Inter"/>
+                <a:cs typeface="Inter"/>
+              </a:rPr>
+              <a:t>human-owned</a:t>
+            </a:r>
+          </a:p>
+        </p:txBody>
+      </p:sp>
+      <p:sp>
+        <p:nvSpPr>
+          <p:cNvPr id="24" name="">
+            <a:extLst xmlns:a="http://schemas.openxmlformats.org/drawingml/2006/main">
+              <a:ext uri="{FF2B5EF4-FFF2-40B4-BE49-F238E27FC236}">
+                <a16:creationId xmlns:a16="http://schemas.microsoft.com/office/drawing/2014/main" id="{70065D86-01DD-4C99-A738-35EC29C14C08}"/>
+              </a:ext>
+            </a:extLst>
+          </p:cNvPr>
+          <p:cNvSpPr>
+            <a:spLocks xmlns:a="http://schemas.openxmlformats.org/drawingml/2006/main" noGrp="1"/>
+          </p:cNvSpPr>
+          <p:nvPr/>
+        </p:nvSpPr>
+        <p:spPr>
+          <a:xfrm xmlns:a="http://schemas.openxmlformats.org/drawingml/2006/main">
+            <a:off x="895350" y="4038600"/>
+            <a:ext cx="4762500" cy="1276350"/>
+          </a:xfrm>
+          <a:prstGeom xmlns:a="http://schemas.openxmlformats.org/drawingml/2006/main" prst="roundRect">
+            <a:avLst>
+              <a:gd name="adj" fmla="val 5970"/>
+            </a:avLst>
+          </a:prstGeom>
+          <a:solidFill xmlns:a="http://schemas.openxmlformats.org/drawingml/2006/main">
+            <a:srgbClr val="FFFFFF"/>
+          </a:solidFill>
+          <a:ln xmlns:a="http://schemas.openxmlformats.org/drawingml/2006/main" w="9525">
+            <a:solidFill>
+              <a:srgbClr val="EDEDED"/>
+            </a:solidFill>
+          </a:ln>
+        </p:spPr>
+      </p:sp>
+      <p:sp>
+        <p:nvSpPr>
+          <p:cNvPr id="25" name="">
+            <a:extLst xmlns:a="http://schemas.openxmlformats.org/drawingml/2006/main">
+              <a:ext uri="{FF2B5EF4-FFF2-40B4-BE49-F238E27FC236}">
+                <a16:creationId xmlns:a16="http://schemas.microsoft.com/office/drawing/2014/main" id="{1B9AD73C-0720-45BF-99AE-14ABD0216361}"/>
+              </a:ext>
+            </a:extLst>
+          </p:cNvPr>
+          <p:cNvSpPr>
+            <a:spLocks xmlns:a="http://schemas.openxmlformats.org/drawingml/2006/main" noGrp="1"/>
+          </p:cNvSpPr>
+          <p:nvPr/>
+        </p:nvSpPr>
+        <p:spPr>
+          <a:xfrm xmlns:a="http://schemas.openxmlformats.org/drawingml/2006/main">
+            <a:off x="1143000" y="4248150"/>
+            <a:ext cx="1905000" cy="190500"/>
+          </a:xfrm>
+          <a:prstGeom xmlns:a="http://schemas.openxmlformats.org/drawingml/2006/main" prst="rect">
+            <a:avLst/>
+          </a:prstGeom>
+          <a:noFill xmlns:a="http://schemas.openxmlformats.org/drawingml/2006/main"/>
+          <a:ln xmlns:a="http://schemas.openxmlformats.org/drawingml/2006/main" w="0">
+            <a:noFill/>
+          </a:ln>
+        </p:spPr>
+        <p:txBody>
+          <a:bodyPr xmlns:a="http://schemas.openxmlformats.org/drawingml/2006/main" wrap="square" lIns="38100" tIns="38100" rIns="38100" bIns="38100">
+            <a:noAutofit/>
+          </a:bodyPr>
+          <a:lstStyle xmlns:a="http://schemas.openxmlformats.org/drawingml/2006/main"/>
+          <a:p xmlns:a="http://schemas.openxmlformats.org/drawingml/2006/main">
+            <a:r>
+              <a:rPr sz="975" b="1">
+                <a:solidFill>
+                  <a:srgbClr val="5D605E"/>
+                </a:solidFill>
+                <a:latin typeface="Inter"/>
+                <a:ea typeface="Inter"/>
+                <a:cs typeface="Inter"/>
+              </a:rPr>
+              <a:t>Today</a:t>
+            </a:r>
+          </a:p>
+        </p:txBody>
+      </p:sp>
+      <p:sp>
+        <p:nvSpPr>
+          <p:cNvPr id="26" name="">
+            <a:extLst xmlns:a="http://schemas.openxmlformats.org/drawingml/2006/main">
+              <a:ext uri="{FF2B5EF4-FFF2-40B4-BE49-F238E27FC236}">
+                <a16:creationId xmlns:a16="http://schemas.microsoft.com/office/drawing/2014/main" id="{BB7F0C46-B44B-4FE1-938D-FB455BCCA4A3}"/>
+              </a:ext>
+            </a:extLst>
+          </p:cNvPr>
+          <p:cNvSpPr>
+            <a:spLocks xmlns:a="http://schemas.openxmlformats.org/drawingml/2006/main" noGrp="1"/>
+          </p:cNvSpPr>
+          <p:nvPr/>
+        </p:nvSpPr>
+        <p:spPr>
+          <a:xfrm xmlns:a="http://schemas.openxmlformats.org/drawingml/2006/main">
+            <a:off x="1143000" y="4495800"/>
+            <a:ext cx="4248150" cy="571500"/>
+          </a:xfrm>
+          <a:prstGeom xmlns:a="http://schemas.openxmlformats.org/drawingml/2006/main" prst="rect">
+            <a:avLst/>
+          </a:prstGeom>
+          <a:noFill xmlns:a="http://schemas.openxmlformats.org/drawingml/2006/main"/>
+          <a:ln xmlns:a="http://schemas.openxmlformats.org/drawingml/2006/main" w="0">
+            <a:noFill/>
+          </a:ln>
+        </p:spPr>
+        <p:txBody>
+          <a:bodyPr xmlns:a="http://schemas.openxmlformats.org/drawingml/2006/main" wrap="square" lIns="38100" tIns="38100" rIns="38100" bIns="38100">
+            <a:noAutofit/>
+          </a:bodyPr>
+          <a:lstStyle xmlns:a="http://schemas.openxmlformats.org/drawingml/2006/main"/>
+          <a:p xmlns:a="http://schemas.openxmlformats.org/drawingml/2006/main">
+            <a:r>
+              <a:rPr sz="1425">
+                <a:solidFill>
+                  <a:srgbClr val="181818"/>
+                </a:solidFill>
+                <a:latin typeface="Inter"/>
+                <a:ea typeface="Inter"/>
+                <a:cs typeface="Inter"/>
+              </a:rPr>
+              <a:t>Managed agents fill the stance contract for each person.</a:t>
+            </a:r>
+          </a:p>
+        </p:txBody>
+      </p:sp>
+      <p:sp>
+        <p:nvSpPr>
+          <p:cNvPr id="27" name="">
+            <a:extLst xmlns:a="http://schemas.openxmlformats.org/drawingml/2006/main">
+              <a:ext uri="{FF2B5EF4-FFF2-40B4-BE49-F238E27FC236}">
+                <a16:creationId xmlns:a16="http://schemas.microsoft.com/office/drawing/2014/main" id="{BA3550BF-C579-4FE9-89B2-CC2B3603005A}"/>
+              </a:ext>
+            </a:extLst>
+          </p:cNvPr>
+          <p:cNvSpPr>
+            <a:spLocks xmlns:a="http://schemas.openxmlformats.org/drawingml/2006/main" noGrp="1"/>
+          </p:cNvSpPr>
+          <p:nvPr/>
+        </p:nvSpPr>
+        <p:spPr>
+          <a:xfrm xmlns:a="http://schemas.openxmlformats.org/drawingml/2006/main">
+            <a:off x="5829300" y="4038600"/>
+            <a:ext cx="4762500" cy="1276350"/>
+          </a:xfrm>
+          <a:prstGeom xmlns:a="http://schemas.openxmlformats.org/drawingml/2006/main" prst="roundRect">
+            <a:avLst>
+              <a:gd name="adj" fmla="val 5970"/>
+            </a:avLst>
+          </a:prstGeom>
+          <a:solidFill xmlns:a="http://schemas.openxmlformats.org/drawingml/2006/main">
+            <a:srgbClr val="F9F9F9"/>
+          </a:solidFill>
+          <a:ln xmlns:a="http://schemas.openxmlformats.org/drawingml/2006/main" w="9525">
+            <a:solidFill>
+              <a:srgbClr val="282828"/>
+            </a:solidFill>
+          </a:ln>
+        </p:spPr>
+      </p:sp>
+      <p:sp>
+        <p:nvSpPr>
+          <p:cNvPr id="28" name="">
+            <a:extLst xmlns:a="http://schemas.openxmlformats.org/drawingml/2006/main">
+              <a:ext uri="{FF2B5EF4-FFF2-40B4-BE49-F238E27FC236}">
+                <a16:creationId xmlns:a16="http://schemas.microsoft.com/office/drawing/2014/main" id="{8E5CED1F-F673-4F29-9C39-1DEFF06EF2F8}"/>
+              </a:ext>
+            </a:extLst>
+          </p:cNvPr>
+          <p:cNvSpPr>
+            <a:spLocks xmlns:a="http://schemas.openxmlformats.org/drawingml/2006/main" noGrp="1"/>
+          </p:cNvSpPr>
+          <p:nvPr/>
+        </p:nvSpPr>
+        <p:spPr>
+          <a:xfrm xmlns:a="http://schemas.openxmlformats.org/drawingml/2006/main">
+            <a:off x="6076950" y="4210050"/>
+            <a:ext cx="1066800" cy="323850"/>
+          </a:xfrm>
+          <a:prstGeom xmlns:a="http://schemas.openxmlformats.org/drawingml/2006/main" prst="roundRect">
+            <a:avLst>
+              <a:gd name="adj" fmla="val 50000"/>
+            </a:avLst>
+          </a:prstGeom>
+          <a:solidFill xmlns:a="http://schemas.openxmlformats.org/drawingml/2006/main">
+            <a:srgbClr val="DDEBFF"/>
+          </a:solidFill>
+          <a:ln xmlns:a="http://schemas.openxmlformats.org/drawingml/2006/main" w="9525">
+            <a:solidFill>
+              <a:srgbClr val="2636B8"/>
+            </a:solidFill>
+          </a:ln>
+        </p:spPr>
+      </p:sp>
+      <p:sp>
+        <p:nvSpPr>
+          <p:cNvPr id="29" name="">
+            <a:extLst xmlns:a="http://schemas.openxmlformats.org/drawingml/2006/main">
+              <a:ext uri="{FF2B5EF4-FFF2-40B4-BE49-F238E27FC236}">
+                <a16:creationId xmlns:a16="http://schemas.microsoft.com/office/drawing/2014/main" id="{D6C22963-3819-4CA6-B13B-22F4AA713E78}"/>
+              </a:ext>
+            </a:extLst>
+          </p:cNvPr>
+          <p:cNvSpPr>
+            <a:spLocks xmlns:a="http://schemas.openxmlformats.org/drawingml/2006/main" noGrp="1"/>
+          </p:cNvSpPr>
+          <p:nvPr/>
+        </p:nvSpPr>
+        <p:spPr>
+          <a:xfrm xmlns:a="http://schemas.openxmlformats.org/drawingml/2006/main">
+            <a:off x="6191250" y="4276725"/>
+            <a:ext cx="838200" cy="171450"/>
+          </a:xfrm>
+          <a:prstGeom xmlns:a="http://schemas.openxmlformats.org/drawingml/2006/main" prst="rect">
+            <a:avLst/>
+          </a:prstGeom>
+          <a:noFill xmlns:a="http://schemas.openxmlformats.org/drawingml/2006/main"/>
+          <a:ln xmlns:a="http://schemas.openxmlformats.org/drawingml/2006/main" w="0">
+            <a:noFill/>
+          </a:ln>
+        </p:spPr>
+        <p:txBody>
+          <a:bodyPr xmlns:a="http://schemas.openxmlformats.org/drawingml/2006/main" wrap="square" lIns="0" tIns="0" rIns="0" bIns="0">
+            <a:noAutofit/>
+          </a:bodyPr>
+          <a:lstStyle xmlns:a="http://schemas.openxmlformats.org/drawingml/2006/main"/>
+          <a:p xmlns:a="http://schemas.openxmlformats.org/drawingml/2006/main">
+            <a:pPr algn="ctr">
+              <a:defRPr sz="900" b="1">
+                <a:solidFill>
+                  <a:srgbClr val="2636B8"/>
+                </a:solidFill>
+                <a:latin typeface="Inter"/>
+                <a:ea typeface="Inter"/>
+                <a:cs typeface="Inter"/>
+              </a:defRPr>
+            </a:pPr>
+            <a:r>
+              <a:rPr sz="900" b="1">
+                <a:solidFill>
+                  <a:srgbClr val="2636B8"/>
+                </a:solidFill>
+                <a:latin typeface="Inter"/>
+                <a:ea typeface="Inter"/>
+                <a:cs typeface="Inter"/>
+              </a:rPr>
+              <a:t>ROADMAP</a:t>
+            </a:r>
+          </a:p>
+        </p:txBody>
+      </p:sp>
+      <p:sp>
+        <p:nvSpPr>
+          <p:cNvPr id="30" name="">
+            <a:extLst xmlns:a="http://schemas.openxmlformats.org/drawingml/2006/main">
+              <a:ext uri="{FF2B5EF4-FFF2-40B4-BE49-F238E27FC236}">
+                <a16:creationId xmlns:a16="http://schemas.microsoft.com/office/drawing/2014/main" id="{F34F5D75-676F-4B6C-A5EA-65AD677A2906}"/>
+              </a:ext>
+            </a:extLst>
+          </p:cNvPr>
+          <p:cNvSpPr>
+            <a:spLocks xmlns:a="http://schemas.openxmlformats.org/drawingml/2006/main" noGrp="1"/>
+          </p:cNvSpPr>
+          <p:nvPr/>
+        </p:nvSpPr>
+        <p:spPr>
+          <a:xfrm xmlns:a="http://schemas.openxmlformats.org/drawingml/2006/main">
+            <a:off x="7258050" y="4248150"/>
+            <a:ext cx="3143250" cy="209550"/>
+          </a:xfrm>
+          <a:prstGeom xmlns:a="http://schemas.openxmlformats.org/drawingml/2006/main" prst="rect">
+            <a:avLst/>
+          </a:prstGeom>
+          <a:noFill xmlns:a="http://schemas.openxmlformats.org/drawingml/2006/main"/>
+          <a:ln xmlns:a="http://schemas.openxmlformats.org/drawingml/2006/main" w="0">
+            <a:noFill/>
+          </a:ln>
+        </p:spPr>
+        <p:txBody>
+          <a:bodyPr xmlns:a="http://schemas.openxmlformats.org/drawingml/2006/main" wrap="square" lIns="38100" tIns="38100" rIns="38100" bIns="38100">
+            <a:noAutofit/>
+          </a:bodyPr>
+          <a:lstStyle xmlns:a="http://schemas.openxmlformats.org/drawingml/2006/main"/>
+          <a:p xmlns:a="http://schemas.openxmlformats.org/drawingml/2006/main">
+            <a:r>
+              <a:rPr sz="1125" b="1">
+                <a:solidFill>
+                  <a:srgbClr val="282828"/>
+                </a:solidFill>
+                <a:latin typeface="Inter"/>
+                <a:ea typeface="Inter"/>
+                <a:cs typeface="Inter"/>
+              </a:rPr>
+              <a:t>Bring your own agent</a:t>
+            </a:r>
+          </a:p>
+        </p:txBody>
+      </p:sp>
+      <p:sp>
+        <p:nvSpPr>
+          <p:cNvPr id="31" name="">
+            <a:extLst xmlns:a="http://schemas.openxmlformats.org/drawingml/2006/main">
+              <a:ext uri="{FF2B5EF4-FFF2-40B4-BE49-F238E27FC236}">
+                <a16:creationId xmlns:a16="http://schemas.microsoft.com/office/drawing/2014/main" id="{B5E46720-4273-4B67-967B-7F20BEAFC060}"/>
+              </a:ext>
+            </a:extLst>
+          </p:cNvPr>
+          <p:cNvSpPr>
+            <a:spLocks xmlns:a="http://schemas.openxmlformats.org/drawingml/2006/main" noGrp="1"/>
+          </p:cNvSpPr>
+          <p:nvPr/>
+        </p:nvSpPr>
+        <p:spPr>
+          <a:xfrm xmlns:a="http://schemas.openxmlformats.org/drawingml/2006/main">
+            <a:off x="6076950" y="4591050"/>
+            <a:ext cx="4305300" cy="666750"/>
+          </a:xfrm>
+          <a:prstGeom xmlns:a="http://schemas.openxmlformats.org/drawingml/2006/main" prst="rect">
+            <a:avLst/>
+          </a:prstGeom>
+          <a:noFill xmlns:a="http://schemas.openxmlformats.org/drawingml/2006/main"/>
+          <a:ln xmlns:a="http://schemas.openxmlformats.org/drawingml/2006/main" w="0">
+            <a:noFill/>
+          </a:ln>
+        </p:spPr>
+        <p:txBody>
+          <a:bodyPr xmlns:a="http://schemas.openxmlformats.org/drawingml/2006/main" wrap="square" lIns="38100" tIns="38100" rIns="38100" bIns="38100">
+            <a:noAutofit/>
+          </a:bodyPr>
+          <a:lstStyle xmlns:a="http://schemas.openxmlformats.org/drawingml/2006/main"/>
+          <a:p xmlns:a="http://schemas.openxmlformats.org/drawingml/2006/main">
+            <a:r>
+              <a:rPr sz="1275">
+                <a:solidFill>
+                  <a:srgbClr val="181818"/>
+                </a:solidFill>
+                <a:latin typeface="Inter"/>
+                <a:ea typeface="Inter"/>
+                <a:cs typeface="Inter"/>
+              </a:rPr>
+              <a:t>Point your own agent at Mochi. It speaks the stance contract, keeps your context private, and emits only a structured stance.</a:t>
+            </a:r>
+          </a:p>
+        </p:txBody>
+      </p:sp>
+      <p:sp>
+        <p:nvSpPr>
+          <p:cNvPr id="32" name="">
+            <a:extLst xmlns:a="http://schemas.openxmlformats.org/drawingml/2006/main">
+              <a:ext uri="{FF2B5EF4-FFF2-40B4-BE49-F238E27FC236}">
+                <a16:creationId xmlns:a16="http://schemas.microsoft.com/office/drawing/2014/main" id="{4FF45627-FE4C-4E74-9A63-F9659F7D8A97}"/>
+              </a:ext>
+            </a:extLst>
+          </p:cNvPr>
+          <p:cNvSpPr>
+            <a:spLocks xmlns:a="http://schemas.openxmlformats.org/drawingml/2006/main" noGrp="1"/>
+          </p:cNvSpPr>
+          <p:nvPr/>
+        </p:nvSpPr>
+        <p:spPr>
+          <a:xfrm xmlns:a="http://schemas.openxmlformats.org/drawingml/2006/main">
+            <a:off x="895350" y="5562600"/>
+            <a:ext cx="9696450" cy="533400"/>
+          </a:xfrm>
+          <a:prstGeom xmlns:a="http://schemas.openxmlformats.org/drawingml/2006/main" prst="roundRect">
+            <a:avLst>
+              <a:gd name="adj" fmla="val 14286"/>
+            </a:avLst>
+          </a:prstGeom>
+          <a:solidFill xmlns:a="http://schemas.openxmlformats.org/drawingml/2006/main">
+            <a:srgbClr val="17191A"/>
+          </a:solidFill>
+          <a:ln xmlns:a="http://schemas.openxmlformats.org/drawingml/2006/main" w="0">
+            <a:noFill/>
+          </a:ln>
+        </p:spPr>
+      </p:sp>
+      <p:sp>
+        <p:nvSpPr>
+          <p:cNvPr id="33" name="">
+            <a:extLst xmlns:a="http://schemas.openxmlformats.org/drawingml/2006/main">
+              <a:ext uri="{FF2B5EF4-FFF2-40B4-BE49-F238E27FC236}">
+                <a16:creationId xmlns:a16="http://schemas.microsoft.com/office/drawing/2014/main" id="{7BC7F6E4-74FA-4B93-AB7D-3FF1FCCC5318}"/>
+              </a:ext>
+            </a:extLst>
+          </p:cNvPr>
+          <p:cNvSpPr>
+            <a:spLocks xmlns:a="http://schemas.openxmlformats.org/drawingml/2006/main" noGrp="1"/>
+          </p:cNvSpPr>
+          <p:nvPr/>
+        </p:nvSpPr>
+        <p:spPr>
+          <a:xfrm xmlns:a="http://schemas.openxmlformats.org/drawingml/2006/main">
+            <a:off x="1162050" y="5734050"/>
+            <a:ext cx="1428750" cy="171450"/>
+          </a:xfrm>
+          <a:prstGeom xmlns:a="http://schemas.openxmlformats.org/drawingml/2006/main" prst="rect">
+            <a:avLst/>
+          </a:prstGeom>
+          <a:noFill xmlns:a="http://schemas.openxmlformats.org/drawingml/2006/main"/>
+          <a:ln xmlns:a="http://schemas.openxmlformats.org/drawingml/2006/main" w="0">
+            <a:noFill/>
+          </a:ln>
+        </p:spPr>
+        <p:txBody>
+          <a:bodyPr xmlns:a="http://schemas.openxmlformats.org/drawingml/2006/main" wrap="square" lIns="38100" tIns="38100" rIns="38100" bIns="38100">
+            <a:noAutofit/>
+          </a:bodyPr>
+          <a:lstStyle xmlns:a="http://schemas.openxmlformats.org/drawingml/2006/main"/>
+          <a:p xmlns:a="http://schemas.openxmlformats.org/drawingml/2006/main">
+            <a:r>
+              <a:rPr sz="975" b="1">
+                <a:solidFill>
+                  <a:srgbClr val="BFC5C9"/>
+                </a:solidFill>
+                <a:latin typeface="Inter"/>
+                <a:ea typeface="Inter"/>
+                <a:cs typeface="Inter"/>
+              </a:rPr>
+              <a:t>The protocol</a:t>
+            </a:r>
+          </a:p>
+        </p:txBody>
+      </p:sp>
+      <p:sp>
+        <p:nvSpPr>
+          <p:cNvPr id="34" name="">
+            <a:extLst xmlns:a="http://schemas.openxmlformats.org/drawingml/2006/main">
+              <a:ext uri="{FF2B5EF4-FFF2-40B4-BE49-F238E27FC236}">
+                <a16:creationId xmlns:a16="http://schemas.microsoft.com/office/drawing/2014/main" id="{6634E353-F48D-4E29-BE3A-F960E95724E9}"/>
+              </a:ext>
+            </a:extLst>
+          </p:cNvPr>
+          <p:cNvSpPr>
+            <a:spLocks xmlns:a="http://schemas.openxmlformats.org/drawingml/2006/main" noGrp="1"/>
+          </p:cNvSpPr>
+          <p:nvPr/>
+        </p:nvSpPr>
+        <p:spPr>
+          <a:xfrm xmlns:a="http://schemas.openxmlformats.org/drawingml/2006/main">
+            <a:off x="2743200" y="5715000"/>
+            <a:ext cx="7620000" cy="228600"/>
+          </a:xfrm>
+          <a:prstGeom xmlns:a="http://schemas.openxmlformats.org/drawingml/2006/main" prst="rect">
+            <a:avLst/>
+          </a:prstGeom>
+          <a:noFill xmlns:a="http://schemas.openxmlformats.org/drawingml/2006/main"/>
+          <a:ln xmlns:a="http://schemas.openxmlformats.org/drawingml/2006/main" w="0">
+            <a:noFill/>
+          </a:ln>
+        </p:spPr>
+        <p:txBody>
+          <a:bodyPr xmlns:a="http://schemas.openxmlformats.org/drawingml/2006/main" wrap="square" lIns="38100" tIns="38100" rIns="38100" bIns="38100">
+            <a:noAutofit/>
+          </a:bodyPr>
+          <a:lstStyle xmlns:a="http://schemas.openxmlformats.org/drawingml/2006/main"/>
+          <a:p xmlns:a="http://schemas.openxmlformats.org/drawingml/2006/main">
+            <a:r>
+              <a:rPr sz="1500" b="1">
+                <a:solidFill>
+                  <a:srgbClr val="FFFFFF"/>
+                </a:solidFill>
+                <a:latin typeface="Inter"/>
+                <a:ea typeface="Inter"/>
+                <a:cs typeface="Inter"/>
+              </a:rPr>
+              <a:t>Mochi is the protocol for pre-meeting agent reasoning, not the silo.</a:t>
+            </a:r>
+          </a:p>
+        </p:txBody>
+      </p:sp>
+    </p:spTree>
+    <p:extLst>
+      <p:ext uri="{BB962C8B-B14F-4D97-AF65-F5344CB8AC3E}">
+        <p14:creationId xmlns:p14="http://schemas.microsoft.com/office/powerpoint/2010/main" val="1762086898"/>
+      </p:ext>
+    </p:extLst>
+  </p:cSld>
+</p:sld>
+</file>
+
+<file path=ppt/slides/slide9.xml><?xml version="1.0" encoding="utf-8"?>
+<p:sld xmlns:p="http://schemas.openxmlformats.org/presentationml/2006/main">
+  <p:cSld>
+    <p:bg>
+      <p:bgPr>
+        <a:solidFill xmlns:a="http://schemas.openxmlformats.org/drawingml/2006/main">
+          <a:srgbClr val="FFFFFF"/>
+        </a:solidFill>
+      </p:bgPr>
+    </p:bg>
+    <p:spTree>
+      <p:nvGrpSpPr>
+        <p:cNvPr id="1" name=""/>
+        <p:cNvGrpSpPr/>
+        <p:nvPr/>
+      </p:nvGrpSpPr>
+      <p:grpSpPr>
+        <a:xfrm xmlns:a="http://schemas.openxmlformats.org/drawingml/2006/main"/>
+      </p:grpSpPr>
+      <p:pic>
+        <p:nvPicPr>
+          <p:cNvPr id="1" name=""/>
+          <p:cNvPicPr>
+            <a:picLocks xmlns:a="http://schemas.openxmlformats.org/drawingml/2006/main" noChangeAspect="1"/>
+          </p:cNvPicPr>
+          <p:nvPr/>
+        </p:nvPicPr>
+        <p:blipFill>
+          <a:blip xmlns:r="http://schemas.openxmlformats.org/officeDocument/2006/relationships" xmlns:a="http://schemas.openxmlformats.org/drawingml/2006/main" r:embed="R3f6955c68f54461c"/>
+          <a:srcRect xmlns:a="http://schemas.openxmlformats.org/drawingml/2006/main" l="0" t="0" r="0" b="0"/>
+          <a:stretch xmlns:a="http://schemas.openxmlformats.org/drawingml/2006/main">
+            <a:fillRect l="0" t="0" r="0" b="0"/>
+          </a:stretch>
+        </p:blipFill>
+        <p:spPr>
+          <a:xfrm xmlns:a="http://schemas.openxmlformats.org/drawingml/2006/main">
+            <a:off x="0" y="0"/>
+            <a:ext cx="12192000" cy="6858000"/>
+          </a:xfrm>
+          <a:prstGeom xmlns:a="http://schemas.openxmlformats.org/drawingml/2006/main" prst="rect">
+            <a:avLst/>
+          </a:prstGeom>
+        </p:spPr>
+      </p:pic>
+      <p:sp>
+        <p:nvSpPr>
+          <p:cNvPr id="2" name="">
+            <a:extLst xmlns:a="http://schemas.openxmlformats.org/drawingml/2006/main">
+              <a:ext uri="{FF2B5EF4-FFF2-40B4-BE49-F238E27FC236}">
+                <a16:creationId xmlns:a16="http://schemas.microsoft.com/office/drawing/2014/main" id="{46F50D42-9208-45CC-A4F9-7A41F786C0C2}"/>
+              </a:ext>
+            </a:extLst>
+          </p:cNvPr>
+          <p:cNvSpPr>
+            <a:spLocks xmlns:a="http://schemas.openxmlformats.org/drawingml/2006/main" noGrp="1"/>
+          </p:cNvSpPr>
+          <p:nvPr/>
+        </p:nvSpPr>
+        <p:spPr>
+          <a:xfrm xmlns:a="http://schemas.openxmlformats.org/drawingml/2006/main">
+            <a:off x="685800" y="419100"/>
+            <a:ext cx="2857500" cy="228600"/>
+          </a:xfrm>
+          <a:prstGeom xmlns:a="http://schemas.openxmlformats.org/drawingml/2006/main" prst="rect">
+            <a:avLst/>
+          </a:prstGeom>
+          <a:noFill xmlns:a="http://schemas.openxmlformats.org/drawingml/2006/main"/>
+          <a:ln xmlns:a="http://schemas.openxmlformats.org/drawingml/2006/main" w="0">
+            <a:noFill/>
+          </a:ln>
+        </p:spPr>
+        <p:txBody>
+          <a:bodyPr xmlns:a="http://schemas.openxmlformats.org/drawingml/2006/main" wrap="square" lIns="0" tIns="19050" rIns="0" bIns="0">
+            <a:noAutofit/>
+          </a:bodyPr>
+          <a:lstStyle xmlns:a="http://schemas.openxmlformats.org/drawingml/2006/main"/>
+          <a:p xmlns:a="http://schemas.openxmlformats.org/drawingml/2006/main">
+            <a:r>
+              <a:rPr sz="975" b="1">
+                <a:solidFill>
+                  <a:srgbClr val="5D605E"/>
+                </a:solidFill>
+                <a:latin typeface="Inter"/>
+                <a:ea typeface="Inter"/>
+                <a:cs typeface="Inter"/>
+              </a:rPr>
+              <a:t>CLOSE</a:t>
+            </a:r>
+          </a:p>
+        </p:txBody>
+      </p:sp>
+      <p:sp>
+        <p:nvSpPr>
+          <p:cNvPr id="3" name="">
+            <a:extLst xmlns:a="http://schemas.openxmlformats.org/drawingml/2006/main">
+              <a:ext uri="{FF2B5EF4-FFF2-40B4-BE49-F238E27FC236}">
+                <a16:creationId xmlns:a16="http://schemas.microsoft.com/office/drawing/2014/main" id="{0A0DB2EB-9286-4651-A000-9FB2C36FCB14}"/>
+              </a:ext>
+            </a:extLst>
+          </p:cNvPr>
+          <p:cNvSpPr>
+            <a:spLocks xmlns:a="http://schemas.openxmlformats.org/drawingml/2006/main" noGrp="1"/>
+          </p:cNvSpPr>
+          <p:nvPr/>
+        </p:nvSpPr>
+        <p:spPr>
+          <a:xfrm xmlns:a="http://schemas.openxmlformats.org/drawingml/2006/main">
+            <a:off x="666750" y="723900"/>
+            <a:ext cx="8763000" cy="1066800"/>
+          </a:xfrm>
+          <a:prstGeom xmlns:a="http://schemas.openxmlformats.org/drawingml/2006/main" prst="rect">
+            <a:avLst/>
+          </a:prstGeom>
+          <a:noFill xmlns:a="http://schemas.openxmlformats.org/drawingml/2006/main"/>
+          <a:ln xmlns:a="http://schemas.openxmlformats.org/drawingml/2006/main" w="0">
+            <a:noFill/>
+          </a:ln>
+        </p:spPr>
+        <p:txBody>
+          <a:bodyPr xmlns:a="http://schemas.openxmlformats.org/drawingml/2006/main" wrap="square" lIns="0" tIns="0" rIns="0" bIns="0">
+            <a:noAutofit/>
+          </a:bodyPr>
+          <a:lstStyle xmlns:a="http://schemas.openxmlformats.org/drawingml/2006/main"/>
+          <a:p xmlns:a="http://schemas.openxmlformats.org/drawingml/2006/main">
+            <a:r>
+              <a:rPr sz="3000">
+                <a:solidFill>
+                  <a:srgbClr val="181818"/>
+                </a:solidFill>
+                <a:latin typeface="Inter"/>
+                <a:ea typeface="Inter"/>
+                <a:cs typeface="Inter"/>
+              </a:rPr>
+              <a:t>Mochi catches fake agreement</a:t>
+            </a:r>
+          </a:p>
+          <a:p xmlns:a="http://schemas.openxmlformats.org/drawingml/2006/main">
+            <a:r>
+              <a:rPr sz="3000">
+                <a:solidFill>
+                  <a:srgbClr val="181818"/>
+                </a:solidFill>
+                <a:latin typeface="Inter"/>
+                <a:ea typeface="Inter"/>
+                <a:cs typeface="Inter"/>
+              </a:rPr>
+              <a:t>before the hour is gone.</a:t>
+            </a:r>
+          </a:p>
+        </p:txBody>
+      </p:sp>
+      <p:sp>
+        <p:nvSpPr>
+          <p:cNvPr id="4" name="">
+            <a:extLst xmlns:a="http://schemas.openxmlformats.org/drawingml/2006/main">
+              <a:ext uri="{FF2B5EF4-FFF2-40B4-BE49-F238E27FC236}">
+                <a16:creationId xmlns:a16="http://schemas.microsoft.com/office/drawing/2014/main" id="{423A5FB3-B336-4A3B-9B62-12D8F9F610F8}"/>
+              </a:ext>
+            </a:extLst>
+          </p:cNvPr>
+          <p:cNvSpPr>
+            <a:spLocks xmlns:a="http://schemas.openxmlformats.org/drawingml/2006/main" noGrp="1"/>
+          </p:cNvSpPr>
+          <p:nvPr/>
+        </p:nvSpPr>
+        <p:spPr>
+          <a:xfrm xmlns:a="http://schemas.openxmlformats.org/drawingml/2006/main">
+            <a:off x="685800" y="6515100"/>
+            <a:ext cx="7239000" cy="171450"/>
+          </a:xfrm>
+          <a:prstGeom xmlns:a="http://schemas.openxmlformats.org/drawingml/2006/main" prst="rect">
+            <a:avLst/>
+          </a:prstGeom>
+          <a:noFill xmlns:a="http://schemas.openxmlformats.org/drawingml/2006/main"/>
+          <a:ln xmlns:a="http://schemas.openxmlformats.org/drawingml/2006/main" w="0">
+            <a:noFill/>
+          </a:ln>
+        </p:spPr>
+        <p:txBody>
+          <a:bodyPr xmlns:a="http://schemas.openxmlformats.org/drawingml/2006/main" wrap="square" lIns="0" tIns="0" rIns="0" bIns="0">
+            <a:noAutofit/>
+          </a:bodyPr>
+          <a:lstStyle xmlns:a="http://schemas.openxmlformats.org/drawingml/2006/main"/>
+          <a:p xmlns:a="http://schemas.openxmlformats.org/drawingml/2006/main">
+            <a:r>
+              <a:rPr sz="750">
+                <a:solidFill>
+                  <a:srgbClr val="5D605E"/>
+                </a:solidFill>
+                <a:latin typeface="Inter"/>
+                <a:ea typeface="Inter"/>
+                <a:cs typeface="Inter"/>
+              </a:rPr>
+              <a:t>Sources: docs/pitch-script.md, docs/submission-checklist.md</a:t>
+            </a:r>
+          </a:p>
+        </p:txBody>
+      </p:sp>
+      <p:sp>
+        <p:nvSpPr>
+          <p:cNvPr id="5" name="">
+            <a:extLst xmlns:a="http://schemas.openxmlformats.org/drawingml/2006/main">
+              <a:ext uri="{FF2B5EF4-FFF2-40B4-BE49-F238E27FC236}">
+                <a16:creationId xmlns:a16="http://schemas.microsoft.com/office/drawing/2014/main" id="{B2D175D1-33EA-4434-AFB3-7FF4EE4C81E6}"/>
+              </a:ext>
+            </a:extLst>
+          </p:cNvPr>
+          <p:cNvSpPr>
+            <a:spLocks xmlns:a="http://schemas.openxmlformats.org/drawingml/2006/main" noGrp="1"/>
+          </p:cNvSpPr>
+          <p:nvPr/>
+        </p:nvSpPr>
+        <p:spPr>
+          <a:xfrm xmlns:a="http://schemas.openxmlformats.org/drawingml/2006/main">
+            <a:off x="11239500" y="6515100"/>
+            <a:ext cx="381000" cy="171450"/>
+          </a:xfrm>
+          <a:prstGeom xmlns:a="http://schemas.openxmlformats.org/drawingml/2006/main" prst="rect">
+            <a:avLst/>
+          </a:prstGeom>
+          <a:noFill xmlns:a="http://schemas.openxmlformats.org/drawingml/2006/main"/>
+          <a:ln xmlns:a="http://schemas.openxmlformats.org/drawingml/2006/main" w="0">
+            <a:noFill/>
+          </a:ln>
+        </p:spPr>
+        <p:txBody>
+          <a:bodyPr xmlns:a="http://schemas.openxmlformats.org/drawingml/2006/main" wrap="square" lIns="0" tIns="0" rIns="0" bIns="0">
+            <a:noAutofit/>
+          </a:bodyPr>
+          <a:lstStyle xmlns:a="http://schemas.openxmlformats.org/drawingml/2006/main"/>
+          <a:p xmlns:a="http://schemas.openxmlformats.org/drawingml/2006/main">
+            <a:pPr algn="r">
+              <a:defRPr sz="750">
+                <a:solidFill>
+                  <a:srgbClr val="5D605E"/>
+                </a:solidFill>
+                <a:latin typeface="Inter"/>
+                <a:ea typeface="Inter"/>
+                <a:cs typeface="Inter"/>
+              </a:defRPr>
+            </a:pPr>
+            <a:r>
+              <a:rPr sz="750">
+                <a:solidFill>
+                  <a:srgbClr val="5D605E"/>
+                </a:solidFill>
+                <a:latin typeface="Inter"/>
+                <a:ea typeface="Inter"/>
+                <a:cs typeface="Inter"/>
+              </a:rPr>
+              <a:t>09</a:t>
+            </a:r>
+          </a:p>
+        </p:txBody>
+      </p:sp>
+      <p:sp>
+        <p:nvSpPr>
+          <p:cNvPr id="6" name="">
+            <a:extLst xmlns:a="http://schemas.openxmlformats.org/drawingml/2006/main">
+              <a:ext uri="{FF2B5EF4-FFF2-40B4-BE49-F238E27FC236}">
+                <a16:creationId xmlns:a16="http://schemas.microsoft.com/office/drawing/2014/main" id="{A2DA483C-9139-4BBE-80D3-3B04ACAEED1E}"/>
+              </a:ext>
+            </a:extLst>
+          </p:cNvPr>
+          <p:cNvSpPr>
+            <a:spLocks xmlns:a="http://schemas.openxmlformats.org/drawingml/2006/main" noGrp="1"/>
+          </p:cNvSpPr>
+          <p:nvPr/>
+        </p:nvSpPr>
+        <p:spPr>
+          <a:xfrm xmlns:a="http://schemas.openxmlformats.org/drawingml/2006/main">
+            <a:off x="876300" y="2038350"/>
+            <a:ext cx="5905500" cy="1257300"/>
+          </a:xfrm>
+          <a:prstGeom xmlns:a="http://schemas.openxmlformats.org/drawingml/2006/main" prst="rect">
+            <a:avLst/>
+          </a:prstGeom>
+          <a:noFill xmlns:a="http://schemas.openxmlformats.org/drawingml/2006/main"/>
+          <a:ln xmlns:a="http://schemas.openxmlformats.org/drawingml/2006/main" w="0">
+            <a:noFill/>
+          </a:ln>
+        </p:spPr>
+        <p:txBody>
+          <a:bodyPr xmlns:a="http://schemas.openxmlformats.org/drawingml/2006/main" wrap="square" lIns="38100" tIns="38100" rIns="38100" bIns="38100">
+            <a:noAutofit/>
+          </a:bodyPr>
+          <a:lstStyle xmlns:a="http://schemas.openxmlformats.org/drawingml/2006/main"/>
+          <a:p xmlns:a="http://schemas.openxmlformats.org/drawingml/2006/main">
+            <a:r>
+              <a:rPr sz="2700">
+                <a:solidFill>
+                  <a:srgbClr val="181818"/>
+                </a:solidFill>
+                <a:latin typeface="Inter"/>
+                <a:ea typeface="Inter"/>
+                <a:cs typeface="Inter"/>
+              </a:rPr>
+              <a:t>Not after-meeting summary.</a:t>
+            </a:r>
+          </a:p>
+          <a:p xmlns:a="http://schemas.openxmlformats.org/drawingml/2006/main">
+            <a:r>
+              <a:rPr sz="2700">
+                <a:solidFill>
+                  <a:srgbClr val="181818"/>
+                </a:solidFill>
+                <a:latin typeface="Inter"/>
+                <a:ea typeface="Inter"/>
+                <a:cs typeface="Inter"/>
+              </a:rPr>
+              <a:t>Before-meeting crux.</a:t>
+            </a:r>
+          </a:p>
+          <a:p xmlns:a="http://schemas.openxmlformats.org/drawingml/2006/main">
+            <a:r>
+              <a:rPr sz="2700">
+                <a:solidFill>
+                  <a:srgbClr val="181818"/>
+                </a:solidFill>
+                <a:latin typeface="Inter"/>
+                <a:ea typeface="Inter"/>
+                <a:cs typeface="Inter"/>
+              </a:rPr>
+              <a:t>Inside Slack.</a:t>
+            </a:r>
+          </a:p>
+        </p:txBody>
+      </p:sp>
+      <p:pic>
+        <p:nvPicPr>
+          <p:cNvPr id="7" name=""/>
+          <p:cNvPicPr>
+            <a:picLocks xmlns:a="http://schemas.openxmlformats.org/drawingml/2006/main" noChangeAspect="1"/>
+          </p:cNvPicPr>
+          <p:nvPr/>
+        </p:nvPicPr>
+        <p:blipFill>
+          <a:blip xmlns:r="http://schemas.openxmlformats.org/officeDocument/2006/relationships" xmlns:a="http://schemas.openxmlformats.org/drawingml/2006/main" r:embed="Rabd9879436b54ced"/>
+          <a:srcRect xmlns:a="http://schemas.openxmlformats.org/drawingml/2006/main" l="0" t="0" r="0" b="0"/>
+          <a:stretch xmlns:a="http://schemas.openxmlformats.org/drawingml/2006/main">
+            <a:fillRect l="0" t="0" r="0" b="0"/>
+          </a:stretch>
+        </p:blipFill>
+        <p:spPr>
+          <a:xfrm xmlns:a="http://schemas.openxmlformats.org/drawingml/2006/main">
+            <a:off x="7524750" y="2019300"/>
+            <a:ext cx="1676400" cy="1676400"/>
+          </a:xfrm>
+          <a:prstGeom xmlns:a="http://schemas.openxmlformats.org/drawingml/2006/main" prst="rect">
+            <a:avLst/>
+          </a:prstGeom>
+        </p:spPr>
+      </p:pic>
+      <p:sp>
+        <p:nvSpPr>
+          <p:cNvPr id="8" name="">
+            <a:extLst xmlns:a="http://schemas.openxmlformats.org/drawingml/2006/main">
+              <a:ext uri="{FF2B5EF4-FFF2-40B4-BE49-F238E27FC236}">
+                <a16:creationId xmlns:a16="http://schemas.microsoft.com/office/drawing/2014/main" id="{A32037B5-FD53-4297-B43F-A735DC0D103F}"/>
+              </a:ext>
+            </a:extLst>
+          </p:cNvPr>
+          <p:cNvSpPr>
+            <a:spLocks xmlns:a="http://schemas.openxmlformats.org/drawingml/2006/main" noGrp="1"/>
+          </p:cNvSpPr>
+          <p:nvPr/>
+        </p:nvSpPr>
+        <p:spPr>
+          <a:xfrm xmlns:a="http://schemas.openxmlformats.org/drawingml/2006/main">
+            <a:off x="876300" y="3695700"/>
+            <a:ext cx="6610350" cy="1295400"/>
+          </a:xfrm>
+          <a:prstGeom xmlns:a="http://schemas.openxmlformats.org/drawingml/2006/main" prst="roundRect">
+            <a:avLst>
+              <a:gd name="adj" fmla="val 5882"/>
+            </a:avLst>
+          </a:prstGeom>
+          <a:solidFill xmlns:a="http://schemas.openxmlformats.org/drawingml/2006/main">
+            <a:srgbClr val="FFFFFF"/>
+          </a:solidFill>
+          <a:ln xmlns:a="http://schemas.openxmlformats.org/drawingml/2006/main" w="9525">
+            <a:solidFill>
+              <a:srgbClr val="EDEDED"/>
+            </a:solidFill>
+          </a:ln>
+        </p:spPr>
+      </p:sp>
+      <p:sp>
+        <p:nvSpPr>
+          <p:cNvPr id="9" name="">
+            <a:extLst xmlns:a="http://schemas.openxmlformats.org/drawingml/2006/main">
+              <a:ext uri="{FF2B5EF4-FFF2-40B4-BE49-F238E27FC236}">
+                <a16:creationId xmlns:a16="http://schemas.microsoft.com/office/drawing/2014/main" id="{9AB051D5-B5F3-4399-9141-D5957F517897}"/>
               </a:ext>
             </a:extLst>
           </p:cNvPr>
@@ -9792,7 +11397,7 @@
           <p:cNvPr id="10" name="">
             <a:extLst xmlns:a="http://schemas.openxmlformats.org/drawingml/2006/main">
               <a:ext uri="{FF2B5EF4-FFF2-40B4-BE49-F238E27FC236}">
-                <a16:creationId xmlns:a16="http://schemas.microsoft.com/office/drawing/2014/main" id="{ACCB8818-7CE2-4357-814C-EA8A19E2E9CA}"/>
+                <a16:creationId xmlns:a16="http://schemas.microsoft.com/office/drawing/2014/main" id="{7809ED5E-3CED-4B33-9C86-F655EBABF625}"/>
               </a:ext>
             </a:extLst>
           </p:cNvPr>
@@ -9839,7 +11444,7 @@
           <p:cNvPr id="11" name="">
             <a:extLst xmlns:a="http://schemas.openxmlformats.org/drawingml/2006/main">
               <a:ext uri="{FF2B5EF4-FFF2-40B4-BE49-F238E27FC236}">
-                <a16:creationId xmlns:a16="http://schemas.microsoft.com/office/drawing/2014/main" id="{0031D4D6-F7C7-42C0-81B8-40CDE397A8F3}"/>
+                <a16:creationId xmlns:a16="http://schemas.microsoft.com/office/drawing/2014/main" id="{501DEE7A-16EC-4F0D-937E-0A0C34B63B69}"/>
               </a:ext>
             </a:extLst>
           </p:cNvPr>
@@ -9886,7 +11491,7 @@
           <p:cNvPr id="12" name="">
             <a:extLst xmlns:a="http://schemas.openxmlformats.org/drawingml/2006/main">
               <a:ext uri="{FF2B5EF4-FFF2-40B4-BE49-F238E27FC236}">
-                <a16:creationId xmlns:a16="http://schemas.microsoft.com/office/drawing/2014/main" id="{6E26F4AA-FC5C-4ADA-8C95-C01E7DD1D81A}"/>
+                <a16:creationId xmlns:a16="http://schemas.microsoft.com/office/drawing/2014/main" id="{4D4D37DE-FFFA-408C-A651-D447F5284439}"/>
               </a:ext>
             </a:extLst>
           </p:cNvPr>
@@ -9933,7 +11538,7 @@
           <p:cNvPr id="13" name="">
             <a:extLst xmlns:a="http://schemas.openxmlformats.org/drawingml/2006/main">
               <a:ext uri="{FF2B5EF4-FFF2-40B4-BE49-F238E27FC236}">
-                <a16:creationId xmlns:a16="http://schemas.microsoft.com/office/drawing/2014/main" id="{0A8B431D-D058-4B7F-AE0D-53E1C01E8320}"/>
+                <a16:creationId xmlns:a16="http://schemas.microsoft.com/office/drawing/2014/main" id="{311E81F7-3D85-4AFA-8AF3-8A215B445F61}"/>
               </a:ext>
             </a:extLst>
           </p:cNvPr>
@@ -9980,7 +11585,7 @@
           <p:cNvPr id="14" name="">
             <a:extLst xmlns:a="http://schemas.openxmlformats.org/drawingml/2006/main">
               <a:ext uri="{FF2B5EF4-FFF2-40B4-BE49-F238E27FC236}">
-                <a16:creationId xmlns:a16="http://schemas.microsoft.com/office/drawing/2014/main" id="{D691BCDB-D516-461D-B5DB-4A6E8283A63A}"/>
+                <a16:creationId xmlns:a16="http://schemas.microsoft.com/office/drawing/2014/main" id="{F0731B52-58FA-489D-A0DF-0721881CA3F0}"/>
               </a:ext>
             </a:extLst>
           </p:cNvPr>
@@ -10027,7 +11632,7 @@
           <p:cNvPr id="15" name="">
             <a:extLst xmlns:a="http://schemas.openxmlformats.org/drawingml/2006/main">
               <a:ext uri="{FF2B5EF4-FFF2-40B4-BE49-F238E27FC236}">
-                <a16:creationId xmlns:a16="http://schemas.microsoft.com/office/drawing/2014/main" id="{DB0190B3-381E-4453-9D7B-60811738C390}"/>
+                <a16:creationId xmlns:a16="http://schemas.microsoft.com/office/drawing/2014/main" id="{D6C3B02C-7AFD-454E-9285-FFB6F4DBDFE8}"/>
               </a:ext>
             </a:extLst>
           </p:cNvPr>
@@ -10074,7 +11679,7 @@
           <p:cNvPr id="16" name="">
             <a:extLst xmlns:a="http://schemas.openxmlformats.org/drawingml/2006/main">
               <a:ext uri="{FF2B5EF4-FFF2-40B4-BE49-F238E27FC236}">
-                <a16:creationId xmlns:a16="http://schemas.microsoft.com/office/drawing/2014/main" id="{619801BB-3049-454A-83C0-48FA7A925342}"/>
+                <a16:creationId xmlns:a16="http://schemas.microsoft.com/office/drawing/2014/main" id="{78FA5560-3EEF-4B1C-A4E5-0B4870573E59}"/>
               </a:ext>
             </a:extLst>
           </p:cNvPr>
@@ -10121,7 +11726,7 @@
           <p:cNvPr id="17" name="">
             <a:extLst xmlns:a="http://schemas.openxmlformats.org/drawingml/2006/main">
               <a:ext uri="{FF2B5EF4-FFF2-40B4-BE49-F238E27FC236}">
-                <a16:creationId xmlns:a16="http://schemas.microsoft.com/office/drawing/2014/main" id="{7528D991-F51F-44D2-A949-8AF1C3C3BA92}"/>
+                <a16:creationId xmlns:a16="http://schemas.microsoft.com/office/drawing/2014/main" id="{C86F94FC-FE56-462F-A175-16556BBA5B17}"/>
               </a:ext>
             </a:extLst>
           </p:cNvPr>
@@ -10153,7 +11758,7 @@
           <p:cNvPr id="18" name="">
             <a:extLst xmlns:a="http://schemas.openxmlformats.org/drawingml/2006/main">
               <a:ext uri="{FF2B5EF4-FFF2-40B4-BE49-F238E27FC236}">
-                <a16:creationId xmlns:a16="http://schemas.microsoft.com/office/drawing/2014/main" id="{8C1EB426-CF08-4F17-AB2A-AA5FA2D8BB04}"/>
+                <a16:creationId xmlns:a16="http://schemas.microsoft.com/office/drawing/2014/main" id="{A26D8212-99EB-4F3C-9B93-AEB1F83EE380}"/>
               </a:ext>
             </a:extLst>
           </p:cNvPr>
@@ -10200,7 +11805,7 @@
           <p:cNvPr id="19" name="">
             <a:extLst xmlns:a="http://schemas.openxmlformats.org/drawingml/2006/main">
               <a:ext uri="{FF2B5EF4-FFF2-40B4-BE49-F238E27FC236}">
-                <a16:creationId xmlns:a16="http://schemas.microsoft.com/office/drawing/2014/main" id="{CEF6751B-20E6-44FE-B08D-F6E8626108A4}"/>
+                <a16:creationId xmlns:a16="http://schemas.microsoft.com/office/drawing/2014/main" id="{EC4A18EC-C49F-4897-AFCF-A288A799FE59}"/>
               </a:ext>
             </a:extLst>
           </p:cNvPr>
@@ -10245,7 +11850,7 @@
     </p:spTree>
     <p:extLst>
       <p:ext uri="{BB962C8B-B14F-4D97-AF65-F5344CB8AC3E}">
-        <p14:creationId xmlns:p14="http://schemas.microsoft.com/office/powerpoint/2010/main" val="1164750939"/>
+        <p14:creationId xmlns:p14="http://schemas.microsoft.com/office/powerpoint/2010/main" val="182323769"/>
       </p:ext>
     </p:extLst>
   </p:cSld>
